--- a/lectures/03/Многопоточность в C++.pptx
+++ b/lectures/03/Многопоточность в C++.pptx
@@ -5,47 +5,46 @@
     <p:sldMasterId id="2147483648" r:id="rId1"/>
   </p:sldMasterIdLst>
   <p:notesMasterIdLst>
-    <p:notesMasterId r:id="rId40"/>
+    <p:notesMasterId r:id="rId39"/>
   </p:notesMasterIdLst>
   <p:sldIdLst>
     <p:sldId id="257" r:id="rId2"/>
-    <p:sldId id="299" r:id="rId3"/>
-    <p:sldId id="300" r:id="rId4"/>
-    <p:sldId id="301" r:id="rId5"/>
-    <p:sldId id="302" r:id="rId6"/>
-    <p:sldId id="303" r:id="rId7"/>
-    <p:sldId id="304" r:id="rId8"/>
-    <p:sldId id="305" r:id="rId9"/>
-    <p:sldId id="266" r:id="rId10"/>
-    <p:sldId id="268" r:id="rId11"/>
-    <p:sldId id="267" r:id="rId12"/>
-    <p:sldId id="271" r:id="rId13"/>
-    <p:sldId id="272" r:id="rId14"/>
-    <p:sldId id="275" r:id="rId15"/>
-    <p:sldId id="296" r:id="rId16"/>
-    <p:sldId id="273" r:id="rId17"/>
-    <p:sldId id="276" r:id="rId18"/>
-    <p:sldId id="279" r:id="rId19"/>
-    <p:sldId id="280" r:id="rId20"/>
-    <p:sldId id="281" r:id="rId21"/>
-    <p:sldId id="282" r:id="rId22"/>
-    <p:sldId id="283" r:id="rId23"/>
-    <p:sldId id="284" r:id="rId24"/>
-    <p:sldId id="285" r:id="rId25"/>
-    <p:sldId id="278" r:id="rId26"/>
-    <p:sldId id="286" r:id="rId27"/>
-    <p:sldId id="287" r:id="rId28"/>
-    <p:sldId id="288" r:id="rId29"/>
-    <p:sldId id="292" r:id="rId30"/>
-    <p:sldId id="291" r:id="rId31"/>
-    <p:sldId id="289" r:id="rId32"/>
-    <p:sldId id="293" r:id="rId33"/>
-    <p:sldId id="294" r:id="rId34"/>
-    <p:sldId id="295" r:id="rId35"/>
-    <p:sldId id="297" r:id="rId36"/>
-    <p:sldId id="269" r:id="rId37"/>
-    <p:sldId id="270" r:id="rId38"/>
-    <p:sldId id="298" r:id="rId39"/>
+    <p:sldId id="306" r:id="rId3"/>
+    <p:sldId id="307" r:id="rId4"/>
+    <p:sldId id="308" r:id="rId5"/>
+    <p:sldId id="304" r:id="rId6"/>
+    <p:sldId id="305" r:id="rId7"/>
+    <p:sldId id="266" r:id="rId8"/>
+    <p:sldId id="268" r:id="rId9"/>
+    <p:sldId id="267" r:id="rId10"/>
+    <p:sldId id="271" r:id="rId11"/>
+    <p:sldId id="272" r:id="rId12"/>
+    <p:sldId id="275" r:id="rId13"/>
+    <p:sldId id="296" r:id="rId14"/>
+    <p:sldId id="273" r:id="rId15"/>
+    <p:sldId id="276" r:id="rId16"/>
+    <p:sldId id="279" r:id="rId17"/>
+    <p:sldId id="280" r:id="rId18"/>
+    <p:sldId id="281" r:id="rId19"/>
+    <p:sldId id="282" r:id="rId20"/>
+    <p:sldId id="283" r:id="rId21"/>
+    <p:sldId id="284" r:id="rId22"/>
+    <p:sldId id="285" r:id="rId23"/>
+    <p:sldId id="278" r:id="rId24"/>
+    <p:sldId id="286" r:id="rId25"/>
+    <p:sldId id="287" r:id="rId26"/>
+    <p:sldId id="288" r:id="rId27"/>
+    <p:sldId id="292" r:id="rId28"/>
+    <p:sldId id="291" r:id="rId29"/>
+    <p:sldId id="289" r:id="rId30"/>
+    <p:sldId id="293" r:id="rId31"/>
+    <p:sldId id="294" r:id="rId32"/>
+    <p:sldId id="295" r:id="rId33"/>
+    <p:sldId id="297" r:id="rId34"/>
+    <p:sldId id="269" r:id="rId35"/>
+    <p:sldId id="270" r:id="rId36"/>
+    <p:sldId id="309" r:id="rId37"/>
+    <p:sldId id="298" r:id="rId38"/>
   </p:sldIdLst>
   <p:sldSz cx="12192000" cy="6858000"/>
   <p:notesSz cx="6858000" cy="9144000"/>
@@ -150,11 +149,9 @@
         <p14:section name="Default Section" id="{78C2E6B8-84A2-4C17-9B6B-A6E9DFC7A858}">
           <p14:sldIdLst>
             <p14:sldId id="257"/>
-            <p14:sldId id="299"/>
-            <p14:sldId id="300"/>
-            <p14:sldId id="301"/>
-            <p14:sldId id="302"/>
-            <p14:sldId id="303"/>
+            <p14:sldId id="306"/>
+            <p14:sldId id="307"/>
+            <p14:sldId id="308"/>
             <p14:sldId id="304"/>
           </p14:sldIdLst>
         </p14:section>
@@ -190,6 +187,7 @@
             <p14:sldId id="297"/>
             <p14:sldId id="269"/>
             <p14:sldId id="270"/>
+            <p14:sldId id="309"/>
             <p14:sldId id="298"/>
           </p14:sldIdLst>
         </p14:section>
@@ -295,7 +293,7 @@
           <a:p>
             <a:fld id="{FED81A67-A27B-4083-940C-241E42A8E894}" type="datetimeFigureOut">
               <a:rPr lang="en-US" smtClean="0"/>
-              <a:t>6/5/2025</a:t>
+              <a:t>2/13/2026</a:t>
             </a:fld>
             <a:endParaRPr lang="en-US"/>
           </a:p>
@@ -720,7 +718,7 @@
     </p:spTree>
     <p:extLst>
       <p:ext uri="{BB962C8B-B14F-4D97-AF65-F5344CB8AC3E}">
-        <p14:creationId xmlns:p14="http://schemas.microsoft.com/office/powerpoint/2010/main" val="2821311572"/>
+        <p14:creationId xmlns:p14="http://schemas.microsoft.com/office/powerpoint/2010/main" val="4223482023"/>
       </p:ext>
     </p:extLst>
   </p:cSld>
@@ -804,7 +802,7 @@
     </p:spTree>
     <p:extLst>
       <p:ext uri="{BB962C8B-B14F-4D97-AF65-F5344CB8AC3E}">
-        <p14:creationId xmlns:p14="http://schemas.microsoft.com/office/powerpoint/2010/main" val="323937840"/>
+        <p14:creationId xmlns:p14="http://schemas.microsoft.com/office/powerpoint/2010/main" val="4152509019"/>
       </p:ext>
     </p:extLst>
   </p:cSld>
@@ -858,7 +856,107 @@
           <a:bodyPr/>
           <a:lstStyle/>
           <a:p>
-            <a:endParaRPr lang="en-US"/>
+            <a:r>
+              <a:rPr lang="ru-RU" dirty="0"/>
+              <a:t>У потока есть </a:t>
+            </a:r>
+            <a:r>
+              <a:rPr lang="en-US" dirty="0"/>
+              <a:t>id. </a:t>
+            </a:r>
+            <a:r>
+              <a:rPr lang="ru-RU" dirty="0"/>
+              <a:t>Его можно получить у потока, вызвав метод </a:t>
+            </a:r>
+            <a:r>
+              <a:rPr lang="en-US" dirty="0" err="1"/>
+              <a:t>get_id</a:t>
+            </a:r>
+            <a:r>
+              <a:rPr lang="en-US" dirty="0"/>
+              <a:t>.</a:t>
+            </a:r>
+          </a:p>
+          <a:p>
+            <a:r>
+              <a:rPr lang="ru-RU" dirty="0"/>
+              <a:t>Если с объектом потока не связан поток, то вернётся сконструированное по умолчанию значение</a:t>
+            </a:r>
+          </a:p>
+          <a:p>
+            <a:r>
+              <a:rPr lang="ru-RU" dirty="0"/>
+              <a:t>Также можно вызвать функцию </a:t>
+            </a:r>
+            <a:r>
+              <a:rPr lang="en-US" dirty="0"/>
+              <a:t>std::</a:t>
+            </a:r>
+            <a:r>
+              <a:rPr lang="en-US" dirty="0" err="1"/>
+              <a:t>this_thread</a:t>
+            </a:r>
+            <a:r>
+              <a:rPr lang="en-US" dirty="0"/>
+              <a:t>::</a:t>
+            </a:r>
+            <a:r>
+              <a:rPr lang="en-US" dirty="0" err="1"/>
+              <a:t>get_id</a:t>
+            </a:r>
+            <a:r>
+              <a:rPr lang="en-US" dirty="0"/>
+              <a:t> </a:t>
+            </a:r>
+            <a:r>
+              <a:rPr lang="ru-RU" dirty="0"/>
+              <a:t>для получения</a:t>
+            </a:r>
+            <a:r>
+              <a:rPr lang="en-US" dirty="0"/>
+              <a:t> id </a:t>
+            </a:r>
+            <a:r>
+              <a:rPr lang="ru-RU" dirty="0"/>
+              <a:t>вызывающего потока.</a:t>
+            </a:r>
+          </a:p>
+          <a:p>
+            <a:r>
+              <a:rPr lang="en-US" dirty="0"/>
+              <a:t>Id </a:t>
+            </a:r>
+            <a:r>
+              <a:rPr lang="ru-RU" dirty="0"/>
+              <a:t>можно сравнивать, копировать и вычислять их </a:t>
+            </a:r>
+            <a:r>
+              <a:rPr lang="ru-RU" dirty="0" err="1"/>
+              <a:t>хеши</a:t>
+            </a:r>
+            <a:endParaRPr lang="ru-RU" dirty="0"/>
+          </a:p>
+          <a:p>
+            <a:endParaRPr lang="ru-RU" dirty="0"/>
+          </a:p>
+          <a:p>
+            <a:r>
+              <a:rPr lang="en-US" dirty="0"/>
+              <a:t>Id </a:t>
+            </a:r>
+            <a:r>
+              <a:rPr lang="ru-RU" dirty="0"/>
+              <a:t>потока можно использовать для того, чтобы отличить один поток от другого. После того, как поток завершил свою работу, его </a:t>
+            </a:r>
+            <a:r>
+              <a:rPr lang="en-US" dirty="0"/>
+              <a:t>id </a:t>
+            </a:r>
+            <a:r>
+              <a:rPr lang="ru-RU" dirty="0"/>
+              <a:t>становится непригодным для использования</a:t>
+            </a:r>
+            <a:endParaRPr lang="en-US" dirty="0"/>
           </a:p>
         </p:txBody>
       </p:sp>
@@ -888,7 +986,7 @@
     </p:spTree>
     <p:extLst>
       <p:ext uri="{BB962C8B-B14F-4D97-AF65-F5344CB8AC3E}">
-        <p14:creationId xmlns:p14="http://schemas.microsoft.com/office/powerpoint/2010/main" val="4223482023"/>
+        <p14:creationId xmlns:p14="http://schemas.microsoft.com/office/powerpoint/2010/main" val="2685991169"/>
       </p:ext>
     </p:extLst>
   </p:cSld>
@@ -972,7 +1070,7 @@
     </p:spTree>
     <p:extLst>
       <p:ext uri="{BB962C8B-B14F-4D97-AF65-F5344CB8AC3E}">
-        <p14:creationId xmlns:p14="http://schemas.microsoft.com/office/powerpoint/2010/main" val="4152509019"/>
+        <p14:creationId xmlns:p14="http://schemas.microsoft.com/office/powerpoint/2010/main" val="1400451780"/>
       </p:ext>
     </p:extLst>
   </p:cSld>
@@ -1028,104 +1126,470 @@
           <a:p>
             <a:r>
               <a:rPr lang="ru-RU" dirty="0"/>
-              <a:t>У потока есть </a:t>
-            </a:r>
-            <a:r>
-              <a:rPr lang="en-US" dirty="0"/>
-              <a:t>id. </a:t>
-            </a:r>
+              <a:t>Очень важно понимать, как именно в C++ передаются аргументы в функцию потока.</a:t>
+            </a:r>
+          </a:p>
+          <a:p>
             <a:r>
               <a:rPr lang="ru-RU" dirty="0"/>
-              <a:t>Его можно получить у потока, вызвав метод </a:t>
-            </a:r>
-            <a:r>
-              <a:rPr lang="en-US" dirty="0" err="1"/>
-              <a:t>get_id</a:t>
-            </a:r>
-            <a:r>
-              <a:rPr lang="en-US" dirty="0"/>
+              <a:t>Когда мы пишем:</a:t>
+            </a:r>
+          </a:p>
+          <a:p>
+            <a:pPr rtl="0"/>
+            <a:r>
+              <a:rPr lang="ru-RU" sz="1200" kern="1200" dirty="0" err="1">
+                <a:solidFill>
+                  <a:schemeClr val="tx1"/>
+                </a:solidFill>
+                <a:latin typeface="+mn-lt"/>
+                <a:ea typeface="+mn-ea"/>
+                <a:cs typeface="+mn-cs"/>
+              </a:rPr>
+              <a:t>std</a:t>
+            </a:r>
+            <a:r>
+              <a:rPr lang="ru-RU" sz="1200" kern="1200" dirty="0">
+                <a:solidFill>
+                  <a:schemeClr val="tx1"/>
+                </a:solidFill>
+                <a:latin typeface="+mn-lt"/>
+                <a:ea typeface="+mn-ea"/>
+                <a:cs typeface="+mn-cs"/>
+              </a:rPr>
+              <a:t>::</a:t>
+            </a:r>
+            <a:r>
+              <a:rPr lang="ru-RU" sz="1200" kern="1200" dirty="0" err="1">
+                <a:solidFill>
+                  <a:schemeClr val="tx1"/>
+                </a:solidFill>
+                <a:latin typeface="+mn-lt"/>
+                <a:ea typeface="+mn-ea"/>
+                <a:cs typeface="+mn-cs"/>
+              </a:rPr>
+              <a:t>thread</a:t>
+            </a:r>
+            <a:r>
+              <a:rPr lang="ru-RU" sz="1200" kern="1200" dirty="0">
+                <a:solidFill>
+                  <a:schemeClr val="tx1"/>
+                </a:solidFill>
+                <a:latin typeface="+mn-lt"/>
+                <a:ea typeface="+mn-ea"/>
+                <a:cs typeface="+mn-cs"/>
+              </a:rPr>
+              <a:t> t(f, arg1, arg2);</a:t>
+            </a:r>
+          </a:p>
+          <a:p>
+            <a:r>
+              <a:rPr lang="ru-RU" dirty="0"/>
+              <a:t>это </a:t>
+            </a:r>
+            <a:r>
+              <a:rPr lang="ru-RU" b="1" dirty="0"/>
+              <a:t>не означает</a:t>
+            </a:r>
+            <a:r>
+              <a:rPr lang="ru-RU" dirty="0"/>
+              <a:t>, что поток немедленно вызывает </a:t>
+            </a:r>
+            <a:r>
+              <a:rPr lang="ru-RU" sz="1200" kern="1200" dirty="0">
+                <a:solidFill>
+                  <a:schemeClr val="tx1"/>
+                </a:solidFill>
+                <a:latin typeface="+mn-lt"/>
+                <a:ea typeface="+mn-ea"/>
+                <a:cs typeface="+mn-cs"/>
+              </a:rPr>
+              <a:t>f(arg1, arg2)</a:t>
+            </a:r>
+            <a:r>
+              <a:rPr lang="ru-RU" dirty="0"/>
               <a:t>.</a:t>
             </a:r>
           </a:p>
           <a:p>
             <a:r>
               <a:rPr lang="ru-RU" dirty="0"/>
-              <a:t>Если с объектом потока не связан поток, то вернётся сконструированное по умолчанию значение</a:t>
+              <a:t>Происходит следующее.</a:t>
             </a:r>
           </a:p>
           <a:p>
             <a:r>
               <a:rPr lang="ru-RU" dirty="0"/>
-              <a:t>Также можно вызвать функцию </a:t>
-            </a:r>
-            <a:r>
-              <a:rPr lang="en-US" dirty="0"/>
-              <a:t>std::</a:t>
-            </a:r>
-            <a:r>
-              <a:rPr lang="en-US" dirty="0" err="1"/>
-              <a:t>this_thread</a:t>
-            </a:r>
-            <a:r>
-              <a:rPr lang="en-US" dirty="0"/>
+              <a:t>Сначала в текущем потоке:</a:t>
+            </a:r>
+          </a:p>
+          <a:p>
+            <a:r>
+              <a:rPr lang="ru-RU" dirty="0"/>
+              <a:t>аргументы копируются или перемещаются,</a:t>
+            </a:r>
+          </a:p>
+          <a:p>
+            <a:r>
+              <a:rPr lang="ru-RU" dirty="0"/>
+              <a:t>они сохраняются внутри объекта </a:t>
+            </a:r>
+            <a:r>
+              <a:rPr lang="ru-RU" sz="1200" kern="1200" dirty="0" err="1">
+                <a:solidFill>
+                  <a:schemeClr val="tx1"/>
+                </a:solidFill>
+                <a:latin typeface="+mn-lt"/>
+                <a:ea typeface="+mn-ea"/>
+                <a:cs typeface="+mn-cs"/>
+              </a:rPr>
+              <a:t>std</a:t>
+            </a:r>
+            <a:r>
+              <a:rPr lang="ru-RU" sz="1200" kern="1200" dirty="0">
+                <a:solidFill>
+                  <a:schemeClr val="tx1"/>
+                </a:solidFill>
+                <a:latin typeface="+mn-lt"/>
+                <a:ea typeface="+mn-ea"/>
+                <a:cs typeface="+mn-cs"/>
+              </a:rPr>
               <a:t>::</a:t>
             </a:r>
             <a:r>
-              <a:rPr lang="en-US" dirty="0" err="1"/>
-              <a:t>get_id</a:t>
-            </a:r>
-            <a:r>
-              <a:rPr lang="en-US" dirty="0"/>
-              <a:t> </a:t>
+              <a:rPr lang="ru-RU" sz="1200" kern="1200" dirty="0" err="1">
+                <a:solidFill>
+                  <a:schemeClr val="tx1"/>
+                </a:solidFill>
+                <a:latin typeface="+mn-lt"/>
+                <a:ea typeface="+mn-ea"/>
+                <a:cs typeface="+mn-cs"/>
+              </a:rPr>
+              <a:t>thread</a:t>
             </a:r>
             <a:r>
               <a:rPr lang="ru-RU" dirty="0"/>
-              <a:t>для получения</a:t>
-            </a:r>
-            <a:r>
-              <a:rPr lang="en-US" dirty="0"/>
-              <a:t> id </a:t>
-            </a:r>
+              <a:t>.</a:t>
+            </a:r>
+          </a:p>
+          <a:p>
             <a:r>
               <a:rPr lang="ru-RU" dirty="0"/>
-              <a:t>вызывающего потока.</a:t>
-            </a:r>
-          </a:p>
-          <a:p>
-            <a:r>
-              <a:rPr lang="en-US" dirty="0"/>
-              <a:t>Id </a:t>
-            </a:r>
-            <a:r>
+              <a:t>И только затем создаётся новый поток выполнения,</a:t>
+            </a:r>
+            <a:br>
               <a:rPr lang="ru-RU" dirty="0"/>
-              <a:t>можно сравнивать, копировать и вычислять их </a:t>
-            </a:r>
-            <a:r>
-              <a:rPr lang="ru-RU" dirty="0" err="1"/>
-              <a:t>хеши</a:t>
-            </a:r>
-            <a:endParaRPr lang="ru-RU" dirty="0"/>
-          </a:p>
-          <a:p>
-            <a:endParaRPr lang="ru-RU" dirty="0"/>
-          </a:p>
-          <a:p>
-            <a:r>
-              <a:rPr lang="en-US" dirty="0"/>
-              <a:t>Id </a:t>
-            </a:r>
+            </a:br>
             <a:r>
               <a:rPr lang="ru-RU" dirty="0"/>
-              <a:t>потока можно использовать для того, чтобы отличить один поток от другого. После того, как поток завершил свою работу, его </a:t>
-            </a:r>
-            <a:r>
-              <a:rPr lang="en-US" dirty="0"/>
-              <a:t>id </a:t>
-            </a:r>
+              <a:t>в котором вызывается:</a:t>
+            </a:r>
+          </a:p>
+          <a:p>
+            <a:pPr rtl="0"/>
+            <a:r>
+              <a:rPr lang="ru-RU" sz="1200" kern="1200" dirty="0" err="1">
+                <a:solidFill>
+                  <a:schemeClr val="tx1"/>
+                </a:solidFill>
+                <a:latin typeface="+mn-lt"/>
+                <a:ea typeface="+mn-ea"/>
+                <a:cs typeface="+mn-cs"/>
+              </a:rPr>
+              <a:t>std</a:t>
+            </a:r>
+            <a:r>
+              <a:rPr lang="ru-RU" sz="1200" kern="1200" dirty="0">
+                <a:solidFill>
+                  <a:schemeClr val="tx1"/>
+                </a:solidFill>
+                <a:latin typeface="+mn-lt"/>
+                <a:ea typeface="+mn-ea"/>
+                <a:cs typeface="+mn-cs"/>
+              </a:rPr>
+              <a:t>::</a:t>
+            </a:r>
+            <a:r>
+              <a:rPr lang="ru-RU" sz="1200" kern="1200" dirty="0" err="1">
+                <a:solidFill>
+                  <a:schemeClr val="tx1"/>
+                </a:solidFill>
+                <a:latin typeface="+mn-lt"/>
+                <a:ea typeface="+mn-ea"/>
+                <a:cs typeface="+mn-cs"/>
+              </a:rPr>
+              <a:t>invoke</a:t>
+            </a:r>
+            <a:r>
+              <a:rPr lang="ru-RU" sz="1200" kern="1200" dirty="0">
+                <a:solidFill>
+                  <a:schemeClr val="tx1"/>
+                </a:solidFill>
+                <a:latin typeface="+mn-lt"/>
+                <a:ea typeface="+mn-ea"/>
+                <a:cs typeface="+mn-cs"/>
+              </a:rPr>
+              <a:t>(f, </a:t>
+            </a:r>
+            <a:r>
+              <a:rPr lang="ru-RU" sz="1200" kern="1200" dirty="0" err="1">
+                <a:solidFill>
+                  <a:schemeClr val="tx1"/>
+                </a:solidFill>
+                <a:latin typeface="+mn-lt"/>
+                <a:ea typeface="+mn-ea"/>
+                <a:cs typeface="+mn-cs"/>
+              </a:rPr>
+              <a:t>сохранённые_аргументы</a:t>
+            </a:r>
+            <a:r>
+              <a:rPr lang="ru-RU" sz="1200" kern="1200" dirty="0">
+                <a:solidFill>
+                  <a:schemeClr val="tx1"/>
+                </a:solidFill>
+                <a:latin typeface="+mn-lt"/>
+                <a:ea typeface="+mn-ea"/>
+                <a:cs typeface="+mn-cs"/>
+              </a:rPr>
+              <a:t>)</a:t>
+            </a:r>
+          </a:p>
+          <a:p>
             <a:r>
               <a:rPr lang="ru-RU" dirty="0"/>
-              <a:t>становится непригодным для использования</a:t>
-            </a:r>
+              <a:t>Это ключевой момент.</a:t>
+            </a:r>
+          </a:p>
+          <a:p>
+            <a:r>
+              <a:rPr lang="ru-RU" dirty="0"/>
+              <a:t>Объект </a:t>
+            </a:r>
+            <a:r>
+              <a:rPr lang="ru-RU" sz="1200" kern="1200" dirty="0" err="1">
+                <a:solidFill>
+                  <a:schemeClr val="tx1"/>
+                </a:solidFill>
+                <a:latin typeface="+mn-lt"/>
+                <a:ea typeface="+mn-ea"/>
+                <a:cs typeface="+mn-cs"/>
+              </a:rPr>
+              <a:t>thread</a:t>
+            </a:r>
+            <a:r>
+              <a:rPr lang="ru-RU" dirty="0"/>
+              <a:t> хранит </a:t>
+            </a:r>
+            <a:r>
+              <a:rPr lang="ru-RU" b="1" dirty="0"/>
+              <a:t>аргументы конструктора</a:t>
+            </a:r>
+            <a:r>
+              <a:rPr lang="ru-RU" dirty="0"/>
+              <a:t>,</a:t>
+            </a:r>
+            <a:br>
+              <a:rPr lang="ru-RU" dirty="0"/>
+            </a:br>
+            <a:r>
+              <a:rPr lang="ru-RU" dirty="0"/>
+              <a:t>а не готовые параметры функции.</a:t>
+            </a:r>
+          </a:p>
+          <a:p>
+            <a:r>
+              <a:rPr lang="ru-RU" dirty="0"/>
+              <a:t>По умолчанию аргументы передаются по значению.</a:t>
+            </a:r>
+          </a:p>
+          <a:p>
+            <a:r>
+              <a:rPr lang="ru-RU" dirty="0"/>
+              <a:t>Если вы хотите передать ссылку, необходимо явно использовать:</a:t>
+            </a:r>
+          </a:p>
+          <a:p>
+            <a:pPr rtl="0"/>
+            <a:r>
+              <a:rPr lang="ru-RU" sz="1200" kern="1200" dirty="0" err="1">
+                <a:solidFill>
+                  <a:schemeClr val="tx1"/>
+                </a:solidFill>
+                <a:latin typeface="+mn-lt"/>
+                <a:ea typeface="+mn-ea"/>
+                <a:cs typeface="+mn-cs"/>
+              </a:rPr>
+              <a:t>std</a:t>
+            </a:r>
+            <a:r>
+              <a:rPr lang="ru-RU" sz="1200" kern="1200" dirty="0">
+                <a:solidFill>
+                  <a:schemeClr val="tx1"/>
+                </a:solidFill>
+                <a:latin typeface="+mn-lt"/>
+                <a:ea typeface="+mn-ea"/>
+                <a:cs typeface="+mn-cs"/>
+              </a:rPr>
+              <a:t>::</a:t>
+            </a:r>
+            <a:r>
+              <a:rPr lang="ru-RU" sz="1200" kern="1200" dirty="0" err="1">
+                <a:solidFill>
+                  <a:schemeClr val="tx1"/>
+                </a:solidFill>
+                <a:latin typeface="+mn-lt"/>
+                <a:ea typeface="+mn-ea"/>
+                <a:cs typeface="+mn-cs"/>
+              </a:rPr>
+              <a:t>ref</a:t>
+            </a:r>
+            <a:r>
+              <a:rPr lang="ru-RU" sz="1200" kern="1200" dirty="0">
+                <a:solidFill>
+                  <a:schemeClr val="tx1"/>
+                </a:solidFill>
+                <a:latin typeface="+mn-lt"/>
+                <a:ea typeface="+mn-ea"/>
+                <a:cs typeface="+mn-cs"/>
+              </a:rPr>
+              <a:t>(</a:t>
+            </a:r>
+            <a:r>
+              <a:rPr lang="ru-RU" sz="1200" kern="1200" dirty="0" err="1">
+                <a:solidFill>
+                  <a:schemeClr val="tx1"/>
+                </a:solidFill>
+                <a:latin typeface="+mn-lt"/>
+                <a:ea typeface="+mn-ea"/>
+                <a:cs typeface="+mn-cs"/>
+              </a:rPr>
+              <a:t>obj</a:t>
+            </a:r>
+            <a:r>
+              <a:rPr lang="ru-RU" sz="1200" kern="1200" dirty="0">
+                <a:solidFill>
+                  <a:schemeClr val="tx1"/>
+                </a:solidFill>
+                <a:latin typeface="+mn-lt"/>
+                <a:ea typeface="+mn-ea"/>
+                <a:cs typeface="+mn-cs"/>
+              </a:rPr>
+              <a:t>)</a:t>
+            </a:r>
+          </a:p>
+          <a:p>
+            <a:pPr rtl="0"/>
+            <a:r>
+              <a:rPr lang="ru-RU" sz="1200" kern="1200" dirty="0" err="1">
+                <a:solidFill>
+                  <a:schemeClr val="tx1"/>
+                </a:solidFill>
+                <a:latin typeface="+mn-lt"/>
+                <a:ea typeface="+mn-ea"/>
+                <a:cs typeface="+mn-cs"/>
+              </a:rPr>
+              <a:t>std</a:t>
+            </a:r>
+            <a:r>
+              <a:rPr lang="ru-RU" sz="1200" kern="1200" dirty="0">
+                <a:solidFill>
+                  <a:schemeClr val="tx1"/>
+                </a:solidFill>
+                <a:latin typeface="+mn-lt"/>
+                <a:ea typeface="+mn-ea"/>
+                <a:cs typeface="+mn-cs"/>
+              </a:rPr>
+              <a:t>::</a:t>
+            </a:r>
+            <a:r>
+              <a:rPr lang="ru-RU" sz="1200" kern="1200" dirty="0" err="1">
+                <a:solidFill>
+                  <a:schemeClr val="tx1"/>
+                </a:solidFill>
+                <a:latin typeface="+mn-lt"/>
+                <a:ea typeface="+mn-ea"/>
+                <a:cs typeface="+mn-cs"/>
+              </a:rPr>
+              <a:t>cref</a:t>
+            </a:r>
+            <a:r>
+              <a:rPr lang="ru-RU" sz="1200" kern="1200" dirty="0">
+                <a:solidFill>
+                  <a:schemeClr val="tx1"/>
+                </a:solidFill>
+                <a:latin typeface="+mn-lt"/>
+                <a:ea typeface="+mn-ea"/>
+                <a:cs typeface="+mn-cs"/>
+              </a:rPr>
+              <a:t>(</a:t>
+            </a:r>
+            <a:r>
+              <a:rPr lang="ru-RU" sz="1200" kern="1200" dirty="0" err="1">
+                <a:solidFill>
+                  <a:schemeClr val="tx1"/>
+                </a:solidFill>
+                <a:latin typeface="+mn-lt"/>
+                <a:ea typeface="+mn-ea"/>
+                <a:cs typeface="+mn-cs"/>
+              </a:rPr>
+              <a:t>obj</a:t>
+            </a:r>
+            <a:r>
+              <a:rPr lang="ru-RU" sz="1200" kern="1200" dirty="0">
+                <a:solidFill>
+                  <a:schemeClr val="tx1"/>
+                </a:solidFill>
+                <a:latin typeface="+mn-lt"/>
+                <a:ea typeface="+mn-ea"/>
+                <a:cs typeface="+mn-cs"/>
+              </a:rPr>
+              <a:t>)</a:t>
+            </a:r>
+          </a:p>
+          <a:p>
+            <a:r>
+              <a:rPr lang="ru-RU" dirty="0"/>
+              <a:t>И вот здесь начинается самое интересное.</a:t>
+            </a:r>
+          </a:p>
+          <a:p>
+            <a:r>
+              <a:rPr lang="ru-RU" dirty="0"/>
+              <a:t>Если вы передаёте ссылку на объект, который может быть разрушен раньше, чем поток начнёт или закончит выполнение — вы получите неопределённое поведение.</a:t>
+            </a:r>
+          </a:p>
+          <a:p>
+            <a:r>
+              <a:rPr lang="ru-RU" dirty="0"/>
+              <a:t>Именно поэтому многопоточность так тесно связана с управлением временем жизни объектов.</a:t>
+            </a:r>
+          </a:p>
+          <a:p>
+            <a:r>
+              <a:rPr lang="ru-RU" dirty="0"/>
+              <a:t>Можно сказать так:</a:t>
+            </a:r>
+          </a:p>
+          <a:p>
+            <a:r>
+              <a:rPr lang="ru-RU" dirty="0"/>
+              <a:t>Поток — это конкурентный исполнитель.</a:t>
+            </a:r>
+            <a:br>
+              <a:rPr lang="ru-RU" dirty="0"/>
+            </a:br>
+            <a:r>
+              <a:rPr lang="ru-RU" dirty="0"/>
+              <a:t>Но время жизни данных — это ответственность программиста.</a:t>
+            </a:r>
+          </a:p>
+          <a:p>
+            <a:r>
+              <a:rPr lang="ru-RU" dirty="0"/>
+              <a:t>И большая часть трудноуловимых ошибок в многопоточном коде связана не с самим созданием потоков, а с неправильной передачей аргументов и разрушением объектов.</a:t>
+            </a:r>
+          </a:p>
+          <a:p>
             <a:endParaRPr lang="en-US" dirty="0"/>
           </a:p>
         </p:txBody>
@@ -1156,7 +1620,7 @@
     </p:spTree>
     <p:extLst>
       <p:ext uri="{BB962C8B-B14F-4D97-AF65-F5344CB8AC3E}">
-        <p14:creationId xmlns:p14="http://schemas.microsoft.com/office/powerpoint/2010/main" val="2685991169"/>
+        <p14:creationId xmlns:p14="http://schemas.microsoft.com/office/powerpoint/2010/main" val="3499908881"/>
       </p:ext>
     </p:extLst>
   </p:cSld>
@@ -1240,7 +1704,7 @@
     </p:spTree>
     <p:extLst>
       <p:ext uri="{BB962C8B-B14F-4D97-AF65-F5344CB8AC3E}">
-        <p14:creationId xmlns:p14="http://schemas.microsoft.com/office/powerpoint/2010/main" val="1400451780"/>
+        <p14:creationId xmlns:p14="http://schemas.microsoft.com/office/powerpoint/2010/main" val="930173741"/>
       </p:ext>
     </p:extLst>
   </p:cSld>
@@ -1324,7 +1788,7 @@
     </p:spTree>
     <p:extLst>
       <p:ext uri="{BB962C8B-B14F-4D97-AF65-F5344CB8AC3E}">
-        <p14:creationId xmlns:p14="http://schemas.microsoft.com/office/powerpoint/2010/main" val="3499908881"/>
+        <p14:creationId xmlns:p14="http://schemas.microsoft.com/office/powerpoint/2010/main" val="3990177826"/>
       </p:ext>
     </p:extLst>
   </p:cSld>
@@ -1408,7 +1872,7 @@
     </p:spTree>
     <p:extLst>
       <p:ext uri="{BB962C8B-B14F-4D97-AF65-F5344CB8AC3E}">
-        <p14:creationId xmlns:p14="http://schemas.microsoft.com/office/powerpoint/2010/main" val="930173741"/>
+        <p14:creationId xmlns:p14="http://schemas.microsoft.com/office/powerpoint/2010/main" val="3069726628"/>
       </p:ext>
     </p:extLst>
   </p:cSld>
@@ -1492,7 +1956,7 @@
     </p:spTree>
     <p:extLst>
       <p:ext uri="{BB962C8B-B14F-4D97-AF65-F5344CB8AC3E}">
-        <p14:creationId xmlns:p14="http://schemas.microsoft.com/office/powerpoint/2010/main" val="3990177826"/>
+        <p14:creationId xmlns:p14="http://schemas.microsoft.com/office/powerpoint/2010/main" val="3672947286"/>
       </p:ext>
     </p:extLst>
   </p:cSld>
@@ -1576,7 +2040,7 @@
     </p:spTree>
     <p:extLst>
       <p:ext uri="{BB962C8B-B14F-4D97-AF65-F5344CB8AC3E}">
-        <p14:creationId xmlns:p14="http://schemas.microsoft.com/office/powerpoint/2010/main" val="3069726628"/>
+        <p14:creationId xmlns:p14="http://schemas.microsoft.com/office/powerpoint/2010/main" val="2917879599"/>
       </p:ext>
     </p:extLst>
   </p:cSld>
@@ -1630,7 +2094,147 @@
           <a:bodyPr/>
           <a:lstStyle/>
           <a:p>
-            <a:endParaRPr lang="en-US"/>
+            <a:r>
+              <a:rPr lang="ru-RU" dirty="0"/>
+              <a:t>В прошлой лекции мы ввели понятия конкурентности и параллелизма и обсудили:</a:t>
+            </a:r>
+          </a:p>
+          <a:p>
+            <a:pPr marL="171450" indent="-171450">
+              <a:buFont typeface="Arial" panose="020B0604020202020204" pitchFamily="34" charset="0"/>
+              <a:buChar char="•"/>
+            </a:pPr>
+            <a:r>
+              <a:rPr lang="ru-RU" dirty="0"/>
+              <a:t>архитектурную необходимость конкурентной структуры программ,</a:t>
+            </a:r>
+          </a:p>
+          <a:p>
+            <a:pPr marL="171450" indent="-171450">
+              <a:buFont typeface="Arial" panose="020B0604020202020204" pitchFamily="34" charset="0"/>
+              <a:buChar char="•"/>
+            </a:pPr>
+            <a:r>
+              <a:rPr lang="ru-RU" dirty="0"/>
+              <a:t>ограничение масштабируемости законом Амдала,</a:t>
+            </a:r>
+          </a:p>
+          <a:p>
+            <a:pPr marL="171450" indent="-171450">
+              <a:buFont typeface="Arial" panose="020B0604020202020204" pitchFamily="34" charset="0"/>
+              <a:buChar char="•"/>
+            </a:pPr>
+            <a:r>
+              <a:rPr lang="ru-RU" dirty="0"/>
+              <a:t>модель разделяемой памяти.</a:t>
+            </a:r>
+          </a:p>
+          <a:p>
+            <a:r>
+              <a:rPr lang="ru-RU" dirty="0"/>
+              <a:t>Сегодня мы переходим от теории к практике.</a:t>
+            </a:r>
+          </a:p>
+          <a:p>
+            <a:r>
+              <a:rPr lang="ru-RU" dirty="0"/>
+              <a:t>В языке C++ конкурентность с разделяемой памятью реализуется через </a:t>
+            </a:r>
+            <a:r>
+              <a:rPr lang="ru-RU" b="1" dirty="0"/>
+              <a:t>потоки выполнения</a:t>
+            </a:r>
+            <a:r>
+              <a:rPr lang="ru-RU" dirty="0"/>
+              <a:t>.</a:t>
+            </a:r>
+          </a:p>
+          <a:p>
+            <a:r>
+              <a:rPr lang="ru-RU" dirty="0"/>
+              <a:t>Мы разберём:</a:t>
+            </a:r>
+          </a:p>
+          <a:p>
+            <a:pPr marL="171450" indent="-171450">
+              <a:buFont typeface="Arial" panose="020B0604020202020204" pitchFamily="34" charset="0"/>
+              <a:buChar char="•"/>
+            </a:pPr>
+            <a:r>
+              <a:rPr lang="ru-RU" dirty="0"/>
+              <a:t>что такое поток в модели C++,</a:t>
+            </a:r>
+          </a:p>
+          <a:p>
+            <a:pPr marL="171450" indent="-171450">
+              <a:buFont typeface="Arial" panose="020B0604020202020204" pitchFamily="34" charset="0"/>
+              <a:buChar char="•"/>
+            </a:pPr>
+            <a:r>
+              <a:rPr lang="ru-RU" dirty="0"/>
+              <a:t>как он создаётся,</a:t>
+            </a:r>
+          </a:p>
+          <a:p>
+            <a:pPr marL="171450" indent="-171450">
+              <a:buFont typeface="Arial" panose="020B0604020202020204" pitchFamily="34" charset="0"/>
+              <a:buChar char="•"/>
+            </a:pPr>
+            <a:r>
+              <a:rPr lang="ru-RU" dirty="0"/>
+              <a:t>как передаются аргументы,</a:t>
+            </a:r>
+          </a:p>
+          <a:p>
+            <a:pPr marL="171450" indent="-171450">
+              <a:buFont typeface="Arial" panose="020B0604020202020204" pitchFamily="34" charset="0"/>
+              <a:buChar char="•"/>
+            </a:pPr>
+            <a:r>
+              <a:rPr lang="ru-RU" dirty="0"/>
+              <a:t>какие возникают риски,</a:t>
+            </a:r>
+          </a:p>
+          <a:p>
+            <a:pPr marL="171450" indent="-171450">
+              <a:buFont typeface="Arial" panose="020B0604020202020204" pitchFamily="34" charset="0"/>
+              <a:buChar char="•"/>
+            </a:pPr>
+            <a:r>
+              <a:rPr lang="ru-RU" dirty="0"/>
+              <a:t>и как правильно управлять жизненным циклом потоков.</a:t>
+            </a:r>
+          </a:p>
+          <a:p>
+            <a:r>
+              <a:rPr lang="ru-RU" dirty="0"/>
+              <a:t>Начиная с C++11 язык предоставляет переносимый стандартный механизм работы с потоками — </a:t>
+            </a:r>
+            <a:r>
+              <a:rPr lang="ru-RU" dirty="0" err="1"/>
+              <a:t>std</a:t>
+            </a:r>
+            <a:r>
+              <a:rPr lang="ru-RU" dirty="0"/>
+              <a:t>::</a:t>
+            </a:r>
+            <a:r>
+              <a:rPr lang="ru-RU" dirty="0" err="1"/>
+              <a:t>thread</a:t>
+            </a:r>
+            <a:r>
+              <a:rPr lang="ru-RU" dirty="0"/>
+              <a:t>.</a:t>
+            </a:r>
+          </a:p>
+          <a:p>
+            <a:r>
+              <a:rPr lang="ru-RU" dirty="0"/>
+              <a:t>Но с большой силой приходит большая ответственность: неправильная работа с потоками приводит к неопределённому поведению, трудноуловимым ошибкам и деградации производительности.</a:t>
+            </a:r>
+          </a:p>
+          <a:p>
+            <a:endParaRPr lang="en-US" dirty="0"/>
           </a:p>
         </p:txBody>
       </p:sp>
@@ -1660,7 +2264,7 @@
     </p:spTree>
     <p:extLst>
       <p:ext uri="{BB962C8B-B14F-4D97-AF65-F5344CB8AC3E}">
-        <p14:creationId xmlns:p14="http://schemas.microsoft.com/office/powerpoint/2010/main" val="2471553388"/>
+        <p14:creationId xmlns:p14="http://schemas.microsoft.com/office/powerpoint/2010/main" val="1382739727"/>
       </p:ext>
     </p:extLst>
   </p:cSld>
@@ -1744,7 +2348,7 @@
     </p:spTree>
     <p:extLst>
       <p:ext uri="{BB962C8B-B14F-4D97-AF65-F5344CB8AC3E}">
-        <p14:creationId xmlns:p14="http://schemas.microsoft.com/office/powerpoint/2010/main" val="3672947286"/>
+        <p14:creationId xmlns:p14="http://schemas.microsoft.com/office/powerpoint/2010/main" val="4136457576"/>
       </p:ext>
     </p:extLst>
   </p:cSld>
@@ -1828,7 +2432,7 @@
     </p:spTree>
     <p:extLst>
       <p:ext uri="{BB962C8B-B14F-4D97-AF65-F5344CB8AC3E}">
-        <p14:creationId xmlns:p14="http://schemas.microsoft.com/office/powerpoint/2010/main" val="2917879599"/>
+        <p14:creationId xmlns:p14="http://schemas.microsoft.com/office/powerpoint/2010/main" val="1851287267"/>
       </p:ext>
     </p:extLst>
   </p:cSld>
@@ -1912,7 +2516,7 @@
     </p:spTree>
     <p:extLst>
       <p:ext uri="{BB962C8B-B14F-4D97-AF65-F5344CB8AC3E}">
-        <p14:creationId xmlns:p14="http://schemas.microsoft.com/office/powerpoint/2010/main" val="4136457576"/>
+        <p14:creationId xmlns:p14="http://schemas.microsoft.com/office/powerpoint/2010/main" val="1021831033"/>
       </p:ext>
     </p:extLst>
   </p:cSld>
@@ -1996,7 +2600,7 @@
     </p:spTree>
     <p:extLst>
       <p:ext uri="{BB962C8B-B14F-4D97-AF65-F5344CB8AC3E}">
-        <p14:creationId xmlns:p14="http://schemas.microsoft.com/office/powerpoint/2010/main" val="1851287267"/>
+        <p14:creationId xmlns:p14="http://schemas.microsoft.com/office/powerpoint/2010/main" val="4061981999"/>
       </p:ext>
     </p:extLst>
   </p:cSld>
@@ -2080,7 +2684,7 @@
     </p:spTree>
     <p:extLst>
       <p:ext uri="{BB962C8B-B14F-4D97-AF65-F5344CB8AC3E}">
-        <p14:creationId xmlns:p14="http://schemas.microsoft.com/office/powerpoint/2010/main" val="1021831033"/>
+        <p14:creationId xmlns:p14="http://schemas.microsoft.com/office/powerpoint/2010/main" val="2955912138"/>
       </p:ext>
     </p:extLst>
   </p:cSld>
@@ -2164,7 +2768,7 @@
     </p:spTree>
     <p:extLst>
       <p:ext uri="{BB962C8B-B14F-4D97-AF65-F5344CB8AC3E}">
-        <p14:creationId xmlns:p14="http://schemas.microsoft.com/office/powerpoint/2010/main" val="4061981999"/>
+        <p14:creationId xmlns:p14="http://schemas.microsoft.com/office/powerpoint/2010/main" val="3059831180"/>
       </p:ext>
     </p:extLst>
   </p:cSld>
@@ -2248,7 +2852,7 @@
     </p:spTree>
     <p:extLst>
       <p:ext uri="{BB962C8B-B14F-4D97-AF65-F5344CB8AC3E}">
-        <p14:creationId xmlns:p14="http://schemas.microsoft.com/office/powerpoint/2010/main" val="2955912138"/>
+        <p14:creationId xmlns:p14="http://schemas.microsoft.com/office/powerpoint/2010/main" val="3333775330"/>
       </p:ext>
     </p:extLst>
   </p:cSld>
@@ -2332,7 +2936,7 @@
     </p:spTree>
     <p:extLst>
       <p:ext uri="{BB962C8B-B14F-4D97-AF65-F5344CB8AC3E}">
-        <p14:creationId xmlns:p14="http://schemas.microsoft.com/office/powerpoint/2010/main" val="3059831180"/>
+        <p14:creationId xmlns:p14="http://schemas.microsoft.com/office/powerpoint/2010/main" val="2051685772"/>
       </p:ext>
     </p:extLst>
   </p:cSld>
@@ -2416,7 +3020,7 @@
     </p:spTree>
     <p:extLst>
       <p:ext uri="{BB962C8B-B14F-4D97-AF65-F5344CB8AC3E}">
-        <p14:creationId xmlns:p14="http://schemas.microsoft.com/office/powerpoint/2010/main" val="3333775330"/>
+        <p14:creationId xmlns:p14="http://schemas.microsoft.com/office/powerpoint/2010/main" val="3268570634"/>
       </p:ext>
     </p:extLst>
   </p:cSld>
@@ -2500,7 +3104,7 @@
     </p:spTree>
     <p:extLst>
       <p:ext uri="{BB962C8B-B14F-4D97-AF65-F5344CB8AC3E}">
-        <p14:creationId xmlns:p14="http://schemas.microsoft.com/office/powerpoint/2010/main" val="2051685772"/>
+        <p14:creationId xmlns:p14="http://schemas.microsoft.com/office/powerpoint/2010/main" val="1138463424"/>
       </p:ext>
     </p:extLst>
   </p:cSld>
@@ -2554,7 +3158,165 @@
           <a:bodyPr/>
           <a:lstStyle/>
           <a:p>
-            <a:endParaRPr lang="en-US"/>
+            <a:r>
+              <a:rPr lang="ru-RU" dirty="0"/>
+              <a:t>Когда мы говорим «создать поток», на самом деле мы просим операционную систему создать новый исполнитель внутри процесса.</a:t>
+            </a:r>
+          </a:p>
+          <a:p>
+            <a:r>
+              <a:rPr lang="ru-RU" dirty="0"/>
+              <a:t>Это не просто вызов функции.</a:t>
+            </a:r>
+          </a:p>
+          <a:p>
+            <a:r>
+              <a:rPr lang="ru-RU" dirty="0"/>
+              <a:t>Ядро операционной системы:</a:t>
+            </a:r>
+          </a:p>
+          <a:p>
+            <a:r>
+              <a:rPr lang="ru-RU" dirty="0"/>
+              <a:t>выделяет новый стек,</a:t>
+            </a:r>
+          </a:p>
+          <a:p>
+            <a:r>
+              <a:rPr lang="ru-RU" dirty="0"/>
+              <a:t>создаёт структуру управления потоком,</a:t>
+            </a:r>
+          </a:p>
+          <a:p>
+            <a:r>
+              <a:rPr lang="ru-RU" dirty="0"/>
+              <a:t>настраивает регистры,</a:t>
+            </a:r>
+          </a:p>
+          <a:p>
+            <a:r>
+              <a:rPr lang="ru-RU" dirty="0"/>
+              <a:t>регистрирует поток в планировщике,</a:t>
+            </a:r>
+          </a:p>
+          <a:p>
+            <a:r>
+              <a:rPr lang="ru-RU" dirty="0"/>
+              <a:t>и только после этого начинает выполнение указанной функции.</a:t>
+            </a:r>
+          </a:p>
+          <a:p>
+            <a:r>
+              <a:rPr lang="ru-RU" dirty="0"/>
+              <a:t>В Linux используется стандарт POSIX — функция </a:t>
+            </a:r>
+            <a:r>
+              <a:rPr lang="ru-RU" dirty="0" err="1"/>
+              <a:t>pthread_create</a:t>
+            </a:r>
+            <a:r>
+              <a:rPr lang="ru-RU" dirty="0"/>
+              <a:t>.</a:t>
+            </a:r>
+          </a:p>
+          <a:p>
+            <a:r>
+              <a:rPr lang="ru-RU" dirty="0"/>
+              <a:t>В Windows — </a:t>
+            </a:r>
+            <a:r>
+              <a:rPr lang="ru-RU" dirty="0" err="1"/>
+              <a:t>CreateThread</a:t>
+            </a:r>
+            <a:r>
+              <a:rPr lang="ru-RU" dirty="0"/>
+              <a:t> или _</a:t>
+            </a:r>
+            <a:r>
+              <a:rPr lang="ru-RU" dirty="0" err="1"/>
+              <a:t>beginthreadex</a:t>
+            </a:r>
+            <a:r>
+              <a:rPr lang="ru-RU" dirty="0"/>
+              <a:t>.</a:t>
+            </a:r>
+          </a:p>
+          <a:p>
+            <a:r>
+              <a:rPr lang="ru-RU" dirty="0"/>
+              <a:t>Обратите внимание: это низкоуровневый API.</a:t>
+            </a:r>
+          </a:p>
+          <a:p>
+            <a:r>
+              <a:rPr lang="ru-RU" dirty="0"/>
+              <a:t>Он требует:</a:t>
+            </a:r>
+          </a:p>
+          <a:p>
+            <a:r>
+              <a:rPr lang="en-US" dirty="0"/>
+              <a:t>- </a:t>
+            </a:r>
+            <a:r>
+              <a:rPr lang="ru-RU" dirty="0"/>
+              <a:t>явной работы с указателями,</a:t>
+            </a:r>
+          </a:p>
+          <a:p>
+            <a:r>
+              <a:rPr lang="en-US" dirty="0"/>
+              <a:t>- </a:t>
+            </a:r>
+            <a:r>
+              <a:rPr lang="ru-RU" dirty="0"/>
+              <a:t>ручного управления ресурсами,</a:t>
+            </a:r>
+          </a:p>
+          <a:p>
+            <a:r>
+              <a:rPr lang="en-US" dirty="0"/>
+              <a:t>- </a:t>
+            </a:r>
+            <a:r>
+              <a:rPr lang="ru-RU" dirty="0"/>
+              <a:t>проверки кодов ошибок,</a:t>
+            </a:r>
+          </a:p>
+          <a:p>
+            <a:r>
+              <a:rPr lang="en-US" dirty="0"/>
+              <a:t>- </a:t>
+            </a:r>
+            <a:r>
+              <a:rPr lang="ru-RU" dirty="0"/>
+              <a:t>и является непереносимым между платформами.</a:t>
+            </a:r>
+          </a:p>
+          <a:p>
+            <a:r>
+              <a:rPr lang="ru-RU" dirty="0"/>
+              <a:t>Именно поэтому в C++ начиная с C++11 появился переносимый стандартный механизм — </a:t>
+            </a:r>
+            <a:r>
+              <a:rPr lang="ru-RU" dirty="0" err="1"/>
+              <a:t>std</a:t>
+            </a:r>
+            <a:r>
+              <a:rPr lang="ru-RU" dirty="0"/>
+              <a:t>::</a:t>
+            </a:r>
+            <a:r>
+              <a:rPr lang="ru-RU" dirty="0" err="1"/>
+              <a:t>thread</a:t>
+            </a:r>
+            <a:r>
+              <a:rPr lang="ru-RU" dirty="0"/>
+              <a:t>.</a:t>
+            </a:r>
+          </a:p>
+          <a:p>
+            <a:endParaRPr lang="en-US" dirty="0"/>
           </a:p>
         </p:txBody>
       </p:sp>
@@ -2575,7 +3337,7 @@
           <a:p>
             <a:fld id="{8740D86D-1409-43B0-8811-9A559436DAB5}" type="slidenum">
               <a:rPr lang="en-US" smtClean="0"/>
-              <a:t>3</a:t>
+              <a:t>4</a:t>
             </a:fld>
             <a:endParaRPr lang="en-US"/>
           </a:p>
@@ -2584,7 +3346,7 @@
     </p:spTree>
     <p:extLst>
       <p:ext uri="{BB962C8B-B14F-4D97-AF65-F5344CB8AC3E}">
-        <p14:creationId xmlns:p14="http://schemas.microsoft.com/office/powerpoint/2010/main" val="3269127608"/>
+        <p14:creationId xmlns:p14="http://schemas.microsoft.com/office/powerpoint/2010/main" val="1967902744"/>
       </p:ext>
     </p:extLst>
   </p:cSld>
@@ -2668,7 +3430,7 @@
     </p:spTree>
     <p:extLst>
       <p:ext uri="{BB962C8B-B14F-4D97-AF65-F5344CB8AC3E}">
-        <p14:creationId xmlns:p14="http://schemas.microsoft.com/office/powerpoint/2010/main" val="3268570634"/>
+        <p14:creationId xmlns:p14="http://schemas.microsoft.com/office/powerpoint/2010/main" val="3885809860"/>
       </p:ext>
     </p:extLst>
   </p:cSld>
@@ -2752,7 +3514,7 @@
     </p:spTree>
     <p:extLst>
       <p:ext uri="{BB962C8B-B14F-4D97-AF65-F5344CB8AC3E}">
-        <p14:creationId xmlns:p14="http://schemas.microsoft.com/office/powerpoint/2010/main" val="1138463424"/>
+        <p14:creationId xmlns:p14="http://schemas.microsoft.com/office/powerpoint/2010/main" val="2443303489"/>
       </p:ext>
     </p:extLst>
   </p:cSld>
@@ -2836,7 +3598,7 @@
     </p:spTree>
     <p:extLst>
       <p:ext uri="{BB962C8B-B14F-4D97-AF65-F5344CB8AC3E}">
-        <p14:creationId xmlns:p14="http://schemas.microsoft.com/office/powerpoint/2010/main" val="3885809860"/>
+        <p14:creationId xmlns:p14="http://schemas.microsoft.com/office/powerpoint/2010/main" val="2927925095"/>
       </p:ext>
     </p:extLst>
   </p:cSld>
@@ -2920,7 +3682,7 @@
     </p:spTree>
     <p:extLst>
       <p:ext uri="{BB962C8B-B14F-4D97-AF65-F5344CB8AC3E}">
-        <p14:creationId xmlns:p14="http://schemas.microsoft.com/office/powerpoint/2010/main" val="2443303489"/>
+        <p14:creationId xmlns:p14="http://schemas.microsoft.com/office/powerpoint/2010/main" val="3351961600"/>
       </p:ext>
     </p:extLst>
   </p:cSld>
@@ -3004,7 +3766,7 @@
     </p:spTree>
     <p:extLst>
       <p:ext uri="{BB962C8B-B14F-4D97-AF65-F5344CB8AC3E}">
-        <p14:creationId xmlns:p14="http://schemas.microsoft.com/office/powerpoint/2010/main" val="2927925095"/>
+        <p14:creationId xmlns:p14="http://schemas.microsoft.com/office/powerpoint/2010/main" val="960008259"/>
       </p:ext>
     </p:extLst>
   </p:cSld>
@@ -3058,7 +3820,163 @@
           <a:bodyPr/>
           <a:lstStyle/>
           <a:p>
-            <a:endParaRPr lang="en-US"/>
+            <a:r>
+              <a:rPr lang="ru-RU" dirty="0"/>
+              <a:t>Сегодня мы познакомились с тем, как в C++ создаются и управляются потоки выполнения.</a:t>
+            </a:r>
+          </a:p>
+          <a:p>
+            <a:r>
+              <a:rPr lang="ru-RU" dirty="0"/>
+              <a:t>Важно понимать несколько ключевых вещей.</a:t>
+            </a:r>
+          </a:p>
+          <a:p>
+            <a:r>
+              <a:rPr lang="ru-RU" dirty="0"/>
+              <a:t>Во-первых, поток — это независимый исполнитель внутри одного процесса. Потоки разделяют память, а значит — разделяют и ответственность за корректность работы с ней.</a:t>
+            </a:r>
+          </a:p>
+          <a:p>
+            <a:endParaRPr lang="ru-RU" dirty="0"/>
+          </a:p>
+          <a:p>
+            <a:r>
+              <a:rPr lang="ru-RU" dirty="0"/>
+              <a:t>Во-вторых, </a:t>
+            </a:r>
+            <a:r>
+              <a:rPr lang="ru-RU" sz="1200" kern="1200" dirty="0" err="1">
+                <a:solidFill>
+                  <a:schemeClr val="tx1"/>
+                </a:solidFill>
+                <a:latin typeface="+mn-lt"/>
+                <a:ea typeface="+mn-ea"/>
+                <a:cs typeface="+mn-cs"/>
+              </a:rPr>
+              <a:t>std</a:t>
+            </a:r>
+            <a:r>
+              <a:rPr lang="ru-RU" sz="1200" kern="1200" dirty="0">
+                <a:solidFill>
+                  <a:schemeClr val="tx1"/>
+                </a:solidFill>
+                <a:latin typeface="+mn-lt"/>
+                <a:ea typeface="+mn-ea"/>
+                <a:cs typeface="+mn-cs"/>
+              </a:rPr>
+              <a:t>::</a:t>
+            </a:r>
+            <a:r>
+              <a:rPr lang="ru-RU" sz="1200" kern="1200" dirty="0" err="1">
+                <a:solidFill>
+                  <a:schemeClr val="tx1"/>
+                </a:solidFill>
+                <a:latin typeface="+mn-lt"/>
+                <a:ea typeface="+mn-ea"/>
+                <a:cs typeface="+mn-cs"/>
+              </a:rPr>
+              <a:t>thread</a:t>
+            </a:r>
+            <a:r>
+              <a:rPr lang="ru-RU" dirty="0"/>
+              <a:t> и </a:t>
+            </a:r>
+            <a:r>
+              <a:rPr lang="ru-RU" sz="1200" kern="1200" dirty="0" err="1">
+                <a:solidFill>
+                  <a:schemeClr val="tx1"/>
+                </a:solidFill>
+                <a:latin typeface="+mn-lt"/>
+                <a:ea typeface="+mn-ea"/>
+                <a:cs typeface="+mn-cs"/>
+              </a:rPr>
+              <a:t>std</a:t>
+            </a:r>
+            <a:r>
+              <a:rPr lang="ru-RU" sz="1200" kern="1200" dirty="0">
+                <a:solidFill>
+                  <a:schemeClr val="tx1"/>
+                </a:solidFill>
+                <a:latin typeface="+mn-lt"/>
+                <a:ea typeface="+mn-ea"/>
+                <a:cs typeface="+mn-cs"/>
+              </a:rPr>
+              <a:t>::</a:t>
+            </a:r>
+            <a:r>
+              <a:rPr lang="ru-RU" sz="1200" kern="1200" dirty="0" err="1">
+                <a:solidFill>
+                  <a:schemeClr val="tx1"/>
+                </a:solidFill>
+                <a:latin typeface="+mn-lt"/>
+                <a:ea typeface="+mn-ea"/>
+                <a:cs typeface="+mn-cs"/>
+              </a:rPr>
+              <a:t>jthread</a:t>
+            </a:r>
+            <a:r>
+              <a:rPr lang="ru-RU" dirty="0"/>
+              <a:t> — это переносимая абстракция над механизмами операционной системы. </a:t>
+            </a:r>
+          </a:p>
+          <a:p>
+            <a:r>
+              <a:rPr lang="ru-RU" dirty="0"/>
+              <a:t>Мы не работаем напрямую с </a:t>
+            </a:r>
+            <a:r>
+              <a:rPr lang="ru-RU" dirty="0" err="1"/>
+              <a:t>pthread</a:t>
+            </a:r>
+            <a:r>
+              <a:rPr lang="ru-RU" dirty="0"/>
+              <a:t> или </a:t>
+            </a:r>
+            <a:r>
+              <a:rPr lang="ru-RU" dirty="0" err="1"/>
+              <a:t>CreateThread</a:t>
+            </a:r>
+            <a:r>
+              <a:rPr lang="ru-RU" dirty="0"/>
+              <a:t>, но под капотом используется именно ОС.</a:t>
+            </a:r>
+          </a:p>
+          <a:p>
+            <a:endParaRPr lang="ru-RU" dirty="0"/>
+          </a:p>
+          <a:p>
+            <a:r>
+              <a:rPr lang="ru-RU" dirty="0"/>
+              <a:t>В-третьих, при создании потока аргументы не передаются напрямую в функцию. Они копируются или перемещаются внутрь объекта потока, и только потом используются для вызова функции в новом потоке.</a:t>
+            </a:r>
+          </a:p>
+          <a:p>
+            <a:r>
+              <a:rPr lang="ru-RU" dirty="0"/>
+              <a:t>Поэтому время жизни объектов — критически важно.</a:t>
+            </a:r>
+          </a:p>
+          <a:p>
+            <a:endParaRPr lang="ru-RU" dirty="0"/>
+          </a:p>
+          <a:p>
+            <a:r>
+              <a:rPr lang="ru-RU" dirty="0"/>
+              <a:t>И наконец, важно помнить вывод из прошлой лекции: увеличение числа потоков само по себе не гарантирует ускорения. Всё ограничивается структурой задачи и законом Амдала.</a:t>
+            </a:r>
+          </a:p>
+          <a:p>
+            <a:endParaRPr lang="ru-RU" dirty="0"/>
+          </a:p>
+          <a:p>
+            <a:r>
+              <a:rPr lang="ru-RU" dirty="0"/>
+              <a:t>На следующем шаге нам нужно разобраться, что происходит, когда несколько потоков начинают одновременно работать с одной и той же памятью — и почему это может привести к гонкам данных и неопределённому поведению.</a:t>
+            </a:r>
+          </a:p>
+          <a:p>
+            <a:endParaRPr lang="en-US" dirty="0"/>
           </a:p>
         </p:txBody>
       </p:sp>
@@ -3088,7 +4006,7 @@
     </p:spTree>
     <p:extLst>
       <p:ext uri="{BB962C8B-B14F-4D97-AF65-F5344CB8AC3E}">
-        <p14:creationId xmlns:p14="http://schemas.microsoft.com/office/powerpoint/2010/main" val="3351961600"/>
+        <p14:creationId xmlns:p14="http://schemas.microsoft.com/office/powerpoint/2010/main" val="3636309912"/>
       </p:ext>
     </p:extLst>
   </p:cSld>
@@ -3164,90 +4082,6 @@
             <a:fld id="{8740D86D-1409-43B0-8811-9A559436DAB5}" type="slidenum">
               <a:rPr lang="en-US" smtClean="0"/>
               <a:t>37</a:t>
-            </a:fld>
-            <a:endParaRPr lang="en-US"/>
-          </a:p>
-        </p:txBody>
-      </p:sp>
-    </p:spTree>
-    <p:extLst>
-      <p:ext uri="{BB962C8B-B14F-4D97-AF65-F5344CB8AC3E}">
-        <p14:creationId xmlns:p14="http://schemas.microsoft.com/office/powerpoint/2010/main" val="960008259"/>
-      </p:ext>
-    </p:extLst>
-  </p:cSld>
-  <p:clrMapOvr>
-    <a:masterClrMapping/>
-  </p:clrMapOvr>
-</p:notes>
-</file>
-
-<file path=ppt/notesSlides/notesSlide37.xml><?xml version="1.0" encoding="utf-8"?>
-<p:notes xmlns:a="http://schemas.openxmlformats.org/drawingml/2006/main" xmlns:r="http://schemas.openxmlformats.org/officeDocument/2006/relationships" xmlns:p="http://schemas.openxmlformats.org/presentationml/2006/main">
-  <p:cSld>
-    <p:spTree>
-      <p:nvGrpSpPr>
-        <p:cNvPr id="1" name=""/>
-        <p:cNvGrpSpPr/>
-        <p:nvPr/>
-      </p:nvGrpSpPr>
-      <p:grpSpPr>
-        <a:xfrm>
-          <a:off x="0" y="0"/>
-          <a:ext cx="0" cy="0"/>
-          <a:chOff x="0" y="0"/>
-          <a:chExt cx="0" cy="0"/>
-        </a:xfrm>
-      </p:grpSpPr>
-      <p:sp>
-        <p:nvSpPr>
-          <p:cNvPr id="2" name="Slide Image Placeholder 1"/>
-          <p:cNvSpPr>
-            <a:spLocks noGrp="1" noRot="1" noChangeAspect="1"/>
-          </p:cNvSpPr>
-          <p:nvPr>
-            <p:ph type="sldImg"/>
-          </p:nvPr>
-        </p:nvSpPr>
-        <p:spPr/>
-      </p:sp>
-      <p:sp>
-        <p:nvSpPr>
-          <p:cNvPr id="3" name="Notes Placeholder 2"/>
-          <p:cNvSpPr>
-            <a:spLocks noGrp="1"/>
-          </p:cNvSpPr>
-          <p:nvPr>
-            <p:ph type="body" idx="1"/>
-          </p:nvPr>
-        </p:nvSpPr>
-        <p:spPr/>
-        <p:txBody>
-          <a:bodyPr/>
-          <a:lstStyle/>
-          <a:p>
-            <a:endParaRPr lang="en-US"/>
-          </a:p>
-        </p:txBody>
-      </p:sp>
-      <p:sp>
-        <p:nvSpPr>
-          <p:cNvPr id="4" name="Slide Number Placeholder 3"/>
-          <p:cNvSpPr>
-            <a:spLocks noGrp="1"/>
-          </p:cNvSpPr>
-          <p:nvPr>
-            <p:ph type="sldNum" sz="quarter" idx="5"/>
-          </p:nvPr>
-        </p:nvSpPr>
-        <p:spPr/>
-        <p:txBody>
-          <a:bodyPr/>
-          <a:lstStyle/>
-          <a:p>
-            <a:fld id="{8740D86D-1409-43B0-8811-9A559436DAB5}" type="slidenum">
-              <a:rPr lang="en-US" smtClean="0"/>
-              <a:t>38</a:t>
             </a:fld>
             <a:endParaRPr lang="en-US"/>
           </a:p>
@@ -3310,7 +4144,186 @@
           <a:bodyPr/>
           <a:lstStyle/>
           <a:p>
-            <a:endParaRPr lang="en-US"/>
+            <a:r>
+              <a:rPr lang="ru-RU" dirty="0"/>
+              <a:t>В большинстве прикладных программ нам не нужно напрямую работать с </a:t>
+            </a:r>
+            <a:r>
+              <a:rPr lang="ru-RU" dirty="0" err="1"/>
+              <a:t>pthread</a:t>
+            </a:r>
+            <a:r>
+              <a:rPr lang="ru-RU" dirty="0"/>
+              <a:t> или </a:t>
+            </a:r>
+            <a:r>
+              <a:rPr lang="ru-RU" dirty="0" err="1"/>
+              <a:t>CreateThread</a:t>
+            </a:r>
+            <a:r>
+              <a:rPr lang="ru-RU" dirty="0"/>
+              <a:t>.</a:t>
+            </a:r>
+          </a:p>
+          <a:p>
+            <a:r>
+              <a:rPr lang="ru-RU" dirty="0"/>
+              <a:t>Эти API оправданы, если:</a:t>
+            </a:r>
+          </a:p>
+          <a:p>
+            <a:pPr marL="171450" indent="-171450">
+              <a:buFont typeface="Arial" panose="020B0604020202020204" pitchFamily="34" charset="0"/>
+              <a:buChar char="•"/>
+            </a:pPr>
+            <a:r>
+              <a:rPr lang="ru-RU" dirty="0"/>
+              <a:t>мы пишем системный код,</a:t>
+            </a:r>
+          </a:p>
+          <a:p>
+            <a:pPr marL="171450" indent="-171450">
+              <a:buFont typeface="Arial" panose="020B0604020202020204" pitchFamily="34" charset="0"/>
+              <a:buChar char="•"/>
+            </a:pPr>
+            <a:r>
+              <a:rPr lang="ru-RU" dirty="0"/>
+              <a:t>нам нужно контролировать размер стека,</a:t>
+            </a:r>
+          </a:p>
+          <a:p>
+            <a:pPr marL="171450" indent="-171450">
+              <a:buFont typeface="Arial" panose="020B0604020202020204" pitchFamily="34" charset="0"/>
+              <a:buChar char="•"/>
+            </a:pPr>
+            <a:r>
+              <a:rPr lang="ru-RU" dirty="0"/>
+              <a:t>настраивать приоритет,</a:t>
+            </a:r>
+          </a:p>
+          <a:p>
+            <a:pPr marL="171450" indent="-171450">
+              <a:buFont typeface="Arial" panose="020B0604020202020204" pitchFamily="34" charset="0"/>
+              <a:buChar char="•"/>
+            </a:pPr>
+            <a:r>
+              <a:rPr lang="ru-RU" dirty="0"/>
+              <a:t>работать с политиками планирования,</a:t>
+            </a:r>
+          </a:p>
+          <a:p>
+            <a:pPr marL="171450" indent="-171450">
+              <a:buFont typeface="Arial" panose="020B0604020202020204" pitchFamily="34" charset="0"/>
+              <a:buChar char="•"/>
+            </a:pPr>
+            <a:r>
+              <a:rPr lang="ru-RU" dirty="0"/>
+              <a:t>или использовать специфичные механизмы ОС.</a:t>
+            </a:r>
+          </a:p>
+          <a:p>
+            <a:r>
+              <a:rPr lang="ru-RU" dirty="0"/>
+              <a:t>Но для обычных пользовательских приложений это избыточно.</a:t>
+            </a:r>
+          </a:p>
+          <a:p>
+            <a:r>
+              <a:rPr lang="ru-RU" dirty="0"/>
+              <a:t>Стандартная библиотека C++ даёт нам:</a:t>
+            </a:r>
+          </a:p>
+          <a:p>
+            <a:pPr marL="171450" indent="-171450">
+              <a:buFont typeface="Arial" panose="020B0604020202020204" pitchFamily="34" charset="0"/>
+              <a:buChar char="•"/>
+            </a:pPr>
+            <a:r>
+              <a:rPr lang="ru-RU" dirty="0"/>
+              <a:t>переносимость,</a:t>
+            </a:r>
+          </a:p>
+          <a:p>
+            <a:pPr marL="171450" indent="-171450">
+              <a:buFont typeface="Arial" panose="020B0604020202020204" pitchFamily="34" charset="0"/>
+              <a:buChar char="•"/>
+            </a:pPr>
+            <a:r>
+              <a:rPr lang="ru-RU" dirty="0"/>
+              <a:t>автоматическое управление ресурсами,</a:t>
+            </a:r>
+          </a:p>
+          <a:p>
+            <a:pPr marL="171450" indent="-171450">
+              <a:buFont typeface="Arial" panose="020B0604020202020204" pitchFamily="34" charset="0"/>
+              <a:buChar char="•"/>
+            </a:pPr>
+            <a:r>
+              <a:rPr lang="ru-RU" dirty="0"/>
+              <a:t>безопасную семантику перемещения,</a:t>
+            </a:r>
+          </a:p>
+          <a:p>
+            <a:pPr marL="171450" indent="-171450">
+              <a:buFont typeface="Arial" panose="020B0604020202020204" pitchFamily="34" charset="0"/>
+              <a:buChar char="•"/>
+            </a:pPr>
+            <a:r>
+              <a:rPr lang="ru-RU" dirty="0"/>
+              <a:t>и более чистый интерфейс.</a:t>
+            </a:r>
+          </a:p>
+          <a:p>
+            <a:r>
+              <a:rPr lang="ru-RU" dirty="0"/>
+              <a:t>Можно сказать так:</a:t>
+            </a:r>
+          </a:p>
+          <a:p>
+            <a:r>
+              <a:rPr lang="ru-RU" dirty="0" err="1"/>
+              <a:t>pthread</a:t>
+            </a:r>
+            <a:r>
+              <a:rPr lang="ru-RU" dirty="0"/>
+              <a:t> и </a:t>
+            </a:r>
+            <a:r>
+              <a:rPr lang="ru-RU" dirty="0" err="1"/>
+              <a:t>CreateThread</a:t>
+            </a:r>
+            <a:r>
+              <a:rPr lang="ru-RU" dirty="0"/>
+              <a:t> — это системный уровень.</a:t>
+            </a:r>
+            <a:br>
+              <a:rPr lang="ru-RU" dirty="0"/>
+            </a:br>
+            <a:r>
+              <a:rPr lang="ru-RU" dirty="0" err="1"/>
+              <a:t>std</a:t>
+            </a:r>
+            <a:r>
+              <a:rPr lang="ru-RU" dirty="0"/>
+              <a:t>::</a:t>
+            </a:r>
+            <a:r>
+              <a:rPr lang="ru-RU" dirty="0" err="1"/>
+              <a:t>thread</a:t>
+            </a:r>
+            <a:r>
+              <a:rPr lang="ru-RU" dirty="0"/>
+              <a:t> — это язык и библиотечная абстракция над ним.</a:t>
+            </a:r>
+          </a:p>
+          <a:p>
+            <a:r>
+              <a:rPr lang="ru-RU" dirty="0"/>
+              <a:t>И в рамках курса по параллельному программированию нас интересует именно эта переносимая абстракция.</a:t>
+            </a:r>
+          </a:p>
+          <a:p>
+            <a:endParaRPr lang="en-US" dirty="0"/>
           </a:p>
         </p:txBody>
       </p:sp>
@@ -3331,7 +4344,7 @@
           <a:p>
             <a:fld id="{8740D86D-1409-43B0-8811-9A559436DAB5}" type="slidenum">
               <a:rPr lang="en-US" smtClean="0"/>
-              <a:t>4</a:t>
+              <a:t>5</a:t>
             </a:fld>
             <a:endParaRPr lang="en-US"/>
           </a:p>
@@ -3340,7 +4353,7 @@
     </p:spTree>
     <p:extLst>
       <p:ext uri="{BB962C8B-B14F-4D97-AF65-F5344CB8AC3E}">
-        <p14:creationId xmlns:p14="http://schemas.microsoft.com/office/powerpoint/2010/main" val="1429028333"/>
+        <p14:creationId xmlns:p14="http://schemas.microsoft.com/office/powerpoint/2010/main" val="665650924"/>
       </p:ext>
     </p:extLst>
   </p:cSld>
@@ -3415,7 +4428,7 @@
           <a:p>
             <a:fld id="{8740D86D-1409-43B0-8811-9A559436DAB5}" type="slidenum">
               <a:rPr lang="en-US" smtClean="0"/>
-              <a:t>5</a:t>
+              <a:t>6</a:t>
             </a:fld>
             <a:endParaRPr lang="en-US"/>
           </a:p>
@@ -3424,7 +4437,7 @@
     </p:spTree>
     <p:extLst>
       <p:ext uri="{BB962C8B-B14F-4D97-AF65-F5344CB8AC3E}">
-        <p14:creationId xmlns:p14="http://schemas.microsoft.com/office/powerpoint/2010/main" val="1663260049"/>
+        <p14:creationId xmlns:p14="http://schemas.microsoft.com/office/powerpoint/2010/main" val="1553879196"/>
       </p:ext>
     </p:extLst>
   </p:cSld>
@@ -3499,7 +4512,7 @@
           <a:p>
             <a:fld id="{8740D86D-1409-43B0-8811-9A559436DAB5}" type="slidenum">
               <a:rPr lang="en-US" smtClean="0"/>
-              <a:t>6</a:t>
+              <a:t>7</a:t>
             </a:fld>
             <a:endParaRPr lang="en-US"/>
           </a:p>
@@ -3508,7 +4521,7 @@
     </p:spTree>
     <p:extLst>
       <p:ext uri="{BB962C8B-B14F-4D97-AF65-F5344CB8AC3E}">
-        <p14:creationId xmlns:p14="http://schemas.microsoft.com/office/powerpoint/2010/main" val="4249723156"/>
+        <p14:creationId xmlns:p14="http://schemas.microsoft.com/office/powerpoint/2010/main" val="286721523"/>
       </p:ext>
     </p:extLst>
   </p:cSld>
@@ -3583,7 +4596,7 @@
           <a:p>
             <a:fld id="{8740D86D-1409-43B0-8811-9A559436DAB5}" type="slidenum">
               <a:rPr lang="en-US" smtClean="0"/>
-              <a:t>7</a:t>
+              <a:t>8</a:t>
             </a:fld>
             <a:endParaRPr lang="en-US"/>
           </a:p>
@@ -3592,7 +4605,7 @@
     </p:spTree>
     <p:extLst>
       <p:ext uri="{BB962C8B-B14F-4D97-AF65-F5344CB8AC3E}">
-        <p14:creationId xmlns:p14="http://schemas.microsoft.com/office/powerpoint/2010/main" val="665650924"/>
+        <p14:creationId xmlns:p14="http://schemas.microsoft.com/office/powerpoint/2010/main" val="2044035842"/>
       </p:ext>
     </p:extLst>
   </p:cSld>
@@ -3676,7 +4689,7 @@
     </p:spTree>
     <p:extLst>
       <p:ext uri="{BB962C8B-B14F-4D97-AF65-F5344CB8AC3E}">
-        <p14:creationId xmlns:p14="http://schemas.microsoft.com/office/powerpoint/2010/main" val="286721523"/>
+        <p14:creationId xmlns:p14="http://schemas.microsoft.com/office/powerpoint/2010/main" val="2821311572"/>
       </p:ext>
     </p:extLst>
   </p:cSld>
@@ -3760,7 +4773,7 @@
     </p:spTree>
     <p:extLst>
       <p:ext uri="{BB962C8B-B14F-4D97-AF65-F5344CB8AC3E}">
-        <p14:creationId xmlns:p14="http://schemas.microsoft.com/office/powerpoint/2010/main" val="2044035842"/>
+        <p14:creationId xmlns:p14="http://schemas.microsoft.com/office/powerpoint/2010/main" val="323937840"/>
       </p:ext>
     </p:extLst>
   </p:cSld>
@@ -3917,7 +4930,7 @@
           <a:p>
             <a:fld id="{93C95F23-F574-4C00-9B25-D94C8E69B068}" type="datetimeFigureOut">
               <a:rPr lang="en-US" smtClean="0"/>
-              <a:t>6/5/2025</a:t>
+              <a:t>2/13/2026</a:t>
             </a:fld>
             <a:endParaRPr lang="en-US"/>
           </a:p>
@@ -4115,7 +5128,7 @@
           <a:p>
             <a:fld id="{93C95F23-F574-4C00-9B25-D94C8E69B068}" type="datetimeFigureOut">
               <a:rPr lang="en-US" smtClean="0"/>
-              <a:t>6/5/2025</a:t>
+              <a:t>2/13/2026</a:t>
             </a:fld>
             <a:endParaRPr lang="en-US"/>
           </a:p>
@@ -4323,7 +5336,7 @@
           <a:p>
             <a:fld id="{93C95F23-F574-4C00-9B25-D94C8E69B068}" type="datetimeFigureOut">
               <a:rPr lang="en-US" smtClean="0"/>
-              <a:t>6/5/2025</a:t>
+              <a:t>2/13/2026</a:t>
             </a:fld>
             <a:endParaRPr lang="en-US"/>
           </a:p>
@@ -4521,7 +5534,7 @@
           <a:p>
             <a:fld id="{93C95F23-F574-4C00-9B25-D94C8E69B068}" type="datetimeFigureOut">
               <a:rPr lang="en-US" smtClean="0"/>
-              <a:t>6/5/2025</a:t>
+              <a:t>2/13/2026</a:t>
             </a:fld>
             <a:endParaRPr lang="en-US"/>
           </a:p>
@@ -4796,7 +5809,7 @@
           <a:p>
             <a:fld id="{93C95F23-F574-4C00-9B25-D94C8E69B068}" type="datetimeFigureOut">
               <a:rPr lang="en-US" smtClean="0"/>
-              <a:t>6/5/2025</a:t>
+              <a:t>2/13/2026</a:t>
             </a:fld>
             <a:endParaRPr lang="en-US"/>
           </a:p>
@@ -5061,7 +6074,7 @@
           <a:p>
             <a:fld id="{93C95F23-F574-4C00-9B25-D94C8E69B068}" type="datetimeFigureOut">
               <a:rPr lang="en-US" smtClean="0"/>
-              <a:t>6/5/2025</a:t>
+              <a:t>2/13/2026</a:t>
             </a:fld>
             <a:endParaRPr lang="en-US"/>
           </a:p>
@@ -5473,7 +6486,7 @@
           <a:p>
             <a:fld id="{93C95F23-F574-4C00-9B25-D94C8E69B068}" type="datetimeFigureOut">
               <a:rPr lang="en-US" smtClean="0"/>
-              <a:t>6/5/2025</a:t>
+              <a:t>2/13/2026</a:t>
             </a:fld>
             <a:endParaRPr lang="en-US"/>
           </a:p>
@@ -5614,7 +6627,7 @@
           <a:p>
             <a:fld id="{93C95F23-F574-4C00-9B25-D94C8E69B068}" type="datetimeFigureOut">
               <a:rPr lang="en-US" smtClean="0"/>
-              <a:t>6/5/2025</a:t>
+              <a:t>2/13/2026</a:t>
             </a:fld>
             <a:endParaRPr lang="en-US"/>
           </a:p>
@@ -5727,7 +6740,7 @@
           <a:p>
             <a:fld id="{93C95F23-F574-4C00-9B25-D94C8E69B068}" type="datetimeFigureOut">
               <a:rPr lang="en-US" smtClean="0"/>
-              <a:t>6/5/2025</a:t>
+              <a:t>2/13/2026</a:t>
             </a:fld>
             <a:endParaRPr lang="en-US"/>
           </a:p>
@@ -6038,7 +7051,7 @@
           <a:p>
             <a:fld id="{93C95F23-F574-4C00-9B25-D94C8E69B068}" type="datetimeFigureOut">
               <a:rPr lang="en-US" smtClean="0"/>
-              <a:t>6/5/2025</a:t>
+              <a:t>2/13/2026</a:t>
             </a:fld>
             <a:endParaRPr lang="en-US"/>
           </a:p>
@@ -6326,7 +7339,7 @@
           <a:p>
             <a:fld id="{93C95F23-F574-4C00-9B25-D94C8E69B068}" type="datetimeFigureOut">
               <a:rPr lang="en-US" smtClean="0"/>
-              <a:t>6/5/2025</a:t>
+              <a:t>2/13/2026</a:t>
             </a:fld>
             <a:endParaRPr lang="en-US"/>
           </a:p>
@@ -6567,7 +7580,7 @@
           <a:p>
             <a:fld id="{93C95F23-F574-4C00-9B25-D94C8E69B068}" type="datetimeFigureOut">
               <a:rPr lang="en-US" smtClean="0"/>
-              <a:t>6/5/2025</a:t>
+              <a:t>2/13/2026</a:t>
             </a:fld>
             <a:endParaRPr lang="en-US"/>
           </a:p>
@@ -7091,1291 +8104,6 @@
           <p:cNvPr id="2" name="Title 1">
             <a:extLst>
               <a:ext uri="{FF2B5EF4-FFF2-40B4-BE49-F238E27FC236}">
-                <a16:creationId xmlns:a16="http://schemas.microsoft.com/office/drawing/2014/main" id="{1772DDCD-2271-5B6E-9BCF-2C6328CDBC09}"/>
-              </a:ext>
-            </a:extLst>
-          </p:cNvPr>
-          <p:cNvSpPr>
-            <a:spLocks noGrp="1"/>
-          </p:cNvSpPr>
-          <p:nvPr>
-            <p:ph type="title"/>
-          </p:nvPr>
-        </p:nvSpPr>
-        <p:spPr/>
-        <p:txBody>
-          <a:bodyPr/>
-          <a:lstStyle/>
-          <a:p>
-            <a:r>
-              <a:rPr lang="ru-RU" dirty="0"/>
-              <a:t>Отпускаем поток</a:t>
-            </a:r>
-            <a:endParaRPr lang="en-US" dirty="0"/>
-          </a:p>
-        </p:txBody>
-      </p:sp>
-      <p:sp>
-        <p:nvSpPr>
-          <p:cNvPr id="4" name="TextBox 3">
-            <a:extLst>
-              <a:ext uri="{FF2B5EF4-FFF2-40B4-BE49-F238E27FC236}">
-                <a16:creationId xmlns:a16="http://schemas.microsoft.com/office/drawing/2014/main" id="{22E038B7-D03B-F79D-6037-E5FDB2A4BAD4}"/>
-              </a:ext>
-            </a:extLst>
-          </p:cNvPr>
-          <p:cNvSpPr txBox="1"/>
-          <p:nvPr/>
-        </p:nvSpPr>
-        <p:spPr>
-          <a:xfrm>
-            <a:off x="838200" y="2116476"/>
-            <a:ext cx="8308368" cy="3693319"/>
-          </a:xfrm>
-          <a:prstGeom prst="rect">
-            <a:avLst/>
-          </a:prstGeom>
-          <a:noFill/>
-        </p:spPr>
-        <p:txBody>
-          <a:bodyPr wrap="square">
-            <a:spAutoFit/>
-          </a:bodyPr>
-          <a:lstStyle/>
-          <a:p>
-            <a:r>
-              <a:rPr lang="en-US" b="0" dirty="0">
-                <a:solidFill>
-                  <a:srgbClr val="AF00DB"/>
-                </a:solidFill>
-                <a:effectLst/>
-                <a:latin typeface="Consolas" panose="020B0609020204030204" pitchFamily="49" charset="0"/>
-              </a:rPr>
-              <a:t>#include</a:t>
-            </a:r>
-            <a:r>
-              <a:rPr lang="en-US" b="0" dirty="0">
-                <a:solidFill>
-                  <a:srgbClr val="0000FF"/>
-                </a:solidFill>
-                <a:effectLst/>
-                <a:latin typeface="Consolas" panose="020B0609020204030204" pitchFamily="49" charset="0"/>
-              </a:rPr>
-              <a:t> </a:t>
-            </a:r>
-            <a:r>
-              <a:rPr lang="en-US" b="0" dirty="0">
-                <a:solidFill>
-                  <a:srgbClr val="A31515"/>
-                </a:solidFill>
-                <a:effectLst/>
-                <a:latin typeface="Consolas" panose="020B0609020204030204" pitchFamily="49" charset="0"/>
-              </a:rPr>
-              <a:t>&lt;iostream&gt;</a:t>
-            </a:r>
-            <a:endParaRPr lang="en-US" b="0" dirty="0">
-              <a:solidFill>
-                <a:srgbClr val="3B3B3B"/>
-              </a:solidFill>
-              <a:effectLst/>
-              <a:latin typeface="Consolas" panose="020B0609020204030204" pitchFamily="49" charset="0"/>
-            </a:endParaRPr>
-          </a:p>
-          <a:p>
-            <a:r>
-              <a:rPr lang="en-US" b="0" dirty="0">
-                <a:solidFill>
-                  <a:srgbClr val="AF00DB"/>
-                </a:solidFill>
-                <a:effectLst/>
-                <a:latin typeface="Consolas" panose="020B0609020204030204" pitchFamily="49" charset="0"/>
-              </a:rPr>
-              <a:t>#include</a:t>
-            </a:r>
-            <a:r>
-              <a:rPr lang="en-US" b="0" dirty="0">
-                <a:solidFill>
-                  <a:srgbClr val="0000FF"/>
-                </a:solidFill>
-                <a:effectLst/>
-                <a:latin typeface="Consolas" panose="020B0609020204030204" pitchFamily="49" charset="0"/>
-              </a:rPr>
-              <a:t> </a:t>
-            </a:r>
-            <a:r>
-              <a:rPr lang="en-US" b="0" dirty="0">
-                <a:solidFill>
-                  <a:srgbClr val="A31515"/>
-                </a:solidFill>
-                <a:effectLst/>
-                <a:latin typeface="Consolas" panose="020B0609020204030204" pitchFamily="49" charset="0"/>
-              </a:rPr>
-              <a:t>&lt;thread&gt;</a:t>
-            </a:r>
-            <a:endParaRPr lang="en-US" b="0" dirty="0">
-              <a:solidFill>
-                <a:srgbClr val="3B3B3B"/>
-              </a:solidFill>
-              <a:effectLst/>
-              <a:latin typeface="Consolas" panose="020B0609020204030204" pitchFamily="49" charset="0"/>
-            </a:endParaRPr>
-          </a:p>
-          <a:p>
-            <a:br>
-              <a:rPr lang="en-US" b="0" dirty="0">
-                <a:solidFill>
-                  <a:srgbClr val="3B3B3B"/>
-                </a:solidFill>
-                <a:effectLst/>
-                <a:latin typeface="Consolas" panose="020B0609020204030204" pitchFamily="49" charset="0"/>
-              </a:rPr>
-            </a:br>
-            <a:r>
-              <a:rPr lang="en-US" b="0" dirty="0">
-                <a:solidFill>
-                  <a:srgbClr val="0000FF"/>
-                </a:solidFill>
-                <a:effectLst/>
-                <a:latin typeface="Consolas" panose="020B0609020204030204" pitchFamily="49" charset="0"/>
-              </a:rPr>
-              <a:t>void</a:t>
-            </a:r>
-            <a:r>
-              <a:rPr lang="en-US" b="0" dirty="0">
-                <a:solidFill>
-                  <a:srgbClr val="3B3B3B"/>
-                </a:solidFill>
-                <a:effectLst/>
-                <a:latin typeface="Consolas" panose="020B0609020204030204" pitchFamily="49" charset="0"/>
-              </a:rPr>
-              <a:t> </a:t>
-            </a:r>
-            <a:r>
-              <a:rPr lang="en-US" b="0" dirty="0" err="1">
-                <a:solidFill>
-                  <a:srgbClr val="795E26"/>
-                </a:solidFill>
-                <a:effectLst/>
-                <a:latin typeface="Consolas" panose="020B0609020204030204" pitchFamily="49" charset="0"/>
-              </a:rPr>
-              <a:t>SayHello</a:t>
-            </a:r>
-            <a:r>
-              <a:rPr lang="en-US" b="0" dirty="0">
-                <a:solidFill>
-                  <a:srgbClr val="3B3B3B"/>
-                </a:solidFill>
-                <a:effectLst/>
-                <a:latin typeface="Consolas" panose="020B0609020204030204" pitchFamily="49" charset="0"/>
-              </a:rPr>
-              <a:t>()</a:t>
-            </a:r>
-          </a:p>
-          <a:p>
-            <a:r>
-              <a:rPr lang="en-US" b="0" dirty="0">
-                <a:solidFill>
-                  <a:srgbClr val="3B3B3B"/>
-                </a:solidFill>
-                <a:effectLst/>
-                <a:latin typeface="Consolas" panose="020B0609020204030204" pitchFamily="49" charset="0"/>
-              </a:rPr>
-              <a:t>{</a:t>
-            </a:r>
-          </a:p>
-          <a:p>
-            <a:r>
-              <a:rPr lang="en-US" b="0" dirty="0">
-                <a:solidFill>
-                  <a:srgbClr val="3B3B3B"/>
-                </a:solidFill>
-                <a:effectLst/>
-                <a:latin typeface="Consolas" panose="020B0609020204030204" pitchFamily="49" charset="0"/>
-              </a:rPr>
-              <a:t>    </a:t>
-            </a:r>
-            <a:r>
-              <a:rPr lang="en-US" b="0" dirty="0">
-                <a:solidFill>
-                  <a:srgbClr val="267F99"/>
-                </a:solidFill>
-                <a:effectLst/>
-                <a:latin typeface="Consolas" panose="020B0609020204030204" pitchFamily="49" charset="0"/>
-              </a:rPr>
-              <a:t>std</a:t>
-            </a:r>
-            <a:r>
-              <a:rPr lang="en-US" b="0" dirty="0">
-                <a:solidFill>
-                  <a:srgbClr val="3B3B3B"/>
-                </a:solidFill>
-                <a:effectLst/>
-                <a:latin typeface="Consolas" panose="020B0609020204030204" pitchFamily="49" charset="0"/>
-              </a:rPr>
-              <a:t>::</a:t>
-            </a:r>
-            <a:r>
-              <a:rPr lang="en-US" b="0" dirty="0" err="1">
-                <a:solidFill>
-                  <a:srgbClr val="001080"/>
-                </a:solidFill>
-                <a:effectLst/>
-                <a:latin typeface="Consolas" panose="020B0609020204030204" pitchFamily="49" charset="0"/>
-              </a:rPr>
-              <a:t>cout</a:t>
-            </a:r>
-            <a:r>
-              <a:rPr lang="en-US" b="0" dirty="0">
-                <a:solidFill>
-                  <a:srgbClr val="3B3B3B"/>
-                </a:solidFill>
-                <a:effectLst/>
-                <a:latin typeface="Consolas" panose="020B0609020204030204" pitchFamily="49" charset="0"/>
-              </a:rPr>
-              <a:t> </a:t>
-            </a:r>
-            <a:r>
-              <a:rPr lang="en-US" b="0" dirty="0">
-                <a:solidFill>
-                  <a:srgbClr val="795E26"/>
-                </a:solidFill>
-                <a:effectLst/>
-                <a:latin typeface="Consolas" panose="020B0609020204030204" pitchFamily="49" charset="0"/>
-              </a:rPr>
-              <a:t>&lt;&lt;</a:t>
-            </a:r>
-            <a:r>
-              <a:rPr lang="en-US" b="0" dirty="0">
-                <a:solidFill>
-                  <a:srgbClr val="3B3B3B"/>
-                </a:solidFill>
-                <a:effectLst/>
-                <a:latin typeface="Consolas" panose="020B0609020204030204" pitchFamily="49" charset="0"/>
-              </a:rPr>
-              <a:t> </a:t>
-            </a:r>
-            <a:r>
-              <a:rPr lang="en-US" b="0" dirty="0">
-                <a:solidFill>
-                  <a:srgbClr val="A31515"/>
-                </a:solidFill>
-                <a:effectLst/>
-                <a:latin typeface="Consolas" panose="020B0609020204030204" pitchFamily="49" charset="0"/>
-              </a:rPr>
-              <a:t>"Hello, world</a:t>
-            </a:r>
-            <a:r>
-              <a:rPr lang="en-US" b="0" dirty="0">
-                <a:solidFill>
-                  <a:srgbClr val="EE0000"/>
-                </a:solidFill>
-                <a:effectLst/>
-                <a:latin typeface="Consolas" panose="020B0609020204030204" pitchFamily="49" charset="0"/>
-              </a:rPr>
-              <a:t>\n</a:t>
-            </a:r>
-            <a:r>
-              <a:rPr lang="en-US" b="0" dirty="0">
-                <a:solidFill>
-                  <a:srgbClr val="A31515"/>
-                </a:solidFill>
-                <a:effectLst/>
-                <a:latin typeface="Consolas" panose="020B0609020204030204" pitchFamily="49" charset="0"/>
-              </a:rPr>
-              <a:t>"</a:t>
-            </a:r>
-            <a:r>
-              <a:rPr lang="en-US" b="0" dirty="0">
-                <a:solidFill>
-                  <a:srgbClr val="3B3B3B"/>
-                </a:solidFill>
-                <a:effectLst/>
-                <a:latin typeface="Consolas" panose="020B0609020204030204" pitchFamily="49" charset="0"/>
-              </a:rPr>
-              <a:t>;</a:t>
-            </a:r>
-          </a:p>
-          <a:p>
-            <a:r>
-              <a:rPr lang="en-US" b="0" dirty="0">
-                <a:solidFill>
-                  <a:srgbClr val="3B3B3B"/>
-                </a:solidFill>
-                <a:effectLst/>
-                <a:latin typeface="Consolas" panose="020B0609020204030204" pitchFamily="49" charset="0"/>
-              </a:rPr>
-              <a:t>}</a:t>
-            </a:r>
-          </a:p>
-          <a:p>
-            <a:br>
-              <a:rPr lang="en-US" b="0" dirty="0">
-                <a:solidFill>
-                  <a:srgbClr val="3B3B3B"/>
-                </a:solidFill>
-                <a:effectLst/>
-                <a:latin typeface="Consolas" panose="020B0609020204030204" pitchFamily="49" charset="0"/>
-              </a:rPr>
-            </a:br>
-            <a:r>
-              <a:rPr lang="en-US" b="0" dirty="0">
-                <a:solidFill>
-                  <a:srgbClr val="0000FF"/>
-                </a:solidFill>
-                <a:effectLst/>
-                <a:latin typeface="Consolas" panose="020B0609020204030204" pitchFamily="49" charset="0"/>
-              </a:rPr>
-              <a:t>int</a:t>
-            </a:r>
-            <a:r>
-              <a:rPr lang="en-US" b="0" dirty="0">
-                <a:solidFill>
-                  <a:srgbClr val="3B3B3B"/>
-                </a:solidFill>
-                <a:effectLst/>
-                <a:latin typeface="Consolas" panose="020B0609020204030204" pitchFamily="49" charset="0"/>
-              </a:rPr>
-              <a:t> </a:t>
-            </a:r>
-            <a:r>
-              <a:rPr lang="en-US" b="0" dirty="0">
-                <a:solidFill>
-                  <a:srgbClr val="795E26"/>
-                </a:solidFill>
-                <a:effectLst/>
-                <a:latin typeface="Consolas" panose="020B0609020204030204" pitchFamily="49" charset="0"/>
-              </a:rPr>
-              <a:t>main</a:t>
-            </a:r>
-            <a:r>
-              <a:rPr lang="en-US" b="0" dirty="0">
-                <a:solidFill>
-                  <a:srgbClr val="3B3B3B"/>
-                </a:solidFill>
-                <a:effectLst/>
-                <a:latin typeface="Consolas" panose="020B0609020204030204" pitchFamily="49" charset="0"/>
-              </a:rPr>
-              <a:t>()</a:t>
-            </a:r>
-          </a:p>
-          <a:p>
-            <a:r>
-              <a:rPr lang="en-US" b="0" dirty="0">
-                <a:solidFill>
-                  <a:srgbClr val="3B3B3B"/>
-                </a:solidFill>
-                <a:effectLst/>
-                <a:latin typeface="Consolas" panose="020B0609020204030204" pitchFamily="49" charset="0"/>
-              </a:rPr>
-              <a:t>{</a:t>
-            </a:r>
-          </a:p>
-          <a:p>
-            <a:r>
-              <a:rPr lang="en-US" b="0" dirty="0">
-                <a:solidFill>
-                  <a:srgbClr val="3B3B3B"/>
-                </a:solidFill>
-                <a:effectLst/>
-                <a:latin typeface="Consolas" panose="020B0609020204030204" pitchFamily="49" charset="0"/>
-              </a:rPr>
-              <a:t>    </a:t>
-            </a:r>
-            <a:r>
-              <a:rPr lang="en-US" b="0" dirty="0">
-                <a:solidFill>
-                  <a:srgbClr val="267F99"/>
-                </a:solidFill>
-                <a:effectLst/>
-                <a:latin typeface="Consolas" panose="020B0609020204030204" pitchFamily="49" charset="0"/>
-              </a:rPr>
-              <a:t>std</a:t>
-            </a:r>
-            <a:r>
-              <a:rPr lang="en-US" b="0" dirty="0">
-                <a:solidFill>
-                  <a:srgbClr val="3B3B3B"/>
-                </a:solidFill>
-                <a:effectLst/>
-                <a:latin typeface="Consolas" panose="020B0609020204030204" pitchFamily="49" charset="0"/>
-              </a:rPr>
-              <a:t>::</a:t>
-            </a:r>
-            <a:r>
-              <a:rPr lang="en-US" b="0" dirty="0">
-                <a:solidFill>
-                  <a:srgbClr val="267F99"/>
-                </a:solidFill>
-                <a:effectLst/>
-                <a:latin typeface="Consolas" panose="020B0609020204030204" pitchFamily="49" charset="0"/>
-              </a:rPr>
-              <a:t>thread</a:t>
-            </a:r>
-            <a:r>
-              <a:rPr lang="en-US" b="0" dirty="0">
-                <a:solidFill>
-                  <a:srgbClr val="3B3B3B"/>
-                </a:solidFill>
-                <a:effectLst/>
-                <a:latin typeface="Consolas" panose="020B0609020204030204" pitchFamily="49" charset="0"/>
-              </a:rPr>
-              <a:t> </a:t>
-            </a:r>
-            <a:r>
-              <a:rPr lang="en-US" b="0" dirty="0">
-                <a:solidFill>
-                  <a:srgbClr val="001080"/>
-                </a:solidFill>
-                <a:effectLst/>
-                <a:latin typeface="Consolas" panose="020B0609020204030204" pitchFamily="49" charset="0"/>
-              </a:rPr>
-              <a:t>t</a:t>
-            </a:r>
-            <a:r>
-              <a:rPr lang="en-US" b="0" dirty="0">
-                <a:solidFill>
-                  <a:srgbClr val="3B3B3B"/>
-                </a:solidFill>
-                <a:effectLst/>
-                <a:latin typeface="Consolas" panose="020B0609020204030204" pitchFamily="49" charset="0"/>
-              </a:rPr>
-              <a:t>{ </a:t>
-            </a:r>
-            <a:r>
-              <a:rPr lang="en-US" b="0" dirty="0" err="1">
-                <a:solidFill>
-                  <a:srgbClr val="795E26"/>
-                </a:solidFill>
-                <a:effectLst/>
-                <a:latin typeface="Consolas" panose="020B0609020204030204" pitchFamily="49" charset="0"/>
-              </a:rPr>
-              <a:t>SayHello</a:t>
-            </a:r>
-            <a:r>
-              <a:rPr lang="en-US" b="0" dirty="0">
-                <a:solidFill>
-                  <a:srgbClr val="3B3B3B"/>
-                </a:solidFill>
-                <a:effectLst/>
-                <a:latin typeface="Consolas" panose="020B0609020204030204" pitchFamily="49" charset="0"/>
-              </a:rPr>
-              <a:t> };</a:t>
-            </a:r>
-          </a:p>
-          <a:p>
-            <a:r>
-              <a:rPr lang="en-US" b="0" dirty="0">
-                <a:solidFill>
-                  <a:srgbClr val="3B3B3B"/>
-                </a:solidFill>
-                <a:effectLst/>
-                <a:latin typeface="Consolas" panose="020B0609020204030204" pitchFamily="49" charset="0"/>
-              </a:rPr>
-              <a:t>    </a:t>
-            </a:r>
-            <a:r>
-              <a:rPr lang="en-US" b="0" dirty="0" err="1">
-                <a:solidFill>
-                  <a:srgbClr val="001080"/>
-                </a:solidFill>
-                <a:effectLst/>
-                <a:latin typeface="Consolas" panose="020B0609020204030204" pitchFamily="49" charset="0"/>
-              </a:rPr>
-              <a:t>t</a:t>
-            </a:r>
-            <a:r>
-              <a:rPr lang="en-US" b="0" dirty="0" err="1">
-                <a:solidFill>
-                  <a:srgbClr val="3B3B3B"/>
-                </a:solidFill>
-                <a:effectLst/>
-                <a:latin typeface="Consolas" panose="020B0609020204030204" pitchFamily="49" charset="0"/>
-              </a:rPr>
-              <a:t>.</a:t>
-            </a:r>
-            <a:r>
-              <a:rPr lang="en-US" b="1" dirty="0" err="1">
-                <a:solidFill>
-                  <a:srgbClr val="FF0000"/>
-                </a:solidFill>
-                <a:effectLst/>
-                <a:latin typeface="Consolas" panose="020B0609020204030204" pitchFamily="49" charset="0"/>
-              </a:rPr>
-              <a:t>detach</a:t>
-            </a:r>
-            <a:r>
-              <a:rPr lang="en-US" b="0" dirty="0">
-                <a:solidFill>
-                  <a:srgbClr val="3B3B3B"/>
-                </a:solidFill>
-                <a:effectLst/>
-                <a:latin typeface="Consolas" panose="020B0609020204030204" pitchFamily="49" charset="0"/>
-              </a:rPr>
-              <a:t>(); </a:t>
-            </a:r>
-            <a:r>
-              <a:rPr lang="ru-RU" b="0" dirty="0">
-                <a:solidFill>
-                  <a:srgbClr val="008000"/>
-                </a:solidFill>
-                <a:effectLst/>
-                <a:latin typeface="Consolas" panose="020B0609020204030204" pitchFamily="49" charset="0"/>
-              </a:rPr>
-              <a:t>// Отцепляем поток от объекта std::thread</a:t>
-            </a:r>
-            <a:endParaRPr lang="en-US" b="0" dirty="0">
-              <a:solidFill>
-                <a:srgbClr val="3B3B3B"/>
-              </a:solidFill>
-              <a:effectLst/>
-              <a:latin typeface="Consolas" panose="020B0609020204030204" pitchFamily="49" charset="0"/>
-            </a:endParaRPr>
-          </a:p>
-          <a:p>
-            <a:r>
-              <a:rPr lang="en-US" b="0" dirty="0">
-                <a:solidFill>
-                  <a:srgbClr val="3B3B3B"/>
-                </a:solidFill>
-                <a:effectLst/>
-                <a:latin typeface="Consolas" panose="020B0609020204030204" pitchFamily="49" charset="0"/>
-              </a:rPr>
-              <a:t>}</a:t>
-            </a:r>
-          </a:p>
-        </p:txBody>
-      </p:sp>
-      <p:sp>
-        <p:nvSpPr>
-          <p:cNvPr id="6" name="TextBox 5">
-            <a:extLst>
-              <a:ext uri="{FF2B5EF4-FFF2-40B4-BE49-F238E27FC236}">
-                <a16:creationId xmlns:a16="http://schemas.microsoft.com/office/drawing/2014/main" id="{0DDEE1B1-C641-A13D-B48D-308A71E86087}"/>
-              </a:ext>
-            </a:extLst>
-          </p:cNvPr>
-          <p:cNvSpPr txBox="1"/>
-          <p:nvPr/>
-        </p:nvSpPr>
-        <p:spPr>
-          <a:xfrm>
-            <a:off x="838200" y="6123543"/>
-            <a:ext cx="6097712" cy="369332"/>
-          </a:xfrm>
-          <a:prstGeom prst="rect">
-            <a:avLst/>
-          </a:prstGeom>
-          <a:noFill/>
-        </p:spPr>
-        <p:txBody>
-          <a:bodyPr wrap="square">
-            <a:spAutoFit/>
-          </a:bodyPr>
-          <a:lstStyle/>
-          <a:p>
-            <a:r>
-              <a:rPr lang="en-US" dirty="0">
-                <a:hlinkClick r:id="rId3"/>
-              </a:rPr>
-              <a:t>https://godbolt.org/z/xP4MqKoWT</a:t>
-            </a:r>
-            <a:r>
-              <a:rPr lang="en-US" dirty="0"/>
-              <a:t> </a:t>
-            </a:r>
-          </a:p>
-        </p:txBody>
-      </p:sp>
-      <p:pic>
-        <p:nvPicPr>
-          <p:cNvPr id="8" name="Picture 7">
-            <a:extLst>
-              <a:ext uri="{FF2B5EF4-FFF2-40B4-BE49-F238E27FC236}">
-                <a16:creationId xmlns:a16="http://schemas.microsoft.com/office/drawing/2014/main" id="{E4F02FE3-8C9C-0A9B-A008-BCF2EA772F04}"/>
-              </a:ext>
-            </a:extLst>
-          </p:cNvPr>
-          <p:cNvPicPr>
-            <a:picLocks noChangeAspect="1"/>
-          </p:cNvPicPr>
-          <p:nvPr/>
-        </p:nvPicPr>
-        <p:blipFill>
-          <a:blip r:embed="rId4"/>
-          <a:stretch>
-            <a:fillRect/>
-          </a:stretch>
-        </p:blipFill>
-        <p:spPr>
-          <a:xfrm>
-            <a:off x="8581584" y="2422867"/>
-            <a:ext cx="2467319" cy="2505425"/>
-          </a:xfrm>
-          <a:prstGeom prst="rect">
-            <a:avLst/>
-          </a:prstGeom>
-        </p:spPr>
-      </p:pic>
-    </p:spTree>
-    <p:extLst>
-      <p:ext uri="{BB962C8B-B14F-4D97-AF65-F5344CB8AC3E}">
-        <p14:creationId xmlns:p14="http://schemas.microsoft.com/office/powerpoint/2010/main" val="309632591"/>
-      </p:ext>
-    </p:extLst>
-  </p:cSld>
-  <p:clrMapOvr>
-    <a:masterClrMapping/>
-  </p:clrMapOvr>
-</p:sld>
-</file>
-
-<file path=ppt/slides/slide11.xml><?xml version="1.0" encoding="utf-8"?>
-<p:sld xmlns:a="http://schemas.openxmlformats.org/drawingml/2006/main" xmlns:r="http://schemas.openxmlformats.org/officeDocument/2006/relationships" xmlns:p="http://schemas.openxmlformats.org/presentationml/2006/main">
-  <p:cSld>
-    <p:spTree>
-      <p:nvGrpSpPr>
-        <p:cNvPr id="1" name=""/>
-        <p:cNvGrpSpPr/>
-        <p:nvPr/>
-      </p:nvGrpSpPr>
-      <p:grpSpPr>
-        <a:xfrm>
-          <a:off x="0" y="0"/>
-          <a:ext cx="0" cy="0"/>
-          <a:chOff x="0" y="0"/>
-          <a:chExt cx="0" cy="0"/>
-        </a:xfrm>
-      </p:grpSpPr>
-      <p:sp>
-        <p:nvSpPr>
-          <p:cNvPr id="2" name="Title 1">
-            <a:extLst>
-              <a:ext uri="{FF2B5EF4-FFF2-40B4-BE49-F238E27FC236}">
-                <a16:creationId xmlns:a16="http://schemas.microsoft.com/office/drawing/2014/main" id="{8D15A878-38C3-5D9C-7EC6-F709A660D141}"/>
-              </a:ext>
-            </a:extLst>
-          </p:cNvPr>
-          <p:cNvSpPr>
-            <a:spLocks noGrp="1"/>
-          </p:cNvSpPr>
-          <p:nvPr>
-            <p:ph type="title"/>
-          </p:nvPr>
-        </p:nvSpPr>
-        <p:spPr/>
-        <p:txBody>
-          <a:bodyPr/>
-          <a:lstStyle/>
-          <a:p>
-            <a:r>
-              <a:rPr lang="en-US" dirty="0"/>
-              <a:t>Joinable Thread (C++ 20)</a:t>
-            </a:r>
-          </a:p>
-        </p:txBody>
-      </p:sp>
-      <p:sp>
-        <p:nvSpPr>
-          <p:cNvPr id="4" name="TextBox 3">
-            <a:extLst>
-              <a:ext uri="{FF2B5EF4-FFF2-40B4-BE49-F238E27FC236}">
-                <a16:creationId xmlns:a16="http://schemas.microsoft.com/office/drawing/2014/main" id="{683E1C57-620C-D109-3A60-EBE541A778BD}"/>
-              </a:ext>
-            </a:extLst>
-          </p:cNvPr>
-          <p:cNvSpPr txBox="1"/>
-          <p:nvPr/>
-        </p:nvSpPr>
-        <p:spPr>
-          <a:xfrm>
-            <a:off x="838200" y="2126751"/>
-            <a:ext cx="8308368" cy="3693319"/>
-          </a:xfrm>
-          <a:prstGeom prst="rect">
-            <a:avLst/>
-          </a:prstGeom>
-          <a:noFill/>
-        </p:spPr>
-        <p:txBody>
-          <a:bodyPr wrap="square">
-            <a:spAutoFit/>
-          </a:bodyPr>
-          <a:lstStyle/>
-          <a:p>
-            <a:r>
-              <a:rPr lang="en-US" b="0" dirty="0">
-                <a:solidFill>
-                  <a:srgbClr val="AF00DB"/>
-                </a:solidFill>
-                <a:effectLst/>
-                <a:latin typeface="Consolas" panose="020B0609020204030204" pitchFamily="49" charset="0"/>
-              </a:rPr>
-              <a:t>#include</a:t>
-            </a:r>
-            <a:r>
-              <a:rPr lang="en-US" b="0" dirty="0">
-                <a:solidFill>
-                  <a:srgbClr val="0000FF"/>
-                </a:solidFill>
-                <a:effectLst/>
-                <a:latin typeface="Consolas" panose="020B0609020204030204" pitchFamily="49" charset="0"/>
-              </a:rPr>
-              <a:t> </a:t>
-            </a:r>
-            <a:r>
-              <a:rPr lang="en-US" b="0" dirty="0">
-                <a:solidFill>
-                  <a:srgbClr val="A31515"/>
-                </a:solidFill>
-                <a:effectLst/>
-                <a:latin typeface="Consolas" panose="020B0609020204030204" pitchFamily="49" charset="0"/>
-              </a:rPr>
-              <a:t>&lt;iostream&gt;</a:t>
-            </a:r>
-            <a:endParaRPr lang="en-US" b="0" dirty="0">
-              <a:solidFill>
-                <a:srgbClr val="3B3B3B"/>
-              </a:solidFill>
-              <a:effectLst/>
-              <a:latin typeface="Consolas" panose="020B0609020204030204" pitchFamily="49" charset="0"/>
-            </a:endParaRPr>
-          </a:p>
-          <a:p>
-            <a:r>
-              <a:rPr lang="en-US" b="0" dirty="0">
-                <a:solidFill>
-                  <a:srgbClr val="AF00DB"/>
-                </a:solidFill>
-                <a:effectLst/>
-                <a:latin typeface="Consolas" panose="020B0609020204030204" pitchFamily="49" charset="0"/>
-              </a:rPr>
-              <a:t>#include</a:t>
-            </a:r>
-            <a:r>
-              <a:rPr lang="en-US" b="0" dirty="0">
-                <a:solidFill>
-                  <a:srgbClr val="0000FF"/>
-                </a:solidFill>
-                <a:effectLst/>
-                <a:latin typeface="Consolas" panose="020B0609020204030204" pitchFamily="49" charset="0"/>
-              </a:rPr>
-              <a:t> </a:t>
-            </a:r>
-            <a:r>
-              <a:rPr lang="en-US" b="0" dirty="0">
-                <a:solidFill>
-                  <a:srgbClr val="A31515"/>
-                </a:solidFill>
-                <a:effectLst/>
-                <a:latin typeface="Consolas" panose="020B0609020204030204" pitchFamily="49" charset="0"/>
-              </a:rPr>
-              <a:t>&lt;thread&gt;</a:t>
-            </a:r>
-            <a:endParaRPr lang="en-US" b="0" dirty="0">
-              <a:solidFill>
-                <a:srgbClr val="3B3B3B"/>
-              </a:solidFill>
-              <a:effectLst/>
-              <a:latin typeface="Consolas" panose="020B0609020204030204" pitchFamily="49" charset="0"/>
-            </a:endParaRPr>
-          </a:p>
-          <a:p>
-            <a:br>
-              <a:rPr lang="en-US" b="0" dirty="0">
-                <a:solidFill>
-                  <a:srgbClr val="3B3B3B"/>
-                </a:solidFill>
-                <a:effectLst/>
-                <a:latin typeface="Consolas" panose="020B0609020204030204" pitchFamily="49" charset="0"/>
-              </a:rPr>
-            </a:br>
-            <a:r>
-              <a:rPr lang="en-US" b="0" dirty="0">
-                <a:solidFill>
-                  <a:srgbClr val="0000FF"/>
-                </a:solidFill>
-                <a:effectLst/>
-                <a:latin typeface="Consolas" panose="020B0609020204030204" pitchFamily="49" charset="0"/>
-              </a:rPr>
-              <a:t>void</a:t>
-            </a:r>
-            <a:r>
-              <a:rPr lang="en-US" b="0" dirty="0">
-                <a:solidFill>
-                  <a:srgbClr val="3B3B3B"/>
-                </a:solidFill>
-                <a:effectLst/>
-                <a:latin typeface="Consolas" panose="020B0609020204030204" pitchFamily="49" charset="0"/>
-              </a:rPr>
-              <a:t> </a:t>
-            </a:r>
-            <a:r>
-              <a:rPr lang="en-US" b="0" dirty="0" err="1">
-                <a:solidFill>
-                  <a:srgbClr val="795E26"/>
-                </a:solidFill>
-                <a:effectLst/>
-                <a:latin typeface="Consolas" panose="020B0609020204030204" pitchFamily="49" charset="0"/>
-              </a:rPr>
-              <a:t>SayHello</a:t>
-            </a:r>
-            <a:r>
-              <a:rPr lang="en-US" b="0" dirty="0">
-                <a:solidFill>
-                  <a:srgbClr val="3B3B3B"/>
-                </a:solidFill>
-                <a:effectLst/>
-                <a:latin typeface="Consolas" panose="020B0609020204030204" pitchFamily="49" charset="0"/>
-              </a:rPr>
-              <a:t>()</a:t>
-            </a:r>
-          </a:p>
-          <a:p>
-            <a:r>
-              <a:rPr lang="en-US" b="0" dirty="0">
-                <a:solidFill>
-                  <a:srgbClr val="3B3B3B"/>
-                </a:solidFill>
-                <a:effectLst/>
-                <a:latin typeface="Consolas" panose="020B0609020204030204" pitchFamily="49" charset="0"/>
-              </a:rPr>
-              <a:t>{</a:t>
-            </a:r>
-          </a:p>
-          <a:p>
-            <a:r>
-              <a:rPr lang="en-US" b="0" dirty="0">
-                <a:solidFill>
-                  <a:srgbClr val="3B3B3B"/>
-                </a:solidFill>
-                <a:effectLst/>
-                <a:latin typeface="Consolas" panose="020B0609020204030204" pitchFamily="49" charset="0"/>
-              </a:rPr>
-              <a:t>    </a:t>
-            </a:r>
-            <a:r>
-              <a:rPr lang="en-US" b="0" dirty="0">
-                <a:solidFill>
-                  <a:srgbClr val="267F99"/>
-                </a:solidFill>
-                <a:effectLst/>
-                <a:latin typeface="Consolas" panose="020B0609020204030204" pitchFamily="49" charset="0"/>
-              </a:rPr>
-              <a:t>std</a:t>
-            </a:r>
-            <a:r>
-              <a:rPr lang="en-US" b="0" dirty="0">
-                <a:solidFill>
-                  <a:srgbClr val="3B3B3B"/>
-                </a:solidFill>
-                <a:effectLst/>
-                <a:latin typeface="Consolas" panose="020B0609020204030204" pitchFamily="49" charset="0"/>
-              </a:rPr>
-              <a:t>::</a:t>
-            </a:r>
-            <a:r>
-              <a:rPr lang="en-US" b="0" dirty="0" err="1">
-                <a:solidFill>
-                  <a:srgbClr val="001080"/>
-                </a:solidFill>
-                <a:effectLst/>
-                <a:latin typeface="Consolas" panose="020B0609020204030204" pitchFamily="49" charset="0"/>
-              </a:rPr>
-              <a:t>cout</a:t>
-            </a:r>
-            <a:r>
-              <a:rPr lang="en-US" b="0" dirty="0">
-                <a:solidFill>
-                  <a:srgbClr val="3B3B3B"/>
-                </a:solidFill>
-                <a:effectLst/>
-                <a:latin typeface="Consolas" panose="020B0609020204030204" pitchFamily="49" charset="0"/>
-              </a:rPr>
-              <a:t> </a:t>
-            </a:r>
-            <a:r>
-              <a:rPr lang="en-US" b="0" dirty="0">
-                <a:solidFill>
-                  <a:srgbClr val="795E26"/>
-                </a:solidFill>
-                <a:effectLst/>
-                <a:latin typeface="Consolas" panose="020B0609020204030204" pitchFamily="49" charset="0"/>
-              </a:rPr>
-              <a:t>&lt;&lt;</a:t>
-            </a:r>
-            <a:r>
-              <a:rPr lang="en-US" b="0" dirty="0">
-                <a:solidFill>
-                  <a:srgbClr val="3B3B3B"/>
-                </a:solidFill>
-                <a:effectLst/>
-                <a:latin typeface="Consolas" panose="020B0609020204030204" pitchFamily="49" charset="0"/>
-              </a:rPr>
-              <a:t> </a:t>
-            </a:r>
-            <a:r>
-              <a:rPr lang="en-US" b="0" dirty="0">
-                <a:solidFill>
-                  <a:srgbClr val="A31515"/>
-                </a:solidFill>
-                <a:effectLst/>
-                <a:latin typeface="Consolas" panose="020B0609020204030204" pitchFamily="49" charset="0"/>
-              </a:rPr>
-              <a:t>"Hello, world</a:t>
-            </a:r>
-            <a:r>
-              <a:rPr lang="en-US" b="0" dirty="0">
-                <a:solidFill>
-                  <a:srgbClr val="EE0000"/>
-                </a:solidFill>
-                <a:effectLst/>
-                <a:latin typeface="Consolas" panose="020B0609020204030204" pitchFamily="49" charset="0"/>
-              </a:rPr>
-              <a:t>\n</a:t>
-            </a:r>
-            <a:r>
-              <a:rPr lang="en-US" b="0" dirty="0">
-                <a:solidFill>
-                  <a:srgbClr val="A31515"/>
-                </a:solidFill>
-                <a:effectLst/>
-                <a:latin typeface="Consolas" panose="020B0609020204030204" pitchFamily="49" charset="0"/>
-              </a:rPr>
-              <a:t>"</a:t>
-            </a:r>
-            <a:r>
-              <a:rPr lang="en-US" b="0" dirty="0">
-                <a:solidFill>
-                  <a:srgbClr val="3B3B3B"/>
-                </a:solidFill>
-                <a:effectLst/>
-                <a:latin typeface="Consolas" panose="020B0609020204030204" pitchFamily="49" charset="0"/>
-              </a:rPr>
-              <a:t>;</a:t>
-            </a:r>
-          </a:p>
-          <a:p>
-            <a:r>
-              <a:rPr lang="en-US" b="0" dirty="0">
-                <a:solidFill>
-                  <a:srgbClr val="3B3B3B"/>
-                </a:solidFill>
-                <a:effectLst/>
-                <a:latin typeface="Consolas" panose="020B0609020204030204" pitchFamily="49" charset="0"/>
-              </a:rPr>
-              <a:t>}</a:t>
-            </a:r>
-          </a:p>
-          <a:p>
-            <a:br>
-              <a:rPr lang="en-US" b="0" dirty="0">
-                <a:solidFill>
-                  <a:srgbClr val="3B3B3B"/>
-                </a:solidFill>
-                <a:effectLst/>
-                <a:latin typeface="Consolas" panose="020B0609020204030204" pitchFamily="49" charset="0"/>
-              </a:rPr>
-            </a:br>
-            <a:r>
-              <a:rPr lang="en-US" b="0" dirty="0">
-                <a:solidFill>
-                  <a:srgbClr val="0000FF"/>
-                </a:solidFill>
-                <a:effectLst/>
-                <a:latin typeface="Consolas" panose="020B0609020204030204" pitchFamily="49" charset="0"/>
-              </a:rPr>
-              <a:t>int</a:t>
-            </a:r>
-            <a:r>
-              <a:rPr lang="en-US" b="0" dirty="0">
-                <a:solidFill>
-                  <a:srgbClr val="3B3B3B"/>
-                </a:solidFill>
-                <a:effectLst/>
-                <a:latin typeface="Consolas" panose="020B0609020204030204" pitchFamily="49" charset="0"/>
-              </a:rPr>
-              <a:t> </a:t>
-            </a:r>
-            <a:r>
-              <a:rPr lang="en-US" b="0" dirty="0">
-                <a:solidFill>
-                  <a:srgbClr val="795E26"/>
-                </a:solidFill>
-                <a:effectLst/>
-                <a:latin typeface="Consolas" panose="020B0609020204030204" pitchFamily="49" charset="0"/>
-              </a:rPr>
-              <a:t>main</a:t>
-            </a:r>
-            <a:r>
-              <a:rPr lang="en-US" b="0" dirty="0">
-                <a:solidFill>
-                  <a:srgbClr val="3B3B3B"/>
-                </a:solidFill>
-                <a:effectLst/>
-                <a:latin typeface="Consolas" panose="020B0609020204030204" pitchFamily="49" charset="0"/>
-              </a:rPr>
-              <a:t>()</a:t>
-            </a:r>
-          </a:p>
-          <a:p>
-            <a:r>
-              <a:rPr lang="en-US" b="0" dirty="0">
-                <a:solidFill>
-                  <a:srgbClr val="3B3B3B"/>
-                </a:solidFill>
-                <a:effectLst/>
-                <a:latin typeface="Consolas" panose="020B0609020204030204" pitchFamily="49" charset="0"/>
-              </a:rPr>
-              <a:t>{</a:t>
-            </a:r>
-          </a:p>
-          <a:p>
-            <a:r>
-              <a:rPr lang="ru-RU" b="0" dirty="0">
-                <a:solidFill>
-                  <a:srgbClr val="3B3B3B"/>
-                </a:solidFill>
-                <a:effectLst/>
-                <a:latin typeface="Consolas" panose="020B0609020204030204" pitchFamily="49" charset="0"/>
-              </a:rPr>
-              <a:t>    </a:t>
-            </a:r>
-            <a:r>
-              <a:rPr lang="en-US" b="0" dirty="0">
-                <a:solidFill>
-                  <a:srgbClr val="267F99"/>
-                </a:solidFill>
-                <a:effectLst/>
-                <a:latin typeface="Consolas" panose="020B0609020204030204" pitchFamily="49" charset="0"/>
-              </a:rPr>
-              <a:t>std</a:t>
-            </a:r>
-            <a:r>
-              <a:rPr lang="en-US" b="0" dirty="0">
-                <a:solidFill>
-                  <a:srgbClr val="3B3B3B"/>
-                </a:solidFill>
-                <a:effectLst/>
-                <a:latin typeface="Consolas" panose="020B0609020204030204" pitchFamily="49" charset="0"/>
-              </a:rPr>
-              <a:t>::</a:t>
-            </a:r>
-            <a:r>
-              <a:rPr lang="en-US" b="1" dirty="0" err="1">
-                <a:solidFill>
-                  <a:srgbClr val="FF0000"/>
-                </a:solidFill>
-                <a:effectLst/>
-                <a:latin typeface="Consolas" panose="020B0609020204030204" pitchFamily="49" charset="0"/>
-              </a:rPr>
-              <a:t>jthread</a:t>
-            </a:r>
-            <a:r>
-              <a:rPr lang="en-US" b="0" dirty="0">
-                <a:solidFill>
-                  <a:srgbClr val="3B3B3B"/>
-                </a:solidFill>
-                <a:effectLst/>
-                <a:latin typeface="Consolas" panose="020B0609020204030204" pitchFamily="49" charset="0"/>
-              </a:rPr>
-              <a:t> </a:t>
-            </a:r>
-            <a:r>
-              <a:rPr lang="en-US" b="0" dirty="0">
-                <a:solidFill>
-                  <a:srgbClr val="001080"/>
-                </a:solidFill>
-                <a:effectLst/>
-                <a:latin typeface="Consolas" panose="020B0609020204030204" pitchFamily="49" charset="0"/>
-              </a:rPr>
-              <a:t>t</a:t>
-            </a:r>
-            <a:r>
-              <a:rPr lang="en-US" b="0" dirty="0">
-                <a:solidFill>
-                  <a:srgbClr val="3B3B3B"/>
-                </a:solidFill>
-                <a:effectLst/>
-                <a:latin typeface="Consolas" panose="020B0609020204030204" pitchFamily="49" charset="0"/>
-              </a:rPr>
-              <a:t>{</a:t>
-            </a:r>
-            <a:r>
-              <a:rPr lang="en-US" b="0" dirty="0" err="1">
-                <a:solidFill>
-                  <a:srgbClr val="795E26"/>
-                </a:solidFill>
-                <a:effectLst/>
-                <a:latin typeface="Consolas" panose="020B0609020204030204" pitchFamily="49" charset="0"/>
-              </a:rPr>
-              <a:t>SayHello</a:t>
-            </a:r>
-            <a:r>
-              <a:rPr lang="en-US" b="0" dirty="0">
-                <a:solidFill>
-                  <a:srgbClr val="3B3B3B"/>
-                </a:solidFill>
-                <a:effectLst/>
-                <a:latin typeface="Consolas" panose="020B0609020204030204" pitchFamily="49" charset="0"/>
-              </a:rPr>
-              <a:t>};</a:t>
-            </a:r>
-            <a:endParaRPr lang="ru-RU" b="0" dirty="0">
-              <a:solidFill>
-                <a:srgbClr val="3B3B3B"/>
-              </a:solidFill>
-              <a:effectLst/>
-              <a:latin typeface="Consolas" panose="020B0609020204030204" pitchFamily="49" charset="0"/>
-            </a:endParaRPr>
-          </a:p>
-          <a:p>
-            <a:r>
-              <a:rPr lang="ru-RU" dirty="0">
-                <a:solidFill>
-                  <a:srgbClr val="3B3B3B"/>
-                </a:solidFill>
-                <a:latin typeface="Consolas" panose="020B0609020204030204" pitchFamily="49" charset="0"/>
-              </a:rPr>
-              <a:t>    </a:t>
-            </a:r>
-            <a:r>
-              <a:rPr lang="ru-RU" b="0" dirty="0">
-                <a:solidFill>
-                  <a:srgbClr val="008000"/>
-                </a:solidFill>
-                <a:effectLst/>
-                <a:latin typeface="Consolas" panose="020B0609020204030204" pitchFamily="49" charset="0"/>
-              </a:rPr>
-              <a:t>// Деструктор объекта t автоматически вызовет метод join()</a:t>
-            </a:r>
-            <a:br>
-              <a:rPr lang="en-US" b="0" dirty="0">
-                <a:solidFill>
-                  <a:srgbClr val="3B3B3B"/>
-                </a:solidFill>
-                <a:effectLst/>
-                <a:latin typeface="Consolas" panose="020B0609020204030204" pitchFamily="49" charset="0"/>
-              </a:rPr>
-            </a:br>
-            <a:r>
-              <a:rPr lang="en-US" b="0" dirty="0">
-                <a:solidFill>
-                  <a:srgbClr val="3B3B3B"/>
-                </a:solidFill>
-                <a:effectLst/>
-                <a:latin typeface="Consolas" panose="020B0609020204030204" pitchFamily="49" charset="0"/>
-              </a:rPr>
-              <a:t>}</a:t>
-            </a:r>
-          </a:p>
-        </p:txBody>
-      </p:sp>
-      <p:sp>
-        <p:nvSpPr>
-          <p:cNvPr id="6" name="TextBox 5">
-            <a:extLst>
-              <a:ext uri="{FF2B5EF4-FFF2-40B4-BE49-F238E27FC236}">
-                <a16:creationId xmlns:a16="http://schemas.microsoft.com/office/drawing/2014/main" id="{C6E5DCBA-0AD6-F977-4C6E-CCD3F60DFFCD}"/>
-              </a:ext>
-            </a:extLst>
-          </p:cNvPr>
-          <p:cNvSpPr txBox="1"/>
-          <p:nvPr/>
-        </p:nvSpPr>
-        <p:spPr>
-          <a:xfrm>
-            <a:off x="838200" y="5912403"/>
-            <a:ext cx="6097712" cy="369332"/>
-          </a:xfrm>
-          <a:prstGeom prst="rect">
-            <a:avLst/>
-          </a:prstGeom>
-          <a:noFill/>
-        </p:spPr>
-        <p:txBody>
-          <a:bodyPr wrap="square">
-            <a:spAutoFit/>
-          </a:bodyPr>
-          <a:lstStyle/>
-          <a:p>
-            <a:r>
-              <a:rPr lang="en-US" dirty="0">
-                <a:hlinkClick r:id="rId3"/>
-              </a:rPr>
-              <a:t>https://godbolt.org/z/873bvT5Y6</a:t>
-            </a:r>
-            <a:r>
-              <a:rPr lang="en-US" dirty="0"/>
-              <a:t> </a:t>
-            </a:r>
-          </a:p>
-        </p:txBody>
-      </p:sp>
-      <p:pic>
-        <p:nvPicPr>
-          <p:cNvPr id="8" name="Picture 7">
-            <a:extLst>
-              <a:ext uri="{FF2B5EF4-FFF2-40B4-BE49-F238E27FC236}">
-                <a16:creationId xmlns:a16="http://schemas.microsoft.com/office/drawing/2014/main" id="{E980AD50-EB15-4954-A4F7-65AEDD1B974A}"/>
-              </a:ext>
-            </a:extLst>
-          </p:cNvPr>
-          <p:cNvPicPr>
-            <a:picLocks noChangeAspect="1"/>
-          </p:cNvPicPr>
-          <p:nvPr/>
-        </p:nvPicPr>
-        <p:blipFill>
-          <a:blip r:embed="rId4"/>
-          <a:stretch>
-            <a:fillRect/>
-          </a:stretch>
-        </p:blipFill>
-        <p:spPr>
-          <a:xfrm>
-            <a:off x="9070729" y="2269503"/>
-            <a:ext cx="2495898" cy="2524477"/>
-          </a:xfrm>
-          <a:prstGeom prst="rect">
-            <a:avLst/>
-          </a:prstGeom>
-        </p:spPr>
-      </p:pic>
-    </p:spTree>
-    <p:extLst>
-      <p:ext uri="{BB962C8B-B14F-4D97-AF65-F5344CB8AC3E}">
-        <p14:creationId xmlns:p14="http://schemas.microsoft.com/office/powerpoint/2010/main" val="3692857452"/>
-      </p:ext>
-    </p:extLst>
-  </p:cSld>
-  <p:clrMapOvr>
-    <a:masterClrMapping/>
-  </p:clrMapOvr>
-</p:sld>
-</file>
-
-<file path=ppt/slides/slide12.xml><?xml version="1.0" encoding="utf-8"?>
-<p:sld xmlns:a="http://schemas.openxmlformats.org/drawingml/2006/main" xmlns:r="http://schemas.openxmlformats.org/officeDocument/2006/relationships" xmlns:p="http://schemas.openxmlformats.org/presentationml/2006/main">
-  <p:cSld>
-    <p:spTree>
-      <p:nvGrpSpPr>
-        <p:cNvPr id="1" name=""/>
-        <p:cNvGrpSpPr/>
-        <p:nvPr/>
-      </p:nvGrpSpPr>
-      <p:grpSpPr>
-        <a:xfrm>
-          <a:off x="0" y="0"/>
-          <a:ext cx="0" cy="0"/>
-          <a:chOff x="0" y="0"/>
-          <a:chExt cx="0" cy="0"/>
-        </a:xfrm>
-      </p:grpSpPr>
-      <p:sp>
-        <p:nvSpPr>
-          <p:cNvPr id="2" name="Title 1">
-            <a:extLst>
-              <a:ext uri="{FF2B5EF4-FFF2-40B4-BE49-F238E27FC236}">
                 <a16:creationId xmlns:a16="http://schemas.microsoft.com/office/drawing/2014/main" id="{1F7096E3-DF9C-286C-3904-90514C61195B}"/>
               </a:ext>
             </a:extLst>
@@ -9408,7 +9136,7 @@
 </p:sld>
 </file>
 
-<file path=ppt/slides/slide13.xml><?xml version="1.0" encoding="utf-8"?>
+<file path=ppt/slides/slide11.xml><?xml version="1.0" encoding="utf-8"?>
 <p:sld xmlns:a="http://schemas.openxmlformats.org/drawingml/2006/main" xmlns:r="http://schemas.openxmlformats.org/officeDocument/2006/relationships" xmlns:p="http://schemas.openxmlformats.org/presentationml/2006/main">
   <p:cSld>
     <p:spTree>
@@ -10662,7 +10390,7 @@
 </p:sld>
 </file>
 
-<file path=ppt/slides/slide14.xml><?xml version="1.0" encoding="utf-8"?>
+<file path=ppt/slides/slide12.xml><?xml version="1.0" encoding="utf-8"?>
 <p:sld xmlns:a="http://schemas.openxmlformats.org/drawingml/2006/main" xmlns:r="http://schemas.openxmlformats.org/officeDocument/2006/relationships" xmlns:p="http://schemas.openxmlformats.org/presentationml/2006/main">
   <p:cSld>
     <p:spTree>
@@ -11011,7 +10739,7 @@
 </p:sld>
 </file>
 
-<file path=ppt/slides/slide15.xml><?xml version="1.0" encoding="utf-8"?>
+<file path=ppt/slides/slide13.xml><?xml version="1.0" encoding="utf-8"?>
 <p:sld xmlns:a="http://schemas.openxmlformats.org/drawingml/2006/main" xmlns:r="http://schemas.openxmlformats.org/officeDocument/2006/relationships" xmlns:p="http://schemas.openxmlformats.org/presentationml/2006/main">
   <p:cSld>
     <p:spTree>
@@ -12660,7 +12388,7 @@
 </p:sld>
 </file>
 
-<file path=ppt/slides/slide16.xml><?xml version="1.0" encoding="utf-8"?>
+<file path=ppt/slides/slide14.xml><?xml version="1.0" encoding="utf-8"?>
 <p:sld xmlns:a="http://schemas.openxmlformats.org/drawingml/2006/main" xmlns:r="http://schemas.openxmlformats.org/officeDocument/2006/relationships" xmlns:p="http://schemas.openxmlformats.org/presentationml/2006/main">
   <p:cSld>
     <p:spTree>
@@ -13914,7 +13642,7 @@
 </p:sld>
 </file>
 
-<file path=ppt/slides/slide17.xml><?xml version="1.0" encoding="utf-8"?>
+<file path=ppt/slides/slide15.xml><?xml version="1.0" encoding="utf-8"?>
 <p:sld xmlns:a="http://schemas.openxmlformats.org/drawingml/2006/main" xmlns:r="http://schemas.openxmlformats.org/officeDocument/2006/relationships" xmlns:p="http://schemas.openxmlformats.org/presentationml/2006/main">
   <p:cSld>
     <p:spTree>
@@ -13979,19 +13707,13 @@
         <p:spPr/>
         <p:txBody>
           <a:bodyPr>
-            <a:normAutofit fontScale="92500" lnSpcReduction="10000"/>
+            <a:normAutofit fontScale="92500" lnSpcReduction="20000"/>
           </a:bodyPr>
           <a:lstStyle/>
           <a:p>
             <a:r>
               <a:rPr lang="ru-RU" dirty="0"/>
               <a:t>Функция потока может принимать аргументы</a:t>
-            </a:r>
-          </a:p>
-          <a:p>
-            <a:r>
-              <a:rPr lang="ru-RU" dirty="0"/>
-              <a:t>Это аргументы передаются в функцию через параметры конструктора потока</a:t>
             </a:r>
           </a:p>
           <a:p>
@@ -14450,35 +14172,113 @@
           <a:p>
             <a:r>
               <a:rPr lang="ru-RU" dirty="0"/>
-              <a:t>По умолчанию аргументы передаются по значению и сохраняются внутри объекта </a:t>
+              <a:t>При создании потока происходит:</a:t>
+            </a:r>
+          </a:p>
+          <a:p>
+            <a:pPr marL="914400" lvl="1" indent="-457200">
+              <a:buFont typeface="+mj-lt"/>
+              <a:buAutoNum type="arabicPeriod"/>
+            </a:pPr>
+            <a:r>
+              <a:rPr lang="ru-RU" dirty="0"/>
+              <a:t>Копирование или перемещение f и </a:t>
+            </a:r>
+            <a:r>
+              <a:rPr lang="ru-RU" dirty="0" err="1"/>
+              <a:t>args</a:t>
+            </a:r>
+            <a:r>
+              <a:rPr lang="ru-RU" dirty="0"/>
+              <a:t>...</a:t>
+            </a:r>
+          </a:p>
+          <a:p>
+            <a:pPr marL="914400" lvl="1" indent="-457200">
+              <a:buFont typeface="+mj-lt"/>
+              <a:buAutoNum type="arabicPeriod"/>
+            </a:pPr>
+            <a:r>
+              <a:rPr lang="ru-RU" dirty="0"/>
+              <a:t>Сохранение их </a:t>
+            </a:r>
+            <a:r>
+              <a:rPr lang="ru-RU" b="1" dirty="0"/>
+              <a:t>внутри объекта </a:t>
+            </a:r>
+            <a:r>
+              <a:rPr lang="ru-RU" b="1" dirty="0" err="1"/>
+              <a:t>thread</a:t>
+            </a:r>
+            <a:endParaRPr lang="ru-RU" dirty="0"/>
+          </a:p>
+          <a:p>
+            <a:pPr marL="914400" lvl="1" indent="-457200">
+              <a:buFont typeface="+mj-lt"/>
+              <a:buAutoNum type="arabicPeriod"/>
+            </a:pPr>
+            <a:r>
+              <a:rPr lang="ru-RU" dirty="0"/>
+              <a:t>Позже — запуск нового потока и вызов: </a:t>
             </a:r>
             <a:r>
               <a:rPr lang="en-US" dirty="0"/>
-              <a:t>(j)thread</a:t>
+              <a:t>std::invoke(f, </a:t>
+            </a:r>
+            <a:r>
+              <a:rPr lang="en-US" dirty="0" err="1"/>
+              <a:t>args</a:t>
+            </a:r>
+            <a:r>
+              <a:rPr lang="en-US" dirty="0"/>
+              <a:t>...)</a:t>
             </a:r>
             <a:endParaRPr lang="ru-RU" dirty="0"/>
           </a:p>
           <a:p>
             <a:r>
               <a:rPr lang="ru-RU" dirty="0"/>
-              <a:t>Функция потока вызывается с этими аргументами</a:t>
+              <a:t>По умолчанию</a:t>
+            </a:r>
+            <a:r>
+              <a:rPr lang="en-US" dirty="0"/>
+              <a:t>:</a:t>
+            </a:r>
+            <a:endParaRPr lang="ru-RU" dirty="0"/>
+          </a:p>
+          <a:p>
+            <a:pPr lvl="1"/>
+            <a:r>
+              <a:rPr lang="ru-RU" dirty="0"/>
+              <a:t>Аргументы передаются </a:t>
+            </a:r>
+            <a:r>
+              <a:rPr lang="ru-RU" b="1" dirty="0"/>
+              <a:t>по значению</a:t>
+            </a:r>
+          </a:p>
+          <a:p>
+            <a:pPr lvl="1"/>
+            <a:r>
+              <a:rPr lang="ru-RU" dirty="0"/>
+              <a:t>Ссылки нужно передавать через </a:t>
+            </a:r>
+            <a:r>
+              <a:rPr lang="en-US" dirty="0"/>
+              <a:t>std::ref / std::</a:t>
+            </a:r>
+            <a:r>
+              <a:rPr lang="en-US" dirty="0" err="1"/>
+              <a:t>cref</a:t>
             </a:r>
             <a:endParaRPr lang="en-US" dirty="0"/>
           </a:p>
           <a:p>
+            <a:pPr lvl="1"/>
             <a:r>
               <a:rPr lang="ru-RU" dirty="0"/>
-              <a:t>Чтобы передать параметр по ссылке, нужно обернуть его в </a:t>
-            </a:r>
-            <a:r>
-              <a:rPr lang="en-US" dirty="0"/>
-              <a:t>std::</a:t>
-            </a:r>
-            <a:r>
-              <a:rPr lang="en-US" dirty="0" err="1"/>
-              <a:t>reference_wrapper</a:t>
-            </a:r>
-            <a:endParaRPr lang="en-US" dirty="0"/>
+              <a:t>Важно учитывать время жизни объектов</a:t>
+            </a:r>
           </a:p>
         </p:txBody>
       </p:sp>
@@ -14555,33 +14355,15 @@
                                   </p:childTnLst>
                                 </p:cTn>
                               </p:par>
-                            </p:childTnLst>
-                          </p:cTn>
-                        </p:par>
-                      </p:childTnLst>
-                    </p:cTn>
-                  </p:par>
-                  <p:par>
-                    <p:cTn id="8" fill="hold">
-                      <p:stCondLst>
-                        <p:cond delay="indefinite"/>
-                      </p:stCondLst>
-                      <p:childTnLst>
-                        <p:par>
-                          <p:cTn id="9" fill="hold">
-                            <p:stCondLst>
-                              <p:cond delay="0"/>
-                            </p:stCondLst>
-                            <p:childTnLst>
                               <p:par>
-                                <p:cTn id="10" presetID="10" presetClass="entr" presetSubtype="0" fill="hold" grpId="0" nodeType="clickEffect">
+                                <p:cTn id="8" presetID="10" presetClass="entr" presetSubtype="0" fill="hold" grpId="0" nodeType="withEffect">
                                   <p:stCondLst>
                                     <p:cond delay="0"/>
                                   </p:stCondLst>
                                   <p:childTnLst>
                                     <p:set>
                                       <p:cBhvr>
-                                        <p:cTn id="11" dur="1" fill="hold">
+                                        <p:cTn id="9" dur="1" fill="hold">
                                           <p:stCondLst>
                                             <p:cond delay="0"/>
                                           </p:stCondLst>
@@ -14603,7 +14385,7 @@
                                     </p:set>
                                     <p:animEffect transition="in" filter="fade">
                                       <p:cBhvr>
-                                        <p:cTn id="12" dur="500"/>
+                                        <p:cTn id="10" dur="500"/>
                                         <p:tgtEl>
                                           <p:spTgt spid="3">
                                             <p:txEl>
@@ -14617,14 +14399,14 @@
                                 </p:cTn>
                               </p:par>
                               <p:par>
-                                <p:cTn id="13" presetID="10" presetClass="entr" presetSubtype="0" fill="hold" grpId="0" nodeType="withEffect">
+                                <p:cTn id="11" presetID="10" presetClass="entr" presetSubtype="0" fill="hold" grpId="0" nodeType="withEffect">
                                   <p:stCondLst>
                                     <p:cond delay="0"/>
                                   </p:stCondLst>
                                   <p:childTnLst>
                                     <p:set>
                                       <p:cBhvr>
-                                        <p:cTn id="14" dur="1" fill="hold">
+                                        <p:cTn id="12" dur="1" fill="hold">
                                           <p:stCondLst>
                                             <p:cond delay="0"/>
                                           </p:stCondLst>
@@ -14646,7 +14428,7 @@
                                     </p:set>
                                     <p:animEffect transition="in" filter="fade">
                                       <p:cBhvr>
-                                        <p:cTn id="15" dur="500"/>
+                                        <p:cTn id="13" dur="500"/>
                                         <p:tgtEl>
                                           <p:spTgt spid="3">
                                             <p:txEl>
@@ -14659,8 +14441,26 @@
                                   </p:childTnLst>
                                 </p:cTn>
                               </p:par>
+                            </p:childTnLst>
+                          </p:cTn>
+                        </p:par>
+                      </p:childTnLst>
+                    </p:cTn>
+                  </p:par>
+                  <p:par>
+                    <p:cTn id="14" fill="hold">
+                      <p:stCondLst>
+                        <p:cond delay="indefinite"/>
+                      </p:stCondLst>
+                      <p:childTnLst>
+                        <p:par>
+                          <p:cTn id="15" fill="hold">
+                            <p:stCondLst>
+                              <p:cond delay="0"/>
+                            </p:stCondLst>
+                            <p:childTnLst>
                               <p:par>
-                                <p:cTn id="16" presetID="10" presetClass="entr" presetSubtype="0" fill="hold" grpId="0" nodeType="withEffect">
+                                <p:cTn id="16" presetID="10" presetClass="entr" presetSubtype="0" fill="hold" grpId="0" nodeType="clickEffect">
                                   <p:stCondLst>
                                     <p:cond delay="0"/>
                                   </p:stCondLst>
@@ -14702,33 +14502,15 @@
                                   </p:childTnLst>
                                 </p:cTn>
                               </p:par>
-                            </p:childTnLst>
-                          </p:cTn>
-                        </p:par>
-                      </p:childTnLst>
-                    </p:cTn>
-                  </p:par>
-                  <p:par>
-                    <p:cTn id="19" fill="hold">
-                      <p:stCondLst>
-                        <p:cond delay="indefinite"/>
-                      </p:stCondLst>
-                      <p:childTnLst>
-                        <p:par>
-                          <p:cTn id="20" fill="hold">
-                            <p:stCondLst>
-                              <p:cond delay="0"/>
-                            </p:stCondLst>
-                            <p:childTnLst>
                               <p:par>
-                                <p:cTn id="21" presetID="10" presetClass="entr" presetSubtype="0" fill="hold" grpId="0" nodeType="clickEffect">
+                                <p:cTn id="19" presetID="10" presetClass="entr" presetSubtype="0" fill="hold" grpId="0" nodeType="withEffect">
                                   <p:stCondLst>
                                     <p:cond delay="0"/>
                                   </p:stCondLst>
                                   <p:childTnLst>
                                     <p:set>
                                       <p:cBhvr>
-                                        <p:cTn id="22" dur="1" fill="hold">
+                                        <p:cTn id="20" dur="1" fill="hold">
                                           <p:stCondLst>
                                             <p:cond delay="0"/>
                                           </p:stCondLst>
@@ -14750,7 +14532,7 @@
                                     </p:set>
                                     <p:animEffect transition="in" filter="fade">
                                       <p:cBhvr>
-                                        <p:cTn id="23" dur="500"/>
+                                        <p:cTn id="21" dur="500"/>
                                         <p:tgtEl>
                                           <p:spTgt spid="3">
                                             <p:txEl>
@@ -14763,33 +14545,15 @@
                                   </p:childTnLst>
                                 </p:cTn>
                               </p:par>
-                            </p:childTnLst>
-                          </p:cTn>
-                        </p:par>
-                      </p:childTnLst>
-                    </p:cTn>
-                  </p:par>
-                  <p:par>
-                    <p:cTn id="24" fill="hold">
-                      <p:stCondLst>
-                        <p:cond delay="indefinite"/>
-                      </p:stCondLst>
-                      <p:childTnLst>
-                        <p:par>
-                          <p:cTn id="25" fill="hold">
-                            <p:stCondLst>
-                              <p:cond delay="0"/>
-                            </p:stCondLst>
-                            <p:childTnLst>
                               <p:par>
-                                <p:cTn id="26" presetID="10" presetClass="entr" presetSubtype="0" fill="hold" grpId="0" nodeType="clickEffect">
+                                <p:cTn id="22" presetID="10" presetClass="entr" presetSubtype="0" fill="hold" grpId="0" nodeType="withEffect">
                                   <p:stCondLst>
                                     <p:cond delay="0"/>
                                   </p:stCondLst>
                                   <p:childTnLst>
                                     <p:set>
                                       <p:cBhvr>
-                                        <p:cTn id="27" dur="1" fill="hold">
+                                        <p:cTn id="23" dur="1" fill="hold">
                                           <p:stCondLst>
                                             <p:cond delay="0"/>
                                           </p:stCondLst>
@@ -14811,7 +14575,7 @@
                                     </p:set>
                                     <p:animEffect transition="in" filter="fade">
                                       <p:cBhvr>
-                                        <p:cTn id="28" dur="500"/>
+                                        <p:cTn id="24" dur="500"/>
                                         <p:tgtEl>
                                           <p:spTgt spid="3">
                                             <p:txEl>
@@ -14824,33 +14588,15 @@
                                   </p:childTnLst>
                                 </p:cTn>
                               </p:par>
-                            </p:childTnLst>
-                          </p:cTn>
-                        </p:par>
-                      </p:childTnLst>
-                    </p:cTn>
-                  </p:par>
-                  <p:par>
-                    <p:cTn id="29" fill="hold">
-                      <p:stCondLst>
-                        <p:cond delay="indefinite"/>
-                      </p:stCondLst>
-                      <p:childTnLst>
-                        <p:par>
-                          <p:cTn id="30" fill="hold">
-                            <p:stCondLst>
-                              <p:cond delay="0"/>
-                            </p:stCondLst>
-                            <p:childTnLst>
                               <p:par>
-                                <p:cTn id="31" presetID="10" presetClass="entr" presetSubtype="0" fill="hold" grpId="0" nodeType="clickEffect">
+                                <p:cTn id="25" presetID="10" presetClass="entr" presetSubtype="0" fill="hold" grpId="0" nodeType="withEffect">
                                   <p:stCondLst>
                                     <p:cond delay="0"/>
                                   </p:stCondLst>
                                   <p:childTnLst>
                                     <p:set>
                                       <p:cBhvr>
-                                        <p:cTn id="32" dur="1" fill="hold">
+                                        <p:cTn id="26" dur="1" fill="hold">
                                           <p:stCondLst>
                                             <p:cond delay="0"/>
                                           </p:stCondLst>
@@ -14872,11 +14618,201 @@
                                     </p:set>
                                     <p:animEffect transition="in" filter="fade">
                                       <p:cBhvr>
-                                        <p:cTn id="33" dur="500"/>
+                                        <p:cTn id="27" dur="500"/>
                                         <p:tgtEl>
                                           <p:spTgt spid="3">
                                             <p:txEl>
                                               <p:pRg st="6" end="6"/>
+                                            </p:txEl>
+                                          </p:spTgt>
+                                        </p:tgtEl>
+                                      </p:cBhvr>
+                                    </p:animEffect>
+                                  </p:childTnLst>
+                                </p:cTn>
+                              </p:par>
+                            </p:childTnLst>
+                          </p:cTn>
+                        </p:par>
+                      </p:childTnLst>
+                    </p:cTn>
+                  </p:par>
+                  <p:par>
+                    <p:cTn id="28" fill="hold">
+                      <p:stCondLst>
+                        <p:cond delay="indefinite"/>
+                      </p:stCondLst>
+                      <p:childTnLst>
+                        <p:par>
+                          <p:cTn id="29" fill="hold">
+                            <p:stCondLst>
+                              <p:cond delay="0"/>
+                            </p:stCondLst>
+                            <p:childTnLst>
+                              <p:par>
+                                <p:cTn id="30" presetID="10" presetClass="entr" presetSubtype="0" fill="hold" grpId="0" nodeType="clickEffect">
+                                  <p:stCondLst>
+                                    <p:cond delay="0"/>
+                                  </p:stCondLst>
+                                  <p:childTnLst>
+                                    <p:set>
+                                      <p:cBhvr>
+                                        <p:cTn id="31" dur="1" fill="hold">
+                                          <p:stCondLst>
+                                            <p:cond delay="0"/>
+                                          </p:stCondLst>
+                                        </p:cTn>
+                                        <p:tgtEl>
+                                          <p:spTgt spid="3">
+                                            <p:txEl>
+                                              <p:pRg st="7" end="7"/>
+                                            </p:txEl>
+                                          </p:spTgt>
+                                        </p:tgtEl>
+                                        <p:attrNameLst>
+                                          <p:attrName>style.visibility</p:attrName>
+                                        </p:attrNameLst>
+                                      </p:cBhvr>
+                                      <p:to>
+                                        <p:strVal val="visible"/>
+                                      </p:to>
+                                    </p:set>
+                                    <p:animEffect transition="in" filter="fade">
+                                      <p:cBhvr>
+                                        <p:cTn id="32" dur="500"/>
+                                        <p:tgtEl>
+                                          <p:spTgt spid="3">
+                                            <p:txEl>
+                                              <p:pRg st="7" end="7"/>
+                                            </p:txEl>
+                                          </p:spTgt>
+                                        </p:tgtEl>
+                                      </p:cBhvr>
+                                    </p:animEffect>
+                                  </p:childTnLst>
+                                </p:cTn>
+                              </p:par>
+                              <p:par>
+                                <p:cTn id="33" presetID="10" presetClass="entr" presetSubtype="0" fill="hold" grpId="0" nodeType="withEffect">
+                                  <p:stCondLst>
+                                    <p:cond delay="0"/>
+                                  </p:stCondLst>
+                                  <p:childTnLst>
+                                    <p:set>
+                                      <p:cBhvr>
+                                        <p:cTn id="34" dur="1" fill="hold">
+                                          <p:stCondLst>
+                                            <p:cond delay="0"/>
+                                          </p:stCondLst>
+                                        </p:cTn>
+                                        <p:tgtEl>
+                                          <p:spTgt spid="3">
+                                            <p:txEl>
+                                              <p:pRg st="8" end="8"/>
+                                            </p:txEl>
+                                          </p:spTgt>
+                                        </p:tgtEl>
+                                        <p:attrNameLst>
+                                          <p:attrName>style.visibility</p:attrName>
+                                        </p:attrNameLst>
+                                      </p:cBhvr>
+                                      <p:to>
+                                        <p:strVal val="visible"/>
+                                      </p:to>
+                                    </p:set>
+                                    <p:animEffect transition="in" filter="fade">
+                                      <p:cBhvr>
+                                        <p:cTn id="35" dur="500"/>
+                                        <p:tgtEl>
+                                          <p:spTgt spid="3">
+                                            <p:txEl>
+                                              <p:pRg st="8" end="8"/>
+                                            </p:txEl>
+                                          </p:spTgt>
+                                        </p:tgtEl>
+                                      </p:cBhvr>
+                                    </p:animEffect>
+                                  </p:childTnLst>
+                                </p:cTn>
+                              </p:par>
+                              <p:par>
+                                <p:cTn id="36" presetID="10" presetClass="entr" presetSubtype="0" fill="hold" grpId="0" nodeType="withEffect">
+                                  <p:stCondLst>
+                                    <p:cond delay="0"/>
+                                  </p:stCondLst>
+                                  <p:childTnLst>
+                                    <p:set>
+                                      <p:cBhvr>
+                                        <p:cTn id="37" dur="1" fill="hold">
+                                          <p:stCondLst>
+                                            <p:cond delay="0"/>
+                                          </p:stCondLst>
+                                        </p:cTn>
+                                        <p:tgtEl>
+                                          <p:spTgt spid="3">
+                                            <p:txEl>
+                                              <p:pRg st="9" end="9"/>
+                                            </p:txEl>
+                                          </p:spTgt>
+                                        </p:tgtEl>
+                                        <p:attrNameLst>
+                                          <p:attrName>style.visibility</p:attrName>
+                                        </p:attrNameLst>
+                                      </p:cBhvr>
+                                      <p:to>
+                                        <p:strVal val="visible"/>
+                                      </p:to>
+                                    </p:set>
+                                    <p:animEffect transition="in" filter="fade">
+                                      <p:cBhvr>
+                                        <p:cTn id="38" dur="500"/>
+                                        <p:tgtEl>
+                                          <p:spTgt spid="3">
+                                            <p:txEl>
+                                              <p:pRg st="9" end="9"/>
+                                            </p:txEl>
+                                          </p:spTgt>
+                                        </p:tgtEl>
+                                      </p:cBhvr>
+                                    </p:animEffect>
+                                  </p:childTnLst>
+                                </p:cTn>
+                              </p:par>
+                              <p:par>
+                                <p:cTn id="39" presetID="10" presetClass="entr" presetSubtype="0" fill="hold" grpId="0" nodeType="withEffect">
+                                  <p:stCondLst>
+                                    <p:cond delay="0"/>
+                                  </p:stCondLst>
+                                  <p:childTnLst>
+                                    <p:set>
+                                      <p:cBhvr>
+                                        <p:cTn id="40" dur="1" fill="hold">
+                                          <p:stCondLst>
+                                            <p:cond delay="0"/>
+                                          </p:stCondLst>
+                                        </p:cTn>
+                                        <p:tgtEl>
+                                          <p:spTgt spid="3">
+                                            <p:txEl>
+                                              <p:pRg st="10" end="10"/>
+                                            </p:txEl>
+                                          </p:spTgt>
+                                        </p:tgtEl>
+                                        <p:attrNameLst>
+                                          <p:attrName>style.visibility</p:attrName>
+                                        </p:attrNameLst>
+                                      </p:cBhvr>
+                                      <p:to>
+                                        <p:strVal val="visible"/>
+                                      </p:to>
+                                    </p:set>
+                                    <p:animEffect transition="in" filter="fade">
+                                      <p:cBhvr>
+                                        <p:cTn id="41" dur="500"/>
+                                        <p:tgtEl>
+                                          <p:spTgt spid="3">
+                                            <p:txEl>
+                                              <p:pRg st="10" end="10"/>
                                             </p:txEl>
                                           </p:spTgt>
                                         </p:tgtEl>
@@ -14919,7 +14855,7 @@
 </p:sld>
 </file>
 
-<file path=ppt/slides/slide18.xml><?xml version="1.0" encoding="utf-8"?>
+<file path=ppt/slides/slide16.xml><?xml version="1.0" encoding="utf-8"?>
 <p:sld xmlns:a="http://schemas.openxmlformats.org/drawingml/2006/main" xmlns:r="http://schemas.openxmlformats.org/officeDocument/2006/relationships" xmlns:p="http://schemas.openxmlformats.org/presentationml/2006/main">
   <p:cSld>
     <p:spTree>
@@ -15693,7 +15629,7 @@
 </p:sld>
 </file>
 
-<file path=ppt/slides/slide19.xml><?xml version="1.0" encoding="utf-8"?>
+<file path=ppt/slides/slide17.xml><?xml version="1.0" encoding="utf-8"?>
 <p:sld xmlns:a="http://schemas.openxmlformats.org/drawingml/2006/main" xmlns:r="http://schemas.openxmlformats.org/officeDocument/2006/relationships" xmlns:p="http://schemas.openxmlformats.org/presentationml/2006/main">
   <p:cSld>
     <p:spTree>
@@ -16780,112 +16716,7 @@
 </p:sld>
 </file>
 
-<file path=ppt/slides/slide2.xml><?xml version="1.0" encoding="utf-8"?>
-<p:sld xmlns:a="http://schemas.openxmlformats.org/drawingml/2006/main" xmlns:r="http://schemas.openxmlformats.org/officeDocument/2006/relationships" xmlns:p="http://schemas.openxmlformats.org/presentationml/2006/main">
-  <p:cSld>
-    <p:spTree>
-      <p:nvGrpSpPr>
-        <p:cNvPr id="1" name=""/>
-        <p:cNvGrpSpPr/>
-        <p:nvPr/>
-      </p:nvGrpSpPr>
-      <p:grpSpPr>
-        <a:xfrm>
-          <a:off x="0" y="0"/>
-          <a:ext cx="0" cy="0"/>
-          <a:chOff x="0" y="0"/>
-          <a:chExt cx="0" cy="0"/>
-        </a:xfrm>
-      </p:grpSpPr>
-      <p:sp>
-        <p:nvSpPr>
-          <p:cNvPr id="2" name="Title 1">
-            <a:extLst>
-              <a:ext uri="{FF2B5EF4-FFF2-40B4-BE49-F238E27FC236}">
-                <a16:creationId xmlns:a16="http://schemas.microsoft.com/office/drawing/2014/main" id="{2D095DF1-35FA-251D-A352-AEC50BF4D3F3}"/>
-              </a:ext>
-            </a:extLst>
-          </p:cNvPr>
-          <p:cNvSpPr>
-            <a:spLocks noGrp="1"/>
-          </p:cNvSpPr>
-          <p:nvPr>
-            <p:ph type="title"/>
-          </p:nvPr>
-        </p:nvSpPr>
-        <p:spPr/>
-        <p:txBody>
-          <a:bodyPr/>
-          <a:lstStyle/>
-          <a:p>
-            <a:r>
-              <a:rPr lang="ru-RU" dirty="0"/>
-              <a:t>Запуск потока в программе</a:t>
-            </a:r>
-            <a:endParaRPr lang="en-US" dirty="0"/>
-          </a:p>
-        </p:txBody>
-      </p:sp>
-      <p:sp>
-        <p:nvSpPr>
-          <p:cNvPr id="3" name="Content Placeholder 2">
-            <a:extLst>
-              <a:ext uri="{FF2B5EF4-FFF2-40B4-BE49-F238E27FC236}">
-                <a16:creationId xmlns:a16="http://schemas.microsoft.com/office/drawing/2014/main" id="{7340A856-8506-DAF9-F13E-141EBB2B2948}"/>
-              </a:ext>
-            </a:extLst>
-          </p:cNvPr>
-          <p:cNvSpPr>
-            <a:spLocks noGrp="1"/>
-          </p:cNvSpPr>
-          <p:nvPr>
-            <p:ph idx="1"/>
-          </p:nvPr>
-        </p:nvSpPr>
-        <p:spPr/>
-        <p:txBody>
-          <a:bodyPr/>
-          <a:lstStyle/>
-          <a:p>
-            <a:r>
-              <a:rPr lang="ru-RU" dirty="0"/>
-              <a:t>При запуске программы автоматически создаётся один поток, выполняющий функцию </a:t>
-            </a:r>
-            <a:r>
-              <a:rPr lang="ru-RU" dirty="0" err="1"/>
-              <a:t>main</a:t>
-            </a:r>
-            <a:endParaRPr lang="ru-RU" dirty="0"/>
-          </a:p>
-          <a:p>
-            <a:r>
-              <a:rPr lang="ru-RU" dirty="0"/>
-              <a:t>Но как создать дополнительный поток?</a:t>
-            </a:r>
-          </a:p>
-          <a:p>
-            <a:r>
-              <a:rPr lang="ru-RU" dirty="0"/>
-              <a:t>Создание потока требует привилегированных инструкций – обращаемся к ОС</a:t>
-            </a:r>
-            <a:endParaRPr lang="en-US" dirty="0"/>
-          </a:p>
-        </p:txBody>
-      </p:sp>
-    </p:spTree>
-    <p:extLst>
-      <p:ext uri="{BB962C8B-B14F-4D97-AF65-F5344CB8AC3E}">
-        <p14:creationId xmlns:p14="http://schemas.microsoft.com/office/powerpoint/2010/main" val="3976885435"/>
-      </p:ext>
-    </p:extLst>
-  </p:cSld>
-  <p:clrMapOvr>
-    <a:masterClrMapping/>
-  </p:clrMapOvr>
-</p:sld>
-</file>
-
-<file path=ppt/slides/slide20.xml><?xml version="1.0" encoding="utf-8"?>
+<file path=ppt/slides/slide18.xml><?xml version="1.0" encoding="utf-8"?>
 <p:sld xmlns:a="http://schemas.openxmlformats.org/drawingml/2006/main" xmlns:r="http://schemas.openxmlformats.org/officeDocument/2006/relationships" xmlns:p="http://schemas.openxmlformats.org/presentationml/2006/main">
   <p:cSld>
     <p:spTree>
@@ -18646,7 +18477,7 @@
 </p:sld>
 </file>
 
-<file path=ppt/slides/slide21.xml><?xml version="1.0" encoding="utf-8"?>
+<file path=ppt/slides/slide19.xml><?xml version="1.0" encoding="utf-8"?>
 <p:sld xmlns:a="http://schemas.openxmlformats.org/drawingml/2006/main" xmlns:r="http://schemas.openxmlformats.org/officeDocument/2006/relationships" xmlns:p="http://schemas.openxmlformats.org/presentationml/2006/main">
   <p:cSld>
     <p:spTree>
@@ -20442,7 +20273,188 @@
 </p:sld>
 </file>
 
-<file path=ppt/slides/slide22.xml><?xml version="1.0" encoding="utf-8"?>
+<file path=ppt/slides/slide2.xml><?xml version="1.0" encoding="utf-8"?>
+<p:sld xmlns:a="http://schemas.openxmlformats.org/drawingml/2006/main" xmlns:r="http://schemas.openxmlformats.org/officeDocument/2006/relationships" xmlns:p="http://schemas.openxmlformats.org/presentationml/2006/main">
+  <p:cSld>
+    <p:spTree>
+      <p:nvGrpSpPr>
+        <p:cNvPr id="1" name=""/>
+        <p:cNvGrpSpPr/>
+        <p:nvPr/>
+      </p:nvGrpSpPr>
+      <p:grpSpPr>
+        <a:xfrm>
+          <a:off x="0" y="0"/>
+          <a:ext cx="0" cy="0"/>
+          <a:chOff x="0" y="0"/>
+          <a:chExt cx="0" cy="0"/>
+        </a:xfrm>
+      </p:grpSpPr>
+      <p:sp>
+        <p:nvSpPr>
+          <p:cNvPr id="2" name="Title 1">
+            <a:extLst>
+              <a:ext uri="{FF2B5EF4-FFF2-40B4-BE49-F238E27FC236}">
+                <a16:creationId xmlns:a16="http://schemas.microsoft.com/office/drawing/2014/main" id="{24A104B3-D2FF-C58D-6B36-DD4F2F3BD49D}"/>
+              </a:ext>
+            </a:extLst>
+          </p:cNvPr>
+          <p:cNvSpPr>
+            <a:spLocks noGrp="1"/>
+          </p:cNvSpPr>
+          <p:nvPr>
+            <p:ph type="title"/>
+          </p:nvPr>
+        </p:nvSpPr>
+        <p:spPr/>
+        <p:txBody>
+          <a:bodyPr>
+            <a:normAutofit/>
+          </a:bodyPr>
+          <a:lstStyle/>
+          <a:p>
+            <a:r>
+              <a:rPr lang="ru-RU" dirty="0"/>
+              <a:t>От конкурентной модели к потокам C++</a:t>
+            </a:r>
+            <a:endParaRPr lang="en-US" dirty="0"/>
+          </a:p>
+        </p:txBody>
+      </p:sp>
+      <p:sp>
+        <p:nvSpPr>
+          <p:cNvPr id="3" name="Content Placeholder 2">
+            <a:extLst>
+              <a:ext uri="{FF2B5EF4-FFF2-40B4-BE49-F238E27FC236}">
+                <a16:creationId xmlns:a16="http://schemas.microsoft.com/office/drawing/2014/main" id="{A4C3962B-C634-326A-CFC4-B3DDA5EB1A2B}"/>
+              </a:ext>
+            </a:extLst>
+          </p:cNvPr>
+          <p:cNvSpPr>
+            <a:spLocks noGrp="1"/>
+          </p:cNvSpPr>
+          <p:nvPr>
+            <p:ph idx="1"/>
+          </p:nvPr>
+        </p:nvSpPr>
+        <p:spPr/>
+        <p:txBody>
+          <a:bodyPr>
+            <a:normAutofit/>
+          </a:bodyPr>
+          <a:lstStyle/>
+          <a:p>
+            <a:r>
+              <a:rPr lang="ru-RU" dirty="0"/>
+              <a:t>В прошлой лекции:</a:t>
+            </a:r>
+          </a:p>
+          <a:p>
+            <a:pPr lvl="1"/>
+            <a:r>
+              <a:rPr lang="ru-RU" dirty="0"/>
+              <a:t>мы разделили конкурентность и параллелизм</a:t>
+            </a:r>
+          </a:p>
+          <a:p>
+            <a:pPr lvl="1"/>
+            <a:r>
+              <a:rPr lang="ru-RU" dirty="0"/>
+              <a:t>обсудили модель общей памяти (</a:t>
+            </a:r>
+            <a:r>
+              <a:rPr lang="en-US" dirty="0"/>
+              <a:t>shared memory)</a:t>
+            </a:r>
+            <a:endParaRPr lang="ru-RU" dirty="0"/>
+          </a:p>
+          <a:p>
+            <a:pPr lvl="1"/>
+            <a:r>
+              <a:rPr lang="ru-RU" dirty="0"/>
+              <a:t>показали, что масштабирование ограничено законом Амдала</a:t>
+            </a:r>
+          </a:p>
+          <a:p>
+            <a:r>
+              <a:rPr lang="ru-RU" dirty="0"/>
+              <a:t>Сегодня:</a:t>
+            </a:r>
+          </a:p>
+          <a:p>
+            <a:pPr lvl="1"/>
+            <a:r>
+              <a:rPr lang="ru-RU" dirty="0"/>
+              <a:t>переходим к инструменту конкурентности в C++</a:t>
+            </a:r>
+          </a:p>
+          <a:p>
+            <a:pPr lvl="1"/>
+            <a:r>
+              <a:rPr lang="ru-RU" dirty="0"/>
+              <a:t>изучаем потоки как механизм реализации </a:t>
+            </a:r>
+            <a:r>
+              <a:rPr lang="ru-RU" dirty="0" err="1"/>
+              <a:t>shared-memory</a:t>
+            </a:r>
+            <a:r>
+              <a:rPr lang="ru-RU" dirty="0"/>
+              <a:t> </a:t>
+            </a:r>
+            <a:r>
+              <a:rPr lang="ru-RU" dirty="0" err="1"/>
+              <a:t>concurrency</a:t>
+            </a:r>
+            <a:endParaRPr lang="ru-RU" dirty="0"/>
+          </a:p>
+          <a:p>
+            <a:pPr lvl="1"/>
+            <a:r>
+              <a:rPr lang="ru-RU" dirty="0"/>
+              <a:t>начинаем работать с реальными рисками: </a:t>
+            </a:r>
+            <a:r>
+              <a:rPr lang="ru-RU" dirty="0" err="1"/>
+              <a:t>lifetime</a:t>
+            </a:r>
+            <a:r>
+              <a:rPr lang="ru-RU" dirty="0"/>
+              <a:t>, UB, </a:t>
+            </a:r>
+            <a:r>
+              <a:rPr lang="ru-RU" dirty="0" err="1"/>
+              <a:t>race</a:t>
+            </a:r>
+            <a:r>
+              <a:rPr lang="ru-RU" dirty="0"/>
+              <a:t> </a:t>
+            </a:r>
+            <a:r>
+              <a:rPr lang="ru-RU" dirty="0" err="1"/>
+              <a:t>conditions</a:t>
+            </a:r>
+            <a:endParaRPr lang="ru-RU" dirty="0"/>
+          </a:p>
+          <a:p>
+            <a:endParaRPr lang="en-US" dirty="0"/>
+          </a:p>
+        </p:txBody>
+      </p:sp>
+    </p:spTree>
+    <p:extLst>
+      <p:ext uri="{BB962C8B-B14F-4D97-AF65-F5344CB8AC3E}">
+        <p14:creationId xmlns:p14="http://schemas.microsoft.com/office/powerpoint/2010/main" val="2447721925"/>
+      </p:ext>
+    </p:extLst>
+  </p:cSld>
+  <p:clrMapOvr>
+    <a:masterClrMapping/>
+  </p:clrMapOvr>
+</p:sld>
+</file>
+
+<file path=ppt/slides/slide20.xml><?xml version="1.0" encoding="utf-8"?>
 <p:sld xmlns:a="http://schemas.openxmlformats.org/drawingml/2006/main" xmlns:r="http://schemas.openxmlformats.org/officeDocument/2006/relationships" xmlns:p="http://schemas.openxmlformats.org/presentationml/2006/main">
   <p:cSld>
     <p:spTree>
@@ -20580,7 +20592,7 @@
 </p:sld>
 </file>
 
-<file path=ppt/slides/slide23.xml><?xml version="1.0" encoding="utf-8"?>
+<file path=ppt/slides/slide21.xml><?xml version="1.0" encoding="utf-8"?>
 <p:sld xmlns:a="http://schemas.openxmlformats.org/drawingml/2006/main" xmlns:r="http://schemas.openxmlformats.org/officeDocument/2006/relationships" xmlns:p="http://schemas.openxmlformats.org/presentationml/2006/main">
   <p:cSld>
     <p:spTree>
@@ -21599,7 +21611,7 @@
 </p:sld>
 </file>
 
-<file path=ppt/slides/slide24.xml><?xml version="1.0" encoding="utf-8"?>
+<file path=ppt/slides/slide22.xml><?xml version="1.0" encoding="utf-8"?>
 <p:sld xmlns:a="http://schemas.openxmlformats.org/drawingml/2006/main" xmlns:r="http://schemas.openxmlformats.org/officeDocument/2006/relationships" xmlns:p="http://schemas.openxmlformats.org/presentationml/2006/main">
   <p:cSld>
     <p:spTree>
@@ -22413,7 +22425,7 @@
 </p:sld>
 </file>
 
-<file path=ppt/slides/slide25.xml><?xml version="1.0" encoding="utf-8"?>
+<file path=ppt/slides/slide23.xml><?xml version="1.0" encoding="utf-8"?>
 <p:sld xmlns:a="http://schemas.openxmlformats.org/drawingml/2006/main" xmlns:r="http://schemas.openxmlformats.org/officeDocument/2006/relationships" xmlns:p="http://schemas.openxmlformats.org/presentationml/2006/main">
   <p:cSld>
     <p:spTree>
@@ -22985,7 +22997,45 @@
                 <a:effectLst/>
                 <a:latin typeface="Consolas" panose="020B0609020204030204" pitchFamily="49" charset="0"/>
               </a:rPr>
-              <a:t>    // указатель на него будет останется в момент создания строки.</a:t>
+              <a:t>    // указатель на него </a:t>
+            </a:r>
+            <a:r>
+              <a:rPr lang="ru-RU" dirty="0">
+                <a:solidFill>
+                  <a:srgbClr val="008000"/>
+                </a:solidFill>
+                <a:latin typeface="Consolas" panose="020B0609020204030204" pitchFamily="49" charset="0"/>
+              </a:rPr>
+              <a:t>о</a:t>
+            </a:r>
+            <a:r>
+              <a:rPr lang="ru-RU" b="0" dirty="0">
+                <a:solidFill>
+                  <a:srgbClr val="008000"/>
+                </a:solidFill>
+                <a:effectLst/>
+                <a:latin typeface="Consolas" panose="020B0609020204030204" pitchFamily="49" charset="0"/>
+              </a:rPr>
+              <a:t>станется </a:t>
+            </a:r>
+            <a:r>
+              <a:rPr lang="ru-RU" dirty="0">
+                <a:solidFill>
+                  <a:srgbClr val="008000"/>
+                </a:solidFill>
+                <a:latin typeface="Consolas" panose="020B0609020204030204" pitchFamily="49" charset="0"/>
+              </a:rPr>
+              <a:t>валидным </a:t>
+            </a:r>
+            <a:r>
+              <a:rPr lang="ru-RU" b="0" dirty="0">
+                <a:solidFill>
+                  <a:srgbClr val="008000"/>
+                </a:solidFill>
+                <a:effectLst/>
+                <a:latin typeface="Consolas" panose="020B0609020204030204" pitchFamily="49" charset="0"/>
+              </a:rPr>
+              <a:t>в момент создания строки.</a:t>
             </a:r>
             <a:endParaRPr lang="ru-RU" b="0" dirty="0">
               <a:solidFill>
@@ -23407,7 +23457,7 @@
 </p:sld>
 </file>
 
-<file path=ppt/slides/slide26.xml><?xml version="1.0" encoding="utf-8"?>
+<file path=ppt/slides/slide24.xml><?xml version="1.0" encoding="utf-8"?>
 <p:sld xmlns:a="http://schemas.openxmlformats.org/drawingml/2006/main" xmlns:r="http://schemas.openxmlformats.org/officeDocument/2006/relationships" xmlns:p="http://schemas.openxmlformats.org/presentationml/2006/main">
   <p:cSld>
     <p:spTree>
@@ -23491,7 +23541,7 @@
 </p:sld>
 </file>
 
-<file path=ppt/slides/slide27.xml><?xml version="1.0" encoding="utf-8"?>
+<file path=ppt/slides/slide25.xml><?xml version="1.0" encoding="utf-8"?>
 <p:sld xmlns:a="http://schemas.openxmlformats.org/drawingml/2006/main" xmlns:r="http://schemas.openxmlformats.org/officeDocument/2006/relationships" xmlns:p="http://schemas.openxmlformats.org/presentationml/2006/main">
   <p:cSld>
     <p:spTree>
@@ -23618,7 +23668,7 @@
 </p:sld>
 </file>
 
-<file path=ppt/slides/slide28.xml><?xml version="1.0" encoding="utf-8"?>
+<file path=ppt/slides/slide26.xml><?xml version="1.0" encoding="utf-8"?>
 <p:sld xmlns:a="http://schemas.openxmlformats.org/drawingml/2006/main" xmlns:r="http://schemas.openxmlformats.org/officeDocument/2006/relationships" xmlns:p="http://schemas.openxmlformats.org/presentationml/2006/main">
   <p:cSld>
     <p:spTree>
@@ -25359,7 +25409,7 @@
 </p:sld>
 </file>
 
-<file path=ppt/slides/slide29.xml><?xml version="1.0" encoding="utf-8"?>
+<file path=ppt/slides/slide27.xml><?xml version="1.0" encoding="utf-8"?>
 <p:sld xmlns:a="http://schemas.openxmlformats.org/drawingml/2006/main" xmlns:r="http://schemas.openxmlformats.org/officeDocument/2006/relationships" xmlns:p="http://schemas.openxmlformats.org/presentationml/2006/main">
   <p:cSld>
     <p:spTree>
@@ -25443,504 +25493,7 @@
 </p:sld>
 </file>
 
-<file path=ppt/slides/slide3.xml><?xml version="1.0" encoding="utf-8"?>
-<p:sld xmlns:a="http://schemas.openxmlformats.org/drawingml/2006/main" xmlns:r="http://schemas.openxmlformats.org/officeDocument/2006/relationships" xmlns:p="http://schemas.openxmlformats.org/presentationml/2006/main">
-  <p:cSld>
-    <p:spTree>
-      <p:nvGrpSpPr>
-        <p:cNvPr id="1" name=""/>
-        <p:cNvGrpSpPr/>
-        <p:nvPr/>
-      </p:nvGrpSpPr>
-      <p:grpSpPr>
-        <a:xfrm>
-          <a:off x="0" y="0"/>
-          <a:ext cx="0" cy="0"/>
-          <a:chOff x="0" y="0"/>
-          <a:chExt cx="0" cy="0"/>
-        </a:xfrm>
-      </p:grpSpPr>
-      <p:sp>
-        <p:nvSpPr>
-          <p:cNvPr id="2" name="Title 1">
-            <a:extLst>
-              <a:ext uri="{FF2B5EF4-FFF2-40B4-BE49-F238E27FC236}">
-                <a16:creationId xmlns:a16="http://schemas.microsoft.com/office/drawing/2014/main" id="{8BB540E0-CE43-5519-2839-FEC827CD6A8B}"/>
-              </a:ext>
-            </a:extLst>
-          </p:cNvPr>
-          <p:cNvSpPr>
-            <a:spLocks noGrp="1"/>
-          </p:cNvSpPr>
-          <p:nvPr>
-            <p:ph type="title"/>
-          </p:nvPr>
-        </p:nvSpPr>
-        <p:spPr/>
-        <p:txBody>
-          <a:bodyPr/>
-          <a:lstStyle/>
-          <a:p>
-            <a:r>
-              <a:rPr lang="ru-RU" dirty="0"/>
-              <a:t>Создание потока в </a:t>
-            </a:r>
-            <a:r>
-              <a:rPr lang="en-US" dirty="0"/>
-              <a:t>Linux</a:t>
-            </a:r>
-            <a:r>
-              <a:rPr lang="ru-RU" dirty="0"/>
-              <a:t> – </a:t>
-            </a:r>
-            <a:r>
-              <a:rPr lang="en-US" dirty="0" err="1"/>
-              <a:t>pthread_create</a:t>
-            </a:r>
-            <a:endParaRPr lang="en-US" dirty="0"/>
-          </a:p>
-        </p:txBody>
-      </p:sp>
-      <p:sp>
-        <p:nvSpPr>
-          <p:cNvPr id="3" name="Content Placeholder 2">
-            <a:extLst>
-              <a:ext uri="{FF2B5EF4-FFF2-40B4-BE49-F238E27FC236}">
-                <a16:creationId xmlns:a16="http://schemas.microsoft.com/office/drawing/2014/main" id="{C229549C-16F8-F017-EC12-6A5210F80D36}"/>
-              </a:ext>
-            </a:extLst>
-          </p:cNvPr>
-          <p:cNvSpPr>
-            <a:spLocks noGrp="1"/>
-          </p:cNvSpPr>
-          <p:nvPr>
-            <p:ph idx="1"/>
-          </p:nvPr>
-        </p:nvSpPr>
-        <p:spPr>
-          <a:xfrm>
-            <a:off x="838200" y="2782667"/>
-            <a:ext cx="10515600" cy="3394295"/>
-          </a:xfrm>
-        </p:spPr>
-        <p:txBody>
-          <a:bodyPr/>
-          <a:lstStyle/>
-          <a:p>
-            <a:r>
-              <a:rPr lang="ru-RU" dirty="0"/>
-              <a:t>Аргументы:</a:t>
-            </a:r>
-            <a:endParaRPr lang="en-US" dirty="0"/>
-          </a:p>
-          <a:p>
-            <a:pPr lvl="1"/>
-            <a:r>
-              <a:rPr lang="en-US" dirty="0" err="1"/>
-              <a:t>pthread_t</a:t>
-            </a:r>
-            <a:r>
-              <a:rPr lang="en-US" dirty="0"/>
-              <a:t>* thread — </a:t>
-            </a:r>
-            <a:r>
-              <a:rPr lang="ru-RU" dirty="0"/>
-              <a:t>идентификатор потока.</a:t>
-            </a:r>
-            <a:endParaRPr lang="en-US" dirty="0"/>
-          </a:p>
-          <a:p>
-            <a:pPr lvl="1"/>
-            <a:r>
-              <a:rPr lang="en-US" dirty="0" err="1"/>
-              <a:t>attr</a:t>
-            </a:r>
-            <a:r>
-              <a:rPr lang="en-US" dirty="0"/>
-              <a:t> — </a:t>
-            </a:r>
-            <a:r>
-              <a:rPr lang="ru-RU" dirty="0"/>
-              <a:t>атрибуты (можно </a:t>
-            </a:r>
-            <a:r>
-              <a:rPr lang="en-US" dirty="0" err="1"/>
-              <a:t>nullptr</a:t>
-            </a:r>
-            <a:r>
-              <a:rPr lang="en-US" dirty="0"/>
-              <a:t>).</a:t>
-            </a:r>
-          </a:p>
-          <a:p>
-            <a:pPr lvl="1"/>
-            <a:r>
-              <a:rPr lang="en-US" dirty="0" err="1"/>
-              <a:t>start_routine</a:t>
-            </a:r>
-            <a:r>
-              <a:rPr lang="en-US" dirty="0"/>
-              <a:t> — </a:t>
-            </a:r>
-            <a:r>
-              <a:rPr lang="ru-RU" dirty="0"/>
-              <a:t>функция потока.</a:t>
-            </a:r>
-            <a:endParaRPr lang="en-US" dirty="0"/>
-          </a:p>
-          <a:p>
-            <a:pPr lvl="1"/>
-            <a:r>
-              <a:rPr lang="en-US" dirty="0" err="1"/>
-              <a:t>arg</a:t>
-            </a:r>
-            <a:r>
-              <a:rPr lang="en-US" dirty="0"/>
-              <a:t> — </a:t>
-            </a:r>
-            <a:r>
-              <a:rPr lang="ru-RU" dirty="0"/>
-              <a:t>данные, передаваемые в поток.</a:t>
-            </a:r>
-            <a:endParaRPr lang="en-US" dirty="0"/>
-          </a:p>
-          <a:p>
-            <a:r>
-              <a:rPr lang="ru-RU" dirty="0"/>
-              <a:t>Возвращает код ошибки (0 — успех).</a:t>
-            </a:r>
-            <a:endParaRPr lang="en-US" dirty="0"/>
-          </a:p>
-        </p:txBody>
-      </p:sp>
-      <p:sp>
-        <p:nvSpPr>
-          <p:cNvPr id="7" name="TextBox 6">
-            <a:extLst>
-              <a:ext uri="{FF2B5EF4-FFF2-40B4-BE49-F238E27FC236}">
-                <a16:creationId xmlns:a16="http://schemas.microsoft.com/office/drawing/2014/main" id="{F77FCB09-153C-6411-7AA5-52BBDEBA341C}"/>
-              </a:ext>
-            </a:extLst>
-          </p:cNvPr>
-          <p:cNvSpPr txBox="1"/>
-          <p:nvPr/>
-        </p:nvSpPr>
-        <p:spPr>
-          <a:xfrm>
-            <a:off x="838200" y="1913512"/>
-            <a:ext cx="9937568" cy="646331"/>
-          </a:xfrm>
-          <a:prstGeom prst="rect">
-            <a:avLst/>
-          </a:prstGeom>
-          <a:noFill/>
-        </p:spPr>
-        <p:txBody>
-          <a:bodyPr wrap="square">
-            <a:spAutoFit/>
-          </a:bodyPr>
-          <a:lstStyle/>
-          <a:p>
-            <a:pPr>
-              <a:buNone/>
-            </a:pPr>
-            <a:r>
-              <a:rPr lang="en-US" b="0" dirty="0">
-                <a:solidFill>
-                  <a:srgbClr val="0000FF"/>
-                </a:solidFill>
-                <a:effectLst/>
-                <a:latin typeface="Consolas" panose="020B0609020204030204" pitchFamily="49" charset="0"/>
-              </a:rPr>
-              <a:t>int</a:t>
-            </a:r>
-            <a:r>
-              <a:rPr lang="en-US" b="0" dirty="0">
-                <a:solidFill>
-                  <a:srgbClr val="000000"/>
-                </a:solidFill>
-                <a:effectLst/>
-                <a:latin typeface="Consolas" panose="020B0609020204030204" pitchFamily="49" charset="0"/>
-              </a:rPr>
-              <a:t> </a:t>
-            </a:r>
-            <a:r>
-              <a:rPr lang="en-US" b="0" dirty="0" err="1">
-                <a:solidFill>
-                  <a:srgbClr val="000000"/>
-                </a:solidFill>
-                <a:effectLst/>
-                <a:latin typeface="Consolas" panose="020B0609020204030204" pitchFamily="49" charset="0"/>
-              </a:rPr>
-              <a:t>pthread_create</a:t>
-            </a:r>
-            <a:r>
-              <a:rPr lang="en-US" b="0" dirty="0">
-                <a:solidFill>
-                  <a:srgbClr val="000000"/>
-                </a:solidFill>
-                <a:effectLst/>
-                <a:latin typeface="Consolas" panose="020B0609020204030204" pitchFamily="49" charset="0"/>
-              </a:rPr>
-              <a:t>(</a:t>
-            </a:r>
-            <a:r>
-              <a:rPr lang="en-US" b="0" dirty="0" err="1">
-                <a:solidFill>
-                  <a:srgbClr val="2B91AF"/>
-                </a:solidFill>
-                <a:effectLst/>
-                <a:latin typeface="Consolas" panose="020B0609020204030204" pitchFamily="49" charset="0"/>
-              </a:rPr>
-              <a:t>pthread_t</a:t>
-            </a:r>
-            <a:r>
-              <a:rPr lang="en-US" b="0" dirty="0">
-                <a:solidFill>
-                  <a:srgbClr val="000000"/>
-                </a:solidFill>
-                <a:effectLst/>
-                <a:latin typeface="Consolas" panose="020B0609020204030204" pitchFamily="49" charset="0"/>
-              </a:rPr>
-              <a:t>* </a:t>
-            </a:r>
-            <a:r>
-              <a:rPr lang="en-US" b="0" dirty="0">
-                <a:solidFill>
-                  <a:srgbClr val="808080"/>
-                </a:solidFill>
-                <a:effectLst/>
-                <a:latin typeface="Consolas" panose="020B0609020204030204" pitchFamily="49" charset="0"/>
-              </a:rPr>
-              <a:t>thread</a:t>
-            </a:r>
-            <a:r>
-              <a:rPr lang="en-US" b="0" dirty="0">
-                <a:solidFill>
-                  <a:srgbClr val="000000"/>
-                </a:solidFill>
-                <a:effectLst/>
-                <a:latin typeface="Consolas" panose="020B0609020204030204" pitchFamily="49" charset="0"/>
-              </a:rPr>
-              <a:t>, </a:t>
-            </a:r>
-            <a:r>
-              <a:rPr lang="en-US" b="0" dirty="0">
-                <a:solidFill>
-                  <a:srgbClr val="0000FF"/>
-                </a:solidFill>
-                <a:effectLst/>
-                <a:latin typeface="Consolas" panose="020B0609020204030204" pitchFamily="49" charset="0"/>
-              </a:rPr>
-              <a:t>const</a:t>
-            </a:r>
-            <a:r>
-              <a:rPr lang="en-US" b="0" dirty="0">
-                <a:solidFill>
-                  <a:srgbClr val="000000"/>
-                </a:solidFill>
-                <a:effectLst/>
-                <a:latin typeface="Consolas" panose="020B0609020204030204" pitchFamily="49" charset="0"/>
-              </a:rPr>
-              <a:t> </a:t>
-            </a:r>
-            <a:r>
-              <a:rPr lang="en-US" b="0" dirty="0" err="1">
-                <a:solidFill>
-                  <a:srgbClr val="2B91AF"/>
-                </a:solidFill>
-                <a:effectLst/>
-                <a:latin typeface="Consolas" panose="020B0609020204030204" pitchFamily="49" charset="0"/>
-              </a:rPr>
-              <a:t>pthread_attr_t</a:t>
-            </a:r>
-            <a:r>
-              <a:rPr lang="en-US" b="0" dirty="0">
-                <a:solidFill>
-                  <a:srgbClr val="000000"/>
-                </a:solidFill>
-                <a:effectLst/>
-                <a:latin typeface="Consolas" panose="020B0609020204030204" pitchFamily="49" charset="0"/>
-              </a:rPr>
-              <a:t>* </a:t>
-            </a:r>
-            <a:r>
-              <a:rPr lang="en-US" b="0" dirty="0" err="1">
-                <a:solidFill>
-                  <a:srgbClr val="808080"/>
-                </a:solidFill>
-                <a:effectLst/>
-                <a:latin typeface="Consolas" panose="020B0609020204030204" pitchFamily="49" charset="0"/>
-              </a:rPr>
-              <a:t>attr</a:t>
-            </a:r>
-            <a:r>
-              <a:rPr lang="en-US" b="0" dirty="0">
-                <a:solidFill>
-                  <a:srgbClr val="000000"/>
-                </a:solidFill>
-                <a:effectLst/>
-                <a:latin typeface="Consolas" panose="020B0609020204030204" pitchFamily="49" charset="0"/>
-              </a:rPr>
-              <a:t>,</a:t>
-            </a:r>
-          </a:p>
-          <a:p>
-            <a:pPr>
-              <a:buNone/>
-            </a:pPr>
-            <a:r>
-              <a:rPr lang="en-US" b="0" dirty="0">
-                <a:solidFill>
-                  <a:srgbClr val="000000"/>
-                </a:solidFill>
-                <a:effectLst/>
-                <a:latin typeface="Consolas" panose="020B0609020204030204" pitchFamily="49" charset="0"/>
-              </a:rPr>
-              <a:t>                   </a:t>
-            </a:r>
-            <a:r>
-              <a:rPr lang="en-US" b="0" dirty="0">
-                <a:solidFill>
-                  <a:srgbClr val="0000FF"/>
-                </a:solidFill>
-                <a:effectLst/>
-                <a:latin typeface="Consolas" panose="020B0609020204030204" pitchFamily="49" charset="0"/>
-              </a:rPr>
-              <a:t>void</a:t>
-            </a:r>
-            <a:r>
-              <a:rPr lang="en-US" b="0" dirty="0">
-                <a:solidFill>
-                  <a:srgbClr val="000000"/>
-                </a:solidFill>
-                <a:effectLst/>
-                <a:latin typeface="Consolas" panose="020B0609020204030204" pitchFamily="49" charset="0"/>
-              </a:rPr>
-              <a:t>* (*</a:t>
-            </a:r>
-            <a:r>
-              <a:rPr lang="en-US" b="0" dirty="0" err="1">
-                <a:solidFill>
-                  <a:srgbClr val="808080"/>
-                </a:solidFill>
-                <a:effectLst/>
-                <a:latin typeface="Consolas" panose="020B0609020204030204" pitchFamily="49" charset="0"/>
-              </a:rPr>
-              <a:t>start_routine</a:t>
-            </a:r>
-            <a:r>
-              <a:rPr lang="en-US" b="0" dirty="0">
-                <a:solidFill>
-                  <a:srgbClr val="000000"/>
-                </a:solidFill>
-                <a:effectLst/>
-                <a:latin typeface="Consolas" panose="020B0609020204030204" pitchFamily="49" charset="0"/>
-              </a:rPr>
-              <a:t>)(</a:t>
-            </a:r>
-            <a:r>
-              <a:rPr lang="en-US" b="0" dirty="0">
-                <a:solidFill>
-                  <a:srgbClr val="0000FF"/>
-                </a:solidFill>
-                <a:effectLst/>
-                <a:highlight>
-                  <a:srgbClr val="FFFF00"/>
-                </a:highlight>
-                <a:latin typeface="Consolas" panose="020B0609020204030204" pitchFamily="49" charset="0"/>
-              </a:rPr>
-              <a:t>void</a:t>
-            </a:r>
-            <a:r>
-              <a:rPr lang="en-US" b="0" dirty="0">
-                <a:solidFill>
-                  <a:srgbClr val="000000"/>
-                </a:solidFill>
-                <a:effectLst/>
-                <a:highlight>
-                  <a:srgbClr val="FFFF00"/>
-                </a:highlight>
-                <a:latin typeface="Consolas" panose="020B0609020204030204" pitchFamily="49" charset="0"/>
-              </a:rPr>
-              <a:t>*</a:t>
-            </a:r>
-            <a:r>
-              <a:rPr lang="en-US" b="0" dirty="0">
-                <a:solidFill>
-                  <a:srgbClr val="000000"/>
-                </a:solidFill>
-                <a:effectLst/>
-                <a:latin typeface="Consolas" panose="020B0609020204030204" pitchFamily="49" charset="0"/>
-              </a:rPr>
-              <a:t>), </a:t>
-            </a:r>
-            <a:r>
-              <a:rPr lang="en-US" b="0" dirty="0">
-                <a:solidFill>
-                  <a:srgbClr val="0000FF"/>
-                </a:solidFill>
-                <a:effectLst/>
-                <a:highlight>
-                  <a:srgbClr val="FFFF00"/>
-                </a:highlight>
-                <a:latin typeface="Consolas" panose="020B0609020204030204" pitchFamily="49" charset="0"/>
-              </a:rPr>
-              <a:t>void</a:t>
-            </a:r>
-            <a:r>
-              <a:rPr lang="en-US" b="0" dirty="0">
-                <a:solidFill>
-                  <a:srgbClr val="000000"/>
-                </a:solidFill>
-                <a:effectLst/>
-                <a:highlight>
-                  <a:srgbClr val="FFFF00"/>
-                </a:highlight>
-                <a:latin typeface="Consolas" panose="020B0609020204030204" pitchFamily="49" charset="0"/>
-              </a:rPr>
-              <a:t>* </a:t>
-            </a:r>
-            <a:r>
-              <a:rPr lang="en-US" b="0" dirty="0" err="1">
-                <a:solidFill>
-                  <a:srgbClr val="808080"/>
-                </a:solidFill>
-                <a:effectLst/>
-                <a:highlight>
-                  <a:srgbClr val="FFFF00"/>
-                </a:highlight>
-                <a:latin typeface="Consolas" panose="020B0609020204030204" pitchFamily="49" charset="0"/>
-              </a:rPr>
-              <a:t>arg</a:t>
-            </a:r>
-            <a:r>
-              <a:rPr lang="en-US" b="0" dirty="0">
-                <a:solidFill>
-                  <a:srgbClr val="000000"/>
-                </a:solidFill>
-                <a:effectLst/>
-                <a:latin typeface="Consolas" panose="020B0609020204030204" pitchFamily="49" charset="0"/>
-              </a:rPr>
-              <a:t>);</a:t>
-            </a:r>
-          </a:p>
-        </p:txBody>
-      </p:sp>
-    </p:spTree>
-    <p:extLst>
-      <p:ext uri="{BB962C8B-B14F-4D97-AF65-F5344CB8AC3E}">
-        <p14:creationId xmlns:p14="http://schemas.microsoft.com/office/powerpoint/2010/main" val="1666179511"/>
-      </p:ext>
-    </p:extLst>
-  </p:cSld>
-  <p:clrMapOvr>
-    <a:masterClrMapping/>
-  </p:clrMapOvr>
-</p:sld>
-</file>
-
-<file path=ppt/slides/slide30.xml><?xml version="1.0" encoding="utf-8"?>
+<file path=ppt/slides/slide28.xml><?xml version="1.0" encoding="utf-8"?>
 <p:sld xmlns:a="http://schemas.openxmlformats.org/drawingml/2006/main" xmlns:r="http://schemas.openxmlformats.org/officeDocument/2006/relationships" xmlns:p="http://schemas.openxmlformats.org/presentationml/2006/main">
   <p:cSld>
     <p:spTree>
@@ -26488,7 +26041,7 @@
 </p:sld>
 </file>
 
-<file path=ppt/slides/slide31.xml><?xml version="1.0" encoding="utf-8"?>
+<file path=ppt/slides/slide29.xml><?xml version="1.0" encoding="utf-8"?>
 <p:sld xmlns:a="http://schemas.openxmlformats.org/drawingml/2006/main" xmlns:r="http://schemas.openxmlformats.org/officeDocument/2006/relationships" xmlns:p="http://schemas.openxmlformats.org/presentationml/2006/main">
   <p:cSld>
     <p:spTree>
@@ -29817,7 +29370,176 @@
 </p:sld>
 </file>
 
-<file path=ppt/slides/slide32.xml><?xml version="1.0" encoding="utf-8"?>
+<file path=ppt/slides/slide3.xml><?xml version="1.0" encoding="utf-8"?>
+<p:sld xmlns:a="http://schemas.openxmlformats.org/drawingml/2006/main" xmlns:r="http://schemas.openxmlformats.org/officeDocument/2006/relationships" xmlns:p="http://schemas.openxmlformats.org/presentationml/2006/main">
+  <p:cSld>
+    <p:spTree>
+      <p:nvGrpSpPr>
+        <p:cNvPr id="1" name=""/>
+        <p:cNvGrpSpPr/>
+        <p:nvPr/>
+      </p:nvGrpSpPr>
+      <p:grpSpPr>
+        <a:xfrm>
+          <a:off x="0" y="0"/>
+          <a:ext cx="0" cy="0"/>
+          <a:chOff x="0" y="0"/>
+          <a:chExt cx="0" cy="0"/>
+        </a:xfrm>
+      </p:grpSpPr>
+      <p:sp>
+        <p:nvSpPr>
+          <p:cNvPr id="2" name="Title 1">
+            <a:extLst>
+              <a:ext uri="{FF2B5EF4-FFF2-40B4-BE49-F238E27FC236}">
+                <a16:creationId xmlns:a16="http://schemas.microsoft.com/office/drawing/2014/main" id="{8623BC37-C88B-8FB9-4CD0-4703A61FDC1B}"/>
+              </a:ext>
+            </a:extLst>
+          </p:cNvPr>
+          <p:cNvSpPr>
+            <a:spLocks noGrp="1"/>
+          </p:cNvSpPr>
+          <p:nvPr>
+            <p:ph type="title"/>
+          </p:nvPr>
+        </p:nvSpPr>
+        <p:spPr/>
+        <p:txBody>
+          <a:bodyPr/>
+          <a:lstStyle/>
+          <a:p>
+            <a:r>
+              <a:rPr lang="ru-RU" dirty="0"/>
+              <a:t>Поток выполнения</a:t>
+            </a:r>
+            <a:endParaRPr lang="en-US" dirty="0"/>
+          </a:p>
+        </p:txBody>
+      </p:sp>
+      <p:sp>
+        <p:nvSpPr>
+          <p:cNvPr id="3" name="Content Placeholder 2">
+            <a:extLst>
+              <a:ext uri="{FF2B5EF4-FFF2-40B4-BE49-F238E27FC236}">
+                <a16:creationId xmlns:a16="http://schemas.microsoft.com/office/drawing/2014/main" id="{6919789F-32A2-6D3A-F76C-9FFD3A11E042}"/>
+              </a:ext>
+            </a:extLst>
+          </p:cNvPr>
+          <p:cNvSpPr>
+            <a:spLocks noGrp="1"/>
+          </p:cNvSpPr>
+          <p:nvPr>
+            <p:ph idx="1"/>
+          </p:nvPr>
+        </p:nvSpPr>
+        <p:spPr/>
+        <p:txBody>
+          <a:bodyPr>
+            <a:normAutofit fontScale="92500"/>
+          </a:bodyPr>
+          <a:lstStyle/>
+          <a:p>
+            <a:r>
+              <a:rPr lang="ru-RU" dirty="0"/>
+              <a:t>Поток </a:t>
+            </a:r>
+            <a:r>
+              <a:rPr lang="en-US" dirty="0"/>
+              <a:t>(thread) </a:t>
+            </a:r>
+            <a:r>
+              <a:rPr lang="ru-RU" dirty="0"/>
+              <a:t>— последовательность инструкций внутри процесса</a:t>
+            </a:r>
+          </a:p>
+          <a:p>
+            <a:r>
+              <a:rPr lang="ru-RU" dirty="0"/>
+              <a:t>Потоки разделяют:</a:t>
+            </a:r>
+          </a:p>
+          <a:p>
+            <a:pPr lvl="1"/>
+            <a:r>
+              <a:rPr lang="ru-RU" dirty="0"/>
+              <a:t>адресное пространство</a:t>
+            </a:r>
+          </a:p>
+          <a:p>
+            <a:pPr lvl="1"/>
+            <a:r>
+              <a:rPr lang="ru-RU" dirty="0"/>
+              <a:t>глобальные переменные</a:t>
+            </a:r>
+          </a:p>
+          <a:p>
+            <a:pPr lvl="1"/>
+            <a:r>
+              <a:rPr lang="ru-RU" dirty="0"/>
+              <a:t>кучу</a:t>
+            </a:r>
+          </a:p>
+          <a:p>
+            <a:r>
+              <a:rPr lang="ru-RU" dirty="0"/>
+              <a:t>Потоки не разделяют:</a:t>
+            </a:r>
+          </a:p>
+          <a:p>
+            <a:pPr lvl="1"/>
+            <a:r>
+              <a:rPr lang="ru-RU" dirty="0"/>
+              <a:t>стек</a:t>
+            </a:r>
+          </a:p>
+          <a:p>
+            <a:pPr lvl="1"/>
+            <a:r>
+              <a:rPr lang="ru-RU" dirty="0"/>
+              <a:t>регистры</a:t>
+            </a:r>
+          </a:p>
+          <a:p>
+            <a:pPr lvl="1"/>
+            <a:r>
+              <a:rPr lang="ru-RU" dirty="0" err="1"/>
+              <a:t>thread-local</a:t>
+            </a:r>
+            <a:r>
+              <a:rPr lang="ru-RU" dirty="0"/>
+              <a:t> </a:t>
+            </a:r>
+            <a:r>
+              <a:rPr lang="ru-RU" dirty="0" err="1"/>
+              <a:t>storage</a:t>
+            </a:r>
+            <a:endParaRPr lang="ru-RU" dirty="0"/>
+          </a:p>
+          <a:p>
+            <a:r>
+              <a:rPr lang="ru-RU" dirty="0"/>
+              <a:t>Многопоточность – это конкурентность с разделяемой памятью</a:t>
+            </a:r>
+          </a:p>
+          <a:p>
+            <a:endParaRPr lang="en-US" dirty="0"/>
+          </a:p>
+        </p:txBody>
+      </p:sp>
+    </p:spTree>
+    <p:extLst>
+      <p:ext uri="{BB962C8B-B14F-4D97-AF65-F5344CB8AC3E}">
+        <p14:creationId xmlns:p14="http://schemas.microsoft.com/office/powerpoint/2010/main" val="2223852839"/>
+      </p:ext>
+    </p:extLst>
+  </p:cSld>
+  <p:clrMapOvr>
+    <a:masterClrMapping/>
+  </p:clrMapOvr>
+</p:sld>
+</file>
+
+<file path=ppt/slides/slide30.xml><?xml version="1.0" encoding="utf-8"?>
 <p:sld xmlns:a="http://schemas.openxmlformats.org/drawingml/2006/main" xmlns:r="http://schemas.openxmlformats.org/officeDocument/2006/relationships" xmlns:p="http://schemas.openxmlformats.org/presentationml/2006/main">
   <p:cSld>
     <p:spTree>
@@ -30508,7 +30230,7 @@
 </p:sld>
 </file>
 
-<file path=ppt/slides/slide33.xml><?xml version="1.0" encoding="utf-8"?>
+<file path=ppt/slides/slide31.xml><?xml version="1.0" encoding="utf-8"?>
 <p:sld xmlns:a="http://schemas.openxmlformats.org/drawingml/2006/main" xmlns:r="http://schemas.openxmlformats.org/officeDocument/2006/relationships" xmlns:p="http://schemas.openxmlformats.org/presentationml/2006/main">
   <p:cSld>
     <p:spTree>
@@ -33432,6 +33154,42 @@
               <a:t>, </a:t>
             </a:r>
             <a:r>
+              <a:rPr lang="en-US" sz="1700" dirty="0">
+                <a:solidFill>
+                  <a:srgbClr val="267F99"/>
+                </a:solidFill>
+                <a:latin typeface="Consolas" panose="020B0609020204030204" pitchFamily="49" charset="0"/>
+              </a:rPr>
+              <a:t>std</a:t>
+            </a:r>
+            <a:r>
+              <a:rPr lang="en-US" sz="1700" dirty="0">
+                <a:solidFill>
+                  <a:srgbClr val="3B3B3B"/>
+                </a:solidFill>
+                <a:latin typeface="Consolas" panose="020B0609020204030204" pitchFamily="49" charset="0"/>
+              </a:rPr>
+              <a:t>::</a:t>
+            </a:r>
+            <a:r>
+              <a:rPr lang="en-US" sz="1700" dirty="0">
+                <a:solidFill>
+                  <a:srgbClr val="795E26"/>
+                </a:solidFill>
+                <a:latin typeface="Consolas" panose="020B0609020204030204" pitchFamily="49" charset="0"/>
+              </a:rPr>
+              <a:t>ref</a:t>
+            </a:r>
+            <a:r>
+              <a:rPr lang="en-US" sz="1700" dirty="0">
+                <a:solidFill>
+                  <a:srgbClr val="3B3B3B"/>
+                </a:solidFill>
+                <a:latin typeface="Consolas" panose="020B0609020204030204" pitchFamily="49" charset="0"/>
+              </a:rPr>
+              <a:t>(</a:t>
+            </a:r>
+            <a:r>
               <a:rPr lang="en-US" sz="1700" b="0" dirty="0">
                 <a:solidFill>
                   <a:srgbClr val="001080"/>
@@ -33509,7 +33267,27 @@
                 <a:effectLst/>
                 <a:latin typeface="Consolas" panose="020B0609020204030204" pitchFamily="49" charset="0"/>
               </a:rPr>
-              <a:t>]);</a:t>
+              <a:t>]</a:t>
+            </a:r>
+            <a:r>
+              <a:rPr lang="ru-RU" sz="1700" b="0" dirty="0">
+                <a:solidFill>
+                  <a:srgbClr val="3B3B3B"/>
+                </a:solidFill>
+                <a:effectLst/>
+                <a:latin typeface="Consolas" panose="020B0609020204030204" pitchFamily="49" charset="0"/>
+              </a:rPr>
+              <a:t>)</a:t>
+            </a:r>
+            <a:r>
+              <a:rPr lang="en-US" sz="1700" b="0" dirty="0">
+                <a:solidFill>
+                  <a:srgbClr val="3B3B3B"/>
+                </a:solidFill>
+                <a:effectLst/>
+                <a:latin typeface="Consolas" panose="020B0609020204030204" pitchFamily="49" charset="0"/>
+              </a:rPr>
+              <a:t>);</a:t>
             </a:r>
           </a:p>
           <a:p>
@@ -34926,7 +34704,7 @@
 </p:sld>
 </file>
 
-<file path=ppt/slides/slide34.xml><?xml version="1.0" encoding="utf-8"?>
+<file path=ppt/slides/slide32.xml><?xml version="1.0" encoding="utf-8"?>
 <p:sld xmlns:a="http://schemas.openxmlformats.org/drawingml/2006/main" xmlns:r="http://schemas.openxmlformats.org/officeDocument/2006/relationships" xmlns:p="http://schemas.openxmlformats.org/presentationml/2006/main">
   <p:cSld>
     <p:spTree>
@@ -35012,7 +34790,7 @@
 </p:sld>
 </file>
 
-<file path=ppt/slides/slide35.xml><?xml version="1.0" encoding="utf-8"?>
+<file path=ppt/slides/slide33.xml><?xml version="1.0" encoding="utf-8"?>
 <p:sld xmlns:a="http://schemas.openxmlformats.org/drawingml/2006/main" xmlns:r="http://schemas.openxmlformats.org/officeDocument/2006/relationships" xmlns:p="http://schemas.openxmlformats.org/presentationml/2006/main">
   <p:cSld>
     <p:spTree>
@@ -35179,7 +34957,7 @@
 </p:sld>
 </file>
 
-<file path=ppt/slides/slide36.xml><?xml version="1.0" encoding="utf-8"?>
+<file path=ppt/slides/slide34.xml><?xml version="1.0" encoding="utf-8"?>
 <p:sld xmlns:a="http://schemas.openxmlformats.org/drawingml/2006/main" xmlns:r="http://schemas.openxmlformats.org/officeDocument/2006/relationships" xmlns:p="http://schemas.openxmlformats.org/presentationml/2006/main">
   <p:cSld>
     <p:spTree>
@@ -36275,7 +36053,7 @@
 </p:sld>
 </file>
 
-<file path=ppt/slides/slide37.xml><?xml version="1.0" encoding="utf-8"?>
+<file path=ppt/slides/slide35.xml><?xml version="1.0" encoding="utf-8"?>
 <p:sld xmlns:a="http://schemas.openxmlformats.org/drawingml/2006/main" xmlns:r="http://schemas.openxmlformats.org/officeDocument/2006/relationships" xmlns:p="http://schemas.openxmlformats.org/presentationml/2006/main">
   <p:cSld>
     <p:spTree>
@@ -37459,7 +37237,149 @@
 </p:sld>
 </file>
 
-<file path=ppt/slides/slide38.xml><?xml version="1.0" encoding="utf-8"?>
+<file path=ppt/slides/slide36.xml><?xml version="1.0" encoding="utf-8"?>
+<p:sld xmlns:a="http://schemas.openxmlformats.org/drawingml/2006/main" xmlns:r="http://schemas.openxmlformats.org/officeDocument/2006/relationships" xmlns:p="http://schemas.openxmlformats.org/presentationml/2006/main">
+  <p:cSld>
+    <p:spTree>
+      <p:nvGrpSpPr>
+        <p:cNvPr id="1" name=""/>
+        <p:cNvGrpSpPr/>
+        <p:nvPr/>
+      </p:nvGrpSpPr>
+      <p:grpSpPr>
+        <a:xfrm>
+          <a:off x="0" y="0"/>
+          <a:ext cx="0" cy="0"/>
+          <a:chOff x="0" y="0"/>
+          <a:chExt cx="0" cy="0"/>
+        </a:xfrm>
+      </p:grpSpPr>
+      <p:sp>
+        <p:nvSpPr>
+          <p:cNvPr id="3" name="Title 2">
+            <a:extLst>
+              <a:ext uri="{FF2B5EF4-FFF2-40B4-BE49-F238E27FC236}">
+                <a16:creationId xmlns:a16="http://schemas.microsoft.com/office/drawing/2014/main" id="{5A3BEBC5-D0EB-1D44-C434-2615668205EA}"/>
+              </a:ext>
+            </a:extLst>
+          </p:cNvPr>
+          <p:cNvSpPr>
+            <a:spLocks noGrp="1"/>
+          </p:cNvSpPr>
+          <p:nvPr>
+            <p:ph type="title"/>
+          </p:nvPr>
+        </p:nvSpPr>
+        <p:spPr/>
+        <p:txBody>
+          <a:bodyPr/>
+          <a:lstStyle/>
+          <a:p>
+            <a:r>
+              <a:rPr lang="ru-RU" dirty="0"/>
+              <a:t>Выводы</a:t>
+            </a:r>
+            <a:endParaRPr lang="en-US" dirty="0"/>
+          </a:p>
+        </p:txBody>
+      </p:sp>
+      <p:sp>
+        <p:nvSpPr>
+          <p:cNvPr id="4" name="Content Placeholder 3">
+            <a:extLst>
+              <a:ext uri="{FF2B5EF4-FFF2-40B4-BE49-F238E27FC236}">
+                <a16:creationId xmlns:a16="http://schemas.microsoft.com/office/drawing/2014/main" id="{3CCB5A60-A6C8-F576-7C6B-DCAC0C788781}"/>
+              </a:ext>
+            </a:extLst>
+          </p:cNvPr>
+          <p:cNvSpPr>
+            <a:spLocks noGrp="1"/>
+          </p:cNvSpPr>
+          <p:nvPr>
+            <p:ph idx="1"/>
+          </p:nvPr>
+        </p:nvSpPr>
+        <p:spPr/>
+        <p:txBody>
+          <a:bodyPr/>
+          <a:lstStyle/>
+          <a:p>
+            <a:r>
+              <a:rPr lang="ru-RU" dirty="0"/>
+              <a:t>Поток — это независимый исполнитель внутри процесса</a:t>
+            </a:r>
+          </a:p>
+          <a:p>
+            <a:r>
+              <a:rPr lang="ru-RU" dirty="0" err="1"/>
+              <a:t>std</a:t>
+            </a:r>
+            <a:r>
+              <a:rPr lang="ru-RU" dirty="0"/>
+              <a:t>::</a:t>
+            </a:r>
+            <a:r>
+              <a:rPr lang="ru-RU" dirty="0" err="1"/>
+              <a:t>thread</a:t>
+            </a:r>
+            <a:r>
+              <a:rPr lang="ru-RU" dirty="0"/>
+              <a:t> / </a:t>
+            </a:r>
+            <a:r>
+              <a:rPr lang="ru-RU" dirty="0" err="1"/>
+              <a:t>std</a:t>
+            </a:r>
+            <a:r>
+              <a:rPr lang="ru-RU" dirty="0"/>
+              <a:t>::</a:t>
+            </a:r>
+            <a:r>
+              <a:rPr lang="ru-RU" dirty="0" err="1"/>
+              <a:t>jthread</a:t>
+            </a:r>
+            <a:r>
+              <a:rPr lang="ru-RU" dirty="0"/>
+              <a:t> — переносимая абстракция над API ОС</a:t>
+            </a:r>
+          </a:p>
+          <a:p>
+            <a:r>
+              <a:rPr lang="ru-RU" dirty="0"/>
+              <a:t>Аргументы копируются или перемещаются внутрь объекта потока</a:t>
+            </a:r>
+          </a:p>
+          <a:p>
+            <a:r>
+              <a:rPr lang="ru-RU" dirty="0"/>
+              <a:t>Время жизни объектов критично</a:t>
+            </a:r>
+          </a:p>
+          <a:p>
+            <a:r>
+              <a:rPr lang="ru-RU" dirty="0"/>
+              <a:t>Больше потоков ≠ больше производительности</a:t>
+            </a:r>
+          </a:p>
+          <a:p>
+            <a:endParaRPr lang="en-US" dirty="0"/>
+          </a:p>
+        </p:txBody>
+      </p:sp>
+    </p:spTree>
+    <p:extLst>
+      <p:ext uri="{BB962C8B-B14F-4D97-AF65-F5344CB8AC3E}">
+        <p14:creationId xmlns:p14="http://schemas.microsoft.com/office/powerpoint/2010/main" val="332995629"/>
+      </p:ext>
+    </p:extLst>
+  </p:cSld>
+  <p:clrMapOvr>
+    <a:masterClrMapping/>
+  </p:clrMapOvr>
+</p:sld>
+</file>
+
+<file path=ppt/slides/slide37.xml><?xml version="1.0" encoding="utf-8"?>
 <p:sld xmlns:a="http://schemas.openxmlformats.org/drawingml/2006/main" xmlns:r="http://schemas.openxmlformats.org/officeDocument/2006/relationships" xmlns:p="http://schemas.openxmlformats.org/presentationml/2006/main">
   <p:cSld>
     <p:spTree>
@@ -37568,7 +37488,7 @@
           <p:cNvPr id="2" name="Title 1">
             <a:extLst>
               <a:ext uri="{FF2B5EF4-FFF2-40B4-BE49-F238E27FC236}">
-                <a16:creationId xmlns:a16="http://schemas.microsoft.com/office/drawing/2014/main" id="{A0248B1E-AD59-D496-5CDE-A4BFBABEE30B}"/>
+                <a16:creationId xmlns:a16="http://schemas.microsoft.com/office/drawing/2014/main" id="{B7846C40-7862-03CE-C7B0-E3AB45D14929}"/>
               </a:ext>
             </a:extLst>
           </p:cNvPr>
@@ -37586,11 +37506,7 @@
           <a:p>
             <a:r>
               <a:rPr lang="ru-RU" dirty="0"/>
-              <a:t>Как работает </a:t>
-            </a:r>
-            <a:r>
-              <a:rPr lang="en-US" dirty="0" err="1"/>
-              <a:t>start_routine</a:t>
+              <a:t>Создание потока средствами операционной системы</a:t>
             </a:r>
             <a:endParaRPr lang="en-US" dirty="0"/>
           </a:p>
@@ -37601,7 +37517,7 @@
           <p:cNvPr id="3" name="Content Placeholder 2">
             <a:extLst>
               <a:ext uri="{FF2B5EF4-FFF2-40B4-BE49-F238E27FC236}">
-                <a16:creationId xmlns:a16="http://schemas.microsoft.com/office/drawing/2014/main" id="{2D610F11-CD90-0BC9-ACBE-1665AD39A310}"/>
+                <a16:creationId xmlns:a16="http://schemas.microsoft.com/office/drawing/2014/main" id="{A42D7B79-0830-40D1-9BBD-BEB29B909FC1}"/>
               </a:ext>
             </a:extLst>
           </p:cNvPr>
@@ -37614,43 +37530,78 @@
         </p:nvSpPr>
         <p:spPr>
           <a:xfrm>
-            <a:off x="838200" y="2847703"/>
-            <a:ext cx="10515600" cy="3329260"/>
+            <a:off x="838200" y="1825625"/>
+            <a:ext cx="5257800" cy="4351338"/>
           </a:xfrm>
         </p:spPr>
         <p:txBody>
-          <a:bodyPr/>
+          <a:bodyPr>
+            <a:normAutofit lnSpcReduction="10000"/>
+          </a:bodyPr>
           <a:lstStyle/>
           <a:p>
             <a:r>
               <a:rPr lang="ru-RU" dirty="0"/>
-              <a:t>Внутри функции потока можно извлечь данные из </a:t>
-            </a:r>
-            <a:r>
-              <a:rPr lang="en-US" dirty="0" err="1"/>
-              <a:t>arg</a:t>
+              <a:t>Потоки создаются ядром операционной системы.</a:t>
+            </a:r>
+          </a:p>
+          <a:p>
+            <a:r>
+              <a:rPr lang="ru-RU" dirty="0"/>
+              <a:t>В пользовательских программах используются системные API</a:t>
             </a:r>
             <a:endParaRPr lang="en-US" dirty="0"/>
           </a:p>
           <a:p>
             <a:r>
               <a:rPr lang="ru-RU" dirty="0"/>
-              <a:t>Функция возвращает указатель на результат вычислений, который можно потом получить функцией </a:t>
-            </a:r>
-            <a:r>
-              <a:rPr lang="en-US" dirty="0" err="1"/>
-              <a:t>pthread_join</a:t>
-            </a:r>
-            <a:endParaRPr lang="en-US" dirty="0"/>
+              <a:t>Создание потока включает</a:t>
+            </a:r>
+            <a:r>
+              <a:rPr lang="en-US" dirty="0"/>
+              <a:t>:</a:t>
+            </a:r>
+            <a:endParaRPr lang="ru-RU" dirty="0"/>
+          </a:p>
+          <a:p>
+            <a:pPr lvl="1"/>
+            <a:r>
+              <a:rPr lang="ru-RU" dirty="0"/>
+              <a:t>выделение стека,</a:t>
+            </a:r>
+          </a:p>
+          <a:p>
+            <a:pPr lvl="1"/>
+            <a:r>
+              <a:rPr lang="ru-RU" dirty="0"/>
+              <a:t>создание контекста выполнения,</a:t>
+            </a:r>
+          </a:p>
+          <a:p>
+            <a:pPr lvl="1"/>
+            <a:r>
+              <a:rPr lang="ru-RU" dirty="0"/>
+              <a:t>регистрацию в планировщике,</a:t>
+            </a:r>
+          </a:p>
+          <a:p>
+            <a:pPr lvl="1"/>
+            <a:r>
+              <a:rPr lang="ru-RU" dirty="0"/>
+              <a:t>запуск стартовой функции.</a:t>
+            </a:r>
+          </a:p>
+          <a:p>
+            <a:endParaRPr lang="ru-RU" dirty="0"/>
           </a:p>
         </p:txBody>
       </p:sp>
       <p:sp>
         <p:nvSpPr>
-          <p:cNvPr id="5" name="TextBox 4">
+          <p:cNvPr id="9" name="TextBox 8">
             <a:extLst>
               <a:ext uri="{FF2B5EF4-FFF2-40B4-BE49-F238E27FC236}">
-                <a16:creationId xmlns:a16="http://schemas.microsoft.com/office/drawing/2014/main" id="{8644F53B-6895-5E02-2127-9F7244E5E624}"/>
+                <a16:creationId xmlns:a16="http://schemas.microsoft.com/office/drawing/2014/main" id="{A2058E10-9D7A-F6ED-8228-F7D1B01BCF01}"/>
               </a:ext>
             </a:extLst>
           </p:cNvPr>
@@ -37659,8 +37610,8 @@
         </p:nvSpPr>
         <p:spPr>
           <a:xfrm>
-            <a:off x="838200" y="1839655"/>
-            <a:ext cx="6093822" cy="369332"/>
+            <a:off x="6096000" y="1595021"/>
+            <a:ext cx="6323214" cy="5262979"/>
           </a:xfrm>
           <a:prstGeom prst="rect">
             <a:avLst/>
@@ -37673,38 +37624,402 @@
           </a:bodyPr>
           <a:lstStyle/>
           <a:p>
-            <a:r>
-              <a:rPr lang="en-US" b="0" dirty="0">
+            <a:pPr>
+              <a:buNone/>
+            </a:pPr>
+            <a:r>
+              <a:rPr lang="en-US" sz="1400" b="0" dirty="0">
+                <a:solidFill>
+                  <a:srgbClr val="008000"/>
+                </a:solidFill>
+                <a:effectLst/>
+                <a:latin typeface="Consolas" panose="020B0609020204030204" pitchFamily="49" charset="0"/>
+              </a:rPr>
+              <a:t>// Linux/POSIX</a:t>
+            </a:r>
+            <a:endParaRPr lang="en-US" sz="1400" b="0" dirty="0">
+              <a:solidFill>
+                <a:srgbClr val="000000"/>
+              </a:solidFill>
+              <a:effectLst/>
+              <a:latin typeface="Consolas" panose="020B0609020204030204" pitchFamily="49" charset="0"/>
+            </a:endParaRPr>
+          </a:p>
+          <a:p>
+            <a:pPr>
+              <a:buNone/>
+            </a:pPr>
+            <a:r>
+              <a:rPr lang="en-US" sz="1400" b="0" dirty="0">
                 <a:solidFill>
                   <a:srgbClr val="0000FF"/>
                 </a:solidFill>
                 <a:effectLst/>
                 <a:latin typeface="Consolas" panose="020B0609020204030204" pitchFamily="49" charset="0"/>
               </a:rPr>
+              <a:t>int</a:t>
+            </a:r>
+            <a:r>
+              <a:rPr lang="en-US" sz="1400" b="0" dirty="0">
+                <a:solidFill>
+                  <a:srgbClr val="000000"/>
+                </a:solidFill>
+                <a:effectLst/>
+                <a:latin typeface="Consolas" panose="020B0609020204030204" pitchFamily="49" charset="0"/>
+              </a:rPr>
+              <a:t> </a:t>
+            </a:r>
+            <a:r>
+              <a:rPr lang="en-US" sz="1400" b="0" dirty="0" err="1">
+                <a:solidFill>
+                  <a:srgbClr val="000000"/>
+                </a:solidFill>
+                <a:effectLst/>
+                <a:latin typeface="Consolas" panose="020B0609020204030204" pitchFamily="49" charset="0"/>
+              </a:rPr>
+              <a:t>pthread_create</a:t>
+            </a:r>
+            <a:r>
+              <a:rPr lang="en-US" sz="1400" b="0" dirty="0">
+                <a:solidFill>
+                  <a:srgbClr val="000000"/>
+                </a:solidFill>
+                <a:effectLst/>
+                <a:latin typeface="Consolas" panose="020B0609020204030204" pitchFamily="49" charset="0"/>
+              </a:rPr>
+              <a:t>(</a:t>
+            </a:r>
+          </a:p>
+          <a:p>
+            <a:pPr>
+              <a:buNone/>
+            </a:pPr>
+            <a:r>
+              <a:rPr lang="en-US" sz="1400" b="0" dirty="0">
+                <a:solidFill>
+                  <a:srgbClr val="000000"/>
+                </a:solidFill>
+                <a:effectLst/>
+                <a:latin typeface="Consolas" panose="020B0609020204030204" pitchFamily="49" charset="0"/>
+              </a:rPr>
+              <a:t>    </a:t>
+            </a:r>
+            <a:r>
+              <a:rPr lang="en-US" sz="1400" b="0" dirty="0" err="1">
+                <a:solidFill>
+                  <a:srgbClr val="2B91AF"/>
+                </a:solidFill>
+                <a:effectLst/>
+                <a:latin typeface="Consolas" panose="020B0609020204030204" pitchFamily="49" charset="0"/>
+              </a:rPr>
+              <a:t>pthread_t</a:t>
+            </a:r>
+            <a:r>
+              <a:rPr lang="en-US" sz="1400" b="0" dirty="0">
+                <a:solidFill>
+                  <a:srgbClr val="000000"/>
+                </a:solidFill>
+                <a:effectLst/>
+                <a:latin typeface="Consolas" panose="020B0609020204030204" pitchFamily="49" charset="0"/>
+              </a:rPr>
+              <a:t>* </a:t>
+            </a:r>
+            <a:r>
+              <a:rPr lang="en-US" sz="1400" b="0" dirty="0">
+                <a:solidFill>
+                  <a:srgbClr val="808080"/>
+                </a:solidFill>
+                <a:effectLst/>
+                <a:latin typeface="Consolas" panose="020B0609020204030204" pitchFamily="49" charset="0"/>
+              </a:rPr>
+              <a:t>thread</a:t>
+            </a:r>
+            <a:r>
+              <a:rPr lang="en-US" sz="1400" b="0" dirty="0">
+                <a:solidFill>
+                  <a:srgbClr val="000000"/>
+                </a:solidFill>
+                <a:effectLst/>
+                <a:latin typeface="Consolas" panose="020B0609020204030204" pitchFamily="49" charset="0"/>
+              </a:rPr>
+              <a:t>,</a:t>
+            </a:r>
+          </a:p>
+          <a:p>
+            <a:pPr>
+              <a:buNone/>
+            </a:pPr>
+            <a:r>
+              <a:rPr lang="en-US" sz="1400" b="0" dirty="0">
+                <a:solidFill>
+                  <a:srgbClr val="000000"/>
+                </a:solidFill>
+                <a:effectLst/>
+                <a:latin typeface="Consolas" panose="020B0609020204030204" pitchFamily="49" charset="0"/>
+              </a:rPr>
+              <a:t>    </a:t>
+            </a:r>
+            <a:r>
+              <a:rPr lang="en-US" sz="1400" b="0" dirty="0">
+                <a:solidFill>
+                  <a:srgbClr val="0000FF"/>
+                </a:solidFill>
+                <a:effectLst/>
+                <a:latin typeface="Consolas" panose="020B0609020204030204" pitchFamily="49" charset="0"/>
+              </a:rPr>
+              <a:t>const</a:t>
+            </a:r>
+            <a:r>
+              <a:rPr lang="en-US" sz="1400" b="0" dirty="0">
+                <a:solidFill>
+                  <a:srgbClr val="000000"/>
+                </a:solidFill>
+                <a:effectLst/>
+                <a:latin typeface="Consolas" panose="020B0609020204030204" pitchFamily="49" charset="0"/>
+              </a:rPr>
+              <a:t> </a:t>
+            </a:r>
+            <a:r>
+              <a:rPr lang="en-US" sz="1400" b="0" dirty="0" err="1">
+                <a:solidFill>
+                  <a:srgbClr val="2B91AF"/>
+                </a:solidFill>
+                <a:effectLst/>
+                <a:latin typeface="Consolas" panose="020B0609020204030204" pitchFamily="49" charset="0"/>
+              </a:rPr>
+              <a:t>pthread_attr_t</a:t>
+            </a:r>
+            <a:r>
+              <a:rPr lang="en-US" sz="1400" b="0" dirty="0">
+                <a:solidFill>
+                  <a:srgbClr val="000000"/>
+                </a:solidFill>
+                <a:effectLst/>
+                <a:latin typeface="Consolas" panose="020B0609020204030204" pitchFamily="49" charset="0"/>
+              </a:rPr>
+              <a:t>* </a:t>
+            </a:r>
+            <a:r>
+              <a:rPr lang="en-US" sz="1400" b="0" dirty="0" err="1">
+                <a:solidFill>
+                  <a:srgbClr val="808080"/>
+                </a:solidFill>
+                <a:effectLst/>
+                <a:latin typeface="Consolas" panose="020B0609020204030204" pitchFamily="49" charset="0"/>
+              </a:rPr>
+              <a:t>attr</a:t>
+            </a:r>
+            <a:r>
+              <a:rPr lang="en-US" sz="1400" b="0" dirty="0">
+                <a:solidFill>
+                  <a:srgbClr val="000000"/>
+                </a:solidFill>
+                <a:effectLst/>
+                <a:latin typeface="Consolas" panose="020B0609020204030204" pitchFamily="49" charset="0"/>
+              </a:rPr>
+              <a:t>,</a:t>
+            </a:r>
+          </a:p>
+          <a:p>
+            <a:pPr>
+              <a:buNone/>
+            </a:pPr>
+            <a:r>
+              <a:rPr lang="en-US" sz="1400" b="0" dirty="0">
+                <a:solidFill>
+                  <a:srgbClr val="000000"/>
+                </a:solidFill>
+                <a:effectLst/>
+                <a:latin typeface="Consolas" panose="020B0609020204030204" pitchFamily="49" charset="0"/>
+              </a:rPr>
+              <a:t>    </a:t>
+            </a:r>
+            <a:r>
+              <a:rPr lang="en-US" sz="1400" b="0" dirty="0">
+                <a:solidFill>
+                  <a:srgbClr val="0000FF"/>
+                </a:solidFill>
+                <a:effectLst/>
+                <a:latin typeface="Consolas" panose="020B0609020204030204" pitchFamily="49" charset="0"/>
+              </a:rPr>
               <a:t>void</a:t>
             </a:r>
             <a:r>
-              <a:rPr lang="en-US" b="0" dirty="0">
+              <a:rPr lang="en-US" sz="1400" b="0" dirty="0">
                 <a:solidFill>
                   <a:srgbClr val="000000"/>
                 </a:solidFill>
                 <a:effectLst/>
                 <a:latin typeface="Consolas" panose="020B0609020204030204" pitchFamily="49" charset="0"/>
               </a:rPr>
+              <a:t>* (*</a:t>
+            </a:r>
+            <a:r>
+              <a:rPr lang="en-US" sz="1400" b="0" dirty="0" err="1">
+                <a:solidFill>
+                  <a:srgbClr val="808080"/>
+                </a:solidFill>
+                <a:effectLst/>
+                <a:latin typeface="Consolas" panose="020B0609020204030204" pitchFamily="49" charset="0"/>
+              </a:rPr>
+              <a:t>start_routine</a:t>
+            </a:r>
+            <a:r>
+              <a:rPr lang="en-US" sz="1400" b="0" dirty="0">
+                <a:solidFill>
+                  <a:srgbClr val="000000"/>
+                </a:solidFill>
+                <a:effectLst/>
+                <a:latin typeface="Consolas" panose="020B0609020204030204" pitchFamily="49" charset="0"/>
+              </a:rPr>
+              <a:t>)(</a:t>
+            </a:r>
+            <a:r>
+              <a:rPr lang="en-US" sz="1400" b="0" dirty="0">
+                <a:solidFill>
+                  <a:srgbClr val="0000FF"/>
+                </a:solidFill>
+                <a:effectLst/>
+                <a:latin typeface="Consolas" panose="020B0609020204030204" pitchFamily="49" charset="0"/>
+              </a:rPr>
+              <a:t>void</a:t>
+            </a:r>
+            <a:r>
+              <a:rPr lang="en-US" sz="1400" b="0" dirty="0">
+                <a:solidFill>
+                  <a:srgbClr val="000000"/>
+                </a:solidFill>
+                <a:effectLst/>
+                <a:latin typeface="Consolas" panose="020B0609020204030204" pitchFamily="49" charset="0"/>
+              </a:rPr>
+              <a:t>*),</a:t>
+            </a:r>
+          </a:p>
+          <a:p>
+            <a:pPr>
+              <a:buNone/>
+            </a:pPr>
+            <a:r>
+              <a:rPr lang="en-US" sz="1400" b="0" dirty="0">
+                <a:solidFill>
+                  <a:srgbClr val="000000"/>
+                </a:solidFill>
+                <a:effectLst/>
+                <a:latin typeface="Consolas" panose="020B0609020204030204" pitchFamily="49" charset="0"/>
+              </a:rPr>
+              <a:t>    </a:t>
+            </a:r>
+            <a:r>
+              <a:rPr lang="en-US" sz="1400" b="0" dirty="0">
+                <a:solidFill>
+                  <a:srgbClr val="0000FF"/>
+                </a:solidFill>
+                <a:effectLst/>
+                <a:latin typeface="Consolas" panose="020B0609020204030204" pitchFamily="49" charset="0"/>
+              </a:rPr>
+              <a:t>void</a:t>
+            </a:r>
+            <a:r>
+              <a:rPr lang="en-US" sz="1400" b="0" dirty="0">
+                <a:solidFill>
+                  <a:srgbClr val="000000"/>
+                </a:solidFill>
+                <a:effectLst/>
+                <a:latin typeface="Consolas" panose="020B0609020204030204" pitchFamily="49" charset="0"/>
+              </a:rPr>
               <a:t>* </a:t>
             </a:r>
             <a:r>
-              <a:rPr lang="en-US" b="0" dirty="0" err="1">
+              <a:rPr lang="en-US" sz="1400" b="0" dirty="0" err="1">
+                <a:solidFill>
+                  <a:srgbClr val="808080"/>
+                </a:solidFill>
+                <a:effectLst/>
+                <a:latin typeface="Consolas" panose="020B0609020204030204" pitchFamily="49" charset="0"/>
+              </a:rPr>
+              <a:t>arg</a:t>
+            </a:r>
+            <a:r>
+              <a:rPr lang="en-US" sz="1400" b="0" dirty="0">
+                <a:solidFill>
+                  <a:srgbClr val="000000"/>
+                </a:solidFill>
+                <a:effectLst/>
+                <a:latin typeface="Consolas" panose="020B0609020204030204" pitchFamily="49" charset="0"/>
+              </a:rPr>
+              <a:t>);</a:t>
+            </a:r>
+          </a:p>
+          <a:p>
+            <a:pPr>
+              <a:buNone/>
+            </a:pPr>
+            <a:endParaRPr lang="en-US" sz="1400" b="0" dirty="0">
+              <a:solidFill>
+                <a:srgbClr val="000000"/>
+              </a:solidFill>
+              <a:effectLst/>
+              <a:latin typeface="Consolas" panose="020B0609020204030204" pitchFamily="49" charset="0"/>
+            </a:endParaRPr>
+          </a:p>
+          <a:p>
+            <a:pPr>
+              <a:buNone/>
+            </a:pPr>
+            <a:r>
+              <a:rPr lang="en-US" sz="1400" b="0" dirty="0">
+                <a:solidFill>
+                  <a:srgbClr val="008000"/>
+                </a:solidFill>
+                <a:effectLst/>
+                <a:latin typeface="Consolas" panose="020B0609020204030204" pitchFamily="49" charset="0"/>
+              </a:rPr>
+              <a:t>// Windows</a:t>
+            </a:r>
+            <a:endParaRPr lang="en-US" sz="1400" b="0" dirty="0">
+              <a:solidFill>
+                <a:srgbClr val="000000"/>
+              </a:solidFill>
+              <a:effectLst/>
+              <a:latin typeface="Consolas" panose="020B0609020204030204" pitchFamily="49" charset="0"/>
+            </a:endParaRPr>
+          </a:p>
+          <a:p>
+            <a:pPr>
+              <a:buNone/>
+            </a:pPr>
+            <a:r>
+              <a:rPr lang="en-US" sz="1400" b="0" dirty="0">
+                <a:solidFill>
+                  <a:srgbClr val="2B91AF"/>
+                </a:solidFill>
+                <a:effectLst/>
+                <a:latin typeface="Consolas" panose="020B0609020204030204" pitchFamily="49" charset="0"/>
+              </a:rPr>
+              <a:t>HANDLE</a:t>
+            </a:r>
+            <a:r>
+              <a:rPr lang="en-US" sz="1400" b="0" dirty="0">
+                <a:solidFill>
+                  <a:srgbClr val="000000"/>
+                </a:solidFill>
+                <a:effectLst/>
+                <a:latin typeface="Consolas" panose="020B0609020204030204" pitchFamily="49" charset="0"/>
+              </a:rPr>
+              <a:t> </a:t>
+            </a:r>
+            <a:r>
+              <a:rPr lang="en-US" sz="1400" b="0" dirty="0" err="1">
                 <a:solidFill>
                   <a:srgbClr val="74531F"/>
                 </a:solidFill>
                 <a:effectLst/>
                 <a:latin typeface="Consolas" panose="020B0609020204030204" pitchFamily="49" charset="0"/>
               </a:rPr>
-              <a:t>start_routine</a:t>
-            </a:r>
-            <a:r>
-              <a:rPr lang="en-US" b="0" dirty="0">
+              <a:t>CreateThread</a:t>
+            </a:r>
+            <a:r>
+              <a:rPr lang="en-US" sz="1400" b="0" dirty="0">
                 <a:solidFill>
                   <a:srgbClr val="000000"/>
                 </a:solidFill>
@@ -37713,18 +38028,456 @@
               </a:rPr>
               <a:t>(</a:t>
             </a:r>
-            <a:r>
-              <a:rPr lang="en-US" b="0" dirty="0">
+          </a:p>
+          <a:p>
+            <a:pPr>
+              <a:buNone/>
+            </a:pPr>
+            <a:r>
+              <a:rPr lang="en-US" sz="1400" b="0" dirty="0">
+                <a:solidFill>
+                  <a:srgbClr val="000000"/>
+                </a:solidFill>
+                <a:effectLst/>
+                <a:latin typeface="Consolas" panose="020B0609020204030204" pitchFamily="49" charset="0"/>
+              </a:rPr>
+              <a:t>    </a:t>
+            </a:r>
+            <a:r>
+              <a:rPr lang="en-US" sz="1400" b="0" dirty="0">
+                <a:solidFill>
+                  <a:srgbClr val="2B91AF"/>
+                </a:solidFill>
+                <a:effectLst/>
+                <a:latin typeface="Consolas" panose="020B0609020204030204" pitchFamily="49" charset="0"/>
+              </a:rPr>
+              <a:t>LPSECURITY_ATTRIBUTES</a:t>
+            </a:r>
+            <a:r>
+              <a:rPr lang="en-US" sz="1400" b="0" dirty="0">
+                <a:solidFill>
+                  <a:srgbClr val="000000"/>
+                </a:solidFill>
+                <a:effectLst/>
+                <a:latin typeface="Consolas" panose="020B0609020204030204" pitchFamily="49" charset="0"/>
+              </a:rPr>
+              <a:t> </a:t>
+            </a:r>
+            <a:r>
+              <a:rPr lang="en-US" sz="1400" b="0" dirty="0" err="1">
+                <a:solidFill>
+                  <a:srgbClr val="808080"/>
+                </a:solidFill>
+                <a:effectLst/>
+                <a:latin typeface="Consolas" panose="020B0609020204030204" pitchFamily="49" charset="0"/>
+              </a:rPr>
+              <a:t>attr</a:t>
+            </a:r>
+            <a:r>
+              <a:rPr lang="en-US" sz="1400" b="0" dirty="0">
+                <a:solidFill>
+                  <a:srgbClr val="000000"/>
+                </a:solidFill>
+                <a:effectLst/>
+                <a:latin typeface="Consolas" panose="020B0609020204030204" pitchFamily="49" charset="0"/>
+              </a:rPr>
+              <a:t>,</a:t>
+            </a:r>
+          </a:p>
+          <a:p>
+            <a:pPr>
+              <a:buNone/>
+            </a:pPr>
+            <a:r>
+              <a:rPr lang="en-US" sz="1400" b="0" dirty="0">
+                <a:solidFill>
+                  <a:srgbClr val="000000"/>
+                </a:solidFill>
+                <a:effectLst/>
+                <a:latin typeface="Consolas" panose="020B0609020204030204" pitchFamily="49" charset="0"/>
+              </a:rPr>
+              <a:t>    </a:t>
+            </a:r>
+            <a:r>
+              <a:rPr lang="en-US" sz="1400" b="0" dirty="0">
+                <a:solidFill>
+                  <a:srgbClr val="2B91AF"/>
+                </a:solidFill>
+                <a:effectLst/>
+                <a:latin typeface="Consolas" panose="020B0609020204030204" pitchFamily="49" charset="0"/>
+              </a:rPr>
+              <a:t>SIZE_T</a:t>
+            </a:r>
+            <a:r>
+              <a:rPr lang="en-US" sz="1400" b="0" dirty="0">
+                <a:solidFill>
+                  <a:srgbClr val="000000"/>
+                </a:solidFill>
+                <a:effectLst/>
+                <a:latin typeface="Consolas" panose="020B0609020204030204" pitchFamily="49" charset="0"/>
+              </a:rPr>
+              <a:t> </a:t>
+            </a:r>
+            <a:r>
+              <a:rPr lang="en-US" sz="1400" b="0" dirty="0" err="1">
+                <a:solidFill>
+                  <a:srgbClr val="808080"/>
+                </a:solidFill>
+                <a:effectLst/>
+                <a:latin typeface="Consolas" panose="020B0609020204030204" pitchFamily="49" charset="0"/>
+              </a:rPr>
+              <a:t>stackSize</a:t>
+            </a:r>
+            <a:r>
+              <a:rPr lang="en-US" sz="1400" b="0" dirty="0">
+                <a:solidFill>
+                  <a:srgbClr val="000000"/>
+                </a:solidFill>
+                <a:effectLst/>
+                <a:latin typeface="Consolas" panose="020B0609020204030204" pitchFamily="49" charset="0"/>
+              </a:rPr>
+              <a:t>,</a:t>
+            </a:r>
+          </a:p>
+          <a:p>
+            <a:pPr>
+              <a:buNone/>
+            </a:pPr>
+            <a:r>
+              <a:rPr lang="en-US" sz="1400" b="0" dirty="0">
+                <a:solidFill>
+                  <a:srgbClr val="000000"/>
+                </a:solidFill>
+                <a:effectLst/>
+                <a:latin typeface="Consolas" panose="020B0609020204030204" pitchFamily="49" charset="0"/>
+              </a:rPr>
+              <a:t>    </a:t>
+            </a:r>
+            <a:r>
+              <a:rPr lang="en-US" sz="1400" b="0" dirty="0">
+                <a:solidFill>
+                  <a:srgbClr val="2B91AF"/>
+                </a:solidFill>
+                <a:effectLst/>
+                <a:latin typeface="Consolas" panose="020B0609020204030204" pitchFamily="49" charset="0"/>
+              </a:rPr>
+              <a:t>LPTHREAD_START_ROUTINE</a:t>
+            </a:r>
+            <a:r>
+              <a:rPr lang="en-US" sz="1400" b="0" dirty="0">
+                <a:solidFill>
+                  <a:srgbClr val="000000"/>
+                </a:solidFill>
+                <a:effectLst/>
+                <a:latin typeface="Consolas" panose="020B0609020204030204" pitchFamily="49" charset="0"/>
+              </a:rPr>
+              <a:t> </a:t>
+            </a:r>
+            <a:r>
+              <a:rPr lang="en-US" sz="1400" b="0" dirty="0" err="1">
+                <a:solidFill>
+                  <a:srgbClr val="808080"/>
+                </a:solidFill>
+                <a:effectLst/>
+                <a:latin typeface="Consolas" panose="020B0609020204030204" pitchFamily="49" charset="0"/>
+              </a:rPr>
+              <a:t>startAddress</a:t>
+            </a:r>
+            <a:r>
+              <a:rPr lang="en-US" sz="1400" b="0" dirty="0">
+                <a:solidFill>
+                  <a:srgbClr val="000000"/>
+                </a:solidFill>
+                <a:effectLst/>
+                <a:latin typeface="Consolas" panose="020B0609020204030204" pitchFamily="49" charset="0"/>
+              </a:rPr>
+              <a:t>,</a:t>
+            </a:r>
+          </a:p>
+          <a:p>
+            <a:pPr>
+              <a:buNone/>
+            </a:pPr>
+            <a:r>
+              <a:rPr lang="en-US" sz="1400" b="0" dirty="0">
+                <a:solidFill>
+                  <a:srgbClr val="000000"/>
+                </a:solidFill>
+                <a:effectLst/>
+                <a:latin typeface="Consolas" panose="020B0609020204030204" pitchFamily="49" charset="0"/>
+              </a:rPr>
+              <a:t>    </a:t>
+            </a:r>
+            <a:r>
+              <a:rPr lang="en-US" sz="1400" b="0" dirty="0">
+                <a:solidFill>
+                  <a:srgbClr val="2B91AF"/>
+                </a:solidFill>
+                <a:effectLst/>
+                <a:latin typeface="Consolas" panose="020B0609020204030204" pitchFamily="49" charset="0"/>
+              </a:rPr>
+              <a:t>LPVOID</a:t>
+            </a:r>
+            <a:r>
+              <a:rPr lang="en-US" sz="1400" b="0" dirty="0">
+                <a:solidFill>
+                  <a:srgbClr val="000000"/>
+                </a:solidFill>
+                <a:effectLst/>
+                <a:latin typeface="Consolas" panose="020B0609020204030204" pitchFamily="49" charset="0"/>
+              </a:rPr>
+              <a:t> </a:t>
+            </a:r>
+            <a:r>
+              <a:rPr lang="en-US" sz="1400" b="0" dirty="0">
+                <a:solidFill>
+                  <a:srgbClr val="808080"/>
+                </a:solidFill>
+                <a:effectLst/>
+                <a:latin typeface="Consolas" panose="020B0609020204030204" pitchFamily="49" charset="0"/>
+              </a:rPr>
+              <a:t>param</a:t>
+            </a:r>
+            <a:r>
+              <a:rPr lang="en-US" sz="1400" b="0" dirty="0">
+                <a:solidFill>
+                  <a:srgbClr val="000000"/>
+                </a:solidFill>
+                <a:effectLst/>
+                <a:latin typeface="Consolas" panose="020B0609020204030204" pitchFamily="49" charset="0"/>
+              </a:rPr>
+              <a:t>,</a:t>
+            </a:r>
+          </a:p>
+          <a:p>
+            <a:pPr>
+              <a:buNone/>
+            </a:pPr>
+            <a:r>
+              <a:rPr lang="en-US" sz="1400" b="0" dirty="0">
+                <a:solidFill>
+                  <a:srgbClr val="000000"/>
+                </a:solidFill>
+                <a:effectLst/>
+                <a:latin typeface="Consolas" panose="020B0609020204030204" pitchFamily="49" charset="0"/>
+              </a:rPr>
+              <a:t>    </a:t>
+            </a:r>
+            <a:r>
+              <a:rPr lang="en-US" sz="1400" b="0" dirty="0">
+                <a:solidFill>
+                  <a:srgbClr val="2B91AF"/>
+                </a:solidFill>
+                <a:effectLst/>
+                <a:latin typeface="Consolas" panose="020B0609020204030204" pitchFamily="49" charset="0"/>
+              </a:rPr>
+              <a:t>DWORD</a:t>
+            </a:r>
+            <a:r>
+              <a:rPr lang="en-US" sz="1400" b="0" dirty="0">
+                <a:solidFill>
+                  <a:srgbClr val="000000"/>
+                </a:solidFill>
+                <a:effectLst/>
+                <a:latin typeface="Consolas" panose="020B0609020204030204" pitchFamily="49" charset="0"/>
+              </a:rPr>
+              <a:t> </a:t>
+            </a:r>
+            <a:r>
+              <a:rPr lang="en-US" sz="1400" b="0" dirty="0">
+                <a:solidFill>
+                  <a:srgbClr val="808080"/>
+                </a:solidFill>
+                <a:effectLst/>
+                <a:latin typeface="Consolas" panose="020B0609020204030204" pitchFamily="49" charset="0"/>
+              </a:rPr>
+              <a:t>flags</a:t>
+            </a:r>
+            <a:r>
+              <a:rPr lang="en-US" sz="1400" b="0" dirty="0">
+                <a:solidFill>
+                  <a:srgbClr val="000000"/>
+                </a:solidFill>
+                <a:effectLst/>
+                <a:latin typeface="Consolas" panose="020B0609020204030204" pitchFamily="49" charset="0"/>
+              </a:rPr>
+              <a:t>,</a:t>
+            </a:r>
+          </a:p>
+          <a:p>
+            <a:pPr>
+              <a:buNone/>
+            </a:pPr>
+            <a:r>
+              <a:rPr lang="en-US" sz="1400" b="0" dirty="0">
+                <a:solidFill>
+                  <a:srgbClr val="000000"/>
+                </a:solidFill>
+                <a:effectLst/>
+                <a:latin typeface="Consolas" panose="020B0609020204030204" pitchFamily="49" charset="0"/>
+              </a:rPr>
+              <a:t>    </a:t>
+            </a:r>
+            <a:r>
+              <a:rPr lang="en-US" sz="1400" b="0" dirty="0">
+                <a:solidFill>
+                  <a:srgbClr val="2B91AF"/>
+                </a:solidFill>
+                <a:effectLst/>
+                <a:latin typeface="Consolas" panose="020B0609020204030204" pitchFamily="49" charset="0"/>
+              </a:rPr>
+              <a:t>LPDWORD</a:t>
+            </a:r>
+            <a:r>
+              <a:rPr lang="en-US" sz="1400" b="0" dirty="0">
+                <a:solidFill>
+                  <a:srgbClr val="000000"/>
+                </a:solidFill>
+                <a:effectLst/>
+                <a:latin typeface="Consolas" panose="020B0609020204030204" pitchFamily="49" charset="0"/>
+              </a:rPr>
+              <a:t> </a:t>
+            </a:r>
+            <a:r>
+              <a:rPr lang="en-US" sz="1400" b="0" dirty="0" err="1">
+                <a:solidFill>
+                  <a:srgbClr val="808080"/>
+                </a:solidFill>
+                <a:effectLst/>
+                <a:latin typeface="Consolas" panose="020B0609020204030204" pitchFamily="49" charset="0"/>
+              </a:rPr>
+              <a:t>threadId</a:t>
+            </a:r>
+            <a:r>
+              <a:rPr lang="en-US" sz="1400" b="0" dirty="0">
+                <a:solidFill>
+                  <a:srgbClr val="000000"/>
+                </a:solidFill>
+                <a:effectLst/>
+                <a:latin typeface="Consolas" panose="020B0609020204030204" pitchFamily="49" charset="0"/>
+              </a:rPr>
+              <a:t>);</a:t>
+            </a:r>
+            <a:br>
+              <a:rPr lang="en-US" sz="1400" b="0" dirty="0">
+                <a:solidFill>
+                  <a:srgbClr val="000000"/>
+                </a:solidFill>
+                <a:effectLst/>
+                <a:latin typeface="Consolas" panose="020B0609020204030204" pitchFamily="49" charset="0"/>
+              </a:rPr>
+            </a:br>
+            <a:endParaRPr lang="en-US" sz="1400" b="0" dirty="0">
+              <a:solidFill>
+                <a:srgbClr val="000000"/>
+              </a:solidFill>
+              <a:effectLst/>
+              <a:latin typeface="Consolas" panose="020B0609020204030204" pitchFamily="49" charset="0"/>
+            </a:endParaRPr>
+          </a:p>
+          <a:p>
+            <a:pPr>
+              <a:buNone/>
+            </a:pPr>
+            <a:r>
+              <a:rPr lang="en-US" sz="1400" b="0" dirty="0">
+                <a:solidFill>
+                  <a:srgbClr val="008000"/>
+                </a:solidFill>
+                <a:effectLst/>
+                <a:latin typeface="Consolas" panose="020B0609020204030204" pitchFamily="49" charset="0"/>
+              </a:rPr>
+              <a:t>// Windows CRT</a:t>
+            </a:r>
+            <a:endParaRPr lang="en-US" sz="1400" b="0" dirty="0">
+              <a:solidFill>
+                <a:srgbClr val="000000"/>
+              </a:solidFill>
+              <a:effectLst/>
+              <a:latin typeface="Consolas" panose="020B0609020204030204" pitchFamily="49" charset="0"/>
+            </a:endParaRPr>
+          </a:p>
+          <a:p>
+            <a:pPr>
+              <a:buNone/>
+            </a:pPr>
+            <a:r>
+              <a:rPr lang="en-US" sz="1400" b="0" dirty="0" err="1">
                 <a:solidFill>
                   <a:srgbClr val="0000FF"/>
                 </a:solidFill>
                 <a:effectLst/>
                 <a:latin typeface="Consolas" panose="020B0609020204030204" pitchFamily="49" charset="0"/>
               </a:rPr>
+              <a:t>uintptr_t</a:t>
+            </a:r>
+            <a:r>
+              <a:rPr lang="en-US" sz="1400" b="0" dirty="0">
+                <a:solidFill>
+                  <a:srgbClr val="000000"/>
+                </a:solidFill>
+                <a:effectLst/>
+                <a:latin typeface="Consolas" panose="020B0609020204030204" pitchFamily="49" charset="0"/>
+              </a:rPr>
+              <a:t> </a:t>
+            </a:r>
+            <a:r>
+              <a:rPr lang="en-US" sz="1400" b="0" dirty="0">
+                <a:solidFill>
+                  <a:srgbClr val="74531F"/>
+                </a:solidFill>
+                <a:effectLst/>
+                <a:latin typeface="Consolas" panose="020B0609020204030204" pitchFamily="49" charset="0"/>
+              </a:rPr>
+              <a:t>_</a:t>
+            </a:r>
+            <a:r>
+              <a:rPr lang="en-US" sz="1400" b="0" dirty="0" err="1">
+                <a:solidFill>
+                  <a:srgbClr val="74531F"/>
+                </a:solidFill>
+                <a:effectLst/>
+                <a:latin typeface="Consolas" panose="020B0609020204030204" pitchFamily="49" charset="0"/>
+              </a:rPr>
+              <a:t>beginthreadex</a:t>
+            </a:r>
+            <a:r>
+              <a:rPr lang="en-US" sz="1400" b="0" dirty="0">
+                <a:solidFill>
+                  <a:srgbClr val="000000"/>
+                </a:solidFill>
+                <a:effectLst/>
+                <a:latin typeface="Consolas" panose="020B0609020204030204" pitchFamily="49" charset="0"/>
+              </a:rPr>
+              <a:t>(</a:t>
+            </a:r>
+          </a:p>
+          <a:p>
+            <a:pPr>
+              <a:buNone/>
+            </a:pPr>
+            <a:r>
+              <a:rPr lang="en-US" sz="1400" b="0" dirty="0">
+                <a:solidFill>
+                  <a:srgbClr val="000000"/>
+                </a:solidFill>
+                <a:effectLst/>
+                <a:latin typeface="Consolas" panose="020B0609020204030204" pitchFamily="49" charset="0"/>
+              </a:rPr>
+              <a:t>    </a:t>
+            </a:r>
+            <a:r>
+              <a:rPr lang="en-US" sz="1400" b="0" dirty="0">
+                <a:solidFill>
+                  <a:srgbClr val="0000FF"/>
+                </a:solidFill>
+                <a:effectLst/>
+                <a:latin typeface="Consolas" panose="020B0609020204030204" pitchFamily="49" charset="0"/>
+              </a:rPr>
               <a:t>void</a:t>
             </a:r>
             <a:r>
-              <a:rPr lang="en-US" b="0" dirty="0">
+              <a:rPr lang="en-US" sz="1400" b="0" dirty="0">
                 <a:solidFill>
                   <a:srgbClr val="000000"/>
                 </a:solidFill>
@@ -37734,17 +38487,332 @@
               <a:t>* </a:t>
             </a:r>
             <a:r>
-              <a:rPr lang="en-US" b="0" dirty="0" err="1">
+              <a:rPr lang="en-US" sz="1400" b="0" dirty="0">
                 <a:solidFill>
                   <a:srgbClr val="808080"/>
                 </a:solidFill>
                 <a:effectLst/>
                 <a:latin typeface="Consolas" panose="020B0609020204030204" pitchFamily="49" charset="0"/>
               </a:rPr>
-              <a:t>arg</a:t>
-            </a:r>
-            <a:r>
-              <a:rPr lang="en-US" b="0" dirty="0">
+              <a:t>security</a:t>
+            </a:r>
+            <a:r>
+              <a:rPr lang="en-US" sz="1400" b="0" dirty="0">
+                <a:solidFill>
+                  <a:srgbClr val="000000"/>
+                </a:solidFill>
+                <a:effectLst/>
+                <a:latin typeface="Consolas" panose="020B0609020204030204" pitchFamily="49" charset="0"/>
+              </a:rPr>
+              <a:t>,</a:t>
+            </a:r>
+          </a:p>
+          <a:p>
+            <a:pPr>
+              <a:buNone/>
+            </a:pPr>
+            <a:r>
+              <a:rPr lang="en-US" sz="1400" b="0" dirty="0">
+                <a:solidFill>
+                  <a:srgbClr val="000000"/>
+                </a:solidFill>
+                <a:effectLst/>
+                <a:latin typeface="Consolas" panose="020B0609020204030204" pitchFamily="49" charset="0"/>
+              </a:rPr>
+              <a:t>    </a:t>
+            </a:r>
+            <a:r>
+              <a:rPr lang="en-US" sz="1400" b="0" dirty="0">
+                <a:solidFill>
+                  <a:srgbClr val="0000FF"/>
+                </a:solidFill>
+                <a:effectLst/>
+                <a:latin typeface="Consolas" panose="020B0609020204030204" pitchFamily="49" charset="0"/>
+              </a:rPr>
+              <a:t>unsigned</a:t>
+            </a:r>
+            <a:r>
+              <a:rPr lang="en-US" sz="1400" b="0" dirty="0">
+                <a:solidFill>
+                  <a:srgbClr val="000000"/>
+                </a:solidFill>
+                <a:effectLst/>
+                <a:latin typeface="Consolas" panose="020B0609020204030204" pitchFamily="49" charset="0"/>
+              </a:rPr>
+              <a:t> </a:t>
+            </a:r>
+            <a:r>
+              <a:rPr lang="en-US" sz="1400" b="0" dirty="0" err="1">
+                <a:solidFill>
+                  <a:srgbClr val="808080"/>
+                </a:solidFill>
+                <a:effectLst/>
+                <a:latin typeface="Consolas" panose="020B0609020204030204" pitchFamily="49" charset="0"/>
+              </a:rPr>
+              <a:t>stack_size</a:t>
+            </a:r>
+            <a:r>
+              <a:rPr lang="en-US" sz="1400" b="0" dirty="0">
+                <a:solidFill>
+                  <a:srgbClr val="000000"/>
+                </a:solidFill>
+                <a:effectLst/>
+                <a:latin typeface="Consolas" panose="020B0609020204030204" pitchFamily="49" charset="0"/>
+              </a:rPr>
+              <a:t>,</a:t>
+            </a:r>
+          </a:p>
+          <a:p>
+            <a:pPr>
+              <a:buNone/>
+            </a:pPr>
+            <a:r>
+              <a:rPr lang="en-US" sz="1400" b="0" dirty="0">
+                <a:solidFill>
+                  <a:srgbClr val="000000"/>
+                </a:solidFill>
+                <a:effectLst/>
+                <a:latin typeface="Consolas" panose="020B0609020204030204" pitchFamily="49" charset="0"/>
+              </a:rPr>
+              <a:t>    </a:t>
+            </a:r>
+            <a:r>
+              <a:rPr lang="en-US" sz="1400" b="0" dirty="0">
+                <a:solidFill>
+                  <a:srgbClr val="0000FF"/>
+                </a:solidFill>
+                <a:effectLst/>
+                <a:latin typeface="Consolas" panose="020B0609020204030204" pitchFamily="49" charset="0"/>
+              </a:rPr>
+              <a:t>unsigned</a:t>
+            </a:r>
+            <a:r>
+              <a:rPr lang="en-US" sz="1400" b="0" dirty="0">
+                <a:solidFill>
+                  <a:srgbClr val="000000"/>
+                </a:solidFill>
+                <a:effectLst/>
+                <a:latin typeface="Consolas" panose="020B0609020204030204" pitchFamily="49" charset="0"/>
+              </a:rPr>
+              <a:t>(__</a:t>
+            </a:r>
+            <a:r>
+              <a:rPr lang="en-US" sz="1400" b="0" dirty="0" err="1">
+                <a:solidFill>
+                  <a:srgbClr val="000000"/>
+                </a:solidFill>
+                <a:effectLst/>
+                <a:latin typeface="Consolas" panose="020B0609020204030204" pitchFamily="49" charset="0"/>
+              </a:rPr>
+              <a:t>stdcall</a:t>
+            </a:r>
+            <a:r>
+              <a:rPr lang="en-US" sz="1400" b="0" dirty="0">
+                <a:solidFill>
+                  <a:srgbClr val="000000"/>
+                </a:solidFill>
+                <a:effectLst/>
+                <a:latin typeface="Consolas" panose="020B0609020204030204" pitchFamily="49" charset="0"/>
+              </a:rPr>
+              <a:t>* </a:t>
+            </a:r>
+            <a:r>
+              <a:rPr lang="en-US" sz="1400" b="0" dirty="0" err="1">
+                <a:solidFill>
+                  <a:srgbClr val="808080"/>
+                </a:solidFill>
+                <a:effectLst/>
+                <a:latin typeface="Consolas" panose="020B0609020204030204" pitchFamily="49" charset="0"/>
+              </a:rPr>
+              <a:t>start_address</a:t>
+            </a:r>
+            <a:r>
+              <a:rPr lang="en-US" sz="1400" b="0" dirty="0">
+                <a:solidFill>
+                  <a:srgbClr val="000000"/>
+                </a:solidFill>
+                <a:effectLst/>
+                <a:latin typeface="Consolas" panose="020B0609020204030204" pitchFamily="49" charset="0"/>
+              </a:rPr>
+              <a:t>)(</a:t>
+            </a:r>
+            <a:r>
+              <a:rPr lang="en-US" sz="1400" b="0" dirty="0">
+                <a:solidFill>
+                  <a:srgbClr val="0000FF"/>
+                </a:solidFill>
+                <a:effectLst/>
+                <a:latin typeface="Consolas" panose="020B0609020204030204" pitchFamily="49" charset="0"/>
+              </a:rPr>
+              <a:t>void</a:t>
+            </a:r>
+            <a:r>
+              <a:rPr lang="en-US" sz="1400" b="0" dirty="0">
+                <a:solidFill>
+                  <a:srgbClr val="000000"/>
+                </a:solidFill>
+                <a:effectLst/>
+                <a:latin typeface="Consolas" panose="020B0609020204030204" pitchFamily="49" charset="0"/>
+              </a:rPr>
+              <a:t>*),</a:t>
+            </a:r>
+          </a:p>
+          <a:p>
+            <a:pPr>
+              <a:buNone/>
+            </a:pPr>
+            <a:r>
+              <a:rPr lang="en-US" sz="1400" b="0" dirty="0">
+                <a:solidFill>
+                  <a:srgbClr val="000000"/>
+                </a:solidFill>
+                <a:effectLst/>
+                <a:latin typeface="Consolas" panose="020B0609020204030204" pitchFamily="49" charset="0"/>
+              </a:rPr>
+              <a:t>    </a:t>
+            </a:r>
+            <a:r>
+              <a:rPr lang="en-US" sz="1400" b="0" dirty="0">
+                <a:solidFill>
+                  <a:srgbClr val="0000FF"/>
+                </a:solidFill>
+                <a:effectLst/>
+                <a:latin typeface="Consolas" panose="020B0609020204030204" pitchFamily="49" charset="0"/>
+              </a:rPr>
+              <a:t>void</a:t>
+            </a:r>
+            <a:r>
+              <a:rPr lang="en-US" sz="1400" b="0" dirty="0">
+                <a:solidFill>
+                  <a:srgbClr val="000000"/>
+                </a:solidFill>
+                <a:effectLst/>
+                <a:latin typeface="Consolas" panose="020B0609020204030204" pitchFamily="49" charset="0"/>
+              </a:rPr>
+              <a:t>* </a:t>
+            </a:r>
+            <a:r>
+              <a:rPr lang="en-US" sz="1400" b="0" dirty="0" err="1">
+                <a:solidFill>
+                  <a:srgbClr val="808080"/>
+                </a:solidFill>
+                <a:effectLst/>
+                <a:latin typeface="Consolas" panose="020B0609020204030204" pitchFamily="49" charset="0"/>
+              </a:rPr>
+              <a:t>arglist</a:t>
+            </a:r>
+            <a:r>
+              <a:rPr lang="en-US" sz="1400" b="0" dirty="0">
+                <a:solidFill>
+                  <a:srgbClr val="000000"/>
+                </a:solidFill>
+                <a:effectLst/>
+                <a:latin typeface="Consolas" panose="020B0609020204030204" pitchFamily="49" charset="0"/>
+              </a:rPr>
+              <a:t>,</a:t>
+            </a:r>
+          </a:p>
+          <a:p>
+            <a:pPr>
+              <a:buNone/>
+            </a:pPr>
+            <a:r>
+              <a:rPr lang="en-US" sz="1400" b="0" dirty="0">
+                <a:solidFill>
+                  <a:srgbClr val="000000"/>
+                </a:solidFill>
+                <a:effectLst/>
+                <a:latin typeface="Consolas" panose="020B0609020204030204" pitchFamily="49" charset="0"/>
+              </a:rPr>
+              <a:t>    </a:t>
+            </a:r>
+            <a:r>
+              <a:rPr lang="en-US" sz="1400" b="0" dirty="0">
+                <a:solidFill>
+                  <a:srgbClr val="0000FF"/>
+                </a:solidFill>
+                <a:effectLst/>
+                <a:latin typeface="Consolas" panose="020B0609020204030204" pitchFamily="49" charset="0"/>
+              </a:rPr>
+              <a:t>unsigned</a:t>
+            </a:r>
+            <a:r>
+              <a:rPr lang="en-US" sz="1400" b="0" dirty="0">
+                <a:solidFill>
+                  <a:srgbClr val="000000"/>
+                </a:solidFill>
+                <a:effectLst/>
+                <a:latin typeface="Consolas" panose="020B0609020204030204" pitchFamily="49" charset="0"/>
+              </a:rPr>
+              <a:t> </a:t>
+            </a:r>
+            <a:r>
+              <a:rPr lang="en-US" sz="1400" b="0" dirty="0" err="1">
+                <a:solidFill>
+                  <a:srgbClr val="808080"/>
+                </a:solidFill>
+                <a:effectLst/>
+                <a:latin typeface="Consolas" panose="020B0609020204030204" pitchFamily="49" charset="0"/>
+              </a:rPr>
+              <a:t>initflag</a:t>
+            </a:r>
+            <a:r>
+              <a:rPr lang="en-US" sz="1400" b="0" dirty="0">
+                <a:solidFill>
+                  <a:srgbClr val="000000"/>
+                </a:solidFill>
+                <a:effectLst/>
+                <a:latin typeface="Consolas" panose="020B0609020204030204" pitchFamily="49" charset="0"/>
+              </a:rPr>
+              <a:t>,</a:t>
+            </a:r>
+          </a:p>
+          <a:p>
+            <a:pPr>
+              <a:buNone/>
+            </a:pPr>
+            <a:r>
+              <a:rPr lang="en-US" sz="1400" b="0" dirty="0">
+                <a:solidFill>
+                  <a:srgbClr val="000000"/>
+                </a:solidFill>
+                <a:effectLst/>
+                <a:latin typeface="Consolas" panose="020B0609020204030204" pitchFamily="49" charset="0"/>
+              </a:rPr>
+              <a:t>    </a:t>
+            </a:r>
+            <a:r>
+              <a:rPr lang="en-US" sz="1400" b="0" dirty="0">
+                <a:solidFill>
+                  <a:srgbClr val="0000FF"/>
+                </a:solidFill>
+                <a:effectLst/>
+                <a:latin typeface="Consolas" panose="020B0609020204030204" pitchFamily="49" charset="0"/>
+              </a:rPr>
+              <a:t>unsigned</a:t>
+            </a:r>
+            <a:r>
+              <a:rPr lang="en-US" sz="1400" b="0" dirty="0">
+                <a:solidFill>
+                  <a:srgbClr val="000000"/>
+                </a:solidFill>
+                <a:effectLst/>
+                <a:latin typeface="Consolas" panose="020B0609020204030204" pitchFamily="49" charset="0"/>
+              </a:rPr>
+              <a:t>* </a:t>
+            </a:r>
+            <a:r>
+              <a:rPr lang="en-US" sz="1400" b="0" dirty="0" err="1">
+                <a:solidFill>
+                  <a:srgbClr val="808080"/>
+                </a:solidFill>
+                <a:effectLst/>
+                <a:latin typeface="Consolas" panose="020B0609020204030204" pitchFamily="49" charset="0"/>
+              </a:rPr>
+              <a:t>thrdaddr</a:t>
+            </a:r>
+            <a:r>
+              <a:rPr lang="en-US" sz="1400" b="0" dirty="0">
                 <a:solidFill>
                   <a:srgbClr val="000000"/>
                 </a:solidFill>
@@ -37759,7 +38827,7 @@
     </p:spTree>
     <p:extLst>
       <p:ext uri="{BB962C8B-B14F-4D97-AF65-F5344CB8AC3E}">
-        <p14:creationId xmlns:p14="http://schemas.microsoft.com/office/powerpoint/2010/main" val="2996250399"/>
+        <p14:creationId xmlns:p14="http://schemas.microsoft.com/office/powerpoint/2010/main" val="2491444302"/>
       </p:ext>
     </p:extLst>
   </p:cSld>
@@ -37770,1258 +38838,6 @@
 </file>
 
 <file path=ppt/slides/slide5.xml><?xml version="1.0" encoding="utf-8"?>
-<p:sld xmlns:a="http://schemas.openxmlformats.org/drawingml/2006/main" xmlns:r="http://schemas.openxmlformats.org/officeDocument/2006/relationships" xmlns:p="http://schemas.openxmlformats.org/presentationml/2006/main">
-  <p:cSld>
-    <p:spTree>
-      <p:nvGrpSpPr>
-        <p:cNvPr id="1" name=""/>
-        <p:cNvGrpSpPr/>
-        <p:nvPr/>
-      </p:nvGrpSpPr>
-      <p:grpSpPr>
-        <a:xfrm>
-          <a:off x="0" y="0"/>
-          <a:ext cx="0" cy="0"/>
-          <a:chOff x="0" y="0"/>
-          <a:chExt cx="0" cy="0"/>
-        </a:xfrm>
-      </p:grpSpPr>
-      <p:sp>
-        <p:nvSpPr>
-          <p:cNvPr id="2" name="Title 1">
-            <a:extLst>
-              <a:ext uri="{FF2B5EF4-FFF2-40B4-BE49-F238E27FC236}">
-                <a16:creationId xmlns:a16="http://schemas.microsoft.com/office/drawing/2014/main" id="{6F6F334B-9B42-D5B6-DF00-045C9885BD28}"/>
-              </a:ext>
-            </a:extLst>
-          </p:cNvPr>
-          <p:cNvSpPr>
-            <a:spLocks noGrp="1"/>
-          </p:cNvSpPr>
-          <p:nvPr>
-            <p:ph type="title"/>
-          </p:nvPr>
-        </p:nvSpPr>
-        <p:spPr/>
-        <p:txBody>
-          <a:bodyPr/>
-          <a:lstStyle/>
-          <a:p>
-            <a:r>
-              <a:rPr lang="ru-RU" dirty="0"/>
-              <a:t>Создание потока в </a:t>
-            </a:r>
-            <a:r>
-              <a:rPr lang="en-US" dirty="0"/>
-              <a:t>Windows</a:t>
-            </a:r>
-          </a:p>
-        </p:txBody>
-      </p:sp>
-      <p:sp>
-        <p:nvSpPr>
-          <p:cNvPr id="3" name="Content Placeholder 2">
-            <a:extLst>
-              <a:ext uri="{FF2B5EF4-FFF2-40B4-BE49-F238E27FC236}">
-                <a16:creationId xmlns:a16="http://schemas.microsoft.com/office/drawing/2014/main" id="{B96BE912-052B-BA95-19F6-1D3546E7B6A5}"/>
-              </a:ext>
-            </a:extLst>
-          </p:cNvPr>
-          <p:cNvSpPr>
-            <a:spLocks noGrp="1"/>
-          </p:cNvSpPr>
-          <p:nvPr>
-            <p:ph idx="1"/>
-          </p:nvPr>
-        </p:nvSpPr>
-        <p:spPr>
-          <a:xfrm>
-            <a:off x="838200" y="3579951"/>
-            <a:ext cx="10515600" cy="2597012"/>
-          </a:xfrm>
-        </p:spPr>
-        <p:txBody>
-          <a:bodyPr/>
-          <a:lstStyle/>
-          <a:p>
-            <a:r>
-              <a:rPr lang="ru-RU" dirty="0"/>
-              <a:t>Функция позволяет задать:</a:t>
-            </a:r>
-          </a:p>
-          <a:p>
-            <a:pPr lvl="1"/>
-            <a:r>
-              <a:rPr lang="ru-RU" dirty="0"/>
-              <a:t>Атрибуты безопасности и размер стека</a:t>
-            </a:r>
-          </a:p>
-          <a:p>
-            <a:pPr lvl="1"/>
-            <a:r>
-              <a:rPr lang="ru-RU" dirty="0"/>
-              <a:t>Стартовую функцию и её аргумент</a:t>
-            </a:r>
-          </a:p>
-          <a:p>
-            <a:pPr lvl="1"/>
-            <a:r>
-              <a:rPr lang="ru-RU" dirty="0"/>
-              <a:t>Флаги создания, указатель на ID потока</a:t>
-            </a:r>
-            <a:endParaRPr lang="en-US" dirty="0"/>
-          </a:p>
-        </p:txBody>
-      </p:sp>
-      <p:sp>
-        <p:nvSpPr>
-          <p:cNvPr id="5" name="TextBox 4">
-            <a:extLst>
-              <a:ext uri="{FF2B5EF4-FFF2-40B4-BE49-F238E27FC236}">
-                <a16:creationId xmlns:a16="http://schemas.microsoft.com/office/drawing/2014/main" id="{FA48FC7A-D28B-F845-6E1C-B2A8BAFEE413}"/>
-              </a:ext>
-            </a:extLst>
-          </p:cNvPr>
-          <p:cNvSpPr txBox="1"/>
-          <p:nvPr/>
-        </p:nvSpPr>
-        <p:spPr>
-          <a:xfrm>
-            <a:off x="930730" y="1825625"/>
-            <a:ext cx="8306888" cy="1754326"/>
-          </a:xfrm>
-          <a:prstGeom prst="rect">
-            <a:avLst/>
-          </a:prstGeom>
-          <a:noFill/>
-        </p:spPr>
-        <p:txBody>
-          <a:bodyPr wrap="square">
-            <a:spAutoFit/>
-          </a:bodyPr>
-          <a:lstStyle/>
-          <a:p>
-            <a:pPr>
-              <a:buNone/>
-            </a:pPr>
-            <a:r>
-              <a:rPr lang="en-US" b="0" dirty="0">
-                <a:solidFill>
-                  <a:srgbClr val="2B91AF"/>
-                </a:solidFill>
-                <a:effectLst/>
-                <a:latin typeface="Consolas" panose="020B0609020204030204" pitchFamily="49" charset="0"/>
-              </a:rPr>
-              <a:t>HANDLE</a:t>
-            </a:r>
-            <a:r>
-              <a:rPr lang="en-US" b="0" dirty="0">
-                <a:solidFill>
-                  <a:srgbClr val="000000"/>
-                </a:solidFill>
-                <a:effectLst/>
-                <a:latin typeface="Consolas" panose="020B0609020204030204" pitchFamily="49" charset="0"/>
-              </a:rPr>
-              <a:t> </a:t>
-            </a:r>
-            <a:r>
-              <a:rPr lang="en-US" b="0" dirty="0" err="1">
-                <a:solidFill>
-                  <a:srgbClr val="74531F"/>
-                </a:solidFill>
-                <a:effectLst/>
-                <a:latin typeface="Consolas" panose="020B0609020204030204" pitchFamily="49" charset="0"/>
-              </a:rPr>
-              <a:t>CreateThread</a:t>
-            </a:r>
-            <a:r>
-              <a:rPr lang="en-US" b="0" dirty="0">
-                <a:solidFill>
-                  <a:srgbClr val="000000"/>
-                </a:solidFill>
-                <a:effectLst/>
-                <a:latin typeface="Consolas" panose="020B0609020204030204" pitchFamily="49" charset="0"/>
-              </a:rPr>
-              <a:t>(</a:t>
-            </a:r>
-            <a:r>
-              <a:rPr lang="en-US" b="0" dirty="0">
-                <a:solidFill>
-                  <a:srgbClr val="2B91AF"/>
-                </a:solidFill>
-                <a:effectLst/>
-                <a:latin typeface="Consolas" panose="020B0609020204030204" pitchFamily="49" charset="0"/>
-              </a:rPr>
-              <a:t>LPSECURITY_ATTRIBUTES</a:t>
-            </a:r>
-            <a:r>
-              <a:rPr lang="en-US" b="0" dirty="0">
-                <a:solidFill>
-                  <a:srgbClr val="000000"/>
-                </a:solidFill>
-                <a:effectLst/>
-                <a:latin typeface="Consolas" panose="020B0609020204030204" pitchFamily="49" charset="0"/>
-              </a:rPr>
-              <a:t> </a:t>
-            </a:r>
-            <a:r>
-              <a:rPr lang="en-US" b="0" dirty="0" err="1">
-                <a:solidFill>
-                  <a:srgbClr val="808080"/>
-                </a:solidFill>
-                <a:effectLst/>
-                <a:latin typeface="Consolas" panose="020B0609020204030204" pitchFamily="49" charset="0"/>
-              </a:rPr>
-              <a:t>lpThreadAttributes</a:t>
-            </a:r>
-            <a:r>
-              <a:rPr lang="en-US" b="0" dirty="0">
-                <a:solidFill>
-                  <a:srgbClr val="000000"/>
-                </a:solidFill>
-                <a:effectLst/>
-                <a:latin typeface="Consolas" panose="020B0609020204030204" pitchFamily="49" charset="0"/>
-              </a:rPr>
-              <a:t>,</a:t>
-            </a:r>
-          </a:p>
-          <a:p>
-            <a:pPr>
-              <a:buNone/>
-            </a:pPr>
-            <a:r>
-              <a:rPr lang="en-US" b="0" dirty="0">
-                <a:solidFill>
-                  <a:srgbClr val="000000"/>
-                </a:solidFill>
-                <a:effectLst/>
-                <a:latin typeface="Consolas" panose="020B0609020204030204" pitchFamily="49" charset="0"/>
-              </a:rPr>
-              <a:t>                    </a:t>
-            </a:r>
-            <a:r>
-              <a:rPr lang="en-US" b="0" dirty="0">
-                <a:solidFill>
-                  <a:srgbClr val="2B91AF"/>
-                </a:solidFill>
-                <a:effectLst/>
-                <a:latin typeface="Consolas" panose="020B0609020204030204" pitchFamily="49" charset="0"/>
-              </a:rPr>
-              <a:t>SIZE_T</a:t>
-            </a:r>
-            <a:r>
-              <a:rPr lang="en-US" b="0" dirty="0">
-                <a:solidFill>
-                  <a:srgbClr val="000000"/>
-                </a:solidFill>
-                <a:effectLst/>
-                <a:latin typeface="Consolas" panose="020B0609020204030204" pitchFamily="49" charset="0"/>
-              </a:rPr>
-              <a:t> </a:t>
-            </a:r>
-            <a:r>
-              <a:rPr lang="en-US" b="0" dirty="0" err="1">
-                <a:solidFill>
-                  <a:srgbClr val="808080"/>
-                </a:solidFill>
-                <a:effectLst/>
-                <a:latin typeface="Consolas" panose="020B0609020204030204" pitchFamily="49" charset="0"/>
-              </a:rPr>
-              <a:t>dwStackSize</a:t>
-            </a:r>
-            <a:r>
-              <a:rPr lang="en-US" b="0" dirty="0">
-                <a:solidFill>
-                  <a:srgbClr val="000000"/>
-                </a:solidFill>
-                <a:effectLst/>
-                <a:latin typeface="Consolas" panose="020B0609020204030204" pitchFamily="49" charset="0"/>
-              </a:rPr>
-              <a:t>,</a:t>
-            </a:r>
-          </a:p>
-          <a:p>
-            <a:pPr>
-              <a:buNone/>
-            </a:pPr>
-            <a:r>
-              <a:rPr lang="en-US" b="0" dirty="0">
-                <a:solidFill>
-                  <a:srgbClr val="000000"/>
-                </a:solidFill>
-                <a:effectLst/>
-                <a:latin typeface="Consolas" panose="020B0609020204030204" pitchFamily="49" charset="0"/>
-              </a:rPr>
-              <a:t>                    </a:t>
-            </a:r>
-            <a:r>
-              <a:rPr lang="en-US" b="0" dirty="0">
-                <a:solidFill>
-                  <a:srgbClr val="2B91AF"/>
-                </a:solidFill>
-                <a:effectLst/>
-                <a:latin typeface="Consolas" panose="020B0609020204030204" pitchFamily="49" charset="0"/>
-              </a:rPr>
-              <a:t>LPTHREAD_START_ROUTINE</a:t>
-            </a:r>
-            <a:r>
-              <a:rPr lang="en-US" b="0" dirty="0">
-                <a:solidFill>
-                  <a:srgbClr val="000000"/>
-                </a:solidFill>
-                <a:effectLst/>
-                <a:latin typeface="Consolas" panose="020B0609020204030204" pitchFamily="49" charset="0"/>
-              </a:rPr>
-              <a:t> </a:t>
-            </a:r>
-            <a:r>
-              <a:rPr lang="en-US" b="0" dirty="0" err="1">
-                <a:solidFill>
-                  <a:srgbClr val="808080"/>
-                </a:solidFill>
-                <a:effectLst/>
-                <a:latin typeface="Consolas" panose="020B0609020204030204" pitchFamily="49" charset="0"/>
-              </a:rPr>
-              <a:t>lpStartAddress</a:t>
-            </a:r>
-            <a:r>
-              <a:rPr lang="en-US" b="0" dirty="0">
-                <a:solidFill>
-                  <a:srgbClr val="000000"/>
-                </a:solidFill>
-                <a:effectLst/>
-                <a:latin typeface="Consolas" panose="020B0609020204030204" pitchFamily="49" charset="0"/>
-              </a:rPr>
-              <a:t>,</a:t>
-            </a:r>
-          </a:p>
-          <a:p>
-            <a:pPr>
-              <a:buNone/>
-            </a:pPr>
-            <a:r>
-              <a:rPr lang="en-US" b="0" dirty="0">
-                <a:solidFill>
-                  <a:srgbClr val="000000"/>
-                </a:solidFill>
-                <a:effectLst/>
-                <a:latin typeface="Consolas" panose="020B0609020204030204" pitchFamily="49" charset="0"/>
-              </a:rPr>
-              <a:t>                    </a:t>
-            </a:r>
-            <a:r>
-              <a:rPr lang="en-US" b="0" dirty="0">
-                <a:solidFill>
-                  <a:srgbClr val="2B91AF"/>
-                </a:solidFill>
-                <a:effectLst/>
-                <a:latin typeface="Consolas" panose="020B0609020204030204" pitchFamily="49" charset="0"/>
-              </a:rPr>
-              <a:t>LPVOID</a:t>
-            </a:r>
-            <a:r>
-              <a:rPr lang="en-US" b="0" dirty="0">
-                <a:solidFill>
-                  <a:srgbClr val="000000"/>
-                </a:solidFill>
-                <a:effectLst/>
-                <a:latin typeface="Consolas" panose="020B0609020204030204" pitchFamily="49" charset="0"/>
-              </a:rPr>
-              <a:t> </a:t>
-            </a:r>
-            <a:r>
-              <a:rPr lang="en-US" b="0" dirty="0" err="1">
-                <a:solidFill>
-                  <a:srgbClr val="808080"/>
-                </a:solidFill>
-                <a:effectLst/>
-                <a:latin typeface="Consolas" panose="020B0609020204030204" pitchFamily="49" charset="0"/>
-              </a:rPr>
-              <a:t>lpParameter</a:t>
-            </a:r>
-            <a:r>
-              <a:rPr lang="en-US" b="0" dirty="0">
-                <a:solidFill>
-                  <a:srgbClr val="000000"/>
-                </a:solidFill>
-                <a:effectLst/>
-                <a:latin typeface="Consolas" panose="020B0609020204030204" pitchFamily="49" charset="0"/>
-              </a:rPr>
-              <a:t>,</a:t>
-            </a:r>
-          </a:p>
-          <a:p>
-            <a:pPr>
-              <a:buNone/>
-            </a:pPr>
-            <a:r>
-              <a:rPr lang="en-US" b="0" dirty="0">
-                <a:solidFill>
-                  <a:srgbClr val="000000"/>
-                </a:solidFill>
-                <a:effectLst/>
-                <a:latin typeface="Consolas" panose="020B0609020204030204" pitchFamily="49" charset="0"/>
-              </a:rPr>
-              <a:t>                    </a:t>
-            </a:r>
-            <a:r>
-              <a:rPr lang="en-US" b="0" dirty="0">
-                <a:solidFill>
-                  <a:srgbClr val="2B91AF"/>
-                </a:solidFill>
-                <a:effectLst/>
-                <a:latin typeface="Consolas" panose="020B0609020204030204" pitchFamily="49" charset="0"/>
-              </a:rPr>
-              <a:t>DWORD</a:t>
-            </a:r>
-            <a:r>
-              <a:rPr lang="en-US" b="0" dirty="0">
-                <a:solidFill>
-                  <a:srgbClr val="000000"/>
-                </a:solidFill>
-                <a:effectLst/>
-                <a:latin typeface="Consolas" panose="020B0609020204030204" pitchFamily="49" charset="0"/>
-              </a:rPr>
-              <a:t> </a:t>
-            </a:r>
-            <a:r>
-              <a:rPr lang="en-US" b="0" dirty="0" err="1">
-                <a:solidFill>
-                  <a:srgbClr val="808080"/>
-                </a:solidFill>
-                <a:effectLst/>
-                <a:latin typeface="Consolas" panose="020B0609020204030204" pitchFamily="49" charset="0"/>
-              </a:rPr>
-              <a:t>dwCreationFlags</a:t>
-            </a:r>
-            <a:r>
-              <a:rPr lang="en-US" b="0" dirty="0">
-                <a:solidFill>
-                  <a:srgbClr val="000000"/>
-                </a:solidFill>
-                <a:effectLst/>
-                <a:latin typeface="Consolas" panose="020B0609020204030204" pitchFamily="49" charset="0"/>
-              </a:rPr>
-              <a:t>,</a:t>
-            </a:r>
-          </a:p>
-          <a:p>
-            <a:r>
-              <a:rPr lang="en-US" b="0" dirty="0">
-                <a:solidFill>
-                  <a:srgbClr val="000000"/>
-                </a:solidFill>
-                <a:effectLst/>
-                <a:latin typeface="Consolas" panose="020B0609020204030204" pitchFamily="49" charset="0"/>
-              </a:rPr>
-              <a:t>                    </a:t>
-            </a:r>
-            <a:r>
-              <a:rPr lang="en-US" b="0" dirty="0">
-                <a:solidFill>
-                  <a:srgbClr val="2B91AF"/>
-                </a:solidFill>
-                <a:effectLst/>
-                <a:latin typeface="Consolas" panose="020B0609020204030204" pitchFamily="49" charset="0"/>
-              </a:rPr>
-              <a:t>LPDWORD</a:t>
-            </a:r>
-            <a:r>
-              <a:rPr lang="en-US" b="0" dirty="0">
-                <a:solidFill>
-                  <a:srgbClr val="000000"/>
-                </a:solidFill>
-                <a:effectLst/>
-                <a:latin typeface="Consolas" panose="020B0609020204030204" pitchFamily="49" charset="0"/>
-              </a:rPr>
-              <a:t> </a:t>
-            </a:r>
-            <a:r>
-              <a:rPr lang="en-US" b="0" dirty="0" err="1">
-                <a:solidFill>
-                  <a:srgbClr val="808080"/>
-                </a:solidFill>
-                <a:effectLst/>
-                <a:latin typeface="Consolas" panose="020B0609020204030204" pitchFamily="49" charset="0"/>
-              </a:rPr>
-              <a:t>lpThreadId</a:t>
-            </a:r>
-            <a:r>
-              <a:rPr lang="en-US" b="0" dirty="0">
-                <a:solidFill>
-                  <a:srgbClr val="000000"/>
-                </a:solidFill>
-                <a:effectLst/>
-                <a:latin typeface="Consolas" panose="020B0609020204030204" pitchFamily="49" charset="0"/>
-              </a:rPr>
-              <a:t>);</a:t>
-            </a:r>
-          </a:p>
-        </p:txBody>
-      </p:sp>
-    </p:spTree>
-    <p:extLst>
-      <p:ext uri="{BB962C8B-B14F-4D97-AF65-F5344CB8AC3E}">
-        <p14:creationId xmlns:p14="http://schemas.microsoft.com/office/powerpoint/2010/main" val="4247895051"/>
-      </p:ext>
-    </p:extLst>
-  </p:cSld>
-  <p:clrMapOvr>
-    <a:masterClrMapping/>
-  </p:clrMapOvr>
-</p:sld>
-</file>
-
-<file path=ppt/slides/slide6.xml><?xml version="1.0" encoding="utf-8"?>
-<p:sld xmlns:a="http://schemas.openxmlformats.org/drawingml/2006/main" xmlns:r="http://schemas.openxmlformats.org/officeDocument/2006/relationships" xmlns:p="http://schemas.openxmlformats.org/presentationml/2006/main">
-  <p:cSld>
-    <p:spTree>
-      <p:nvGrpSpPr>
-        <p:cNvPr id="1" name=""/>
-        <p:cNvGrpSpPr/>
-        <p:nvPr/>
-      </p:nvGrpSpPr>
-      <p:grpSpPr>
-        <a:xfrm>
-          <a:off x="0" y="0"/>
-          <a:ext cx="0" cy="0"/>
-          <a:chOff x="0" y="0"/>
-          <a:chExt cx="0" cy="0"/>
-        </a:xfrm>
-      </p:grpSpPr>
-      <p:sp>
-        <p:nvSpPr>
-          <p:cNvPr id="2" name="Title 1">
-            <a:extLst>
-              <a:ext uri="{FF2B5EF4-FFF2-40B4-BE49-F238E27FC236}">
-                <a16:creationId xmlns:a16="http://schemas.microsoft.com/office/drawing/2014/main" id="{4FDE8BB7-E0C7-BF44-B8D7-6790653CB18D}"/>
-              </a:ext>
-            </a:extLst>
-          </p:cNvPr>
-          <p:cNvSpPr>
-            <a:spLocks noGrp="1"/>
-          </p:cNvSpPr>
-          <p:nvPr>
-            <p:ph type="title"/>
-          </p:nvPr>
-        </p:nvSpPr>
-        <p:spPr/>
-        <p:txBody>
-          <a:bodyPr/>
-          <a:lstStyle/>
-          <a:p>
-            <a:r>
-              <a:rPr lang="ru-RU" dirty="0"/>
-              <a:t>Функции </a:t>
-            </a:r>
-            <a:r>
-              <a:rPr lang="en-US" dirty="0"/>
-              <a:t>_</a:t>
-            </a:r>
-            <a:r>
-              <a:rPr lang="en-US" dirty="0" err="1"/>
-              <a:t>beginthreadex</a:t>
-            </a:r>
-            <a:r>
-              <a:rPr lang="en-US" dirty="0"/>
-              <a:t> </a:t>
-            </a:r>
-            <a:r>
-              <a:rPr lang="ru-RU" dirty="0"/>
-              <a:t>и </a:t>
-            </a:r>
-            <a:r>
-              <a:rPr lang="en-US" dirty="0"/>
-              <a:t>_</a:t>
-            </a:r>
-            <a:r>
-              <a:rPr lang="en-US" dirty="0" err="1"/>
-              <a:t>endthreadex</a:t>
-            </a:r>
-            <a:endParaRPr lang="en-US" dirty="0"/>
-          </a:p>
-        </p:txBody>
-      </p:sp>
-      <p:sp>
-        <p:nvSpPr>
-          <p:cNvPr id="3" name="Content Placeholder 2">
-            <a:extLst>
-              <a:ext uri="{FF2B5EF4-FFF2-40B4-BE49-F238E27FC236}">
-                <a16:creationId xmlns:a16="http://schemas.microsoft.com/office/drawing/2014/main" id="{D35743E6-83BD-8662-FED0-20AEF5AEFB81}"/>
-              </a:ext>
-            </a:extLst>
-          </p:cNvPr>
-          <p:cNvSpPr>
-            <a:spLocks noGrp="1"/>
-          </p:cNvSpPr>
-          <p:nvPr>
-            <p:ph idx="1"/>
-          </p:nvPr>
-        </p:nvSpPr>
-        <p:spPr/>
-        <p:txBody>
-          <a:bodyPr/>
-          <a:lstStyle/>
-          <a:p>
-            <a:r>
-              <a:rPr lang="ru-RU"/>
-              <a:t>Функция </a:t>
-            </a:r>
-            <a:r>
-              <a:rPr lang="en-US"/>
-              <a:t>CreateThread</a:t>
-            </a:r>
-            <a:r>
-              <a:rPr lang="ru-RU"/>
-              <a:t> не подходит для C/C++ программ, так как C Run</a:t>
-            </a:r>
-            <a:r>
-              <a:rPr lang="en-US"/>
-              <a:t>t</a:t>
-            </a:r>
-            <a:r>
-              <a:rPr lang="ru-RU"/>
-              <a:t>ime (CRT) требует корректной инициализации потоков</a:t>
-            </a:r>
-            <a:r>
-              <a:rPr lang="en-US"/>
-              <a:t>:</a:t>
-            </a:r>
-          </a:p>
-          <a:p>
-            <a:pPr lvl="1"/>
-            <a:r>
-              <a:rPr lang="ru-RU"/>
-              <a:t>CRT поддерживает </a:t>
-            </a:r>
-            <a:r>
-              <a:rPr lang="ru-RU" b="1"/>
-              <a:t>переменные, специфичные для потока</a:t>
-            </a:r>
-            <a:r>
-              <a:rPr lang="ru-RU"/>
-              <a:t>:</a:t>
-            </a:r>
-            <a:endParaRPr lang="en-US"/>
-          </a:p>
-          <a:p>
-            <a:pPr lvl="2"/>
-            <a:r>
-              <a:rPr lang="ru-RU"/>
-              <a:t>Макрос </a:t>
-            </a:r>
-            <a:r>
-              <a:rPr lang="en-US"/>
-              <a:t>errno</a:t>
-            </a:r>
-            <a:r>
-              <a:rPr lang="ru-RU"/>
-              <a:t>, возвращающий код последней ошибки в текущем потоке</a:t>
-            </a:r>
-          </a:p>
-          <a:p>
-            <a:pPr lvl="2"/>
-            <a:r>
-              <a:rPr lang="ru-RU"/>
-              <a:t>У каждого </a:t>
-            </a:r>
-            <a:r>
-              <a:rPr lang="en-US"/>
-              <a:t>thread</a:t>
-            </a:r>
-            <a:r>
-              <a:rPr lang="ru-RU"/>
-              <a:t> должна быть свой экземпляр </a:t>
-            </a:r>
-            <a:r>
-              <a:rPr lang="en-US"/>
-              <a:t>errno</a:t>
-            </a:r>
-          </a:p>
-          <a:p>
-            <a:r>
-              <a:rPr lang="ru-RU"/>
-              <a:t>Решение:</a:t>
-            </a:r>
-          </a:p>
-          <a:p>
-            <a:pPr lvl="1"/>
-            <a:r>
-              <a:rPr lang="ru-RU"/>
-              <a:t>Использовать </a:t>
-            </a:r>
-            <a:r>
-              <a:rPr lang="en-US"/>
-              <a:t>_beginthreadex </a:t>
-            </a:r>
-            <a:r>
-              <a:rPr lang="ru-RU"/>
-              <a:t>и </a:t>
-            </a:r>
-            <a:r>
-              <a:rPr lang="en-US"/>
-              <a:t>_endthreadex</a:t>
-            </a:r>
-            <a:r>
-              <a:rPr lang="ru-RU"/>
-              <a:t> для </a:t>
-            </a:r>
-            <a:endParaRPr lang="en-US"/>
-          </a:p>
-          <a:p>
-            <a:pPr lvl="2"/>
-            <a:endParaRPr lang="en-US" dirty="0"/>
-          </a:p>
-        </p:txBody>
-      </p:sp>
-      <p:sp>
-        <p:nvSpPr>
-          <p:cNvPr id="8" name="TextBox 7">
-            <a:extLst>
-              <a:ext uri="{FF2B5EF4-FFF2-40B4-BE49-F238E27FC236}">
-                <a16:creationId xmlns:a16="http://schemas.microsoft.com/office/drawing/2014/main" id="{E68595FF-681B-AC00-807D-352ECACDAD0E}"/>
-              </a:ext>
-            </a:extLst>
-          </p:cNvPr>
-          <p:cNvSpPr txBox="1"/>
-          <p:nvPr/>
-        </p:nvSpPr>
-        <p:spPr>
-          <a:xfrm>
-            <a:off x="1283426" y="5111571"/>
-            <a:ext cx="10070374" cy="1671355"/>
-          </a:xfrm>
-          <a:prstGeom prst="rect">
-            <a:avLst/>
-          </a:prstGeom>
-          <a:noFill/>
-        </p:spPr>
-        <p:txBody>
-          <a:bodyPr wrap="square">
-            <a:spAutoFit/>
-          </a:bodyPr>
-          <a:lstStyle/>
-          <a:p>
-            <a:pPr>
-              <a:buNone/>
-            </a:pPr>
-            <a:r>
-              <a:rPr lang="en-US" b="0" dirty="0" err="1">
-                <a:solidFill>
-                  <a:srgbClr val="0000FF"/>
-                </a:solidFill>
-                <a:effectLst/>
-                <a:latin typeface="Consolas" panose="020B0609020204030204" pitchFamily="49" charset="0"/>
-              </a:rPr>
-              <a:t>uintptr_t</a:t>
-            </a:r>
-            <a:r>
-              <a:rPr lang="en-US" b="0" dirty="0">
-                <a:solidFill>
-                  <a:srgbClr val="000000"/>
-                </a:solidFill>
-                <a:effectLst/>
-                <a:latin typeface="Consolas" panose="020B0609020204030204" pitchFamily="49" charset="0"/>
-              </a:rPr>
-              <a:t> </a:t>
-            </a:r>
-            <a:r>
-              <a:rPr lang="en-US" b="0" dirty="0">
-                <a:solidFill>
-                  <a:srgbClr val="74531F"/>
-                </a:solidFill>
-                <a:effectLst/>
-                <a:latin typeface="Consolas" panose="020B0609020204030204" pitchFamily="49" charset="0"/>
-              </a:rPr>
-              <a:t>_</a:t>
-            </a:r>
-            <a:r>
-              <a:rPr lang="en-US" b="0" dirty="0" err="1">
-                <a:solidFill>
-                  <a:srgbClr val="74531F"/>
-                </a:solidFill>
-                <a:effectLst/>
-                <a:latin typeface="Consolas" panose="020B0609020204030204" pitchFamily="49" charset="0"/>
-              </a:rPr>
-              <a:t>beginthreadex</a:t>
-            </a:r>
-            <a:r>
-              <a:rPr lang="en-US" b="0" dirty="0">
-                <a:solidFill>
-                  <a:srgbClr val="000000"/>
-                </a:solidFill>
-                <a:effectLst/>
-                <a:latin typeface="Consolas" panose="020B0609020204030204" pitchFamily="49" charset="0"/>
-              </a:rPr>
-              <a:t>(</a:t>
-            </a:r>
-            <a:r>
-              <a:rPr lang="en-US" b="0" dirty="0">
-                <a:solidFill>
-                  <a:srgbClr val="0000FF"/>
-                </a:solidFill>
-                <a:effectLst/>
-                <a:latin typeface="Consolas" panose="020B0609020204030204" pitchFamily="49" charset="0"/>
-              </a:rPr>
-              <a:t>void</a:t>
-            </a:r>
-            <a:r>
-              <a:rPr lang="en-US" b="0" dirty="0">
-                <a:solidFill>
-                  <a:srgbClr val="000000"/>
-                </a:solidFill>
-                <a:effectLst/>
-                <a:latin typeface="Consolas" panose="020B0609020204030204" pitchFamily="49" charset="0"/>
-              </a:rPr>
-              <a:t> *</a:t>
-            </a:r>
-            <a:r>
-              <a:rPr lang="en-US" b="0" dirty="0">
-                <a:solidFill>
-                  <a:srgbClr val="808080"/>
-                </a:solidFill>
-                <a:effectLst/>
-                <a:latin typeface="Consolas" panose="020B0609020204030204" pitchFamily="49" charset="0"/>
-              </a:rPr>
-              <a:t>security</a:t>
-            </a:r>
-            <a:r>
-              <a:rPr lang="en-US" b="0" dirty="0">
-                <a:solidFill>
-                  <a:srgbClr val="000000"/>
-                </a:solidFill>
-                <a:effectLst/>
-                <a:latin typeface="Consolas" panose="020B0609020204030204" pitchFamily="49" charset="0"/>
-              </a:rPr>
-              <a:t>, </a:t>
-            </a:r>
-            <a:r>
-              <a:rPr lang="en-US" b="0" dirty="0">
-                <a:solidFill>
-                  <a:srgbClr val="0000FF"/>
-                </a:solidFill>
-                <a:effectLst/>
-                <a:latin typeface="Consolas" panose="020B0609020204030204" pitchFamily="49" charset="0"/>
-              </a:rPr>
-              <a:t>unsigned</a:t>
-            </a:r>
-            <a:r>
-              <a:rPr lang="en-US" b="0" dirty="0">
-                <a:solidFill>
-                  <a:srgbClr val="000000"/>
-                </a:solidFill>
-                <a:effectLst/>
-                <a:latin typeface="Consolas" panose="020B0609020204030204" pitchFamily="49" charset="0"/>
-              </a:rPr>
-              <a:t> </a:t>
-            </a:r>
-            <a:r>
-              <a:rPr lang="en-US" b="0" dirty="0" err="1">
-                <a:solidFill>
-                  <a:srgbClr val="808080"/>
-                </a:solidFill>
-                <a:effectLst/>
-                <a:latin typeface="Consolas" panose="020B0609020204030204" pitchFamily="49" charset="0"/>
-              </a:rPr>
-              <a:t>stack_size</a:t>
-            </a:r>
-            <a:r>
-              <a:rPr lang="en-US" b="0" dirty="0">
-                <a:solidFill>
-                  <a:srgbClr val="000000"/>
-                </a:solidFill>
-                <a:effectLst/>
-                <a:latin typeface="Consolas" panose="020B0609020204030204" pitchFamily="49" charset="0"/>
-              </a:rPr>
-              <a:t>,</a:t>
-            </a:r>
-          </a:p>
-          <a:p>
-            <a:pPr>
-              <a:buNone/>
-            </a:pPr>
-            <a:r>
-              <a:rPr lang="en-US" b="0" dirty="0">
-                <a:solidFill>
-                  <a:srgbClr val="000000"/>
-                </a:solidFill>
-                <a:effectLst/>
-                <a:latin typeface="Consolas" panose="020B0609020204030204" pitchFamily="49" charset="0"/>
-              </a:rPr>
-              <a:t>   </a:t>
-            </a:r>
-            <a:r>
-              <a:rPr lang="en-US" b="0" dirty="0">
-                <a:solidFill>
-                  <a:srgbClr val="0000FF"/>
-                </a:solidFill>
-                <a:effectLst/>
-                <a:latin typeface="Consolas" panose="020B0609020204030204" pitchFamily="49" charset="0"/>
-              </a:rPr>
-              <a:t>unsigned</a:t>
-            </a:r>
-            <a:r>
-              <a:rPr lang="en-US" b="0" dirty="0">
-                <a:solidFill>
-                  <a:srgbClr val="000000"/>
-                </a:solidFill>
-                <a:effectLst/>
-                <a:latin typeface="Consolas" panose="020B0609020204030204" pitchFamily="49" charset="0"/>
-              </a:rPr>
-              <a:t> ( __</a:t>
-            </a:r>
-            <a:r>
-              <a:rPr lang="en-US" b="0" dirty="0" err="1">
-                <a:solidFill>
-                  <a:srgbClr val="000000"/>
-                </a:solidFill>
-                <a:effectLst/>
-                <a:latin typeface="Consolas" panose="020B0609020204030204" pitchFamily="49" charset="0"/>
-              </a:rPr>
-              <a:t>stdcall</a:t>
-            </a:r>
-            <a:r>
-              <a:rPr lang="en-US" b="0" dirty="0">
-                <a:solidFill>
-                  <a:srgbClr val="000000"/>
-                </a:solidFill>
-                <a:effectLst/>
-                <a:latin typeface="Consolas" panose="020B0609020204030204" pitchFamily="49" charset="0"/>
-              </a:rPr>
-              <a:t> *</a:t>
-            </a:r>
-            <a:r>
-              <a:rPr lang="en-US" b="0" dirty="0" err="1">
-                <a:solidFill>
-                  <a:srgbClr val="808080"/>
-                </a:solidFill>
-                <a:effectLst/>
-                <a:latin typeface="Consolas" panose="020B0609020204030204" pitchFamily="49" charset="0"/>
-              </a:rPr>
-              <a:t>start_address</a:t>
-            </a:r>
-            <a:r>
-              <a:rPr lang="en-US" b="0" dirty="0">
-                <a:solidFill>
-                  <a:srgbClr val="000000"/>
-                </a:solidFill>
-                <a:effectLst/>
-                <a:latin typeface="Consolas" panose="020B0609020204030204" pitchFamily="49" charset="0"/>
-              </a:rPr>
-              <a:t> )( </a:t>
-            </a:r>
-            <a:r>
-              <a:rPr lang="en-US" b="0" dirty="0">
-                <a:solidFill>
-                  <a:srgbClr val="0000FF"/>
-                </a:solidFill>
-                <a:effectLst/>
-                <a:highlight>
-                  <a:srgbClr val="00FF00"/>
-                </a:highlight>
-                <a:latin typeface="Consolas" panose="020B0609020204030204" pitchFamily="49" charset="0"/>
-              </a:rPr>
-              <a:t>void</a:t>
-            </a:r>
-            <a:r>
-              <a:rPr lang="en-US" b="0" dirty="0">
-                <a:solidFill>
-                  <a:srgbClr val="000000"/>
-                </a:solidFill>
-                <a:effectLst/>
-                <a:highlight>
-                  <a:srgbClr val="00FF00"/>
-                </a:highlight>
-                <a:latin typeface="Consolas" panose="020B0609020204030204" pitchFamily="49" charset="0"/>
-              </a:rPr>
-              <a:t> *</a:t>
-            </a:r>
-            <a:r>
-              <a:rPr lang="en-US" b="0" dirty="0">
-                <a:solidFill>
-                  <a:srgbClr val="000000"/>
-                </a:solidFill>
-                <a:effectLst/>
-                <a:latin typeface="Consolas" panose="020B0609020204030204" pitchFamily="49" charset="0"/>
-              </a:rPr>
-              <a:t> ),</a:t>
-            </a:r>
-          </a:p>
-          <a:p>
-            <a:pPr>
-              <a:buNone/>
-            </a:pPr>
-            <a:r>
-              <a:rPr lang="en-US" b="0" dirty="0">
-                <a:solidFill>
-                  <a:srgbClr val="000000"/>
-                </a:solidFill>
-                <a:effectLst/>
-                <a:latin typeface="Consolas" panose="020B0609020204030204" pitchFamily="49" charset="0"/>
-              </a:rPr>
-              <a:t>   </a:t>
-            </a:r>
-            <a:r>
-              <a:rPr lang="en-US" b="0" dirty="0">
-                <a:solidFill>
-                  <a:srgbClr val="0000FF"/>
-                </a:solidFill>
-                <a:effectLst/>
-                <a:highlight>
-                  <a:srgbClr val="00FF00"/>
-                </a:highlight>
-                <a:latin typeface="Consolas" panose="020B0609020204030204" pitchFamily="49" charset="0"/>
-              </a:rPr>
-              <a:t>void</a:t>
-            </a:r>
-            <a:r>
-              <a:rPr lang="en-US" b="0" dirty="0">
-                <a:solidFill>
-                  <a:srgbClr val="000000"/>
-                </a:solidFill>
-                <a:effectLst/>
-                <a:highlight>
-                  <a:srgbClr val="00FF00"/>
-                </a:highlight>
-                <a:latin typeface="Consolas" panose="020B0609020204030204" pitchFamily="49" charset="0"/>
-              </a:rPr>
-              <a:t> *</a:t>
-            </a:r>
-            <a:r>
-              <a:rPr lang="en-US" b="0" dirty="0" err="1">
-                <a:solidFill>
-                  <a:srgbClr val="808080"/>
-                </a:solidFill>
-                <a:effectLst/>
-                <a:highlight>
-                  <a:srgbClr val="00FF00"/>
-                </a:highlight>
-                <a:latin typeface="Consolas" panose="020B0609020204030204" pitchFamily="49" charset="0"/>
-              </a:rPr>
-              <a:t>arglist</a:t>
-            </a:r>
-            <a:r>
-              <a:rPr lang="en-US" b="0" dirty="0">
-                <a:solidFill>
-                  <a:srgbClr val="000000"/>
-                </a:solidFill>
-                <a:effectLst/>
-                <a:latin typeface="Consolas" panose="020B0609020204030204" pitchFamily="49" charset="0"/>
-              </a:rPr>
-              <a:t>, </a:t>
-            </a:r>
-            <a:r>
-              <a:rPr lang="en-US" b="0" dirty="0">
-                <a:solidFill>
-                  <a:srgbClr val="0000FF"/>
-                </a:solidFill>
-                <a:effectLst/>
-                <a:latin typeface="Consolas" panose="020B0609020204030204" pitchFamily="49" charset="0"/>
-              </a:rPr>
-              <a:t>unsigned</a:t>
-            </a:r>
-            <a:r>
-              <a:rPr lang="en-US" b="0" dirty="0">
-                <a:solidFill>
-                  <a:srgbClr val="000000"/>
-                </a:solidFill>
-                <a:effectLst/>
-                <a:latin typeface="Consolas" panose="020B0609020204030204" pitchFamily="49" charset="0"/>
-              </a:rPr>
-              <a:t> </a:t>
-            </a:r>
-            <a:r>
-              <a:rPr lang="en-US" b="0" dirty="0" err="1">
-                <a:solidFill>
-                  <a:srgbClr val="808080"/>
-                </a:solidFill>
-                <a:effectLst/>
-                <a:latin typeface="Consolas" panose="020B0609020204030204" pitchFamily="49" charset="0"/>
-              </a:rPr>
-              <a:t>initflag</a:t>
-            </a:r>
-            <a:r>
-              <a:rPr lang="en-US" b="0" dirty="0">
-                <a:solidFill>
-                  <a:srgbClr val="000000"/>
-                </a:solidFill>
-                <a:effectLst/>
-                <a:latin typeface="Consolas" panose="020B0609020204030204" pitchFamily="49" charset="0"/>
-              </a:rPr>
-              <a:t>, </a:t>
-            </a:r>
-            <a:r>
-              <a:rPr lang="en-US" b="0" dirty="0">
-                <a:solidFill>
-                  <a:srgbClr val="0000FF"/>
-                </a:solidFill>
-                <a:effectLst/>
-                <a:latin typeface="Consolas" panose="020B0609020204030204" pitchFamily="49" charset="0"/>
-              </a:rPr>
-              <a:t>unsigned</a:t>
-            </a:r>
-            <a:r>
-              <a:rPr lang="en-US" b="0" dirty="0">
-                <a:solidFill>
-                  <a:srgbClr val="000000"/>
-                </a:solidFill>
-                <a:effectLst/>
-                <a:latin typeface="Consolas" panose="020B0609020204030204" pitchFamily="49" charset="0"/>
-              </a:rPr>
-              <a:t> *</a:t>
-            </a:r>
-            <a:r>
-              <a:rPr lang="en-US" b="0" dirty="0" err="1">
-                <a:solidFill>
-                  <a:srgbClr val="808080"/>
-                </a:solidFill>
-                <a:effectLst/>
-                <a:highlight>
-                  <a:srgbClr val="FFFF00"/>
-                </a:highlight>
-                <a:latin typeface="Consolas" panose="020B0609020204030204" pitchFamily="49" charset="0"/>
-              </a:rPr>
-              <a:t>thrdaddr</a:t>
-            </a:r>
-            <a:endParaRPr lang="en-US" b="0" dirty="0">
-              <a:solidFill>
-                <a:srgbClr val="000000"/>
-              </a:solidFill>
-              <a:effectLst/>
-              <a:highlight>
-                <a:srgbClr val="FFFF00"/>
-              </a:highlight>
-              <a:latin typeface="Consolas" panose="020B0609020204030204" pitchFamily="49" charset="0"/>
-            </a:endParaRPr>
-          </a:p>
-          <a:p>
-            <a:r>
-              <a:rPr lang="en-US" b="0" dirty="0">
-                <a:solidFill>
-                  <a:srgbClr val="000000"/>
-                </a:solidFill>
-                <a:effectLst/>
-                <a:latin typeface="Consolas" panose="020B0609020204030204" pitchFamily="49" charset="0"/>
-              </a:rPr>
-              <a:t>);</a:t>
-            </a:r>
-          </a:p>
-          <a:p>
-            <a:endParaRPr lang="en-US" dirty="0">
-              <a:solidFill>
-                <a:srgbClr val="000000"/>
-              </a:solidFill>
-              <a:latin typeface="Consolas" panose="020B0609020204030204" pitchFamily="49" charset="0"/>
-            </a:endParaRPr>
-          </a:p>
-          <a:p>
-            <a:pPr>
-              <a:lnSpc>
-                <a:spcPts val="1425"/>
-              </a:lnSpc>
-              <a:buNone/>
-            </a:pPr>
-            <a:r>
-              <a:rPr lang="en-US" dirty="0">
-                <a:solidFill>
-                  <a:srgbClr val="0000FF"/>
-                </a:solidFill>
-                <a:latin typeface="Consolas" panose="020B0609020204030204" pitchFamily="49" charset="0"/>
-              </a:rPr>
-              <a:t>void</a:t>
-            </a:r>
-            <a:r>
-              <a:rPr lang="en-US" dirty="0">
-                <a:solidFill>
-                  <a:srgbClr val="000000"/>
-                </a:solidFill>
-                <a:latin typeface="Consolas" panose="020B0609020204030204" pitchFamily="49" charset="0"/>
-              </a:rPr>
-              <a:t> </a:t>
-            </a:r>
-            <a:r>
-              <a:rPr lang="en-US" dirty="0">
-                <a:solidFill>
-                  <a:srgbClr val="74531F"/>
-                </a:solidFill>
-                <a:latin typeface="Consolas" panose="020B0609020204030204" pitchFamily="49" charset="0"/>
-              </a:rPr>
-              <a:t>_</a:t>
-            </a:r>
-            <a:r>
-              <a:rPr lang="en-US" dirty="0" err="1">
-                <a:solidFill>
-                  <a:srgbClr val="74531F"/>
-                </a:solidFill>
-                <a:latin typeface="Consolas" panose="020B0609020204030204" pitchFamily="49" charset="0"/>
-              </a:rPr>
-              <a:t>endthreadex</a:t>
-            </a:r>
-            <a:r>
-              <a:rPr lang="en-US" dirty="0">
-                <a:solidFill>
-                  <a:srgbClr val="000000"/>
-                </a:solidFill>
-                <a:latin typeface="Consolas" panose="020B0609020204030204" pitchFamily="49" charset="0"/>
-              </a:rPr>
-              <a:t>(</a:t>
-            </a:r>
-            <a:r>
-              <a:rPr lang="en-US" dirty="0">
-                <a:solidFill>
-                  <a:srgbClr val="0000FF"/>
-                </a:solidFill>
-                <a:latin typeface="Consolas" panose="020B0609020204030204" pitchFamily="49" charset="0"/>
-              </a:rPr>
-              <a:t>unsigned</a:t>
-            </a:r>
-            <a:r>
-              <a:rPr lang="en-US" dirty="0">
-                <a:solidFill>
-                  <a:srgbClr val="000000"/>
-                </a:solidFill>
-                <a:latin typeface="Consolas" panose="020B0609020204030204" pitchFamily="49" charset="0"/>
-              </a:rPr>
-              <a:t> </a:t>
-            </a:r>
-            <a:r>
-              <a:rPr lang="en-US" dirty="0" err="1">
-                <a:solidFill>
-                  <a:srgbClr val="808080"/>
-                </a:solidFill>
-                <a:highlight>
-                  <a:srgbClr val="FFFF00"/>
-                </a:highlight>
-                <a:latin typeface="Consolas" panose="020B0609020204030204" pitchFamily="49" charset="0"/>
-              </a:rPr>
-              <a:t>retval</a:t>
-            </a:r>
-            <a:r>
-              <a:rPr lang="en-US" dirty="0">
-                <a:solidFill>
-                  <a:srgbClr val="000000"/>
-                </a:solidFill>
-                <a:latin typeface="Consolas" panose="020B0609020204030204" pitchFamily="49" charset="0"/>
-              </a:rPr>
-              <a:t>);</a:t>
-            </a:r>
-          </a:p>
-        </p:txBody>
-      </p:sp>
-    </p:spTree>
-    <p:extLst>
-      <p:ext uri="{BB962C8B-B14F-4D97-AF65-F5344CB8AC3E}">
-        <p14:creationId xmlns:p14="http://schemas.microsoft.com/office/powerpoint/2010/main" val="2190846681"/>
-      </p:ext>
-    </p:extLst>
-  </p:cSld>
-  <p:clrMapOvr>
-    <a:masterClrMapping/>
-  </p:clrMapOvr>
-</p:sld>
-</file>
-
-<file path=ppt/slides/slide7.xml><?xml version="1.0" encoding="utf-8"?>
 <p:sld xmlns:a="http://schemas.openxmlformats.org/drawingml/2006/main" xmlns:r="http://schemas.openxmlformats.org/officeDocument/2006/relationships" xmlns:p="http://schemas.openxmlformats.org/presentationml/2006/main">
   <p:cSld>
     <p:spTree>
@@ -39061,7 +38877,15 @@
           <a:p>
             <a:r>
               <a:rPr lang="ru-RU" dirty="0"/>
-              <a:t>Когда использовать функции ОС для создания потока</a:t>
+              <a:t>Когда использовать ОС </a:t>
+            </a:r>
+            <a:r>
+              <a:rPr lang="en-US" dirty="0"/>
+              <a:t>API </a:t>
+            </a:r>
+            <a:r>
+              <a:rPr lang="ru-RU" dirty="0"/>
+              <a:t>напрямую</a:t>
             </a:r>
             <a:r>
               <a:rPr lang="en-US" dirty="0"/>
@@ -39089,48 +38913,135 @@
         <p:spPr/>
         <p:txBody>
           <a:bodyPr>
-            <a:normAutofit/>
+            <a:normAutofit fontScale="92500"/>
           </a:bodyPr>
           <a:lstStyle/>
           <a:p>
             <a:r>
               <a:rPr lang="ru-RU" dirty="0"/>
-              <a:t>Используйте функции ОС, если:</a:t>
+              <a:t>Использование </a:t>
+            </a:r>
+            <a:r>
+              <a:rPr lang="ru-RU" dirty="0" err="1"/>
+              <a:t>pthread</a:t>
+            </a:r>
+            <a:r>
+              <a:rPr lang="ru-RU" dirty="0"/>
+              <a:t> / </a:t>
+            </a:r>
+            <a:r>
+              <a:rPr lang="ru-RU" dirty="0" err="1"/>
+              <a:t>CreateThread</a:t>
+            </a:r>
+            <a:r>
+              <a:rPr lang="ru-RU" dirty="0"/>
+              <a:t> оправдано, если требуется:</a:t>
             </a:r>
           </a:p>
           <a:p>
             <a:pPr lvl="1"/>
             <a:r>
               <a:rPr lang="ru-RU" dirty="0"/>
-              <a:t>Требуется низкоуровневый контроль (размер стека, приоритет, атрибуты безопасности)</a:t>
+              <a:t>управление размером стека,</a:t>
             </a:r>
           </a:p>
           <a:p>
             <a:pPr lvl="1"/>
             <a:r>
               <a:rPr lang="ru-RU" dirty="0"/>
-              <a:t>Потоки используются в нестандартной среде (например, ядро ОС, драйверы)</a:t>
+              <a:t>настройка приоритета потока,</a:t>
             </a:r>
           </a:p>
           <a:p>
             <a:pPr lvl="1"/>
             <a:r>
               <a:rPr lang="ru-RU" dirty="0"/>
-              <a:t>Необходимы особые API ОС, недоступные стандартными способами</a:t>
-            </a:r>
-            <a:endParaRPr lang="en-US" dirty="0"/>
-          </a:p>
-          <a:p>
+              <a:t>специфичные атрибуты безопасности,</a:t>
+            </a:r>
+          </a:p>
+          <a:p>
+            <a:pPr lvl="1"/>
             <a:r>
               <a:rPr lang="ru-RU" dirty="0"/>
-              <a:t>В остальных случаях используйте средства стандартной библиотеки</a:t>
+              <a:t>интеграция с системным кодом (ядро, драйверы),</a:t>
             </a:r>
           </a:p>
           <a:p>
             <a:pPr lvl="1"/>
             <a:r>
               <a:rPr lang="ru-RU" dirty="0"/>
-              <a:t>Код будет переносимым</a:t>
+              <a:t>жёсткая привязка к платформе.</a:t>
+            </a:r>
+          </a:p>
+          <a:p>
+            <a:r>
+              <a:rPr lang="ru-RU" dirty="0"/>
+              <a:t>Во всех остальных случаях:</a:t>
+            </a:r>
+            <a:r>
+              <a:rPr lang="en-US" dirty="0"/>
+              <a:t> </a:t>
+            </a:r>
+            <a:r>
+              <a:rPr lang="ru-RU" dirty="0"/>
+              <a:t>Используйте </a:t>
+            </a:r>
+            <a:r>
+              <a:rPr lang="ru-RU" dirty="0" err="1"/>
+              <a:t>std</a:t>
+            </a:r>
+            <a:r>
+              <a:rPr lang="ru-RU" dirty="0"/>
+              <a:t>::</a:t>
+            </a:r>
+            <a:r>
+              <a:rPr lang="ru-RU" dirty="0" err="1"/>
+              <a:t>thread</a:t>
+            </a:r>
+            <a:r>
+              <a:rPr lang="ru-RU" dirty="0"/>
+              <a:t> или </a:t>
+            </a:r>
+            <a:r>
+              <a:rPr lang="ru-RU" dirty="0" err="1"/>
+              <a:t>std</a:t>
+            </a:r>
+            <a:r>
+              <a:rPr lang="ru-RU" dirty="0"/>
+              <a:t>::</a:t>
+            </a:r>
+            <a:r>
+              <a:rPr lang="ru-RU" dirty="0" err="1"/>
+              <a:t>jthread</a:t>
+            </a:r>
+            <a:endParaRPr lang="ru-RU" dirty="0"/>
+          </a:p>
+          <a:p>
+            <a:pPr lvl="1"/>
+            <a:r>
+              <a:rPr lang="ru-RU" dirty="0"/>
+              <a:t>переносимость,</a:t>
+            </a:r>
+          </a:p>
+          <a:p>
+            <a:pPr lvl="1"/>
+            <a:r>
+              <a:rPr lang="ru-RU" dirty="0"/>
+              <a:t>RAII,</a:t>
+            </a:r>
+          </a:p>
+          <a:p>
+            <a:pPr lvl="1"/>
+            <a:r>
+              <a:rPr lang="ru-RU" dirty="0"/>
+              <a:t>безопасное управление ресурсами,</a:t>
+            </a:r>
+          </a:p>
+          <a:p>
+            <a:pPr lvl="1"/>
+            <a:r>
+              <a:rPr lang="ru-RU" dirty="0"/>
+              <a:t>исключения вместо кодов ошибок.</a:t>
             </a:r>
           </a:p>
         </p:txBody>
@@ -39148,7 +39059,7 @@
 </p:sld>
 </file>
 
-<file path=ppt/slides/slide8.xml><?xml version="1.0" encoding="utf-8"?>
+<file path=ppt/slides/slide6.xml><?xml version="1.0" encoding="utf-8"?>
 <p:sld xmlns:a="http://schemas.openxmlformats.org/drawingml/2006/main" xmlns:r="http://schemas.openxmlformats.org/officeDocument/2006/relationships" xmlns:p="http://schemas.openxmlformats.org/presentationml/2006/main">
   <p:cSld>
     <p:spTree>
@@ -39235,7 +39146,7 @@
 </p:sld>
 </file>
 
-<file path=ppt/slides/slide9.xml><?xml version="1.0" encoding="utf-8"?>
+<file path=ppt/slides/slide7.xml><?xml version="1.0" encoding="utf-8"?>
 <p:sld xmlns:a="http://schemas.openxmlformats.org/drawingml/2006/main" xmlns:r="http://schemas.openxmlformats.org/officeDocument/2006/relationships" xmlns:p="http://schemas.openxmlformats.org/presentationml/2006/main">
   <p:cSld>
     <p:spTree>
@@ -39899,6 +39810,1291 @@
     <p:extLst>
       <p:ext uri="{BB962C8B-B14F-4D97-AF65-F5344CB8AC3E}">
         <p14:creationId xmlns:p14="http://schemas.microsoft.com/office/powerpoint/2010/main" val="2839372132"/>
+      </p:ext>
+    </p:extLst>
+  </p:cSld>
+  <p:clrMapOvr>
+    <a:masterClrMapping/>
+  </p:clrMapOvr>
+</p:sld>
+</file>
+
+<file path=ppt/slides/slide8.xml><?xml version="1.0" encoding="utf-8"?>
+<p:sld xmlns:a="http://schemas.openxmlformats.org/drawingml/2006/main" xmlns:r="http://schemas.openxmlformats.org/officeDocument/2006/relationships" xmlns:p="http://schemas.openxmlformats.org/presentationml/2006/main">
+  <p:cSld>
+    <p:spTree>
+      <p:nvGrpSpPr>
+        <p:cNvPr id="1" name=""/>
+        <p:cNvGrpSpPr/>
+        <p:nvPr/>
+      </p:nvGrpSpPr>
+      <p:grpSpPr>
+        <a:xfrm>
+          <a:off x="0" y="0"/>
+          <a:ext cx="0" cy="0"/>
+          <a:chOff x="0" y="0"/>
+          <a:chExt cx="0" cy="0"/>
+        </a:xfrm>
+      </p:grpSpPr>
+      <p:sp>
+        <p:nvSpPr>
+          <p:cNvPr id="2" name="Title 1">
+            <a:extLst>
+              <a:ext uri="{FF2B5EF4-FFF2-40B4-BE49-F238E27FC236}">
+                <a16:creationId xmlns:a16="http://schemas.microsoft.com/office/drawing/2014/main" id="{1772DDCD-2271-5B6E-9BCF-2C6328CDBC09}"/>
+              </a:ext>
+            </a:extLst>
+          </p:cNvPr>
+          <p:cNvSpPr>
+            <a:spLocks noGrp="1"/>
+          </p:cNvSpPr>
+          <p:nvPr>
+            <p:ph type="title"/>
+          </p:nvPr>
+        </p:nvSpPr>
+        <p:spPr/>
+        <p:txBody>
+          <a:bodyPr/>
+          <a:lstStyle/>
+          <a:p>
+            <a:r>
+              <a:rPr lang="ru-RU" dirty="0"/>
+              <a:t>Отпускаем поток</a:t>
+            </a:r>
+            <a:endParaRPr lang="en-US" dirty="0"/>
+          </a:p>
+        </p:txBody>
+      </p:sp>
+      <p:sp>
+        <p:nvSpPr>
+          <p:cNvPr id="4" name="TextBox 3">
+            <a:extLst>
+              <a:ext uri="{FF2B5EF4-FFF2-40B4-BE49-F238E27FC236}">
+                <a16:creationId xmlns:a16="http://schemas.microsoft.com/office/drawing/2014/main" id="{22E038B7-D03B-F79D-6037-E5FDB2A4BAD4}"/>
+              </a:ext>
+            </a:extLst>
+          </p:cNvPr>
+          <p:cNvSpPr txBox="1"/>
+          <p:nvPr/>
+        </p:nvSpPr>
+        <p:spPr>
+          <a:xfrm>
+            <a:off x="838200" y="2116476"/>
+            <a:ext cx="8308368" cy="3693319"/>
+          </a:xfrm>
+          <a:prstGeom prst="rect">
+            <a:avLst/>
+          </a:prstGeom>
+          <a:noFill/>
+        </p:spPr>
+        <p:txBody>
+          <a:bodyPr wrap="square">
+            <a:spAutoFit/>
+          </a:bodyPr>
+          <a:lstStyle/>
+          <a:p>
+            <a:r>
+              <a:rPr lang="en-US" b="0" dirty="0">
+                <a:solidFill>
+                  <a:srgbClr val="AF00DB"/>
+                </a:solidFill>
+                <a:effectLst/>
+                <a:latin typeface="Consolas" panose="020B0609020204030204" pitchFamily="49" charset="0"/>
+              </a:rPr>
+              <a:t>#include</a:t>
+            </a:r>
+            <a:r>
+              <a:rPr lang="en-US" b="0" dirty="0">
+                <a:solidFill>
+                  <a:srgbClr val="0000FF"/>
+                </a:solidFill>
+                <a:effectLst/>
+                <a:latin typeface="Consolas" panose="020B0609020204030204" pitchFamily="49" charset="0"/>
+              </a:rPr>
+              <a:t> </a:t>
+            </a:r>
+            <a:r>
+              <a:rPr lang="en-US" b="0" dirty="0">
+                <a:solidFill>
+                  <a:srgbClr val="A31515"/>
+                </a:solidFill>
+                <a:effectLst/>
+                <a:latin typeface="Consolas" panose="020B0609020204030204" pitchFamily="49" charset="0"/>
+              </a:rPr>
+              <a:t>&lt;iostream&gt;</a:t>
+            </a:r>
+            <a:endParaRPr lang="en-US" b="0" dirty="0">
+              <a:solidFill>
+                <a:srgbClr val="3B3B3B"/>
+              </a:solidFill>
+              <a:effectLst/>
+              <a:latin typeface="Consolas" panose="020B0609020204030204" pitchFamily="49" charset="0"/>
+            </a:endParaRPr>
+          </a:p>
+          <a:p>
+            <a:r>
+              <a:rPr lang="en-US" b="0" dirty="0">
+                <a:solidFill>
+                  <a:srgbClr val="AF00DB"/>
+                </a:solidFill>
+                <a:effectLst/>
+                <a:latin typeface="Consolas" panose="020B0609020204030204" pitchFamily="49" charset="0"/>
+              </a:rPr>
+              <a:t>#include</a:t>
+            </a:r>
+            <a:r>
+              <a:rPr lang="en-US" b="0" dirty="0">
+                <a:solidFill>
+                  <a:srgbClr val="0000FF"/>
+                </a:solidFill>
+                <a:effectLst/>
+                <a:latin typeface="Consolas" panose="020B0609020204030204" pitchFamily="49" charset="0"/>
+              </a:rPr>
+              <a:t> </a:t>
+            </a:r>
+            <a:r>
+              <a:rPr lang="en-US" b="0" dirty="0">
+                <a:solidFill>
+                  <a:srgbClr val="A31515"/>
+                </a:solidFill>
+                <a:effectLst/>
+                <a:latin typeface="Consolas" panose="020B0609020204030204" pitchFamily="49" charset="0"/>
+              </a:rPr>
+              <a:t>&lt;thread&gt;</a:t>
+            </a:r>
+            <a:endParaRPr lang="en-US" b="0" dirty="0">
+              <a:solidFill>
+                <a:srgbClr val="3B3B3B"/>
+              </a:solidFill>
+              <a:effectLst/>
+              <a:latin typeface="Consolas" panose="020B0609020204030204" pitchFamily="49" charset="0"/>
+            </a:endParaRPr>
+          </a:p>
+          <a:p>
+            <a:br>
+              <a:rPr lang="en-US" b="0" dirty="0">
+                <a:solidFill>
+                  <a:srgbClr val="3B3B3B"/>
+                </a:solidFill>
+                <a:effectLst/>
+                <a:latin typeface="Consolas" panose="020B0609020204030204" pitchFamily="49" charset="0"/>
+              </a:rPr>
+            </a:br>
+            <a:r>
+              <a:rPr lang="en-US" b="0" dirty="0">
+                <a:solidFill>
+                  <a:srgbClr val="0000FF"/>
+                </a:solidFill>
+                <a:effectLst/>
+                <a:latin typeface="Consolas" panose="020B0609020204030204" pitchFamily="49" charset="0"/>
+              </a:rPr>
+              <a:t>void</a:t>
+            </a:r>
+            <a:r>
+              <a:rPr lang="en-US" b="0" dirty="0">
+                <a:solidFill>
+                  <a:srgbClr val="3B3B3B"/>
+                </a:solidFill>
+                <a:effectLst/>
+                <a:latin typeface="Consolas" panose="020B0609020204030204" pitchFamily="49" charset="0"/>
+              </a:rPr>
+              <a:t> </a:t>
+            </a:r>
+            <a:r>
+              <a:rPr lang="en-US" b="0" dirty="0" err="1">
+                <a:solidFill>
+                  <a:srgbClr val="795E26"/>
+                </a:solidFill>
+                <a:effectLst/>
+                <a:latin typeface="Consolas" panose="020B0609020204030204" pitchFamily="49" charset="0"/>
+              </a:rPr>
+              <a:t>SayHello</a:t>
+            </a:r>
+            <a:r>
+              <a:rPr lang="en-US" b="0" dirty="0">
+                <a:solidFill>
+                  <a:srgbClr val="3B3B3B"/>
+                </a:solidFill>
+                <a:effectLst/>
+                <a:latin typeface="Consolas" panose="020B0609020204030204" pitchFamily="49" charset="0"/>
+              </a:rPr>
+              <a:t>()</a:t>
+            </a:r>
+          </a:p>
+          <a:p>
+            <a:r>
+              <a:rPr lang="en-US" b="0" dirty="0">
+                <a:solidFill>
+                  <a:srgbClr val="3B3B3B"/>
+                </a:solidFill>
+                <a:effectLst/>
+                <a:latin typeface="Consolas" panose="020B0609020204030204" pitchFamily="49" charset="0"/>
+              </a:rPr>
+              <a:t>{</a:t>
+            </a:r>
+          </a:p>
+          <a:p>
+            <a:r>
+              <a:rPr lang="en-US" b="0" dirty="0">
+                <a:solidFill>
+                  <a:srgbClr val="3B3B3B"/>
+                </a:solidFill>
+                <a:effectLst/>
+                <a:latin typeface="Consolas" panose="020B0609020204030204" pitchFamily="49" charset="0"/>
+              </a:rPr>
+              <a:t>    </a:t>
+            </a:r>
+            <a:r>
+              <a:rPr lang="en-US" b="0" dirty="0">
+                <a:solidFill>
+                  <a:srgbClr val="267F99"/>
+                </a:solidFill>
+                <a:effectLst/>
+                <a:latin typeface="Consolas" panose="020B0609020204030204" pitchFamily="49" charset="0"/>
+              </a:rPr>
+              <a:t>std</a:t>
+            </a:r>
+            <a:r>
+              <a:rPr lang="en-US" b="0" dirty="0">
+                <a:solidFill>
+                  <a:srgbClr val="3B3B3B"/>
+                </a:solidFill>
+                <a:effectLst/>
+                <a:latin typeface="Consolas" panose="020B0609020204030204" pitchFamily="49" charset="0"/>
+              </a:rPr>
+              <a:t>::</a:t>
+            </a:r>
+            <a:r>
+              <a:rPr lang="en-US" b="0" dirty="0" err="1">
+                <a:solidFill>
+                  <a:srgbClr val="001080"/>
+                </a:solidFill>
+                <a:effectLst/>
+                <a:latin typeface="Consolas" panose="020B0609020204030204" pitchFamily="49" charset="0"/>
+              </a:rPr>
+              <a:t>cout</a:t>
+            </a:r>
+            <a:r>
+              <a:rPr lang="en-US" b="0" dirty="0">
+                <a:solidFill>
+                  <a:srgbClr val="3B3B3B"/>
+                </a:solidFill>
+                <a:effectLst/>
+                <a:latin typeface="Consolas" panose="020B0609020204030204" pitchFamily="49" charset="0"/>
+              </a:rPr>
+              <a:t> </a:t>
+            </a:r>
+            <a:r>
+              <a:rPr lang="en-US" b="0" dirty="0">
+                <a:solidFill>
+                  <a:srgbClr val="795E26"/>
+                </a:solidFill>
+                <a:effectLst/>
+                <a:latin typeface="Consolas" panose="020B0609020204030204" pitchFamily="49" charset="0"/>
+              </a:rPr>
+              <a:t>&lt;&lt;</a:t>
+            </a:r>
+            <a:r>
+              <a:rPr lang="en-US" b="0" dirty="0">
+                <a:solidFill>
+                  <a:srgbClr val="3B3B3B"/>
+                </a:solidFill>
+                <a:effectLst/>
+                <a:latin typeface="Consolas" panose="020B0609020204030204" pitchFamily="49" charset="0"/>
+              </a:rPr>
+              <a:t> </a:t>
+            </a:r>
+            <a:r>
+              <a:rPr lang="en-US" b="0" dirty="0">
+                <a:solidFill>
+                  <a:srgbClr val="A31515"/>
+                </a:solidFill>
+                <a:effectLst/>
+                <a:latin typeface="Consolas" panose="020B0609020204030204" pitchFamily="49" charset="0"/>
+              </a:rPr>
+              <a:t>"Hello, world</a:t>
+            </a:r>
+            <a:r>
+              <a:rPr lang="en-US" b="0" dirty="0">
+                <a:solidFill>
+                  <a:srgbClr val="EE0000"/>
+                </a:solidFill>
+                <a:effectLst/>
+                <a:latin typeface="Consolas" panose="020B0609020204030204" pitchFamily="49" charset="0"/>
+              </a:rPr>
+              <a:t>\n</a:t>
+            </a:r>
+            <a:r>
+              <a:rPr lang="en-US" b="0" dirty="0">
+                <a:solidFill>
+                  <a:srgbClr val="A31515"/>
+                </a:solidFill>
+                <a:effectLst/>
+                <a:latin typeface="Consolas" panose="020B0609020204030204" pitchFamily="49" charset="0"/>
+              </a:rPr>
+              <a:t>"</a:t>
+            </a:r>
+            <a:r>
+              <a:rPr lang="en-US" b="0" dirty="0">
+                <a:solidFill>
+                  <a:srgbClr val="3B3B3B"/>
+                </a:solidFill>
+                <a:effectLst/>
+                <a:latin typeface="Consolas" panose="020B0609020204030204" pitchFamily="49" charset="0"/>
+              </a:rPr>
+              <a:t>;</a:t>
+            </a:r>
+          </a:p>
+          <a:p>
+            <a:r>
+              <a:rPr lang="en-US" b="0" dirty="0">
+                <a:solidFill>
+                  <a:srgbClr val="3B3B3B"/>
+                </a:solidFill>
+                <a:effectLst/>
+                <a:latin typeface="Consolas" panose="020B0609020204030204" pitchFamily="49" charset="0"/>
+              </a:rPr>
+              <a:t>}</a:t>
+            </a:r>
+          </a:p>
+          <a:p>
+            <a:br>
+              <a:rPr lang="en-US" b="0" dirty="0">
+                <a:solidFill>
+                  <a:srgbClr val="3B3B3B"/>
+                </a:solidFill>
+                <a:effectLst/>
+                <a:latin typeface="Consolas" panose="020B0609020204030204" pitchFamily="49" charset="0"/>
+              </a:rPr>
+            </a:br>
+            <a:r>
+              <a:rPr lang="en-US" b="0" dirty="0">
+                <a:solidFill>
+                  <a:srgbClr val="0000FF"/>
+                </a:solidFill>
+                <a:effectLst/>
+                <a:latin typeface="Consolas" panose="020B0609020204030204" pitchFamily="49" charset="0"/>
+              </a:rPr>
+              <a:t>int</a:t>
+            </a:r>
+            <a:r>
+              <a:rPr lang="en-US" b="0" dirty="0">
+                <a:solidFill>
+                  <a:srgbClr val="3B3B3B"/>
+                </a:solidFill>
+                <a:effectLst/>
+                <a:latin typeface="Consolas" panose="020B0609020204030204" pitchFamily="49" charset="0"/>
+              </a:rPr>
+              <a:t> </a:t>
+            </a:r>
+            <a:r>
+              <a:rPr lang="en-US" b="0" dirty="0">
+                <a:solidFill>
+                  <a:srgbClr val="795E26"/>
+                </a:solidFill>
+                <a:effectLst/>
+                <a:latin typeface="Consolas" panose="020B0609020204030204" pitchFamily="49" charset="0"/>
+              </a:rPr>
+              <a:t>main</a:t>
+            </a:r>
+            <a:r>
+              <a:rPr lang="en-US" b="0" dirty="0">
+                <a:solidFill>
+                  <a:srgbClr val="3B3B3B"/>
+                </a:solidFill>
+                <a:effectLst/>
+                <a:latin typeface="Consolas" panose="020B0609020204030204" pitchFamily="49" charset="0"/>
+              </a:rPr>
+              <a:t>()</a:t>
+            </a:r>
+          </a:p>
+          <a:p>
+            <a:r>
+              <a:rPr lang="en-US" b="0" dirty="0">
+                <a:solidFill>
+                  <a:srgbClr val="3B3B3B"/>
+                </a:solidFill>
+                <a:effectLst/>
+                <a:latin typeface="Consolas" panose="020B0609020204030204" pitchFamily="49" charset="0"/>
+              </a:rPr>
+              <a:t>{</a:t>
+            </a:r>
+          </a:p>
+          <a:p>
+            <a:r>
+              <a:rPr lang="en-US" b="0" dirty="0">
+                <a:solidFill>
+                  <a:srgbClr val="3B3B3B"/>
+                </a:solidFill>
+                <a:effectLst/>
+                <a:latin typeface="Consolas" panose="020B0609020204030204" pitchFamily="49" charset="0"/>
+              </a:rPr>
+              <a:t>    </a:t>
+            </a:r>
+            <a:r>
+              <a:rPr lang="en-US" b="0" dirty="0">
+                <a:solidFill>
+                  <a:srgbClr val="267F99"/>
+                </a:solidFill>
+                <a:effectLst/>
+                <a:latin typeface="Consolas" panose="020B0609020204030204" pitchFamily="49" charset="0"/>
+              </a:rPr>
+              <a:t>std</a:t>
+            </a:r>
+            <a:r>
+              <a:rPr lang="en-US" b="0" dirty="0">
+                <a:solidFill>
+                  <a:srgbClr val="3B3B3B"/>
+                </a:solidFill>
+                <a:effectLst/>
+                <a:latin typeface="Consolas" panose="020B0609020204030204" pitchFamily="49" charset="0"/>
+              </a:rPr>
+              <a:t>::</a:t>
+            </a:r>
+            <a:r>
+              <a:rPr lang="en-US" b="0" dirty="0">
+                <a:solidFill>
+                  <a:srgbClr val="267F99"/>
+                </a:solidFill>
+                <a:effectLst/>
+                <a:latin typeface="Consolas" panose="020B0609020204030204" pitchFamily="49" charset="0"/>
+              </a:rPr>
+              <a:t>thread</a:t>
+            </a:r>
+            <a:r>
+              <a:rPr lang="en-US" b="0" dirty="0">
+                <a:solidFill>
+                  <a:srgbClr val="3B3B3B"/>
+                </a:solidFill>
+                <a:effectLst/>
+                <a:latin typeface="Consolas" panose="020B0609020204030204" pitchFamily="49" charset="0"/>
+              </a:rPr>
+              <a:t> </a:t>
+            </a:r>
+            <a:r>
+              <a:rPr lang="en-US" b="0" dirty="0">
+                <a:solidFill>
+                  <a:srgbClr val="001080"/>
+                </a:solidFill>
+                <a:effectLst/>
+                <a:latin typeface="Consolas" panose="020B0609020204030204" pitchFamily="49" charset="0"/>
+              </a:rPr>
+              <a:t>t</a:t>
+            </a:r>
+            <a:r>
+              <a:rPr lang="en-US" b="0" dirty="0">
+                <a:solidFill>
+                  <a:srgbClr val="3B3B3B"/>
+                </a:solidFill>
+                <a:effectLst/>
+                <a:latin typeface="Consolas" panose="020B0609020204030204" pitchFamily="49" charset="0"/>
+              </a:rPr>
+              <a:t>{ </a:t>
+            </a:r>
+            <a:r>
+              <a:rPr lang="en-US" b="0" dirty="0" err="1">
+                <a:solidFill>
+                  <a:srgbClr val="795E26"/>
+                </a:solidFill>
+                <a:effectLst/>
+                <a:latin typeface="Consolas" panose="020B0609020204030204" pitchFamily="49" charset="0"/>
+              </a:rPr>
+              <a:t>SayHello</a:t>
+            </a:r>
+            <a:r>
+              <a:rPr lang="en-US" b="0" dirty="0">
+                <a:solidFill>
+                  <a:srgbClr val="3B3B3B"/>
+                </a:solidFill>
+                <a:effectLst/>
+                <a:latin typeface="Consolas" panose="020B0609020204030204" pitchFamily="49" charset="0"/>
+              </a:rPr>
+              <a:t> };</a:t>
+            </a:r>
+          </a:p>
+          <a:p>
+            <a:r>
+              <a:rPr lang="en-US" b="0" dirty="0">
+                <a:solidFill>
+                  <a:srgbClr val="3B3B3B"/>
+                </a:solidFill>
+                <a:effectLst/>
+                <a:latin typeface="Consolas" panose="020B0609020204030204" pitchFamily="49" charset="0"/>
+              </a:rPr>
+              <a:t>    </a:t>
+            </a:r>
+            <a:r>
+              <a:rPr lang="en-US" b="0" dirty="0" err="1">
+                <a:solidFill>
+                  <a:srgbClr val="001080"/>
+                </a:solidFill>
+                <a:effectLst/>
+                <a:latin typeface="Consolas" panose="020B0609020204030204" pitchFamily="49" charset="0"/>
+              </a:rPr>
+              <a:t>t</a:t>
+            </a:r>
+            <a:r>
+              <a:rPr lang="en-US" b="0" dirty="0" err="1">
+                <a:solidFill>
+                  <a:srgbClr val="3B3B3B"/>
+                </a:solidFill>
+                <a:effectLst/>
+                <a:latin typeface="Consolas" panose="020B0609020204030204" pitchFamily="49" charset="0"/>
+              </a:rPr>
+              <a:t>.</a:t>
+            </a:r>
+            <a:r>
+              <a:rPr lang="en-US" b="1" dirty="0" err="1">
+                <a:solidFill>
+                  <a:srgbClr val="FF0000"/>
+                </a:solidFill>
+                <a:effectLst/>
+                <a:latin typeface="Consolas" panose="020B0609020204030204" pitchFamily="49" charset="0"/>
+              </a:rPr>
+              <a:t>detach</a:t>
+            </a:r>
+            <a:r>
+              <a:rPr lang="en-US" b="0" dirty="0">
+                <a:solidFill>
+                  <a:srgbClr val="3B3B3B"/>
+                </a:solidFill>
+                <a:effectLst/>
+                <a:latin typeface="Consolas" panose="020B0609020204030204" pitchFamily="49" charset="0"/>
+              </a:rPr>
+              <a:t>(); </a:t>
+            </a:r>
+            <a:r>
+              <a:rPr lang="ru-RU" b="0" dirty="0">
+                <a:solidFill>
+                  <a:srgbClr val="008000"/>
+                </a:solidFill>
+                <a:effectLst/>
+                <a:latin typeface="Consolas" panose="020B0609020204030204" pitchFamily="49" charset="0"/>
+              </a:rPr>
+              <a:t>// Отцепляем поток от объекта std::thread</a:t>
+            </a:r>
+            <a:endParaRPr lang="en-US" b="0" dirty="0">
+              <a:solidFill>
+                <a:srgbClr val="3B3B3B"/>
+              </a:solidFill>
+              <a:effectLst/>
+              <a:latin typeface="Consolas" panose="020B0609020204030204" pitchFamily="49" charset="0"/>
+            </a:endParaRPr>
+          </a:p>
+          <a:p>
+            <a:r>
+              <a:rPr lang="en-US" b="0" dirty="0">
+                <a:solidFill>
+                  <a:srgbClr val="3B3B3B"/>
+                </a:solidFill>
+                <a:effectLst/>
+                <a:latin typeface="Consolas" panose="020B0609020204030204" pitchFamily="49" charset="0"/>
+              </a:rPr>
+              <a:t>}</a:t>
+            </a:r>
+          </a:p>
+        </p:txBody>
+      </p:sp>
+      <p:sp>
+        <p:nvSpPr>
+          <p:cNvPr id="6" name="TextBox 5">
+            <a:extLst>
+              <a:ext uri="{FF2B5EF4-FFF2-40B4-BE49-F238E27FC236}">
+                <a16:creationId xmlns:a16="http://schemas.microsoft.com/office/drawing/2014/main" id="{0DDEE1B1-C641-A13D-B48D-308A71E86087}"/>
+              </a:ext>
+            </a:extLst>
+          </p:cNvPr>
+          <p:cNvSpPr txBox="1"/>
+          <p:nvPr/>
+        </p:nvSpPr>
+        <p:spPr>
+          <a:xfrm>
+            <a:off x="838200" y="6123543"/>
+            <a:ext cx="6097712" cy="369332"/>
+          </a:xfrm>
+          <a:prstGeom prst="rect">
+            <a:avLst/>
+          </a:prstGeom>
+          <a:noFill/>
+        </p:spPr>
+        <p:txBody>
+          <a:bodyPr wrap="square">
+            <a:spAutoFit/>
+          </a:bodyPr>
+          <a:lstStyle/>
+          <a:p>
+            <a:r>
+              <a:rPr lang="en-US" dirty="0">
+                <a:hlinkClick r:id="rId3"/>
+              </a:rPr>
+              <a:t>https://godbolt.org/z/xP4MqKoWT</a:t>
+            </a:r>
+            <a:r>
+              <a:rPr lang="en-US" dirty="0"/>
+              <a:t> </a:t>
+            </a:r>
+          </a:p>
+        </p:txBody>
+      </p:sp>
+      <p:pic>
+        <p:nvPicPr>
+          <p:cNvPr id="8" name="Picture 7">
+            <a:extLst>
+              <a:ext uri="{FF2B5EF4-FFF2-40B4-BE49-F238E27FC236}">
+                <a16:creationId xmlns:a16="http://schemas.microsoft.com/office/drawing/2014/main" id="{E4F02FE3-8C9C-0A9B-A008-BCF2EA772F04}"/>
+              </a:ext>
+            </a:extLst>
+          </p:cNvPr>
+          <p:cNvPicPr>
+            <a:picLocks noChangeAspect="1"/>
+          </p:cNvPicPr>
+          <p:nvPr/>
+        </p:nvPicPr>
+        <p:blipFill>
+          <a:blip r:embed="rId4"/>
+          <a:stretch>
+            <a:fillRect/>
+          </a:stretch>
+        </p:blipFill>
+        <p:spPr>
+          <a:xfrm>
+            <a:off x="8581584" y="2422867"/>
+            <a:ext cx="2467319" cy="2505425"/>
+          </a:xfrm>
+          <a:prstGeom prst="rect">
+            <a:avLst/>
+          </a:prstGeom>
+        </p:spPr>
+      </p:pic>
+    </p:spTree>
+    <p:extLst>
+      <p:ext uri="{BB962C8B-B14F-4D97-AF65-F5344CB8AC3E}">
+        <p14:creationId xmlns:p14="http://schemas.microsoft.com/office/powerpoint/2010/main" val="309632591"/>
+      </p:ext>
+    </p:extLst>
+  </p:cSld>
+  <p:clrMapOvr>
+    <a:masterClrMapping/>
+  </p:clrMapOvr>
+</p:sld>
+</file>
+
+<file path=ppt/slides/slide9.xml><?xml version="1.0" encoding="utf-8"?>
+<p:sld xmlns:a="http://schemas.openxmlformats.org/drawingml/2006/main" xmlns:r="http://schemas.openxmlformats.org/officeDocument/2006/relationships" xmlns:p="http://schemas.openxmlformats.org/presentationml/2006/main">
+  <p:cSld>
+    <p:spTree>
+      <p:nvGrpSpPr>
+        <p:cNvPr id="1" name=""/>
+        <p:cNvGrpSpPr/>
+        <p:nvPr/>
+      </p:nvGrpSpPr>
+      <p:grpSpPr>
+        <a:xfrm>
+          <a:off x="0" y="0"/>
+          <a:ext cx="0" cy="0"/>
+          <a:chOff x="0" y="0"/>
+          <a:chExt cx="0" cy="0"/>
+        </a:xfrm>
+      </p:grpSpPr>
+      <p:sp>
+        <p:nvSpPr>
+          <p:cNvPr id="2" name="Title 1">
+            <a:extLst>
+              <a:ext uri="{FF2B5EF4-FFF2-40B4-BE49-F238E27FC236}">
+                <a16:creationId xmlns:a16="http://schemas.microsoft.com/office/drawing/2014/main" id="{8D15A878-38C3-5D9C-7EC6-F709A660D141}"/>
+              </a:ext>
+            </a:extLst>
+          </p:cNvPr>
+          <p:cNvSpPr>
+            <a:spLocks noGrp="1"/>
+          </p:cNvSpPr>
+          <p:nvPr>
+            <p:ph type="title"/>
+          </p:nvPr>
+        </p:nvSpPr>
+        <p:spPr/>
+        <p:txBody>
+          <a:bodyPr/>
+          <a:lstStyle/>
+          <a:p>
+            <a:r>
+              <a:rPr lang="en-US" dirty="0"/>
+              <a:t>Joinable Thread (C++ 20)</a:t>
+            </a:r>
+          </a:p>
+        </p:txBody>
+      </p:sp>
+      <p:sp>
+        <p:nvSpPr>
+          <p:cNvPr id="4" name="TextBox 3">
+            <a:extLst>
+              <a:ext uri="{FF2B5EF4-FFF2-40B4-BE49-F238E27FC236}">
+                <a16:creationId xmlns:a16="http://schemas.microsoft.com/office/drawing/2014/main" id="{683E1C57-620C-D109-3A60-EBE541A778BD}"/>
+              </a:ext>
+            </a:extLst>
+          </p:cNvPr>
+          <p:cNvSpPr txBox="1"/>
+          <p:nvPr/>
+        </p:nvSpPr>
+        <p:spPr>
+          <a:xfrm>
+            <a:off x="838200" y="2126751"/>
+            <a:ext cx="8308368" cy="3693319"/>
+          </a:xfrm>
+          <a:prstGeom prst="rect">
+            <a:avLst/>
+          </a:prstGeom>
+          <a:noFill/>
+        </p:spPr>
+        <p:txBody>
+          <a:bodyPr wrap="square">
+            <a:spAutoFit/>
+          </a:bodyPr>
+          <a:lstStyle/>
+          <a:p>
+            <a:r>
+              <a:rPr lang="en-US" b="0" dirty="0">
+                <a:solidFill>
+                  <a:srgbClr val="AF00DB"/>
+                </a:solidFill>
+                <a:effectLst/>
+                <a:latin typeface="Consolas" panose="020B0609020204030204" pitchFamily="49" charset="0"/>
+              </a:rPr>
+              <a:t>#include</a:t>
+            </a:r>
+            <a:r>
+              <a:rPr lang="en-US" b="0" dirty="0">
+                <a:solidFill>
+                  <a:srgbClr val="0000FF"/>
+                </a:solidFill>
+                <a:effectLst/>
+                <a:latin typeface="Consolas" panose="020B0609020204030204" pitchFamily="49" charset="0"/>
+              </a:rPr>
+              <a:t> </a:t>
+            </a:r>
+            <a:r>
+              <a:rPr lang="en-US" b="0" dirty="0">
+                <a:solidFill>
+                  <a:srgbClr val="A31515"/>
+                </a:solidFill>
+                <a:effectLst/>
+                <a:latin typeface="Consolas" panose="020B0609020204030204" pitchFamily="49" charset="0"/>
+              </a:rPr>
+              <a:t>&lt;iostream&gt;</a:t>
+            </a:r>
+            <a:endParaRPr lang="en-US" b="0" dirty="0">
+              <a:solidFill>
+                <a:srgbClr val="3B3B3B"/>
+              </a:solidFill>
+              <a:effectLst/>
+              <a:latin typeface="Consolas" panose="020B0609020204030204" pitchFamily="49" charset="0"/>
+            </a:endParaRPr>
+          </a:p>
+          <a:p>
+            <a:r>
+              <a:rPr lang="en-US" b="0" dirty="0">
+                <a:solidFill>
+                  <a:srgbClr val="AF00DB"/>
+                </a:solidFill>
+                <a:effectLst/>
+                <a:latin typeface="Consolas" panose="020B0609020204030204" pitchFamily="49" charset="0"/>
+              </a:rPr>
+              <a:t>#include</a:t>
+            </a:r>
+            <a:r>
+              <a:rPr lang="en-US" b="0" dirty="0">
+                <a:solidFill>
+                  <a:srgbClr val="0000FF"/>
+                </a:solidFill>
+                <a:effectLst/>
+                <a:latin typeface="Consolas" panose="020B0609020204030204" pitchFamily="49" charset="0"/>
+              </a:rPr>
+              <a:t> </a:t>
+            </a:r>
+            <a:r>
+              <a:rPr lang="en-US" b="0" dirty="0">
+                <a:solidFill>
+                  <a:srgbClr val="A31515"/>
+                </a:solidFill>
+                <a:effectLst/>
+                <a:latin typeface="Consolas" panose="020B0609020204030204" pitchFamily="49" charset="0"/>
+              </a:rPr>
+              <a:t>&lt;thread&gt;</a:t>
+            </a:r>
+            <a:endParaRPr lang="en-US" b="0" dirty="0">
+              <a:solidFill>
+                <a:srgbClr val="3B3B3B"/>
+              </a:solidFill>
+              <a:effectLst/>
+              <a:latin typeface="Consolas" panose="020B0609020204030204" pitchFamily="49" charset="0"/>
+            </a:endParaRPr>
+          </a:p>
+          <a:p>
+            <a:br>
+              <a:rPr lang="en-US" b="0" dirty="0">
+                <a:solidFill>
+                  <a:srgbClr val="3B3B3B"/>
+                </a:solidFill>
+                <a:effectLst/>
+                <a:latin typeface="Consolas" panose="020B0609020204030204" pitchFamily="49" charset="0"/>
+              </a:rPr>
+            </a:br>
+            <a:r>
+              <a:rPr lang="en-US" b="0" dirty="0">
+                <a:solidFill>
+                  <a:srgbClr val="0000FF"/>
+                </a:solidFill>
+                <a:effectLst/>
+                <a:latin typeface="Consolas" panose="020B0609020204030204" pitchFamily="49" charset="0"/>
+              </a:rPr>
+              <a:t>void</a:t>
+            </a:r>
+            <a:r>
+              <a:rPr lang="en-US" b="0" dirty="0">
+                <a:solidFill>
+                  <a:srgbClr val="3B3B3B"/>
+                </a:solidFill>
+                <a:effectLst/>
+                <a:latin typeface="Consolas" panose="020B0609020204030204" pitchFamily="49" charset="0"/>
+              </a:rPr>
+              <a:t> </a:t>
+            </a:r>
+            <a:r>
+              <a:rPr lang="en-US" b="0" dirty="0" err="1">
+                <a:solidFill>
+                  <a:srgbClr val="795E26"/>
+                </a:solidFill>
+                <a:effectLst/>
+                <a:latin typeface="Consolas" panose="020B0609020204030204" pitchFamily="49" charset="0"/>
+              </a:rPr>
+              <a:t>SayHello</a:t>
+            </a:r>
+            <a:r>
+              <a:rPr lang="en-US" b="0" dirty="0">
+                <a:solidFill>
+                  <a:srgbClr val="3B3B3B"/>
+                </a:solidFill>
+                <a:effectLst/>
+                <a:latin typeface="Consolas" panose="020B0609020204030204" pitchFamily="49" charset="0"/>
+              </a:rPr>
+              <a:t>()</a:t>
+            </a:r>
+          </a:p>
+          <a:p>
+            <a:r>
+              <a:rPr lang="en-US" b="0" dirty="0">
+                <a:solidFill>
+                  <a:srgbClr val="3B3B3B"/>
+                </a:solidFill>
+                <a:effectLst/>
+                <a:latin typeface="Consolas" panose="020B0609020204030204" pitchFamily="49" charset="0"/>
+              </a:rPr>
+              <a:t>{</a:t>
+            </a:r>
+          </a:p>
+          <a:p>
+            <a:r>
+              <a:rPr lang="en-US" b="0" dirty="0">
+                <a:solidFill>
+                  <a:srgbClr val="3B3B3B"/>
+                </a:solidFill>
+                <a:effectLst/>
+                <a:latin typeface="Consolas" panose="020B0609020204030204" pitchFamily="49" charset="0"/>
+              </a:rPr>
+              <a:t>    </a:t>
+            </a:r>
+            <a:r>
+              <a:rPr lang="en-US" b="0" dirty="0">
+                <a:solidFill>
+                  <a:srgbClr val="267F99"/>
+                </a:solidFill>
+                <a:effectLst/>
+                <a:latin typeface="Consolas" panose="020B0609020204030204" pitchFamily="49" charset="0"/>
+              </a:rPr>
+              <a:t>std</a:t>
+            </a:r>
+            <a:r>
+              <a:rPr lang="en-US" b="0" dirty="0">
+                <a:solidFill>
+                  <a:srgbClr val="3B3B3B"/>
+                </a:solidFill>
+                <a:effectLst/>
+                <a:latin typeface="Consolas" panose="020B0609020204030204" pitchFamily="49" charset="0"/>
+              </a:rPr>
+              <a:t>::</a:t>
+            </a:r>
+            <a:r>
+              <a:rPr lang="en-US" b="0" dirty="0" err="1">
+                <a:solidFill>
+                  <a:srgbClr val="001080"/>
+                </a:solidFill>
+                <a:effectLst/>
+                <a:latin typeface="Consolas" panose="020B0609020204030204" pitchFamily="49" charset="0"/>
+              </a:rPr>
+              <a:t>cout</a:t>
+            </a:r>
+            <a:r>
+              <a:rPr lang="en-US" b="0" dirty="0">
+                <a:solidFill>
+                  <a:srgbClr val="3B3B3B"/>
+                </a:solidFill>
+                <a:effectLst/>
+                <a:latin typeface="Consolas" panose="020B0609020204030204" pitchFamily="49" charset="0"/>
+              </a:rPr>
+              <a:t> </a:t>
+            </a:r>
+            <a:r>
+              <a:rPr lang="en-US" b="0" dirty="0">
+                <a:solidFill>
+                  <a:srgbClr val="795E26"/>
+                </a:solidFill>
+                <a:effectLst/>
+                <a:latin typeface="Consolas" panose="020B0609020204030204" pitchFamily="49" charset="0"/>
+              </a:rPr>
+              <a:t>&lt;&lt;</a:t>
+            </a:r>
+            <a:r>
+              <a:rPr lang="en-US" b="0" dirty="0">
+                <a:solidFill>
+                  <a:srgbClr val="3B3B3B"/>
+                </a:solidFill>
+                <a:effectLst/>
+                <a:latin typeface="Consolas" panose="020B0609020204030204" pitchFamily="49" charset="0"/>
+              </a:rPr>
+              <a:t> </a:t>
+            </a:r>
+            <a:r>
+              <a:rPr lang="en-US" b="0" dirty="0">
+                <a:solidFill>
+                  <a:srgbClr val="A31515"/>
+                </a:solidFill>
+                <a:effectLst/>
+                <a:latin typeface="Consolas" panose="020B0609020204030204" pitchFamily="49" charset="0"/>
+              </a:rPr>
+              <a:t>"Hello, world</a:t>
+            </a:r>
+            <a:r>
+              <a:rPr lang="en-US" b="0" dirty="0">
+                <a:solidFill>
+                  <a:srgbClr val="EE0000"/>
+                </a:solidFill>
+                <a:effectLst/>
+                <a:latin typeface="Consolas" panose="020B0609020204030204" pitchFamily="49" charset="0"/>
+              </a:rPr>
+              <a:t>\n</a:t>
+            </a:r>
+            <a:r>
+              <a:rPr lang="en-US" b="0" dirty="0">
+                <a:solidFill>
+                  <a:srgbClr val="A31515"/>
+                </a:solidFill>
+                <a:effectLst/>
+                <a:latin typeface="Consolas" panose="020B0609020204030204" pitchFamily="49" charset="0"/>
+              </a:rPr>
+              <a:t>"</a:t>
+            </a:r>
+            <a:r>
+              <a:rPr lang="en-US" b="0" dirty="0">
+                <a:solidFill>
+                  <a:srgbClr val="3B3B3B"/>
+                </a:solidFill>
+                <a:effectLst/>
+                <a:latin typeface="Consolas" panose="020B0609020204030204" pitchFamily="49" charset="0"/>
+              </a:rPr>
+              <a:t>;</a:t>
+            </a:r>
+          </a:p>
+          <a:p>
+            <a:r>
+              <a:rPr lang="en-US" b="0" dirty="0">
+                <a:solidFill>
+                  <a:srgbClr val="3B3B3B"/>
+                </a:solidFill>
+                <a:effectLst/>
+                <a:latin typeface="Consolas" panose="020B0609020204030204" pitchFamily="49" charset="0"/>
+              </a:rPr>
+              <a:t>}</a:t>
+            </a:r>
+          </a:p>
+          <a:p>
+            <a:br>
+              <a:rPr lang="en-US" b="0" dirty="0">
+                <a:solidFill>
+                  <a:srgbClr val="3B3B3B"/>
+                </a:solidFill>
+                <a:effectLst/>
+                <a:latin typeface="Consolas" panose="020B0609020204030204" pitchFamily="49" charset="0"/>
+              </a:rPr>
+            </a:br>
+            <a:r>
+              <a:rPr lang="en-US" b="0" dirty="0">
+                <a:solidFill>
+                  <a:srgbClr val="0000FF"/>
+                </a:solidFill>
+                <a:effectLst/>
+                <a:latin typeface="Consolas" panose="020B0609020204030204" pitchFamily="49" charset="0"/>
+              </a:rPr>
+              <a:t>int</a:t>
+            </a:r>
+            <a:r>
+              <a:rPr lang="en-US" b="0" dirty="0">
+                <a:solidFill>
+                  <a:srgbClr val="3B3B3B"/>
+                </a:solidFill>
+                <a:effectLst/>
+                <a:latin typeface="Consolas" panose="020B0609020204030204" pitchFamily="49" charset="0"/>
+              </a:rPr>
+              <a:t> </a:t>
+            </a:r>
+            <a:r>
+              <a:rPr lang="en-US" b="0" dirty="0">
+                <a:solidFill>
+                  <a:srgbClr val="795E26"/>
+                </a:solidFill>
+                <a:effectLst/>
+                <a:latin typeface="Consolas" panose="020B0609020204030204" pitchFamily="49" charset="0"/>
+              </a:rPr>
+              <a:t>main</a:t>
+            </a:r>
+            <a:r>
+              <a:rPr lang="en-US" b="0" dirty="0">
+                <a:solidFill>
+                  <a:srgbClr val="3B3B3B"/>
+                </a:solidFill>
+                <a:effectLst/>
+                <a:latin typeface="Consolas" panose="020B0609020204030204" pitchFamily="49" charset="0"/>
+              </a:rPr>
+              <a:t>()</a:t>
+            </a:r>
+          </a:p>
+          <a:p>
+            <a:r>
+              <a:rPr lang="en-US" b="0" dirty="0">
+                <a:solidFill>
+                  <a:srgbClr val="3B3B3B"/>
+                </a:solidFill>
+                <a:effectLst/>
+                <a:latin typeface="Consolas" panose="020B0609020204030204" pitchFamily="49" charset="0"/>
+              </a:rPr>
+              <a:t>{</a:t>
+            </a:r>
+          </a:p>
+          <a:p>
+            <a:r>
+              <a:rPr lang="ru-RU" b="0" dirty="0">
+                <a:solidFill>
+                  <a:srgbClr val="3B3B3B"/>
+                </a:solidFill>
+                <a:effectLst/>
+                <a:latin typeface="Consolas" panose="020B0609020204030204" pitchFamily="49" charset="0"/>
+              </a:rPr>
+              <a:t>    </a:t>
+            </a:r>
+            <a:r>
+              <a:rPr lang="en-US" b="0" dirty="0">
+                <a:solidFill>
+                  <a:srgbClr val="267F99"/>
+                </a:solidFill>
+                <a:effectLst/>
+                <a:latin typeface="Consolas" panose="020B0609020204030204" pitchFamily="49" charset="0"/>
+              </a:rPr>
+              <a:t>std</a:t>
+            </a:r>
+            <a:r>
+              <a:rPr lang="en-US" b="0" dirty="0">
+                <a:solidFill>
+                  <a:srgbClr val="3B3B3B"/>
+                </a:solidFill>
+                <a:effectLst/>
+                <a:latin typeface="Consolas" panose="020B0609020204030204" pitchFamily="49" charset="0"/>
+              </a:rPr>
+              <a:t>::</a:t>
+            </a:r>
+            <a:r>
+              <a:rPr lang="en-US" b="1" dirty="0" err="1">
+                <a:solidFill>
+                  <a:srgbClr val="FF0000"/>
+                </a:solidFill>
+                <a:effectLst/>
+                <a:latin typeface="Consolas" panose="020B0609020204030204" pitchFamily="49" charset="0"/>
+              </a:rPr>
+              <a:t>jthread</a:t>
+            </a:r>
+            <a:r>
+              <a:rPr lang="en-US" b="0" dirty="0">
+                <a:solidFill>
+                  <a:srgbClr val="3B3B3B"/>
+                </a:solidFill>
+                <a:effectLst/>
+                <a:latin typeface="Consolas" panose="020B0609020204030204" pitchFamily="49" charset="0"/>
+              </a:rPr>
+              <a:t> </a:t>
+            </a:r>
+            <a:r>
+              <a:rPr lang="en-US" b="0" dirty="0">
+                <a:solidFill>
+                  <a:srgbClr val="001080"/>
+                </a:solidFill>
+                <a:effectLst/>
+                <a:latin typeface="Consolas" panose="020B0609020204030204" pitchFamily="49" charset="0"/>
+              </a:rPr>
+              <a:t>t</a:t>
+            </a:r>
+            <a:r>
+              <a:rPr lang="en-US" b="0" dirty="0">
+                <a:solidFill>
+                  <a:srgbClr val="3B3B3B"/>
+                </a:solidFill>
+                <a:effectLst/>
+                <a:latin typeface="Consolas" panose="020B0609020204030204" pitchFamily="49" charset="0"/>
+              </a:rPr>
+              <a:t>{</a:t>
+            </a:r>
+            <a:r>
+              <a:rPr lang="en-US" b="0" dirty="0" err="1">
+                <a:solidFill>
+                  <a:srgbClr val="795E26"/>
+                </a:solidFill>
+                <a:effectLst/>
+                <a:latin typeface="Consolas" panose="020B0609020204030204" pitchFamily="49" charset="0"/>
+              </a:rPr>
+              <a:t>SayHello</a:t>
+            </a:r>
+            <a:r>
+              <a:rPr lang="en-US" b="0" dirty="0">
+                <a:solidFill>
+                  <a:srgbClr val="3B3B3B"/>
+                </a:solidFill>
+                <a:effectLst/>
+                <a:latin typeface="Consolas" panose="020B0609020204030204" pitchFamily="49" charset="0"/>
+              </a:rPr>
+              <a:t>};</a:t>
+            </a:r>
+            <a:endParaRPr lang="ru-RU" b="0" dirty="0">
+              <a:solidFill>
+                <a:srgbClr val="3B3B3B"/>
+              </a:solidFill>
+              <a:effectLst/>
+              <a:latin typeface="Consolas" panose="020B0609020204030204" pitchFamily="49" charset="0"/>
+            </a:endParaRPr>
+          </a:p>
+          <a:p>
+            <a:r>
+              <a:rPr lang="ru-RU" dirty="0">
+                <a:solidFill>
+                  <a:srgbClr val="3B3B3B"/>
+                </a:solidFill>
+                <a:latin typeface="Consolas" panose="020B0609020204030204" pitchFamily="49" charset="0"/>
+              </a:rPr>
+              <a:t>    </a:t>
+            </a:r>
+            <a:r>
+              <a:rPr lang="ru-RU" b="0" dirty="0">
+                <a:solidFill>
+                  <a:srgbClr val="008000"/>
+                </a:solidFill>
+                <a:effectLst/>
+                <a:latin typeface="Consolas" panose="020B0609020204030204" pitchFamily="49" charset="0"/>
+              </a:rPr>
+              <a:t>// Деструктор объекта t автоматически вызовет метод join()</a:t>
+            </a:r>
+            <a:br>
+              <a:rPr lang="en-US" b="0" dirty="0">
+                <a:solidFill>
+                  <a:srgbClr val="3B3B3B"/>
+                </a:solidFill>
+                <a:effectLst/>
+                <a:latin typeface="Consolas" panose="020B0609020204030204" pitchFamily="49" charset="0"/>
+              </a:rPr>
+            </a:br>
+            <a:r>
+              <a:rPr lang="en-US" b="0" dirty="0">
+                <a:solidFill>
+                  <a:srgbClr val="3B3B3B"/>
+                </a:solidFill>
+                <a:effectLst/>
+                <a:latin typeface="Consolas" panose="020B0609020204030204" pitchFamily="49" charset="0"/>
+              </a:rPr>
+              <a:t>}</a:t>
+            </a:r>
+          </a:p>
+        </p:txBody>
+      </p:sp>
+      <p:sp>
+        <p:nvSpPr>
+          <p:cNvPr id="6" name="TextBox 5">
+            <a:extLst>
+              <a:ext uri="{FF2B5EF4-FFF2-40B4-BE49-F238E27FC236}">
+                <a16:creationId xmlns:a16="http://schemas.microsoft.com/office/drawing/2014/main" id="{C6E5DCBA-0AD6-F977-4C6E-CCD3F60DFFCD}"/>
+              </a:ext>
+            </a:extLst>
+          </p:cNvPr>
+          <p:cNvSpPr txBox="1"/>
+          <p:nvPr/>
+        </p:nvSpPr>
+        <p:spPr>
+          <a:xfrm>
+            <a:off x="838200" y="5912403"/>
+            <a:ext cx="6097712" cy="369332"/>
+          </a:xfrm>
+          <a:prstGeom prst="rect">
+            <a:avLst/>
+          </a:prstGeom>
+          <a:noFill/>
+        </p:spPr>
+        <p:txBody>
+          <a:bodyPr wrap="square">
+            <a:spAutoFit/>
+          </a:bodyPr>
+          <a:lstStyle/>
+          <a:p>
+            <a:r>
+              <a:rPr lang="en-US" dirty="0">
+                <a:hlinkClick r:id="rId3"/>
+              </a:rPr>
+              <a:t>https://godbolt.org/z/873bvT5Y6</a:t>
+            </a:r>
+            <a:r>
+              <a:rPr lang="en-US" dirty="0"/>
+              <a:t> </a:t>
+            </a:r>
+          </a:p>
+        </p:txBody>
+      </p:sp>
+      <p:pic>
+        <p:nvPicPr>
+          <p:cNvPr id="8" name="Picture 7">
+            <a:extLst>
+              <a:ext uri="{FF2B5EF4-FFF2-40B4-BE49-F238E27FC236}">
+                <a16:creationId xmlns:a16="http://schemas.microsoft.com/office/drawing/2014/main" id="{E980AD50-EB15-4954-A4F7-65AEDD1B974A}"/>
+              </a:ext>
+            </a:extLst>
+          </p:cNvPr>
+          <p:cNvPicPr>
+            <a:picLocks noChangeAspect="1"/>
+          </p:cNvPicPr>
+          <p:nvPr/>
+        </p:nvPicPr>
+        <p:blipFill>
+          <a:blip r:embed="rId4"/>
+          <a:stretch>
+            <a:fillRect/>
+          </a:stretch>
+        </p:blipFill>
+        <p:spPr>
+          <a:xfrm>
+            <a:off x="9070729" y="2269503"/>
+            <a:ext cx="2495898" cy="2524477"/>
+          </a:xfrm>
+          <a:prstGeom prst="rect">
+            <a:avLst/>
+          </a:prstGeom>
+        </p:spPr>
+      </p:pic>
+    </p:spTree>
+    <p:extLst>
+      <p:ext uri="{BB962C8B-B14F-4D97-AF65-F5344CB8AC3E}">
+        <p14:creationId xmlns:p14="http://schemas.microsoft.com/office/powerpoint/2010/main" val="3692857452"/>
       </p:ext>
     </p:extLst>
   </p:cSld>

--- a/lectures/03/Многопоточность в C++.pptx
+++ b/lectures/03/Многопоточность в C++.pptx
@@ -293,7 +293,7 @@
           <a:p>
             <a:fld id="{FED81A67-A27B-4083-940C-241E42A8E894}" type="datetimeFigureOut">
               <a:rPr lang="en-US" smtClean="0"/>
-              <a:t>2/13/2026</a:t>
+              <a:t>3/26/2026</a:t>
             </a:fld>
             <a:endParaRPr lang="en-US"/>
           </a:p>
@@ -709,7 +709,7 @@
           <a:p>
             <a:fld id="{8740D86D-1409-43B0-8811-9A559436DAB5}" type="slidenum">
               <a:rPr lang="en-US" smtClean="0"/>
-              <a:t>11</a:t>
+              <a:t>10</a:t>
             </a:fld>
             <a:endParaRPr lang="en-US"/>
           </a:p>
@@ -718,7 +718,7 @@
     </p:spTree>
     <p:extLst>
       <p:ext uri="{BB962C8B-B14F-4D97-AF65-F5344CB8AC3E}">
-        <p14:creationId xmlns:p14="http://schemas.microsoft.com/office/powerpoint/2010/main" val="4223482023"/>
+        <p14:creationId xmlns:p14="http://schemas.microsoft.com/office/powerpoint/2010/main" val="323937840"/>
       </p:ext>
     </p:extLst>
   </p:cSld>
@@ -793,7 +793,7 @@
           <a:p>
             <a:fld id="{8740D86D-1409-43B0-8811-9A559436DAB5}" type="slidenum">
               <a:rPr lang="en-US" smtClean="0"/>
-              <a:t>12</a:t>
+              <a:t>11</a:t>
             </a:fld>
             <a:endParaRPr lang="en-US"/>
           </a:p>
@@ -802,7 +802,7 @@
     </p:spTree>
     <p:extLst>
       <p:ext uri="{BB962C8B-B14F-4D97-AF65-F5344CB8AC3E}">
-        <p14:creationId xmlns:p14="http://schemas.microsoft.com/office/powerpoint/2010/main" val="4152509019"/>
+        <p14:creationId xmlns:p14="http://schemas.microsoft.com/office/powerpoint/2010/main" val="4223482023"/>
       </p:ext>
     </p:extLst>
   </p:cSld>
@@ -856,107 +856,7 @@
           <a:bodyPr/>
           <a:lstStyle/>
           <a:p>
-            <a:r>
-              <a:rPr lang="ru-RU" dirty="0"/>
-              <a:t>У потока есть </a:t>
-            </a:r>
-            <a:r>
-              <a:rPr lang="en-US" dirty="0"/>
-              <a:t>id. </a:t>
-            </a:r>
-            <a:r>
-              <a:rPr lang="ru-RU" dirty="0"/>
-              <a:t>Его можно получить у потока, вызвав метод </a:t>
-            </a:r>
-            <a:r>
-              <a:rPr lang="en-US" dirty="0" err="1"/>
-              <a:t>get_id</a:t>
-            </a:r>
-            <a:r>
-              <a:rPr lang="en-US" dirty="0"/>
-              <a:t>.</a:t>
-            </a:r>
-          </a:p>
-          <a:p>
-            <a:r>
-              <a:rPr lang="ru-RU" dirty="0"/>
-              <a:t>Если с объектом потока не связан поток, то вернётся сконструированное по умолчанию значение</a:t>
-            </a:r>
-          </a:p>
-          <a:p>
-            <a:r>
-              <a:rPr lang="ru-RU" dirty="0"/>
-              <a:t>Также можно вызвать функцию </a:t>
-            </a:r>
-            <a:r>
-              <a:rPr lang="en-US" dirty="0"/>
-              <a:t>std::</a:t>
-            </a:r>
-            <a:r>
-              <a:rPr lang="en-US" dirty="0" err="1"/>
-              <a:t>this_thread</a:t>
-            </a:r>
-            <a:r>
-              <a:rPr lang="en-US" dirty="0"/>
-              <a:t>::</a:t>
-            </a:r>
-            <a:r>
-              <a:rPr lang="en-US" dirty="0" err="1"/>
-              <a:t>get_id</a:t>
-            </a:r>
-            <a:r>
-              <a:rPr lang="en-US" dirty="0"/>
-              <a:t> </a:t>
-            </a:r>
-            <a:r>
-              <a:rPr lang="ru-RU" dirty="0"/>
-              <a:t>для получения</a:t>
-            </a:r>
-            <a:r>
-              <a:rPr lang="en-US" dirty="0"/>
-              <a:t> id </a:t>
-            </a:r>
-            <a:r>
-              <a:rPr lang="ru-RU" dirty="0"/>
-              <a:t>вызывающего потока.</a:t>
-            </a:r>
-          </a:p>
-          <a:p>
-            <a:r>
-              <a:rPr lang="en-US" dirty="0"/>
-              <a:t>Id </a:t>
-            </a:r>
-            <a:r>
-              <a:rPr lang="ru-RU" dirty="0"/>
-              <a:t>можно сравнивать, копировать и вычислять их </a:t>
-            </a:r>
-            <a:r>
-              <a:rPr lang="ru-RU" dirty="0" err="1"/>
-              <a:t>хеши</a:t>
-            </a:r>
-            <a:endParaRPr lang="ru-RU" dirty="0"/>
-          </a:p>
-          <a:p>
-            <a:endParaRPr lang="ru-RU" dirty="0"/>
-          </a:p>
-          <a:p>
-            <a:r>
-              <a:rPr lang="en-US" dirty="0"/>
-              <a:t>Id </a:t>
-            </a:r>
-            <a:r>
-              <a:rPr lang="ru-RU" dirty="0"/>
-              <a:t>потока можно использовать для того, чтобы отличить один поток от другого. После того, как поток завершил свою работу, его </a:t>
-            </a:r>
-            <a:r>
-              <a:rPr lang="en-US" dirty="0"/>
-              <a:t>id </a:t>
-            </a:r>
-            <a:r>
-              <a:rPr lang="ru-RU" dirty="0"/>
-              <a:t>становится непригодным для использования</a:t>
-            </a:r>
-            <a:endParaRPr lang="en-US" dirty="0"/>
+            <a:endParaRPr lang="en-US"/>
           </a:p>
         </p:txBody>
       </p:sp>
@@ -977,7 +877,7 @@
           <a:p>
             <a:fld id="{8740D86D-1409-43B0-8811-9A559436DAB5}" type="slidenum">
               <a:rPr lang="en-US" smtClean="0"/>
-              <a:t>13</a:t>
+              <a:t>12</a:t>
             </a:fld>
             <a:endParaRPr lang="en-US"/>
           </a:p>
@@ -986,7 +886,7 @@
     </p:spTree>
     <p:extLst>
       <p:ext uri="{BB962C8B-B14F-4D97-AF65-F5344CB8AC3E}">
-        <p14:creationId xmlns:p14="http://schemas.microsoft.com/office/powerpoint/2010/main" val="2685991169"/>
+        <p14:creationId xmlns:p14="http://schemas.microsoft.com/office/powerpoint/2010/main" val="4152509019"/>
       </p:ext>
     </p:extLst>
   </p:cSld>
@@ -1040,7 +940,107 @@
           <a:bodyPr/>
           <a:lstStyle/>
           <a:p>
-            <a:endParaRPr lang="en-US"/>
+            <a:r>
+              <a:rPr lang="ru-RU" dirty="0"/>
+              <a:t>У потока есть </a:t>
+            </a:r>
+            <a:r>
+              <a:rPr lang="en-US" dirty="0"/>
+              <a:t>id. </a:t>
+            </a:r>
+            <a:r>
+              <a:rPr lang="ru-RU" dirty="0"/>
+              <a:t>Его можно получить у потока, вызвав метод </a:t>
+            </a:r>
+            <a:r>
+              <a:rPr lang="en-US" dirty="0" err="1"/>
+              <a:t>get_id</a:t>
+            </a:r>
+            <a:r>
+              <a:rPr lang="en-US" dirty="0"/>
+              <a:t>.</a:t>
+            </a:r>
+          </a:p>
+          <a:p>
+            <a:r>
+              <a:rPr lang="ru-RU" dirty="0"/>
+              <a:t>Если с объектом потока не связан поток, то вернётся сконструированное по умолчанию значение</a:t>
+            </a:r>
+          </a:p>
+          <a:p>
+            <a:r>
+              <a:rPr lang="ru-RU" dirty="0"/>
+              <a:t>Также можно вызвать функцию </a:t>
+            </a:r>
+            <a:r>
+              <a:rPr lang="en-US" dirty="0"/>
+              <a:t>std::</a:t>
+            </a:r>
+            <a:r>
+              <a:rPr lang="en-US" dirty="0" err="1"/>
+              <a:t>this_thread</a:t>
+            </a:r>
+            <a:r>
+              <a:rPr lang="en-US" dirty="0"/>
+              <a:t>::</a:t>
+            </a:r>
+            <a:r>
+              <a:rPr lang="en-US" dirty="0" err="1"/>
+              <a:t>get_id</a:t>
+            </a:r>
+            <a:r>
+              <a:rPr lang="en-US" dirty="0"/>
+              <a:t> </a:t>
+            </a:r>
+            <a:r>
+              <a:rPr lang="ru-RU" dirty="0"/>
+              <a:t>для получения</a:t>
+            </a:r>
+            <a:r>
+              <a:rPr lang="en-US" dirty="0"/>
+              <a:t> id </a:t>
+            </a:r>
+            <a:r>
+              <a:rPr lang="ru-RU" dirty="0"/>
+              <a:t>вызывающего потока.</a:t>
+            </a:r>
+          </a:p>
+          <a:p>
+            <a:r>
+              <a:rPr lang="en-US" dirty="0"/>
+              <a:t>Id </a:t>
+            </a:r>
+            <a:r>
+              <a:rPr lang="ru-RU" dirty="0"/>
+              <a:t>можно сравнивать, копировать и вычислять их </a:t>
+            </a:r>
+            <a:r>
+              <a:rPr lang="ru-RU" dirty="0" err="1"/>
+              <a:t>хеши</a:t>
+            </a:r>
+            <a:endParaRPr lang="ru-RU" dirty="0"/>
+          </a:p>
+          <a:p>
+            <a:endParaRPr lang="ru-RU" dirty="0"/>
+          </a:p>
+          <a:p>
+            <a:r>
+              <a:rPr lang="en-US" dirty="0"/>
+              <a:t>Id </a:t>
+            </a:r>
+            <a:r>
+              <a:rPr lang="ru-RU" dirty="0"/>
+              <a:t>потока можно использовать для того, чтобы отличить один поток от другого. После того, как поток завершил свою работу, его </a:t>
+            </a:r>
+            <a:r>
+              <a:rPr lang="en-US" dirty="0"/>
+              <a:t>id </a:t>
+            </a:r>
+            <a:r>
+              <a:rPr lang="ru-RU" dirty="0"/>
+              <a:t>становится непригодным для использования</a:t>
+            </a:r>
+            <a:endParaRPr lang="en-US" dirty="0"/>
           </a:p>
         </p:txBody>
       </p:sp>
@@ -1061,7 +1061,7 @@
           <a:p>
             <a:fld id="{8740D86D-1409-43B0-8811-9A559436DAB5}" type="slidenum">
               <a:rPr lang="en-US" smtClean="0"/>
-              <a:t>14</a:t>
+              <a:t>13</a:t>
             </a:fld>
             <a:endParaRPr lang="en-US"/>
           </a:p>
@@ -1070,7 +1070,7 @@
     </p:spTree>
     <p:extLst>
       <p:ext uri="{BB962C8B-B14F-4D97-AF65-F5344CB8AC3E}">
-        <p14:creationId xmlns:p14="http://schemas.microsoft.com/office/powerpoint/2010/main" val="1400451780"/>
+        <p14:creationId xmlns:p14="http://schemas.microsoft.com/office/powerpoint/2010/main" val="2685991169"/>
       </p:ext>
     </p:extLst>
   </p:cSld>
@@ -1124,473 +1124,7 @@
           <a:bodyPr/>
           <a:lstStyle/>
           <a:p>
-            <a:r>
-              <a:rPr lang="ru-RU" dirty="0"/>
-              <a:t>Очень важно понимать, как именно в C++ передаются аргументы в функцию потока.</a:t>
-            </a:r>
-          </a:p>
-          <a:p>
-            <a:r>
-              <a:rPr lang="ru-RU" dirty="0"/>
-              <a:t>Когда мы пишем:</a:t>
-            </a:r>
-          </a:p>
-          <a:p>
-            <a:pPr rtl="0"/>
-            <a:r>
-              <a:rPr lang="ru-RU" sz="1200" kern="1200" dirty="0" err="1">
-                <a:solidFill>
-                  <a:schemeClr val="tx1"/>
-                </a:solidFill>
-                <a:latin typeface="+mn-lt"/>
-                <a:ea typeface="+mn-ea"/>
-                <a:cs typeface="+mn-cs"/>
-              </a:rPr>
-              <a:t>std</a:t>
-            </a:r>
-            <a:r>
-              <a:rPr lang="ru-RU" sz="1200" kern="1200" dirty="0">
-                <a:solidFill>
-                  <a:schemeClr val="tx1"/>
-                </a:solidFill>
-                <a:latin typeface="+mn-lt"/>
-                <a:ea typeface="+mn-ea"/>
-                <a:cs typeface="+mn-cs"/>
-              </a:rPr>
-              <a:t>::</a:t>
-            </a:r>
-            <a:r>
-              <a:rPr lang="ru-RU" sz="1200" kern="1200" dirty="0" err="1">
-                <a:solidFill>
-                  <a:schemeClr val="tx1"/>
-                </a:solidFill>
-                <a:latin typeface="+mn-lt"/>
-                <a:ea typeface="+mn-ea"/>
-                <a:cs typeface="+mn-cs"/>
-              </a:rPr>
-              <a:t>thread</a:t>
-            </a:r>
-            <a:r>
-              <a:rPr lang="ru-RU" sz="1200" kern="1200" dirty="0">
-                <a:solidFill>
-                  <a:schemeClr val="tx1"/>
-                </a:solidFill>
-                <a:latin typeface="+mn-lt"/>
-                <a:ea typeface="+mn-ea"/>
-                <a:cs typeface="+mn-cs"/>
-              </a:rPr>
-              <a:t> t(f, arg1, arg2);</a:t>
-            </a:r>
-          </a:p>
-          <a:p>
-            <a:r>
-              <a:rPr lang="ru-RU" dirty="0"/>
-              <a:t>это </a:t>
-            </a:r>
-            <a:r>
-              <a:rPr lang="ru-RU" b="1" dirty="0"/>
-              <a:t>не означает</a:t>
-            </a:r>
-            <a:r>
-              <a:rPr lang="ru-RU" dirty="0"/>
-              <a:t>, что поток немедленно вызывает </a:t>
-            </a:r>
-            <a:r>
-              <a:rPr lang="ru-RU" sz="1200" kern="1200" dirty="0">
-                <a:solidFill>
-                  <a:schemeClr val="tx1"/>
-                </a:solidFill>
-                <a:latin typeface="+mn-lt"/>
-                <a:ea typeface="+mn-ea"/>
-                <a:cs typeface="+mn-cs"/>
-              </a:rPr>
-              <a:t>f(arg1, arg2)</a:t>
-            </a:r>
-            <a:r>
-              <a:rPr lang="ru-RU" dirty="0"/>
-              <a:t>.</a:t>
-            </a:r>
-          </a:p>
-          <a:p>
-            <a:r>
-              <a:rPr lang="ru-RU" dirty="0"/>
-              <a:t>Происходит следующее.</a:t>
-            </a:r>
-          </a:p>
-          <a:p>
-            <a:r>
-              <a:rPr lang="ru-RU" dirty="0"/>
-              <a:t>Сначала в текущем потоке:</a:t>
-            </a:r>
-          </a:p>
-          <a:p>
-            <a:r>
-              <a:rPr lang="ru-RU" dirty="0"/>
-              <a:t>аргументы копируются или перемещаются,</a:t>
-            </a:r>
-          </a:p>
-          <a:p>
-            <a:r>
-              <a:rPr lang="ru-RU" dirty="0"/>
-              <a:t>они сохраняются внутри объекта </a:t>
-            </a:r>
-            <a:r>
-              <a:rPr lang="ru-RU" sz="1200" kern="1200" dirty="0" err="1">
-                <a:solidFill>
-                  <a:schemeClr val="tx1"/>
-                </a:solidFill>
-                <a:latin typeface="+mn-lt"/>
-                <a:ea typeface="+mn-ea"/>
-                <a:cs typeface="+mn-cs"/>
-              </a:rPr>
-              <a:t>std</a:t>
-            </a:r>
-            <a:r>
-              <a:rPr lang="ru-RU" sz="1200" kern="1200" dirty="0">
-                <a:solidFill>
-                  <a:schemeClr val="tx1"/>
-                </a:solidFill>
-                <a:latin typeface="+mn-lt"/>
-                <a:ea typeface="+mn-ea"/>
-                <a:cs typeface="+mn-cs"/>
-              </a:rPr>
-              <a:t>::</a:t>
-            </a:r>
-            <a:r>
-              <a:rPr lang="ru-RU" sz="1200" kern="1200" dirty="0" err="1">
-                <a:solidFill>
-                  <a:schemeClr val="tx1"/>
-                </a:solidFill>
-                <a:latin typeface="+mn-lt"/>
-                <a:ea typeface="+mn-ea"/>
-                <a:cs typeface="+mn-cs"/>
-              </a:rPr>
-              <a:t>thread</a:t>
-            </a:r>
-            <a:r>
-              <a:rPr lang="ru-RU" dirty="0"/>
-              <a:t>.</a:t>
-            </a:r>
-          </a:p>
-          <a:p>
-            <a:r>
-              <a:rPr lang="ru-RU" dirty="0"/>
-              <a:t>И только затем создаётся новый поток выполнения,</a:t>
-            </a:r>
-            <a:br>
-              <a:rPr lang="ru-RU" dirty="0"/>
-            </a:br>
-            <a:r>
-              <a:rPr lang="ru-RU" dirty="0"/>
-              <a:t>в котором вызывается:</a:t>
-            </a:r>
-          </a:p>
-          <a:p>
-            <a:pPr rtl="0"/>
-            <a:r>
-              <a:rPr lang="ru-RU" sz="1200" kern="1200" dirty="0" err="1">
-                <a:solidFill>
-                  <a:schemeClr val="tx1"/>
-                </a:solidFill>
-                <a:latin typeface="+mn-lt"/>
-                <a:ea typeface="+mn-ea"/>
-                <a:cs typeface="+mn-cs"/>
-              </a:rPr>
-              <a:t>std</a:t>
-            </a:r>
-            <a:r>
-              <a:rPr lang="ru-RU" sz="1200" kern="1200" dirty="0">
-                <a:solidFill>
-                  <a:schemeClr val="tx1"/>
-                </a:solidFill>
-                <a:latin typeface="+mn-lt"/>
-                <a:ea typeface="+mn-ea"/>
-                <a:cs typeface="+mn-cs"/>
-              </a:rPr>
-              <a:t>::</a:t>
-            </a:r>
-            <a:r>
-              <a:rPr lang="ru-RU" sz="1200" kern="1200" dirty="0" err="1">
-                <a:solidFill>
-                  <a:schemeClr val="tx1"/>
-                </a:solidFill>
-                <a:latin typeface="+mn-lt"/>
-                <a:ea typeface="+mn-ea"/>
-                <a:cs typeface="+mn-cs"/>
-              </a:rPr>
-              <a:t>invoke</a:t>
-            </a:r>
-            <a:r>
-              <a:rPr lang="ru-RU" sz="1200" kern="1200" dirty="0">
-                <a:solidFill>
-                  <a:schemeClr val="tx1"/>
-                </a:solidFill>
-                <a:latin typeface="+mn-lt"/>
-                <a:ea typeface="+mn-ea"/>
-                <a:cs typeface="+mn-cs"/>
-              </a:rPr>
-              <a:t>(f, </a:t>
-            </a:r>
-            <a:r>
-              <a:rPr lang="ru-RU" sz="1200" kern="1200" dirty="0" err="1">
-                <a:solidFill>
-                  <a:schemeClr val="tx1"/>
-                </a:solidFill>
-                <a:latin typeface="+mn-lt"/>
-                <a:ea typeface="+mn-ea"/>
-                <a:cs typeface="+mn-cs"/>
-              </a:rPr>
-              <a:t>сохранённые_аргументы</a:t>
-            </a:r>
-            <a:r>
-              <a:rPr lang="ru-RU" sz="1200" kern="1200" dirty="0">
-                <a:solidFill>
-                  <a:schemeClr val="tx1"/>
-                </a:solidFill>
-                <a:latin typeface="+mn-lt"/>
-                <a:ea typeface="+mn-ea"/>
-                <a:cs typeface="+mn-cs"/>
-              </a:rPr>
-              <a:t>)</a:t>
-            </a:r>
-          </a:p>
-          <a:p>
-            <a:r>
-              <a:rPr lang="ru-RU" dirty="0"/>
-              <a:t>Это ключевой момент.</a:t>
-            </a:r>
-          </a:p>
-          <a:p>
-            <a:r>
-              <a:rPr lang="ru-RU" dirty="0"/>
-              <a:t>Объект </a:t>
-            </a:r>
-            <a:r>
-              <a:rPr lang="ru-RU" sz="1200" kern="1200" dirty="0" err="1">
-                <a:solidFill>
-                  <a:schemeClr val="tx1"/>
-                </a:solidFill>
-                <a:latin typeface="+mn-lt"/>
-                <a:ea typeface="+mn-ea"/>
-                <a:cs typeface="+mn-cs"/>
-              </a:rPr>
-              <a:t>thread</a:t>
-            </a:r>
-            <a:r>
-              <a:rPr lang="ru-RU" dirty="0"/>
-              <a:t> хранит </a:t>
-            </a:r>
-            <a:r>
-              <a:rPr lang="ru-RU" b="1" dirty="0"/>
-              <a:t>аргументы конструктора</a:t>
-            </a:r>
-            <a:r>
-              <a:rPr lang="ru-RU" dirty="0"/>
-              <a:t>,</a:t>
-            </a:r>
-            <a:br>
-              <a:rPr lang="ru-RU" dirty="0"/>
-            </a:br>
-            <a:r>
-              <a:rPr lang="ru-RU" dirty="0"/>
-              <a:t>а не готовые параметры функции.</a:t>
-            </a:r>
-          </a:p>
-          <a:p>
-            <a:r>
-              <a:rPr lang="ru-RU" dirty="0"/>
-              <a:t>По умолчанию аргументы передаются по значению.</a:t>
-            </a:r>
-          </a:p>
-          <a:p>
-            <a:r>
-              <a:rPr lang="ru-RU" dirty="0"/>
-              <a:t>Если вы хотите передать ссылку, необходимо явно использовать:</a:t>
-            </a:r>
-          </a:p>
-          <a:p>
-            <a:pPr rtl="0"/>
-            <a:r>
-              <a:rPr lang="ru-RU" sz="1200" kern="1200" dirty="0" err="1">
-                <a:solidFill>
-                  <a:schemeClr val="tx1"/>
-                </a:solidFill>
-                <a:latin typeface="+mn-lt"/>
-                <a:ea typeface="+mn-ea"/>
-                <a:cs typeface="+mn-cs"/>
-              </a:rPr>
-              <a:t>std</a:t>
-            </a:r>
-            <a:r>
-              <a:rPr lang="ru-RU" sz="1200" kern="1200" dirty="0">
-                <a:solidFill>
-                  <a:schemeClr val="tx1"/>
-                </a:solidFill>
-                <a:latin typeface="+mn-lt"/>
-                <a:ea typeface="+mn-ea"/>
-                <a:cs typeface="+mn-cs"/>
-              </a:rPr>
-              <a:t>::</a:t>
-            </a:r>
-            <a:r>
-              <a:rPr lang="ru-RU" sz="1200" kern="1200" dirty="0" err="1">
-                <a:solidFill>
-                  <a:schemeClr val="tx1"/>
-                </a:solidFill>
-                <a:latin typeface="+mn-lt"/>
-                <a:ea typeface="+mn-ea"/>
-                <a:cs typeface="+mn-cs"/>
-              </a:rPr>
-              <a:t>ref</a:t>
-            </a:r>
-            <a:r>
-              <a:rPr lang="ru-RU" sz="1200" kern="1200" dirty="0">
-                <a:solidFill>
-                  <a:schemeClr val="tx1"/>
-                </a:solidFill>
-                <a:latin typeface="+mn-lt"/>
-                <a:ea typeface="+mn-ea"/>
-                <a:cs typeface="+mn-cs"/>
-              </a:rPr>
-              <a:t>(</a:t>
-            </a:r>
-            <a:r>
-              <a:rPr lang="ru-RU" sz="1200" kern="1200" dirty="0" err="1">
-                <a:solidFill>
-                  <a:schemeClr val="tx1"/>
-                </a:solidFill>
-                <a:latin typeface="+mn-lt"/>
-                <a:ea typeface="+mn-ea"/>
-                <a:cs typeface="+mn-cs"/>
-              </a:rPr>
-              <a:t>obj</a:t>
-            </a:r>
-            <a:r>
-              <a:rPr lang="ru-RU" sz="1200" kern="1200" dirty="0">
-                <a:solidFill>
-                  <a:schemeClr val="tx1"/>
-                </a:solidFill>
-                <a:latin typeface="+mn-lt"/>
-                <a:ea typeface="+mn-ea"/>
-                <a:cs typeface="+mn-cs"/>
-              </a:rPr>
-              <a:t>)</a:t>
-            </a:r>
-          </a:p>
-          <a:p>
-            <a:pPr rtl="0"/>
-            <a:r>
-              <a:rPr lang="ru-RU" sz="1200" kern="1200" dirty="0" err="1">
-                <a:solidFill>
-                  <a:schemeClr val="tx1"/>
-                </a:solidFill>
-                <a:latin typeface="+mn-lt"/>
-                <a:ea typeface="+mn-ea"/>
-                <a:cs typeface="+mn-cs"/>
-              </a:rPr>
-              <a:t>std</a:t>
-            </a:r>
-            <a:r>
-              <a:rPr lang="ru-RU" sz="1200" kern="1200" dirty="0">
-                <a:solidFill>
-                  <a:schemeClr val="tx1"/>
-                </a:solidFill>
-                <a:latin typeface="+mn-lt"/>
-                <a:ea typeface="+mn-ea"/>
-                <a:cs typeface="+mn-cs"/>
-              </a:rPr>
-              <a:t>::</a:t>
-            </a:r>
-            <a:r>
-              <a:rPr lang="ru-RU" sz="1200" kern="1200" dirty="0" err="1">
-                <a:solidFill>
-                  <a:schemeClr val="tx1"/>
-                </a:solidFill>
-                <a:latin typeface="+mn-lt"/>
-                <a:ea typeface="+mn-ea"/>
-                <a:cs typeface="+mn-cs"/>
-              </a:rPr>
-              <a:t>cref</a:t>
-            </a:r>
-            <a:r>
-              <a:rPr lang="ru-RU" sz="1200" kern="1200" dirty="0">
-                <a:solidFill>
-                  <a:schemeClr val="tx1"/>
-                </a:solidFill>
-                <a:latin typeface="+mn-lt"/>
-                <a:ea typeface="+mn-ea"/>
-                <a:cs typeface="+mn-cs"/>
-              </a:rPr>
-              <a:t>(</a:t>
-            </a:r>
-            <a:r>
-              <a:rPr lang="ru-RU" sz="1200" kern="1200" dirty="0" err="1">
-                <a:solidFill>
-                  <a:schemeClr val="tx1"/>
-                </a:solidFill>
-                <a:latin typeface="+mn-lt"/>
-                <a:ea typeface="+mn-ea"/>
-                <a:cs typeface="+mn-cs"/>
-              </a:rPr>
-              <a:t>obj</a:t>
-            </a:r>
-            <a:r>
-              <a:rPr lang="ru-RU" sz="1200" kern="1200" dirty="0">
-                <a:solidFill>
-                  <a:schemeClr val="tx1"/>
-                </a:solidFill>
-                <a:latin typeface="+mn-lt"/>
-                <a:ea typeface="+mn-ea"/>
-                <a:cs typeface="+mn-cs"/>
-              </a:rPr>
-              <a:t>)</a:t>
-            </a:r>
-          </a:p>
-          <a:p>
-            <a:r>
-              <a:rPr lang="ru-RU" dirty="0"/>
-              <a:t>И вот здесь начинается самое интересное.</a:t>
-            </a:r>
-          </a:p>
-          <a:p>
-            <a:r>
-              <a:rPr lang="ru-RU" dirty="0"/>
-              <a:t>Если вы передаёте ссылку на объект, который может быть разрушен раньше, чем поток начнёт или закончит выполнение — вы получите неопределённое поведение.</a:t>
-            </a:r>
-          </a:p>
-          <a:p>
-            <a:r>
-              <a:rPr lang="ru-RU" dirty="0"/>
-              <a:t>Именно поэтому многопоточность так тесно связана с управлением временем жизни объектов.</a:t>
-            </a:r>
-          </a:p>
-          <a:p>
-            <a:r>
-              <a:rPr lang="ru-RU" dirty="0"/>
-              <a:t>Можно сказать так:</a:t>
-            </a:r>
-          </a:p>
-          <a:p>
-            <a:r>
-              <a:rPr lang="ru-RU" dirty="0"/>
-              <a:t>Поток — это конкурентный исполнитель.</a:t>
-            </a:r>
-            <a:br>
-              <a:rPr lang="ru-RU" dirty="0"/>
-            </a:br>
-            <a:r>
-              <a:rPr lang="ru-RU" dirty="0"/>
-              <a:t>Но время жизни данных — это ответственность программиста.</a:t>
-            </a:r>
-          </a:p>
-          <a:p>
-            <a:r>
-              <a:rPr lang="ru-RU" dirty="0"/>
-              <a:t>И большая часть трудноуловимых ошибок в многопоточном коде связана не с самим созданием потоков, а с неправильной передачей аргументов и разрушением объектов.</a:t>
-            </a:r>
-          </a:p>
-          <a:p>
-            <a:endParaRPr lang="en-US" dirty="0"/>
+            <a:endParaRPr lang="en-US"/>
           </a:p>
         </p:txBody>
       </p:sp>
@@ -1611,7 +1145,7 @@
           <a:p>
             <a:fld id="{8740D86D-1409-43B0-8811-9A559436DAB5}" type="slidenum">
               <a:rPr lang="en-US" smtClean="0"/>
-              <a:t>15</a:t>
+              <a:t>14</a:t>
             </a:fld>
             <a:endParaRPr lang="en-US"/>
           </a:p>
@@ -1620,7 +1154,7 @@
     </p:spTree>
     <p:extLst>
       <p:ext uri="{BB962C8B-B14F-4D97-AF65-F5344CB8AC3E}">
-        <p14:creationId xmlns:p14="http://schemas.microsoft.com/office/powerpoint/2010/main" val="3499908881"/>
+        <p14:creationId xmlns:p14="http://schemas.microsoft.com/office/powerpoint/2010/main" val="1400451780"/>
       </p:ext>
     </p:extLst>
   </p:cSld>
@@ -1674,7 +1208,473 @@
           <a:bodyPr/>
           <a:lstStyle/>
           <a:p>
-            <a:endParaRPr lang="en-US"/>
+            <a:r>
+              <a:rPr lang="ru-RU" dirty="0"/>
+              <a:t>Очень важно понимать, как именно в C++ передаются аргументы в функцию потока.</a:t>
+            </a:r>
+          </a:p>
+          <a:p>
+            <a:r>
+              <a:rPr lang="ru-RU" dirty="0"/>
+              <a:t>Когда мы пишем:</a:t>
+            </a:r>
+          </a:p>
+          <a:p>
+            <a:pPr rtl="0"/>
+            <a:r>
+              <a:rPr lang="ru-RU" sz="1200" kern="1200" dirty="0" err="1">
+                <a:solidFill>
+                  <a:schemeClr val="tx1"/>
+                </a:solidFill>
+                <a:latin typeface="+mn-lt"/>
+                <a:ea typeface="+mn-ea"/>
+                <a:cs typeface="+mn-cs"/>
+              </a:rPr>
+              <a:t>std</a:t>
+            </a:r>
+            <a:r>
+              <a:rPr lang="ru-RU" sz="1200" kern="1200" dirty="0">
+                <a:solidFill>
+                  <a:schemeClr val="tx1"/>
+                </a:solidFill>
+                <a:latin typeface="+mn-lt"/>
+                <a:ea typeface="+mn-ea"/>
+                <a:cs typeface="+mn-cs"/>
+              </a:rPr>
+              <a:t>::</a:t>
+            </a:r>
+            <a:r>
+              <a:rPr lang="ru-RU" sz="1200" kern="1200" dirty="0" err="1">
+                <a:solidFill>
+                  <a:schemeClr val="tx1"/>
+                </a:solidFill>
+                <a:latin typeface="+mn-lt"/>
+                <a:ea typeface="+mn-ea"/>
+                <a:cs typeface="+mn-cs"/>
+              </a:rPr>
+              <a:t>thread</a:t>
+            </a:r>
+            <a:r>
+              <a:rPr lang="ru-RU" sz="1200" kern="1200" dirty="0">
+                <a:solidFill>
+                  <a:schemeClr val="tx1"/>
+                </a:solidFill>
+                <a:latin typeface="+mn-lt"/>
+                <a:ea typeface="+mn-ea"/>
+                <a:cs typeface="+mn-cs"/>
+              </a:rPr>
+              <a:t> t(f, arg1, arg2);</a:t>
+            </a:r>
+          </a:p>
+          <a:p>
+            <a:r>
+              <a:rPr lang="ru-RU" dirty="0"/>
+              <a:t>это </a:t>
+            </a:r>
+            <a:r>
+              <a:rPr lang="ru-RU" b="1" dirty="0"/>
+              <a:t>не означает</a:t>
+            </a:r>
+            <a:r>
+              <a:rPr lang="ru-RU" dirty="0"/>
+              <a:t>, что поток немедленно вызывает </a:t>
+            </a:r>
+            <a:r>
+              <a:rPr lang="ru-RU" sz="1200" kern="1200" dirty="0">
+                <a:solidFill>
+                  <a:schemeClr val="tx1"/>
+                </a:solidFill>
+                <a:latin typeface="+mn-lt"/>
+                <a:ea typeface="+mn-ea"/>
+                <a:cs typeface="+mn-cs"/>
+              </a:rPr>
+              <a:t>f(arg1, arg2)</a:t>
+            </a:r>
+            <a:r>
+              <a:rPr lang="ru-RU" dirty="0"/>
+              <a:t>.</a:t>
+            </a:r>
+          </a:p>
+          <a:p>
+            <a:r>
+              <a:rPr lang="ru-RU" dirty="0"/>
+              <a:t>Происходит следующее.</a:t>
+            </a:r>
+          </a:p>
+          <a:p>
+            <a:r>
+              <a:rPr lang="ru-RU" dirty="0"/>
+              <a:t>Сначала в текущем потоке:</a:t>
+            </a:r>
+          </a:p>
+          <a:p>
+            <a:r>
+              <a:rPr lang="ru-RU" dirty="0"/>
+              <a:t>аргументы копируются или перемещаются,</a:t>
+            </a:r>
+          </a:p>
+          <a:p>
+            <a:r>
+              <a:rPr lang="ru-RU" dirty="0"/>
+              <a:t>они сохраняются внутри объекта </a:t>
+            </a:r>
+            <a:r>
+              <a:rPr lang="ru-RU" sz="1200" kern="1200" dirty="0" err="1">
+                <a:solidFill>
+                  <a:schemeClr val="tx1"/>
+                </a:solidFill>
+                <a:latin typeface="+mn-lt"/>
+                <a:ea typeface="+mn-ea"/>
+                <a:cs typeface="+mn-cs"/>
+              </a:rPr>
+              <a:t>std</a:t>
+            </a:r>
+            <a:r>
+              <a:rPr lang="ru-RU" sz="1200" kern="1200" dirty="0">
+                <a:solidFill>
+                  <a:schemeClr val="tx1"/>
+                </a:solidFill>
+                <a:latin typeface="+mn-lt"/>
+                <a:ea typeface="+mn-ea"/>
+                <a:cs typeface="+mn-cs"/>
+              </a:rPr>
+              <a:t>::</a:t>
+            </a:r>
+            <a:r>
+              <a:rPr lang="ru-RU" sz="1200" kern="1200" dirty="0" err="1">
+                <a:solidFill>
+                  <a:schemeClr val="tx1"/>
+                </a:solidFill>
+                <a:latin typeface="+mn-lt"/>
+                <a:ea typeface="+mn-ea"/>
+                <a:cs typeface="+mn-cs"/>
+              </a:rPr>
+              <a:t>thread</a:t>
+            </a:r>
+            <a:r>
+              <a:rPr lang="ru-RU" dirty="0"/>
+              <a:t>.</a:t>
+            </a:r>
+          </a:p>
+          <a:p>
+            <a:r>
+              <a:rPr lang="ru-RU" dirty="0"/>
+              <a:t>И только затем создаётся новый поток выполнения,</a:t>
+            </a:r>
+            <a:br>
+              <a:rPr lang="ru-RU" dirty="0"/>
+            </a:br>
+            <a:r>
+              <a:rPr lang="ru-RU" dirty="0"/>
+              <a:t>в котором вызывается:</a:t>
+            </a:r>
+          </a:p>
+          <a:p>
+            <a:pPr rtl="0"/>
+            <a:r>
+              <a:rPr lang="ru-RU" sz="1200" kern="1200" dirty="0" err="1">
+                <a:solidFill>
+                  <a:schemeClr val="tx1"/>
+                </a:solidFill>
+                <a:latin typeface="+mn-lt"/>
+                <a:ea typeface="+mn-ea"/>
+                <a:cs typeface="+mn-cs"/>
+              </a:rPr>
+              <a:t>std</a:t>
+            </a:r>
+            <a:r>
+              <a:rPr lang="ru-RU" sz="1200" kern="1200" dirty="0">
+                <a:solidFill>
+                  <a:schemeClr val="tx1"/>
+                </a:solidFill>
+                <a:latin typeface="+mn-lt"/>
+                <a:ea typeface="+mn-ea"/>
+                <a:cs typeface="+mn-cs"/>
+              </a:rPr>
+              <a:t>::</a:t>
+            </a:r>
+            <a:r>
+              <a:rPr lang="ru-RU" sz="1200" kern="1200" dirty="0" err="1">
+                <a:solidFill>
+                  <a:schemeClr val="tx1"/>
+                </a:solidFill>
+                <a:latin typeface="+mn-lt"/>
+                <a:ea typeface="+mn-ea"/>
+                <a:cs typeface="+mn-cs"/>
+              </a:rPr>
+              <a:t>invoke</a:t>
+            </a:r>
+            <a:r>
+              <a:rPr lang="ru-RU" sz="1200" kern="1200" dirty="0">
+                <a:solidFill>
+                  <a:schemeClr val="tx1"/>
+                </a:solidFill>
+                <a:latin typeface="+mn-lt"/>
+                <a:ea typeface="+mn-ea"/>
+                <a:cs typeface="+mn-cs"/>
+              </a:rPr>
+              <a:t>(f, </a:t>
+            </a:r>
+            <a:r>
+              <a:rPr lang="ru-RU" sz="1200" kern="1200" dirty="0" err="1">
+                <a:solidFill>
+                  <a:schemeClr val="tx1"/>
+                </a:solidFill>
+                <a:latin typeface="+mn-lt"/>
+                <a:ea typeface="+mn-ea"/>
+                <a:cs typeface="+mn-cs"/>
+              </a:rPr>
+              <a:t>сохранённые_аргументы</a:t>
+            </a:r>
+            <a:r>
+              <a:rPr lang="ru-RU" sz="1200" kern="1200" dirty="0">
+                <a:solidFill>
+                  <a:schemeClr val="tx1"/>
+                </a:solidFill>
+                <a:latin typeface="+mn-lt"/>
+                <a:ea typeface="+mn-ea"/>
+                <a:cs typeface="+mn-cs"/>
+              </a:rPr>
+              <a:t>)</a:t>
+            </a:r>
+          </a:p>
+          <a:p>
+            <a:r>
+              <a:rPr lang="ru-RU" dirty="0"/>
+              <a:t>Это ключевой момент.</a:t>
+            </a:r>
+          </a:p>
+          <a:p>
+            <a:r>
+              <a:rPr lang="ru-RU" dirty="0"/>
+              <a:t>Объект </a:t>
+            </a:r>
+            <a:r>
+              <a:rPr lang="ru-RU" sz="1200" kern="1200" dirty="0" err="1">
+                <a:solidFill>
+                  <a:schemeClr val="tx1"/>
+                </a:solidFill>
+                <a:latin typeface="+mn-lt"/>
+                <a:ea typeface="+mn-ea"/>
+                <a:cs typeface="+mn-cs"/>
+              </a:rPr>
+              <a:t>thread</a:t>
+            </a:r>
+            <a:r>
+              <a:rPr lang="ru-RU" dirty="0"/>
+              <a:t> хранит </a:t>
+            </a:r>
+            <a:r>
+              <a:rPr lang="ru-RU" b="1" dirty="0"/>
+              <a:t>аргументы конструктора</a:t>
+            </a:r>
+            <a:r>
+              <a:rPr lang="ru-RU" dirty="0"/>
+              <a:t>,</a:t>
+            </a:r>
+            <a:br>
+              <a:rPr lang="ru-RU" dirty="0"/>
+            </a:br>
+            <a:r>
+              <a:rPr lang="ru-RU" dirty="0"/>
+              <a:t>а не готовые параметры функции.</a:t>
+            </a:r>
+          </a:p>
+          <a:p>
+            <a:r>
+              <a:rPr lang="ru-RU" dirty="0"/>
+              <a:t>По умолчанию аргументы передаются по значению.</a:t>
+            </a:r>
+          </a:p>
+          <a:p>
+            <a:r>
+              <a:rPr lang="ru-RU" dirty="0"/>
+              <a:t>Если вы хотите передать ссылку, необходимо явно использовать:</a:t>
+            </a:r>
+          </a:p>
+          <a:p>
+            <a:pPr rtl="0"/>
+            <a:r>
+              <a:rPr lang="ru-RU" sz="1200" kern="1200" dirty="0" err="1">
+                <a:solidFill>
+                  <a:schemeClr val="tx1"/>
+                </a:solidFill>
+                <a:latin typeface="+mn-lt"/>
+                <a:ea typeface="+mn-ea"/>
+                <a:cs typeface="+mn-cs"/>
+              </a:rPr>
+              <a:t>std</a:t>
+            </a:r>
+            <a:r>
+              <a:rPr lang="ru-RU" sz="1200" kern="1200" dirty="0">
+                <a:solidFill>
+                  <a:schemeClr val="tx1"/>
+                </a:solidFill>
+                <a:latin typeface="+mn-lt"/>
+                <a:ea typeface="+mn-ea"/>
+                <a:cs typeface="+mn-cs"/>
+              </a:rPr>
+              <a:t>::</a:t>
+            </a:r>
+            <a:r>
+              <a:rPr lang="ru-RU" sz="1200" kern="1200" dirty="0" err="1">
+                <a:solidFill>
+                  <a:schemeClr val="tx1"/>
+                </a:solidFill>
+                <a:latin typeface="+mn-lt"/>
+                <a:ea typeface="+mn-ea"/>
+                <a:cs typeface="+mn-cs"/>
+              </a:rPr>
+              <a:t>ref</a:t>
+            </a:r>
+            <a:r>
+              <a:rPr lang="ru-RU" sz="1200" kern="1200" dirty="0">
+                <a:solidFill>
+                  <a:schemeClr val="tx1"/>
+                </a:solidFill>
+                <a:latin typeface="+mn-lt"/>
+                <a:ea typeface="+mn-ea"/>
+                <a:cs typeface="+mn-cs"/>
+              </a:rPr>
+              <a:t>(</a:t>
+            </a:r>
+            <a:r>
+              <a:rPr lang="ru-RU" sz="1200" kern="1200" dirty="0" err="1">
+                <a:solidFill>
+                  <a:schemeClr val="tx1"/>
+                </a:solidFill>
+                <a:latin typeface="+mn-lt"/>
+                <a:ea typeface="+mn-ea"/>
+                <a:cs typeface="+mn-cs"/>
+              </a:rPr>
+              <a:t>obj</a:t>
+            </a:r>
+            <a:r>
+              <a:rPr lang="ru-RU" sz="1200" kern="1200" dirty="0">
+                <a:solidFill>
+                  <a:schemeClr val="tx1"/>
+                </a:solidFill>
+                <a:latin typeface="+mn-lt"/>
+                <a:ea typeface="+mn-ea"/>
+                <a:cs typeface="+mn-cs"/>
+              </a:rPr>
+              <a:t>)</a:t>
+            </a:r>
+          </a:p>
+          <a:p>
+            <a:pPr rtl="0"/>
+            <a:r>
+              <a:rPr lang="ru-RU" sz="1200" kern="1200" dirty="0" err="1">
+                <a:solidFill>
+                  <a:schemeClr val="tx1"/>
+                </a:solidFill>
+                <a:latin typeface="+mn-lt"/>
+                <a:ea typeface="+mn-ea"/>
+                <a:cs typeface="+mn-cs"/>
+              </a:rPr>
+              <a:t>std</a:t>
+            </a:r>
+            <a:r>
+              <a:rPr lang="ru-RU" sz="1200" kern="1200" dirty="0">
+                <a:solidFill>
+                  <a:schemeClr val="tx1"/>
+                </a:solidFill>
+                <a:latin typeface="+mn-lt"/>
+                <a:ea typeface="+mn-ea"/>
+                <a:cs typeface="+mn-cs"/>
+              </a:rPr>
+              <a:t>::</a:t>
+            </a:r>
+            <a:r>
+              <a:rPr lang="ru-RU" sz="1200" kern="1200" dirty="0" err="1">
+                <a:solidFill>
+                  <a:schemeClr val="tx1"/>
+                </a:solidFill>
+                <a:latin typeface="+mn-lt"/>
+                <a:ea typeface="+mn-ea"/>
+                <a:cs typeface="+mn-cs"/>
+              </a:rPr>
+              <a:t>cref</a:t>
+            </a:r>
+            <a:r>
+              <a:rPr lang="ru-RU" sz="1200" kern="1200" dirty="0">
+                <a:solidFill>
+                  <a:schemeClr val="tx1"/>
+                </a:solidFill>
+                <a:latin typeface="+mn-lt"/>
+                <a:ea typeface="+mn-ea"/>
+                <a:cs typeface="+mn-cs"/>
+              </a:rPr>
+              <a:t>(</a:t>
+            </a:r>
+            <a:r>
+              <a:rPr lang="ru-RU" sz="1200" kern="1200" dirty="0" err="1">
+                <a:solidFill>
+                  <a:schemeClr val="tx1"/>
+                </a:solidFill>
+                <a:latin typeface="+mn-lt"/>
+                <a:ea typeface="+mn-ea"/>
+                <a:cs typeface="+mn-cs"/>
+              </a:rPr>
+              <a:t>obj</a:t>
+            </a:r>
+            <a:r>
+              <a:rPr lang="ru-RU" sz="1200" kern="1200" dirty="0">
+                <a:solidFill>
+                  <a:schemeClr val="tx1"/>
+                </a:solidFill>
+                <a:latin typeface="+mn-lt"/>
+                <a:ea typeface="+mn-ea"/>
+                <a:cs typeface="+mn-cs"/>
+              </a:rPr>
+              <a:t>)</a:t>
+            </a:r>
+          </a:p>
+          <a:p>
+            <a:r>
+              <a:rPr lang="ru-RU" dirty="0"/>
+              <a:t>И вот здесь начинается самое интересное.</a:t>
+            </a:r>
+          </a:p>
+          <a:p>
+            <a:r>
+              <a:rPr lang="ru-RU" dirty="0"/>
+              <a:t>Если вы передаёте ссылку на объект, который может быть разрушен раньше, чем поток начнёт или закончит выполнение — вы получите неопределённое поведение.</a:t>
+            </a:r>
+          </a:p>
+          <a:p>
+            <a:r>
+              <a:rPr lang="ru-RU" dirty="0"/>
+              <a:t>Именно поэтому многопоточность так тесно связана с управлением временем жизни объектов.</a:t>
+            </a:r>
+          </a:p>
+          <a:p>
+            <a:r>
+              <a:rPr lang="ru-RU" dirty="0"/>
+              <a:t>Можно сказать так:</a:t>
+            </a:r>
+          </a:p>
+          <a:p>
+            <a:r>
+              <a:rPr lang="ru-RU" dirty="0"/>
+              <a:t>Поток — это конкурентный исполнитель.</a:t>
+            </a:r>
+            <a:br>
+              <a:rPr lang="ru-RU" dirty="0"/>
+            </a:br>
+            <a:r>
+              <a:rPr lang="ru-RU" dirty="0"/>
+              <a:t>Но время жизни данных — это ответственность программиста.</a:t>
+            </a:r>
+          </a:p>
+          <a:p>
+            <a:r>
+              <a:rPr lang="ru-RU" dirty="0"/>
+              <a:t>И большая часть трудноуловимых ошибок в многопоточном коде связана не с самим созданием потоков, а с неправильной передачей аргументов и разрушением объектов.</a:t>
+            </a:r>
+          </a:p>
+          <a:p>
+            <a:endParaRPr lang="en-US" dirty="0"/>
           </a:p>
         </p:txBody>
       </p:sp>
@@ -1695,7 +1695,7 @@
           <a:p>
             <a:fld id="{8740D86D-1409-43B0-8811-9A559436DAB5}" type="slidenum">
               <a:rPr lang="en-US" smtClean="0"/>
-              <a:t>16</a:t>
+              <a:t>15</a:t>
             </a:fld>
             <a:endParaRPr lang="en-US"/>
           </a:p>
@@ -1704,7 +1704,7 @@
     </p:spTree>
     <p:extLst>
       <p:ext uri="{BB962C8B-B14F-4D97-AF65-F5344CB8AC3E}">
-        <p14:creationId xmlns:p14="http://schemas.microsoft.com/office/powerpoint/2010/main" val="930173741"/>
+        <p14:creationId xmlns:p14="http://schemas.microsoft.com/office/powerpoint/2010/main" val="3499908881"/>
       </p:ext>
     </p:extLst>
   </p:cSld>
@@ -1779,7 +1779,7 @@
           <a:p>
             <a:fld id="{8740D86D-1409-43B0-8811-9A559436DAB5}" type="slidenum">
               <a:rPr lang="en-US" smtClean="0"/>
-              <a:t>17</a:t>
+              <a:t>16</a:t>
             </a:fld>
             <a:endParaRPr lang="en-US"/>
           </a:p>
@@ -1788,7 +1788,7 @@
     </p:spTree>
     <p:extLst>
       <p:ext uri="{BB962C8B-B14F-4D97-AF65-F5344CB8AC3E}">
-        <p14:creationId xmlns:p14="http://schemas.microsoft.com/office/powerpoint/2010/main" val="3990177826"/>
+        <p14:creationId xmlns:p14="http://schemas.microsoft.com/office/powerpoint/2010/main" val="930173741"/>
       </p:ext>
     </p:extLst>
   </p:cSld>
@@ -1863,7 +1863,7 @@
           <a:p>
             <a:fld id="{8740D86D-1409-43B0-8811-9A559436DAB5}" type="slidenum">
               <a:rPr lang="en-US" smtClean="0"/>
-              <a:t>18</a:t>
+              <a:t>17</a:t>
             </a:fld>
             <a:endParaRPr lang="en-US"/>
           </a:p>
@@ -1872,7 +1872,7 @@
     </p:spTree>
     <p:extLst>
       <p:ext uri="{BB962C8B-B14F-4D97-AF65-F5344CB8AC3E}">
-        <p14:creationId xmlns:p14="http://schemas.microsoft.com/office/powerpoint/2010/main" val="3069726628"/>
+        <p14:creationId xmlns:p14="http://schemas.microsoft.com/office/powerpoint/2010/main" val="3990177826"/>
       </p:ext>
     </p:extLst>
   </p:cSld>
@@ -1947,7 +1947,7 @@
           <a:p>
             <a:fld id="{8740D86D-1409-43B0-8811-9A559436DAB5}" type="slidenum">
               <a:rPr lang="en-US" smtClean="0"/>
-              <a:t>19</a:t>
+              <a:t>18</a:t>
             </a:fld>
             <a:endParaRPr lang="en-US"/>
           </a:p>
@@ -1956,7 +1956,7 @@
     </p:spTree>
     <p:extLst>
       <p:ext uri="{BB962C8B-B14F-4D97-AF65-F5344CB8AC3E}">
-        <p14:creationId xmlns:p14="http://schemas.microsoft.com/office/powerpoint/2010/main" val="3672947286"/>
+        <p14:creationId xmlns:p14="http://schemas.microsoft.com/office/powerpoint/2010/main" val="3069726628"/>
       </p:ext>
     </p:extLst>
   </p:cSld>
@@ -2031,7 +2031,7 @@
           <a:p>
             <a:fld id="{8740D86D-1409-43B0-8811-9A559436DAB5}" type="slidenum">
               <a:rPr lang="en-US" smtClean="0"/>
-              <a:t>20</a:t>
+              <a:t>19</a:t>
             </a:fld>
             <a:endParaRPr lang="en-US"/>
           </a:p>
@@ -2040,7 +2040,7 @@
     </p:spTree>
     <p:extLst>
       <p:ext uri="{BB962C8B-B14F-4D97-AF65-F5344CB8AC3E}">
-        <p14:creationId xmlns:p14="http://schemas.microsoft.com/office/powerpoint/2010/main" val="2917879599"/>
+        <p14:creationId xmlns:p14="http://schemas.microsoft.com/office/powerpoint/2010/main" val="3672947286"/>
       </p:ext>
     </p:extLst>
   </p:cSld>
@@ -2339,7 +2339,7 @@
           <a:p>
             <a:fld id="{8740D86D-1409-43B0-8811-9A559436DAB5}" type="slidenum">
               <a:rPr lang="en-US" smtClean="0"/>
-              <a:t>21</a:t>
+              <a:t>20</a:t>
             </a:fld>
             <a:endParaRPr lang="en-US"/>
           </a:p>
@@ -2348,7 +2348,7 @@
     </p:spTree>
     <p:extLst>
       <p:ext uri="{BB962C8B-B14F-4D97-AF65-F5344CB8AC3E}">
-        <p14:creationId xmlns:p14="http://schemas.microsoft.com/office/powerpoint/2010/main" val="4136457576"/>
+        <p14:creationId xmlns:p14="http://schemas.microsoft.com/office/powerpoint/2010/main" val="2917879599"/>
       </p:ext>
     </p:extLst>
   </p:cSld>
@@ -2423,7 +2423,7 @@
           <a:p>
             <a:fld id="{8740D86D-1409-43B0-8811-9A559436DAB5}" type="slidenum">
               <a:rPr lang="en-US" smtClean="0"/>
-              <a:t>22</a:t>
+              <a:t>21</a:t>
             </a:fld>
             <a:endParaRPr lang="en-US"/>
           </a:p>
@@ -2432,7 +2432,7 @@
     </p:spTree>
     <p:extLst>
       <p:ext uri="{BB962C8B-B14F-4D97-AF65-F5344CB8AC3E}">
-        <p14:creationId xmlns:p14="http://schemas.microsoft.com/office/powerpoint/2010/main" val="1851287267"/>
+        <p14:creationId xmlns:p14="http://schemas.microsoft.com/office/powerpoint/2010/main" val="4136457576"/>
       </p:ext>
     </p:extLst>
   </p:cSld>
@@ -2507,7 +2507,7 @@
           <a:p>
             <a:fld id="{8740D86D-1409-43B0-8811-9A559436DAB5}" type="slidenum">
               <a:rPr lang="en-US" smtClean="0"/>
-              <a:t>23</a:t>
+              <a:t>22</a:t>
             </a:fld>
             <a:endParaRPr lang="en-US"/>
           </a:p>
@@ -2516,7 +2516,7 @@
     </p:spTree>
     <p:extLst>
       <p:ext uri="{BB962C8B-B14F-4D97-AF65-F5344CB8AC3E}">
-        <p14:creationId xmlns:p14="http://schemas.microsoft.com/office/powerpoint/2010/main" val="1021831033"/>
+        <p14:creationId xmlns:p14="http://schemas.microsoft.com/office/powerpoint/2010/main" val="1851287267"/>
       </p:ext>
     </p:extLst>
   </p:cSld>
@@ -2591,7 +2591,7 @@
           <a:p>
             <a:fld id="{8740D86D-1409-43B0-8811-9A559436DAB5}" type="slidenum">
               <a:rPr lang="en-US" smtClean="0"/>
-              <a:t>24</a:t>
+              <a:t>23</a:t>
             </a:fld>
             <a:endParaRPr lang="en-US"/>
           </a:p>
@@ -2600,7 +2600,7 @@
     </p:spTree>
     <p:extLst>
       <p:ext uri="{BB962C8B-B14F-4D97-AF65-F5344CB8AC3E}">
-        <p14:creationId xmlns:p14="http://schemas.microsoft.com/office/powerpoint/2010/main" val="4061981999"/>
+        <p14:creationId xmlns:p14="http://schemas.microsoft.com/office/powerpoint/2010/main" val="1021831033"/>
       </p:ext>
     </p:extLst>
   </p:cSld>
@@ -2675,7 +2675,7 @@
           <a:p>
             <a:fld id="{8740D86D-1409-43B0-8811-9A559436DAB5}" type="slidenum">
               <a:rPr lang="en-US" smtClean="0"/>
-              <a:t>25</a:t>
+              <a:t>24</a:t>
             </a:fld>
             <a:endParaRPr lang="en-US"/>
           </a:p>
@@ -2684,7 +2684,7 @@
     </p:spTree>
     <p:extLst>
       <p:ext uri="{BB962C8B-B14F-4D97-AF65-F5344CB8AC3E}">
-        <p14:creationId xmlns:p14="http://schemas.microsoft.com/office/powerpoint/2010/main" val="2955912138"/>
+        <p14:creationId xmlns:p14="http://schemas.microsoft.com/office/powerpoint/2010/main" val="4061981999"/>
       </p:ext>
     </p:extLst>
   </p:cSld>
@@ -2759,7 +2759,7 @@
           <a:p>
             <a:fld id="{8740D86D-1409-43B0-8811-9A559436DAB5}" type="slidenum">
               <a:rPr lang="en-US" smtClean="0"/>
-              <a:t>26</a:t>
+              <a:t>25</a:t>
             </a:fld>
             <a:endParaRPr lang="en-US"/>
           </a:p>
@@ -2768,7 +2768,7 @@
     </p:spTree>
     <p:extLst>
       <p:ext uri="{BB962C8B-B14F-4D97-AF65-F5344CB8AC3E}">
-        <p14:creationId xmlns:p14="http://schemas.microsoft.com/office/powerpoint/2010/main" val="3059831180"/>
+        <p14:creationId xmlns:p14="http://schemas.microsoft.com/office/powerpoint/2010/main" val="2955912138"/>
       </p:ext>
     </p:extLst>
   </p:cSld>
@@ -2843,7 +2843,7 @@
           <a:p>
             <a:fld id="{8740D86D-1409-43B0-8811-9A559436DAB5}" type="slidenum">
               <a:rPr lang="en-US" smtClean="0"/>
-              <a:t>27</a:t>
+              <a:t>26</a:t>
             </a:fld>
             <a:endParaRPr lang="en-US"/>
           </a:p>
@@ -2852,7 +2852,7 @@
     </p:spTree>
     <p:extLst>
       <p:ext uri="{BB962C8B-B14F-4D97-AF65-F5344CB8AC3E}">
-        <p14:creationId xmlns:p14="http://schemas.microsoft.com/office/powerpoint/2010/main" val="3333775330"/>
+        <p14:creationId xmlns:p14="http://schemas.microsoft.com/office/powerpoint/2010/main" val="3059831180"/>
       </p:ext>
     </p:extLst>
   </p:cSld>
@@ -2927,7 +2927,7 @@
           <a:p>
             <a:fld id="{8740D86D-1409-43B0-8811-9A559436DAB5}" type="slidenum">
               <a:rPr lang="en-US" smtClean="0"/>
-              <a:t>28</a:t>
+              <a:t>27</a:t>
             </a:fld>
             <a:endParaRPr lang="en-US"/>
           </a:p>
@@ -2936,7 +2936,7 @@
     </p:spTree>
     <p:extLst>
       <p:ext uri="{BB962C8B-B14F-4D97-AF65-F5344CB8AC3E}">
-        <p14:creationId xmlns:p14="http://schemas.microsoft.com/office/powerpoint/2010/main" val="2051685772"/>
+        <p14:creationId xmlns:p14="http://schemas.microsoft.com/office/powerpoint/2010/main" val="3333775330"/>
       </p:ext>
     </p:extLst>
   </p:cSld>
@@ -3011,7 +3011,7 @@
           <a:p>
             <a:fld id="{8740D86D-1409-43B0-8811-9A559436DAB5}" type="slidenum">
               <a:rPr lang="en-US" smtClean="0"/>
-              <a:t>29</a:t>
+              <a:t>28</a:t>
             </a:fld>
             <a:endParaRPr lang="en-US"/>
           </a:p>
@@ -3020,7 +3020,7 @@
     </p:spTree>
     <p:extLst>
       <p:ext uri="{BB962C8B-B14F-4D97-AF65-F5344CB8AC3E}">
-        <p14:creationId xmlns:p14="http://schemas.microsoft.com/office/powerpoint/2010/main" val="3268570634"/>
+        <p14:creationId xmlns:p14="http://schemas.microsoft.com/office/powerpoint/2010/main" val="2051685772"/>
       </p:ext>
     </p:extLst>
   </p:cSld>
@@ -3095,7 +3095,7 @@
           <a:p>
             <a:fld id="{8740D86D-1409-43B0-8811-9A559436DAB5}" type="slidenum">
               <a:rPr lang="en-US" smtClean="0"/>
-              <a:t>30</a:t>
+              <a:t>29</a:t>
             </a:fld>
             <a:endParaRPr lang="en-US"/>
           </a:p>
@@ -3104,7 +3104,7 @@
     </p:spTree>
     <p:extLst>
       <p:ext uri="{BB962C8B-B14F-4D97-AF65-F5344CB8AC3E}">
-        <p14:creationId xmlns:p14="http://schemas.microsoft.com/office/powerpoint/2010/main" val="1138463424"/>
+        <p14:creationId xmlns:p14="http://schemas.microsoft.com/office/powerpoint/2010/main" val="3268570634"/>
       </p:ext>
     </p:extLst>
   </p:cSld>
@@ -3158,165 +3158,7 @@
           <a:bodyPr/>
           <a:lstStyle/>
           <a:p>
-            <a:r>
-              <a:rPr lang="ru-RU" dirty="0"/>
-              <a:t>Когда мы говорим «создать поток», на самом деле мы просим операционную систему создать новый исполнитель внутри процесса.</a:t>
-            </a:r>
-          </a:p>
-          <a:p>
-            <a:r>
-              <a:rPr lang="ru-RU" dirty="0"/>
-              <a:t>Это не просто вызов функции.</a:t>
-            </a:r>
-          </a:p>
-          <a:p>
-            <a:r>
-              <a:rPr lang="ru-RU" dirty="0"/>
-              <a:t>Ядро операционной системы:</a:t>
-            </a:r>
-          </a:p>
-          <a:p>
-            <a:r>
-              <a:rPr lang="ru-RU" dirty="0"/>
-              <a:t>выделяет новый стек,</a:t>
-            </a:r>
-          </a:p>
-          <a:p>
-            <a:r>
-              <a:rPr lang="ru-RU" dirty="0"/>
-              <a:t>создаёт структуру управления потоком,</a:t>
-            </a:r>
-          </a:p>
-          <a:p>
-            <a:r>
-              <a:rPr lang="ru-RU" dirty="0"/>
-              <a:t>настраивает регистры,</a:t>
-            </a:r>
-          </a:p>
-          <a:p>
-            <a:r>
-              <a:rPr lang="ru-RU" dirty="0"/>
-              <a:t>регистрирует поток в планировщике,</a:t>
-            </a:r>
-          </a:p>
-          <a:p>
-            <a:r>
-              <a:rPr lang="ru-RU" dirty="0"/>
-              <a:t>и только после этого начинает выполнение указанной функции.</a:t>
-            </a:r>
-          </a:p>
-          <a:p>
-            <a:r>
-              <a:rPr lang="ru-RU" dirty="0"/>
-              <a:t>В Linux используется стандарт POSIX — функция </a:t>
-            </a:r>
-            <a:r>
-              <a:rPr lang="ru-RU" dirty="0" err="1"/>
-              <a:t>pthread_create</a:t>
-            </a:r>
-            <a:r>
-              <a:rPr lang="ru-RU" dirty="0"/>
-              <a:t>.</a:t>
-            </a:r>
-          </a:p>
-          <a:p>
-            <a:r>
-              <a:rPr lang="ru-RU" dirty="0"/>
-              <a:t>В Windows — </a:t>
-            </a:r>
-            <a:r>
-              <a:rPr lang="ru-RU" dirty="0" err="1"/>
-              <a:t>CreateThread</a:t>
-            </a:r>
-            <a:r>
-              <a:rPr lang="ru-RU" dirty="0"/>
-              <a:t> или _</a:t>
-            </a:r>
-            <a:r>
-              <a:rPr lang="ru-RU" dirty="0" err="1"/>
-              <a:t>beginthreadex</a:t>
-            </a:r>
-            <a:r>
-              <a:rPr lang="ru-RU" dirty="0"/>
-              <a:t>.</a:t>
-            </a:r>
-          </a:p>
-          <a:p>
-            <a:r>
-              <a:rPr lang="ru-RU" dirty="0"/>
-              <a:t>Обратите внимание: это низкоуровневый API.</a:t>
-            </a:r>
-          </a:p>
-          <a:p>
-            <a:r>
-              <a:rPr lang="ru-RU" dirty="0"/>
-              <a:t>Он требует:</a:t>
-            </a:r>
-          </a:p>
-          <a:p>
-            <a:r>
-              <a:rPr lang="en-US" dirty="0"/>
-              <a:t>- </a:t>
-            </a:r>
-            <a:r>
-              <a:rPr lang="ru-RU" dirty="0"/>
-              <a:t>явной работы с указателями,</a:t>
-            </a:r>
-          </a:p>
-          <a:p>
-            <a:r>
-              <a:rPr lang="en-US" dirty="0"/>
-              <a:t>- </a:t>
-            </a:r>
-            <a:r>
-              <a:rPr lang="ru-RU" dirty="0"/>
-              <a:t>ручного управления ресурсами,</a:t>
-            </a:r>
-          </a:p>
-          <a:p>
-            <a:r>
-              <a:rPr lang="en-US" dirty="0"/>
-              <a:t>- </a:t>
-            </a:r>
-            <a:r>
-              <a:rPr lang="ru-RU" dirty="0"/>
-              <a:t>проверки кодов ошибок,</a:t>
-            </a:r>
-          </a:p>
-          <a:p>
-            <a:r>
-              <a:rPr lang="en-US" dirty="0"/>
-              <a:t>- </a:t>
-            </a:r>
-            <a:r>
-              <a:rPr lang="ru-RU" dirty="0"/>
-              <a:t>и является непереносимым между платформами.</a:t>
-            </a:r>
-          </a:p>
-          <a:p>
-            <a:r>
-              <a:rPr lang="ru-RU" dirty="0"/>
-              <a:t>Именно поэтому в C++ начиная с C++11 появился переносимый стандартный механизм — </a:t>
-            </a:r>
-            <a:r>
-              <a:rPr lang="ru-RU" dirty="0" err="1"/>
-              <a:t>std</a:t>
-            </a:r>
-            <a:r>
-              <a:rPr lang="ru-RU" dirty="0"/>
-              <a:t>::</a:t>
-            </a:r>
-            <a:r>
-              <a:rPr lang="ru-RU" dirty="0" err="1"/>
-              <a:t>thread</a:t>
-            </a:r>
-            <a:r>
-              <a:rPr lang="ru-RU" dirty="0"/>
-              <a:t>.</a:t>
-            </a:r>
-          </a:p>
-          <a:p>
-            <a:endParaRPr lang="en-US" dirty="0"/>
+            <a:endParaRPr lang="en-US"/>
           </a:p>
         </p:txBody>
       </p:sp>
@@ -3337,7 +3179,7 @@
           <a:p>
             <a:fld id="{8740D86D-1409-43B0-8811-9A559436DAB5}" type="slidenum">
               <a:rPr lang="en-US" smtClean="0"/>
-              <a:t>4</a:t>
+              <a:t>3</a:t>
             </a:fld>
             <a:endParaRPr lang="en-US"/>
           </a:p>
@@ -3346,7 +3188,7 @@
     </p:spTree>
     <p:extLst>
       <p:ext uri="{BB962C8B-B14F-4D97-AF65-F5344CB8AC3E}">
-        <p14:creationId xmlns:p14="http://schemas.microsoft.com/office/powerpoint/2010/main" val="1967902744"/>
+        <p14:creationId xmlns:p14="http://schemas.microsoft.com/office/powerpoint/2010/main" val="3843770054"/>
       </p:ext>
     </p:extLst>
   </p:cSld>
@@ -3421,7 +3263,7 @@
           <a:p>
             <a:fld id="{8740D86D-1409-43B0-8811-9A559436DAB5}" type="slidenum">
               <a:rPr lang="en-US" smtClean="0"/>
-              <a:t>31</a:t>
+              <a:t>30</a:t>
             </a:fld>
             <a:endParaRPr lang="en-US"/>
           </a:p>
@@ -3430,7 +3272,7 @@
     </p:spTree>
     <p:extLst>
       <p:ext uri="{BB962C8B-B14F-4D97-AF65-F5344CB8AC3E}">
-        <p14:creationId xmlns:p14="http://schemas.microsoft.com/office/powerpoint/2010/main" val="3885809860"/>
+        <p14:creationId xmlns:p14="http://schemas.microsoft.com/office/powerpoint/2010/main" val="1138463424"/>
       </p:ext>
     </p:extLst>
   </p:cSld>
@@ -3505,7 +3347,7 @@
           <a:p>
             <a:fld id="{8740D86D-1409-43B0-8811-9A559436DAB5}" type="slidenum">
               <a:rPr lang="en-US" smtClean="0"/>
-              <a:t>32</a:t>
+              <a:t>31</a:t>
             </a:fld>
             <a:endParaRPr lang="en-US"/>
           </a:p>
@@ -3514,7 +3356,7 @@
     </p:spTree>
     <p:extLst>
       <p:ext uri="{BB962C8B-B14F-4D97-AF65-F5344CB8AC3E}">
-        <p14:creationId xmlns:p14="http://schemas.microsoft.com/office/powerpoint/2010/main" val="2443303489"/>
+        <p14:creationId xmlns:p14="http://schemas.microsoft.com/office/powerpoint/2010/main" val="3885809860"/>
       </p:ext>
     </p:extLst>
   </p:cSld>
@@ -3589,7 +3431,7 @@
           <a:p>
             <a:fld id="{8740D86D-1409-43B0-8811-9A559436DAB5}" type="slidenum">
               <a:rPr lang="en-US" smtClean="0"/>
-              <a:t>33</a:t>
+              <a:t>32</a:t>
             </a:fld>
             <a:endParaRPr lang="en-US"/>
           </a:p>
@@ -3598,7 +3440,7 @@
     </p:spTree>
     <p:extLst>
       <p:ext uri="{BB962C8B-B14F-4D97-AF65-F5344CB8AC3E}">
-        <p14:creationId xmlns:p14="http://schemas.microsoft.com/office/powerpoint/2010/main" val="2927925095"/>
+        <p14:creationId xmlns:p14="http://schemas.microsoft.com/office/powerpoint/2010/main" val="2443303489"/>
       </p:ext>
     </p:extLst>
   </p:cSld>
@@ -3673,7 +3515,7 @@
           <a:p>
             <a:fld id="{8740D86D-1409-43B0-8811-9A559436DAB5}" type="slidenum">
               <a:rPr lang="en-US" smtClean="0"/>
-              <a:t>34</a:t>
+              <a:t>33</a:t>
             </a:fld>
             <a:endParaRPr lang="en-US"/>
           </a:p>
@@ -3682,7 +3524,7 @@
     </p:spTree>
     <p:extLst>
       <p:ext uri="{BB962C8B-B14F-4D97-AF65-F5344CB8AC3E}">
-        <p14:creationId xmlns:p14="http://schemas.microsoft.com/office/powerpoint/2010/main" val="3351961600"/>
+        <p14:creationId xmlns:p14="http://schemas.microsoft.com/office/powerpoint/2010/main" val="2927925095"/>
       </p:ext>
     </p:extLst>
   </p:cSld>
@@ -3757,7 +3599,7 @@
           <a:p>
             <a:fld id="{8740D86D-1409-43B0-8811-9A559436DAB5}" type="slidenum">
               <a:rPr lang="en-US" smtClean="0"/>
-              <a:t>35</a:t>
+              <a:t>34</a:t>
             </a:fld>
             <a:endParaRPr lang="en-US"/>
           </a:p>
@@ -3766,7 +3608,7 @@
     </p:spTree>
     <p:extLst>
       <p:ext uri="{BB962C8B-B14F-4D97-AF65-F5344CB8AC3E}">
-        <p14:creationId xmlns:p14="http://schemas.microsoft.com/office/powerpoint/2010/main" val="960008259"/>
+        <p14:creationId xmlns:p14="http://schemas.microsoft.com/office/powerpoint/2010/main" val="3351961600"/>
       </p:ext>
     </p:extLst>
   </p:cSld>
@@ -3820,163 +3662,7 @@
           <a:bodyPr/>
           <a:lstStyle/>
           <a:p>
-            <a:r>
-              <a:rPr lang="ru-RU" dirty="0"/>
-              <a:t>Сегодня мы познакомились с тем, как в C++ создаются и управляются потоки выполнения.</a:t>
-            </a:r>
-          </a:p>
-          <a:p>
-            <a:r>
-              <a:rPr lang="ru-RU" dirty="0"/>
-              <a:t>Важно понимать несколько ключевых вещей.</a:t>
-            </a:r>
-          </a:p>
-          <a:p>
-            <a:r>
-              <a:rPr lang="ru-RU" dirty="0"/>
-              <a:t>Во-первых, поток — это независимый исполнитель внутри одного процесса. Потоки разделяют память, а значит — разделяют и ответственность за корректность работы с ней.</a:t>
-            </a:r>
-          </a:p>
-          <a:p>
-            <a:endParaRPr lang="ru-RU" dirty="0"/>
-          </a:p>
-          <a:p>
-            <a:r>
-              <a:rPr lang="ru-RU" dirty="0"/>
-              <a:t>Во-вторых, </a:t>
-            </a:r>
-            <a:r>
-              <a:rPr lang="ru-RU" sz="1200" kern="1200" dirty="0" err="1">
-                <a:solidFill>
-                  <a:schemeClr val="tx1"/>
-                </a:solidFill>
-                <a:latin typeface="+mn-lt"/>
-                <a:ea typeface="+mn-ea"/>
-                <a:cs typeface="+mn-cs"/>
-              </a:rPr>
-              <a:t>std</a:t>
-            </a:r>
-            <a:r>
-              <a:rPr lang="ru-RU" sz="1200" kern="1200" dirty="0">
-                <a:solidFill>
-                  <a:schemeClr val="tx1"/>
-                </a:solidFill>
-                <a:latin typeface="+mn-lt"/>
-                <a:ea typeface="+mn-ea"/>
-                <a:cs typeface="+mn-cs"/>
-              </a:rPr>
-              <a:t>::</a:t>
-            </a:r>
-            <a:r>
-              <a:rPr lang="ru-RU" sz="1200" kern="1200" dirty="0" err="1">
-                <a:solidFill>
-                  <a:schemeClr val="tx1"/>
-                </a:solidFill>
-                <a:latin typeface="+mn-lt"/>
-                <a:ea typeface="+mn-ea"/>
-                <a:cs typeface="+mn-cs"/>
-              </a:rPr>
-              <a:t>thread</a:t>
-            </a:r>
-            <a:r>
-              <a:rPr lang="ru-RU" dirty="0"/>
-              <a:t> и </a:t>
-            </a:r>
-            <a:r>
-              <a:rPr lang="ru-RU" sz="1200" kern="1200" dirty="0" err="1">
-                <a:solidFill>
-                  <a:schemeClr val="tx1"/>
-                </a:solidFill>
-                <a:latin typeface="+mn-lt"/>
-                <a:ea typeface="+mn-ea"/>
-                <a:cs typeface="+mn-cs"/>
-              </a:rPr>
-              <a:t>std</a:t>
-            </a:r>
-            <a:r>
-              <a:rPr lang="ru-RU" sz="1200" kern="1200" dirty="0">
-                <a:solidFill>
-                  <a:schemeClr val="tx1"/>
-                </a:solidFill>
-                <a:latin typeface="+mn-lt"/>
-                <a:ea typeface="+mn-ea"/>
-                <a:cs typeface="+mn-cs"/>
-              </a:rPr>
-              <a:t>::</a:t>
-            </a:r>
-            <a:r>
-              <a:rPr lang="ru-RU" sz="1200" kern="1200" dirty="0" err="1">
-                <a:solidFill>
-                  <a:schemeClr val="tx1"/>
-                </a:solidFill>
-                <a:latin typeface="+mn-lt"/>
-                <a:ea typeface="+mn-ea"/>
-                <a:cs typeface="+mn-cs"/>
-              </a:rPr>
-              <a:t>jthread</a:t>
-            </a:r>
-            <a:r>
-              <a:rPr lang="ru-RU" dirty="0"/>
-              <a:t> — это переносимая абстракция над механизмами операционной системы. </a:t>
-            </a:r>
-          </a:p>
-          <a:p>
-            <a:r>
-              <a:rPr lang="ru-RU" dirty="0"/>
-              <a:t>Мы не работаем напрямую с </a:t>
-            </a:r>
-            <a:r>
-              <a:rPr lang="ru-RU" dirty="0" err="1"/>
-              <a:t>pthread</a:t>
-            </a:r>
-            <a:r>
-              <a:rPr lang="ru-RU" dirty="0"/>
-              <a:t> или </a:t>
-            </a:r>
-            <a:r>
-              <a:rPr lang="ru-RU" dirty="0" err="1"/>
-              <a:t>CreateThread</a:t>
-            </a:r>
-            <a:r>
-              <a:rPr lang="ru-RU" dirty="0"/>
-              <a:t>, но под капотом используется именно ОС.</a:t>
-            </a:r>
-          </a:p>
-          <a:p>
-            <a:endParaRPr lang="ru-RU" dirty="0"/>
-          </a:p>
-          <a:p>
-            <a:r>
-              <a:rPr lang="ru-RU" dirty="0"/>
-              <a:t>В-третьих, при создании потока аргументы не передаются напрямую в функцию. Они копируются или перемещаются внутрь объекта потока, и только потом используются для вызова функции в новом потоке.</a:t>
-            </a:r>
-          </a:p>
-          <a:p>
-            <a:r>
-              <a:rPr lang="ru-RU" dirty="0"/>
-              <a:t>Поэтому время жизни объектов — критически важно.</a:t>
-            </a:r>
-          </a:p>
-          <a:p>
-            <a:endParaRPr lang="ru-RU" dirty="0"/>
-          </a:p>
-          <a:p>
-            <a:r>
-              <a:rPr lang="ru-RU" dirty="0"/>
-              <a:t>И наконец, важно помнить вывод из прошлой лекции: увеличение числа потоков само по себе не гарантирует ускорения. Всё ограничивается структурой задачи и законом Амдала.</a:t>
-            </a:r>
-          </a:p>
-          <a:p>
-            <a:endParaRPr lang="ru-RU" dirty="0"/>
-          </a:p>
-          <a:p>
-            <a:r>
-              <a:rPr lang="ru-RU" dirty="0"/>
-              <a:t>На следующем шаге нам нужно разобраться, что происходит, когда несколько потоков начинают одновременно работать с одной и той же памятью — и почему это может привести к гонкам данных и неопределённому поведению.</a:t>
-            </a:r>
-          </a:p>
-          <a:p>
-            <a:endParaRPr lang="en-US" dirty="0"/>
+            <a:endParaRPr lang="en-US"/>
           </a:p>
         </p:txBody>
       </p:sp>
@@ -3997,6 +3683,246 @@
           <a:p>
             <a:fld id="{8740D86D-1409-43B0-8811-9A559436DAB5}" type="slidenum">
               <a:rPr lang="en-US" smtClean="0"/>
+              <a:t>35</a:t>
+            </a:fld>
+            <a:endParaRPr lang="en-US"/>
+          </a:p>
+        </p:txBody>
+      </p:sp>
+    </p:spTree>
+    <p:extLst>
+      <p:ext uri="{BB962C8B-B14F-4D97-AF65-F5344CB8AC3E}">
+        <p14:creationId xmlns:p14="http://schemas.microsoft.com/office/powerpoint/2010/main" val="960008259"/>
+      </p:ext>
+    </p:extLst>
+  </p:cSld>
+  <p:clrMapOvr>
+    <a:masterClrMapping/>
+  </p:clrMapOvr>
+</p:notes>
+</file>
+
+<file path=ppt/notesSlides/notesSlide36.xml><?xml version="1.0" encoding="utf-8"?>
+<p:notes xmlns:a="http://schemas.openxmlformats.org/drawingml/2006/main" xmlns:r="http://schemas.openxmlformats.org/officeDocument/2006/relationships" xmlns:p="http://schemas.openxmlformats.org/presentationml/2006/main">
+  <p:cSld>
+    <p:spTree>
+      <p:nvGrpSpPr>
+        <p:cNvPr id="1" name=""/>
+        <p:cNvGrpSpPr/>
+        <p:nvPr/>
+      </p:nvGrpSpPr>
+      <p:grpSpPr>
+        <a:xfrm>
+          <a:off x="0" y="0"/>
+          <a:ext cx="0" cy="0"/>
+          <a:chOff x="0" y="0"/>
+          <a:chExt cx="0" cy="0"/>
+        </a:xfrm>
+      </p:grpSpPr>
+      <p:sp>
+        <p:nvSpPr>
+          <p:cNvPr id="2" name="Slide Image Placeholder 1"/>
+          <p:cNvSpPr>
+            <a:spLocks noGrp="1" noRot="1" noChangeAspect="1"/>
+          </p:cNvSpPr>
+          <p:nvPr>
+            <p:ph type="sldImg"/>
+          </p:nvPr>
+        </p:nvSpPr>
+        <p:spPr/>
+      </p:sp>
+      <p:sp>
+        <p:nvSpPr>
+          <p:cNvPr id="3" name="Notes Placeholder 2"/>
+          <p:cNvSpPr>
+            <a:spLocks noGrp="1"/>
+          </p:cNvSpPr>
+          <p:nvPr>
+            <p:ph type="body" idx="1"/>
+          </p:nvPr>
+        </p:nvSpPr>
+        <p:spPr/>
+        <p:txBody>
+          <a:bodyPr/>
+          <a:lstStyle/>
+          <a:p>
+            <a:r>
+              <a:rPr lang="ru-RU" dirty="0"/>
+              <a:t>Сегодня мы познакомились с тем, как в C++ создаются и управляются потоки выполнения.</a:t>
+            </a:r>
+          </a:p>
+          <a:p>
+            <a:r>
+              <a:rPr lang="ru-RU" dirty="0"/>
+              <a:t>Важно понимать несколько ключевых вещей.</a:t>
+            </a:r>
+          </a:p>
+          <a:p>
+            <a:r>
+              <a:rPr lang="ru-RU" dirty="0"/>
+              <a:t>Во-первых, поток — это независимый исполнитель внутри одного процесса. Потоки разделяют память, а значит — разделяют и ответственность за корректность работы с ней.</a:t>
+            </a:r>
+          </a:p>
+          <a:p>
+            <a:endParaRPr lang="ru-RU" dirty="0"/>
+          </a:p>
+          <a:p>
+            <a:r>
+              <a:rPr lang="ru-RU" dirty="0"/>
+              <a:t>Во-вторых, </a:t>
+            </a:r>
+            <a:r>
+              <a:rPr lang="ru-RU" sz="1200" kern="1200" dirty="0" err="1">
+                <a:solidFill>
+                  <a:schemeClr val="tx1"/>
+                </a:solidFill>
+                <a:latin typeface="+mn-lt"/>
+                <a:ea typeface="+mn-ea"/>
+                <a:cs typeface="+mn-cs"/>
+              </a:rPr>
+              <a:t>std</a:t>
+            </a:r>
+            <a:r>
+              <a:rPr lang="ru-RU" sz="1200" kern="1200" dirty="0">
+                <a:solidFill>
+                  <a:schemeClr val="tx1"/>
+                </a:solidFill>
+                <a:latin typeface="+mn-lt"/>
+                <a:ea typeface="+mn-ea"/>
+                <a:cs typeface="+mn-cs"/>
+              </a:rPr>
+              <a:t>::</a:t>
+            </a:r>
+            <a:r>
+              <a:rPr lang="ru-RU" sz="1200" kern="1200" dirty="0" err="1">
+                <a:solidFill>
+                  <a:schemeClr val="tx1"/>
+                </a:solidFill>
+                <a:latin typeface="+mn-lt"/>
+                <a:ea typeface="+mn-ea"/>
+                <a:cs typeface="+mn-cs"/>
+              </a:rPr>
+              <a:t>thread</a:t>
+            </a:r>
+            <a:r>
+              <a:rPr lang="ru-RU" dirty="0"/>
+              <a:t> и </a:t>
+            </a:r>
+            <a:r>
+              <a:rPr lang="ru-RU" sz="1200" kern="1200" dirty="0" err="1">
+                <a:solidFill>
+                  <a:schemeClr val="tx1"/>
+                </a:solidFill>
+                <a:latin typeface="+mn-lt"/>
+                <a:ea typeface="+mn-ea"/>
+                <a:cs typeface="+mn-cs"/>
+              </a:rPr>
+              <a:t>std</a:t>
+            </a:r>
+            <a:r>
+              <a:rPr lang="ru-RU" sz="1200" kern="1200" dirty="0">
+                <a:solidFill>
+                  <a:schemeClr val="tx1"/>
+                </a:solidFill>
+                <a:latin typeface="+mn-lt"/>
+                <a:ea typeface="+mn-ea"/>
+                <a:cs typeface="+mn-cs"/>
+              </a:rPr>
+              <a:t>::</a:t>
+            </a:r>
+            <a:r>
+              <a:rPr lang="ru-RU" sz="1200" kern="1200" dirty="0" err="1">
+                <a:solidFill>
+                  <a:schemeClr val="tx1"/>
+                </a:solidFill>
+                <a:latin typeface="+mn-lt"/>
+                <a:ea typeface="+mn-ea"/>
+                <a:cs typeface="+mn-cs"/>
+              </a:rPr>
+              <a:t>jthread</a:t>
+            </a:r>
+            <a:r>
+              <a:rPr lang="ru-RU" dirty="0"/>
+              <a:t> — это переносимая абстракция над механизмами операционной системы. </a:t>
+            </a:r>
+          </a:p>
+          <a:p>
+            <a:r>
+              <a:rPr lang="ru-RU" dirty="0"/>
+              <a:t>Мы не работаем напрямую с </a:t>
+            </a:r>
+            <a:r>
+              <a:rPr lang="ru-RU" dirty="0" err="1"/>
+              <a:t>pthread</a:t>
+            </a:r>
+            <a:r>
+              <a:rPr lang="ru-RU" dirty="0"/>
+              <a:t> или </a:t>
+            </a:r>
+            <a:r>
+              <a:rPr lang="ru-RU" dirty="0" err="1"/>
+              <a:t>CreateThread</a:t>
+            </a:r>
+            <a:r>
+              <a:rPr lang="ru-RU" dirty="0"/>
+              <a:t>, но под капотом используется именно ОС.</a:t>
+            </a:r>
+          </a:p>
+          <a:p>
+            <a:endParaRPr lang="ru-RU" dirty="0"/>
+          </a:p>
+          <a:p>
+            <a:r>
+              <a:rPr lang="ru-RU" dirty="0"/>
+              <a:t>В-третьих, при создании потока аргументы не передаются напрямую в функцию. Они копируются или перемещаются внутрь объекта потока, и только потом используются для вызова функции в новом потоке.</a:t>
+            </a:r>
+          </a:p>
+          <a:p>
+            <a:r>
+              <a:rPr lang="ru-RU" dirty="0"/>
+              <a:t>Поэтому время жизни объектов — критически важно.</a:t>
+            </a:r>
+          </a:p>
+          <a:p>
+            <a:endParaRPr lang="ru-RU" dirty="0"/>
+          </a:p>
+          <a:p>
+            <a:r>
+              <a:rPr lang="ru-RU" dirty="0"/>
+              <a:t>И наконец, важно помнить вывод из прошлой лекции: увеличение числа потоков само по себе не гарантирует ускорения. Всё ограничивается структурой задачи и законом Амдала.</a:t>
+            </a:r>
+          </a:p>
+          <a:p>
+            <a:endParaRPr lang="ru-RU" dirty="0"/>
+          </a:p>
+          <a:p>
+            <a:r>
+              <a:rPr lang="ru-RU" dirty="0"/>
+              <a:t>На следующем шаге нам нужно разобраться, что происходит, когда несколько потоков начинают одновременно работать с одной и той же памятью — и почему это может привести к гонкам данных и неопределённому поведению.</a:t>
+            </a:r>
+          </a:p>
+          <a:p>
+            <a:endParaRPr lang="en-US" dirty="0"/>
+          </a:p>
+        </p:txBody>
+      </p:sp>
+      <p:sp>
+        <p:nvSpPr>
+          <p:cNvPr id="4" name="Slide Number Placeholder 3"/>
+          <p:cNvSpPr>
+            <a:spLocks noGrp="1"/>
+          </p:cNvSpPr>
+          <p:nvPr>
+            <p:ph type="sldNum" sz="quarter" idx="5"/>
+          </p:nvPr>
+        </p:nvSpPr>
+        <p:spPr/>
+        <p:txBody>
+          <a:bodyPr/>
+          <a:lstStyle/>
+          <a:p>
+            <a:fld id="{8740D86D-1409-43B0-8811-9A559436DAB5}" type="slidenum">
+              <a:rPr lang="en-US" smtClean="0"/>
               <a:t>36</a:t>
             </a:fld>
             <a:endParaRPr lang="en-US"/>
@@ -4016,7 +3942,7 @@
 </p:notes>
 </file>
 
-<file path=ppt/notesSlides/notesSlide36.xml><?xml version="1.0" encoding="utf-8"?>
+<file path=ppt/notesSlides/notesSlide37.xml><?xml version="1.0" encoding="utf-8"?>
 <p:notes xmlns:a="http://schemas.openxmlformats.org/drawingml/2006/main" xmlns:r="http://schemas.openxmlformats.org/officeDocument/2006/relationships" xmlns:p="http://schemas.openxmlformats.org/presentationml/2006/main">
   <p:cSld>
     <p:spTree>
@@ -4146,15 +4072,69 @@
           <a:p>
             <a:r>
               <a:rPr lang="ru-RU" dirty="0"/>
-              <a:t>В большинстве прикладных программ нам не нужно напрямую работать с </a:t>
+              <a:t>Когда мы говорим «создать поток», на самом деле мы просим операционную систему создать новый исполнитель внутри процесса.</a:t>
+            </a:r>
+          </a:p>
+          <a:p>
+            <a:r>
+              <a:rPr lang="ru-RU" dirty="0"/>
+              <a:t>Это не просто вызов функции.</a:t>
+            </a:r>
+          </a:p>
+          <a:p>
+            <a:r>
+              <a:rPr lang="ru-RU" dirty="0"/>
+              <a:t>Ядро операционной системы:</a:t>
+            </a:r>
+          </a:p>
+          <a:p>
+            <a:r>
+              <a:rPr lang="ru-RU" dirty="0"/>
+              <a:t>выделяет новый стек,</a:t>
+            </a:r>
+          </a:p>
+          <a:p>
+            <a:r>
+              <a:rPr lang="ru-RU" dirty="0"/>
+              <a:t>создаёт структуру управления потоком,</a:t>
+            </a:r>
+          </a:p>
+          <a:p>
+            <a:r>
+              <a:rPr lang="ru-RU" dirty="0"/>
+              <a:t>настраивает регистры,</a:t>
+            </a:r>
+          </a:p>
+          <a:p>
+            <a:r>
+              <a:rPr lang="ru-RU" dirty="0"/>
+              <a:t>регистрирует поток в планировщике,</a:t>
+            </a:r>
+          </a:p>
+          <a:p>
+            <a:r>
+              <a:rPr lang="ru-RU" dirty="0"/>
+              <a:t>и только после этого начинает выполнение указанной функции.</a:t>
+            </a:r>
+          </a:p>
+          <a:p>
+            <a:r>
+              <a:rPr lang="ru-RU" dirty="0"/>
+              <a:t>В Linux используется стандарт POSIX — функция </a:t>
             </a:r>
             <a:r>
               <a:rPr lang="ru-RU" dirty="0" err="1"/>
-              <a:t>pthread</a:t>
+              <a:t>pthread_create</a:t>
             </a:r>
             <a:r>
               <a:rPr lang="ru-RU" dirty="0"/>
-              <a:t> или </a:t>
+              <a:t>.</a:t>
+            </a:r>
+          </a:p>
+          <a:p>
+            <a:r>
+              <a:rPr lang="ru-RU" dirty="0"/>
+              <a:t>В Windows — </a:t>
             </a:r>
             <a:r>
               <a:rPr lang="ru-RU" dirty="0" err="1"/>
@@ -4162,143 +4142,74 @@
             </a:r>
             <a:r>
               <a:rPr lang="ru-RU" dirty="0"/>
+              <a:t> или _</a:t>
+            </a:r>
+            <a:r>
+              <a:rPr lang="ru-RU" dirty="0" err="1"/>
+              <a:t>beginthreadex</a:t>
+            </a:r>
+            <a:r>
+              <a:rPr lang="ru-RU" dirty="0"/>
               <a:t>.</a:t>
             </a:r>
           </a:p>
           <a:p>
             <a:r>
               <a:rPr lang="ru-RU" dirty="0"/>
-              <a:t>Эти API оправданы, если:</a:t>
-            </a:r>
-          </a:p>
-          <a:p>
-            <a:pPr marL="171450" indent="-171450">
-              <a:buFont typeface="Arial" panose="020B0604020202020204" pitchFamily="34" charset="0"/>
-              <a:buChar char="•"/>
-            </a:pPr>
+              <a:t>Обратите внимание: это низкоуровневый API.</a:t>
+            </a:r>
+          </a:p>
+          <a:p>
             <a:r>
               <a:rPr lang="ru-RU" dirty="0"/>
-              <a:t>мы пишем системный код,</a:t>
-            </a:r>
-          </a:p>
-          <a:p>
-            <a:pPr marL="171450" indent="-171450">
-              <a:buFont typeface="Arial" panose="020B0604020202020204" pitchFamily="34" charset="0"/>
-              <a:buChar char="•"/>
-            </a:pPr>
+              <a:t>Он требует:</a:t>
+            </a:r>
+          </a:p>
+          <a:p>
+            <a:r>
+              <a:rPr lang="en-US" dirty="0"/>
+              <a:t>- </a:t>
+            </a:r>
             <a:r>
               <a:rPr lang="ru-RU" dirty="0"/>
-              <a:t>нам нужно контролировать размер стека,</a:t>
-            </a:r>
-          </a:p>
-          <a:p>
-            <a:pPr marL="171450" indent="-171450">
-              <a:buFont typeface="Arial" panose="020B0604020202020204" pitchFamily="34" charset="0"/>
-              <a:buChar char="•"/>
-            </a:pPr>
+              <a:t>явной работы с указателями,</a:t>
+            </a:r>
+          </a:p>
+          <a:p>
+            <a:r>
+              <a:rPr lang="en-US" dirty="0"/>
+              <a:t>- </a:t>
+            </a:r>
             <a:r>
               <a:rPr lang="ru-RU" dirty="0"/>
-              <a:t>настраивать приоритет,</a:t>
-            </a:r>
-          </a:p>
-          <a:p>
-            <a:pPr marL="171450" indent="-171450">
-              <a:buFont typeface="Arial" panose="020B0604020202020204" pitchFamily="34" charset="0"/>
-              <a:buChar char="•"/>
-            </a:pPr>
+              <a:t>ручного управления ресурсами,</a:t>
+            </a:r>
+          </a:p>
+          <a:p>
+            <a:r>
+              <a:rPr lang="en-US" dirty="0"/>
+              <a:t>- </a:t>
+            </a:r>
             <a:r>
               <a:rPr lang="ru-RU" dirty="0"/>
-              <a:t>работать с политиками планирования,</a:t>
-            </a:r>
-          </a:p>
-          <a:p>
-            <a:pPr marL="171450" indent="-171450">
-              <a:buFont typeface="Arial" panose="020B0604020202020204" pitchFamily="34" charset="0"/>
-              <a:buChar char="•"/>
-            </a:pPr>
+              <a:t>проверки кодов ошибок,</a:t>
+            </a:r>
+          </a:p>
+          <a:p>
+            <a:r>
+              <a:rPr lang="en-US" dirty="0"/>
+              <a:t>- </a:t>
+            </a:r>
             <a:r>
               <a:rPr lang="ru-RU" dirty="0"/>
-              <a:t>или использовать специфичные механизмы ОС.</a:t>
+              <a:t>и является непереносимым между платформами.</a:t>
             </a:r>
           </a:p>
           <a:p>
             <a:r>
               <a:rPr lang="ru-RU" dirty="0"/>
-              <a:t>Но для обычных пользовательских приложений это избыточно.</a:t>
-            </a:r>
-          </a:p>
-          <a:p>
-            <a:r>
-              <a:rPr lang="ru-RU" dirty="0"/>
-              <a:t>Стандартная библиотека C++ даёт нам:</a:t>
-            </a:r>
-          </a:p>
-          <a:p>
-            <a:pPr marL="171450" indent="-171450">
-              <a:buFont typeface="Arial" panose="020B0604020202020204" pitchFamily="34" charset="0"/>
-              <a:buChar char="•"/>
-            </a:pPr>
-            <a:r>
-              <a:rPr lang="ru-RU" dirty="0"/>
-              <a:t>переносимость,</a:t>
-            </a:r>
-          </a:p>
-          <a:p>
-            <a:pPr marL="171450" indent="-171450">
-              <a:buFont typeface="Arial" panose="020B0604020202020204" pitchFamily="34" charset="0"/>
-              <a:buChar char="•"/>
-            </a:pPr>
-            <a:r>
-              <a:rPr lang="ru-RU" dirty="0"/>
-              <a:t>автоматическое управление ресурсами,</a:t>
-            </a:r>
-          </a:p>
-          <a:p>
-            <a:pPr marL="171450" indent="-171450">
-              <a:buFont typeface="Arial" panose="020B0604020202020204" pitchFamily="34" charset="0"/>
-              <a:buChar char="•"/>
-            </a:pPr>
-            <a:r>
-              <a:rPr lang="ru-RU" dirty="0"/>
-              <a:t>безопасную семантику перемещения,</a:t>
-            </a:r>
-          </a:p>
-          <a:p>
-            <a:pPr marL="171450" indent="-171450">
-              <a:buFont typeface="Arial" panose="020B0604020202020204" pitchFamily="34" charset="0"/>
-              <a:buChar char="•"/>
-            </a:pPr>
-            <a:r>
-              <a:rPr lang="ru-RU" dirty="0"/>
-              <a:t>и более чистый интерфейс.</a:t>
-            </a:r>
-          </a:p>
-          <a:p>
-            <a:r>
-              <a:rPr lang="ru-RU" dirty="0"/>
-              <a:t>Можно сказать так:</a:t>
-            </a:r>
-          </a:p>
-          <a:p>
-            <a:r>
-              <a:rPr lang="ru-RU" dirty="0" err="1"/>
-              <a:t>pthread</a:t>
-            </a:r>
-            <a:r>
-              <a:rPr lang="ru-RU" dirty="0"/>
-              <a:t> и </a:t>
-            </a:r>
-            <a:r>
-              <a:rPr lang="ru-RU" dirty="0" err="1"/>
-              <a:t>CreateThread</a:t>
-            </a:r>
-            <a:r>
-              <a:rPr lang="ru-RU" dirty="0"/>
-              <a:t> — это системный уровень.</a:t>
-            </a:r>
-            <a:br>
-              <a:rPr lang="ru-RU" dirty="0"/>
-            </a:br>
+              <a:t>Именно поэтому в C++ начиная с C++11 появился переносимый стандартный механизм — </a:t>
+            </a:r>
             <a:r>
               <a:rPr lang="ru-RU" dirty="0" err="1"/>
               <a:t>std</a:t>
@@ -4313,13 +4224,7 @@
             </a:r>
             <a:r>
               <a:rPr lang="ru-RU" dirty="0"/>
-              <a:t> — это язык и библиотечная абстракция над ним.</a:t>
-            </a:r>
-          </a:p>
-          <a:p>
-            <a:r>
-              <a:rPr lang="ru-RU" dirty="0"/>
-              <a:t>И в рамках курса по параллельному программированию нас интересует именно эта переносимая абстракция.</a:t>
+              <a:t>.</a:t>
             </a:r>
           </a:p>
           <a:p>
@@ -4344,7 +4249,7 @@
           <a:p>
             <a:fld id="{8740D86D-1409-43B0-8811-9A559436DAB5}" type="slidenum">
               <a:rPr lang="en-US" smtClean="0"/>
-              <a:t>5</a:t>
+              <a:t>4</a:t>
             </a:fld>
             <a:endParaRPr lang="en-US"/>
           </a:p>
@@ -4353,7 +4258,7 @@
     </p:spTree>
     <p:extLst>
       <p:ext uri="{BB962C8B-B14F-4D97-AF65-F5344CB8AC3E}">
-        <p14:creationId xmlns:p14="http://schemas.microsoft.com/office/powerpoint/2010/main" val="665650924"/>
+        <p14:creationId xmlns:p14="http://schemas.microsoft.com/office/powerpoint/2010/main" val="1967902744"/>
       </p:ext>
     </p:extLst>
   </p:cSld>
@@ -4407,7 +4312,186 @@
           <a:bodyPr/>
           <a:lstStyle/>
           <a:p>
-            <a:endParaRPr lang="en-US"/>
+            <a:r>
+              <a:rPr lang="ru-RU" dirty="0"/>
+              <a:t>В большинстве прикладных программ нам не нужно напрямую работать с </a:t>
+            </a:r>
+            <a:r>
+              <a:rPr lang="ru-RU" dirty="0" err="1"/>
+              <a:t>pthread</a:t>
+            </a:r>
+            <a:r>
+              <a:rPr lang="ru-RU" dirty="0"/>
+              <a:t> или </a:t>
+            </a:r>
+            <a:r>
+              <a:rPr lang="ru-RU" dirty="0" err="1"/>
+              <a:t>CreateThread</a:t>
+            </a:r>
+            <a:r>
+              <a:rPr lang="ru-RU" dirty="0"/>
+              <a:t>.</a:t>
+            </a:r>
+          </a:p>
+          <a:p>
+            <a:r>
+              <a:rPr lang="ru-RU" dirty="0"/>
+              <a:t>Эти API оправданы, если:</a:t>
+            </a:r>
+          </a:p>
+          <a:p>
+            <a:pPr marL="171450" indent="-171450">
+              <a:buFont typeface="Arial" panose="020B0604020202020204" pitchFamily="34" charset="0"/>
+              <a:buChar char="•"/>
+            </a:pPr>
+            <a:r>
+              <a:rPr lang="ru-RU" dirty="0"/>
+              <a:t>мы пишем системный код,</a:t>
+            </a:r>
+          </a:p>
+          <a:p>
+            <a:pPr marL="171450" indent="-171450">
+              <a:buFont typeface="Arial" panose="020B0604020202020204" pitchFamily="34" charset="0"/>
+              <a:buChar char="•"/>
+            </a:pPr>
+            <a:r>
+              <a:rPr lang="ru-RU" dirty="0"/>
+              <a:t>нам нужно контролировать размер стека,</a:t>
+            </a:r>
+          </a:p>
+          <a:p>
+            <a:pPr marL="171450" indent="-171450">
+              <a:buFont typeface="Arial" panose="020B0604020202020204" pitchFamily="34" charset="0"/>
+              <a:buChar char="•"/>
+            </a:pPr>
+            <a:r>
+              <a:rPr lang="ru-RU" dirty="0"/>
+              <a:t>настраивать приоритет,</a:t>
+            </a:r>
+          </a:p>
+          <a:p>
+            <a:pPr marL="171450" indent="-171450">
+              <a:buFont typeface="Arial" panose="020B0604020202020204" pitchFamily="34" charset="0"/>
+              <a:buChar char="•"/>
+            </a:pPr>
+            <a:r>
+              <a:rPr lang="ru-RU" dirty="0"/>
+              <a:t>работать с политиками планирования,</a:t>
+            </a:r>
+          </a:p>
+          <a:p>
+            <a:pPr marL="171450" indent="-171450">
+              <a:buFont typeface="Arial" panose="020B0604020202020204" pitchFamily="34" charset="0"/>
+              <a:buChar char="•"/>
+            </a:pPr>
+            <a:r>
+              <a:rPr lang="ru-RU" dirty="0"/>
+              <a:t>или использовать специфичные механизмы ОС.</a:t>
+            </a:r>
+          </a:p>
+          <a:p>
+            <a:r>
+              <a:rPr lang="ru-RU" dirty="0"/>
+              <a:t>Но для обычных пользовательских приложений это избыточно.</a:t>
+            </a:r>
+          </a:p>
+          <a:p>
+            <a:r>
+              <a:rPr lang="ru-RU" dirty="0"/>
+              <a:t>Стандартная библиотека C++ даёт нам:</a:t>
+            </a:r>
+          </a:p>
+          <a:p>
+            <a:pPr marL="171450" indent="-171450">
+              <a:buFont typeface="Arial" panose="020B0604020202020204" pitchFamily="34" charset="0"/>
+              <a:buChar char="•"/>
+            </a:pPr>
+            <a:r>
+              <a:rPr lang="ru-RU" dirty="0"/>
+              <a:t>переносимость,</a:t>
+            </a:r>
+          </a:p>
+          <a:p>
+            <a:pPr marL="171450" indent="-171450">
+              <a:buFont typeface="Arial" panose="020B0604020202020204" pitchFamily="34" charset="0"/>
+              <a:buChar char="•"/>
+            </a:pPr>
+            <a:r>
+              <a:rPr lang="ru-RU" dirty="0"/>
+              <a:t>автоматическое управление ресурсами,</a:t>
+            </a:r>
+          </a:p>
+          <a:p>
+            <a:pPr marL="171450" indent="-171450">
+              <a:buFont typeface="Arial" panose="020B0604020202020204" pitchFamily="34" charset="0"/>
+              <a:buChar char="•"/>
+            </a:pPr>
+            <a:r>
+              <a:rPr lang="ru-RU" dirty="0"/>
+              <a:t>безопасную семантику перемещения,</a:t>
+            </a:r>
+          </a:p>
+          <a:p>
+            <a:pPr marL="171450" indent="-171450">
+              <a:buFont typeface="Arial" panose="020B0604020202020204" pitchFamily="34" charset="0"/>
+              <a:buChar char="•"/>
+            </a:pPr>
+            <a:r>
+              <a:rPr lang="ru-RU" dirty="0"/>
+              <a:t>и более чистый интерфейс.</a:t>
+            </a:r>
+          </a:p>
+          <a:p>
+            <a:r>
+              <a:rPr lang="ru-RU" dirty="0"/>
+              <a:t>Можно сказать так:</a:t>
+            </a:r>
+          </a:p>
+          <a:p>
+            <a:r>
+              <a:rPr lang="ru-RU" dirty="0" err="1"/>
+              <a:t>pthread</a:t>
+            </a:r>
+            <a:r>
+              <a:rPr lang="ru-RU" dirty="0"/>
+              <a:t> и </a:t>
+            </a:r>
+            <a:r>
+              <a:rPr lang="ru-RU" dirty="0" err="1"/>
+              <a:t>CreateThread</a:t>
+            </a:r>
+            <a:r>
+              <a:rPr lang="ru-RU" dirty="0"/>
+              <a:t> — это системный уровень.</a:t>
+            </a:r>
+            <a:br>
+              <a:rPr lang="ru-RU" dirty="0"/>
+            </a:br>
+            <a:r>
+              <a:rPr lang="ru-RU" dirty="0" err="1"/>
+              <a:t>std</a:t>
+            </a:r>
+            <a:r>
+              <a:rPr lang="ru-RU" dirty="0"/>
+              <a:t>::</a:t>
+            </a:r>
+            <a:r>
+              <a:rPr lang="ru-RU" dirty="0" err="1"/>
+              <a:t>thread</a:t>
+            </a:r>
+            <a:r>
+              <a:rPr lang="ru-RU" dirty="0"/>
+              <a:t> — это язык и библиотечная абстракция над ним.</a:t>
+            </a:r>
+          </a:p>
+          <a:p>
+            <a:r>
+              <a:rPr lang="ru-RU" dirty="0"/>
+              <a:t>И в рамках курса по параллельному программированию нас интересует именно эта переносимая абстракция.</a:t>
+            </a:r>
+          </a:p>
+          <a:p>
+            <a:endParaRPr lang="en-US" dirty="0"/>
           </a:p>
         </p:txBody>
       </p:sp>
@@ -4428,7 +4512,7 @@
           <a:p>
             <a:fld id="{8740D86D-1409-43B0-8811-9A559436DAB5}" type="slidenum">
               <a:rPr lang="en-US" smtClean="0"/>
-              <a:t>6</a:t>
+              <a:t>5</a:t>
             </a:fld>
             <a:endParaRPr lang="en-US"/>
           </a:p>
@@ -4437,7 +4521,7 @@
     </p:spTree>
     <p:extLst>
       <p:ext uri="{BB962C8B-B14F-4D97-AF65-F5344CB8AC3E}">
-        <p14:creationId xmlns:p14="http://schemas.microsoft.com/office/powerpoint/2010/main" val="1553879196"/>
+        <p14:creationId xmlns:p14="http://schemas.microsoft.com/office/powerpoint/2010/main" val="665650924"/>
       </p:ext>
     </p:extLst>
   </p:cSld>
@@ -4512,7 +4596,7 @@
           <a:p>
             <a:fld id="{8740D86D-1409-43B0-8811-9A559436DAB5}" type="slidenum">
               <a:rPr lang="en-US" smtClean="0"/>
-              <a:t>7</a:t>
+              <a:t>6</a:t>
             </a:fld>
             <a:endParaRPr lang="en-US"/>
           </a:p>
@@ -4521,7 +4605,7 @@
     </p:spTree>
     <p:extLst>
       <p:ext uri="{BB962C8B-B14F-4D97-AF65-F5344CB8AC3E}">
-        <p14:creationId xmlns:p14="http://schemas.microsoft.com/office/powerpoint/2010/main" val="286721523"/>
+        <p14:creationId xmlns:p14="http://schemas.microsoft.com/office/powerpoint/2010/main" val="1553879196"/>
       </p:ext>
     </p:extLst>
   </p:cSld>
@@ -4596,7 +4680,7 @@
           <a:p>
             <a:fld id="{8740D86D-1409-43B0-8811-9A559436DAB5}" type="slidenum">
               <a:rPr lang="en-US" smtClean="0"/>
-              <a:t>8</a:t>
+              <a:t>7</a:t>
             </a:fld>
             <a:endParaRPr lang="en-US"/>
           </a:p>
@@ -4605,7 +4689,7 @@
     </p:spTree>
     <p:extLst>
       <p:ext uri="{BB962C8B-B14F-4D97-AF65-F5344CB8AC3E}">
-        <p14:creationId xmlns:p14="http://schemas.microsoft.com/office/powerpoint/2010/main" val="2044035842"/>
+        <p14:creationId xmlns:p14="http://schemas.microsoft.com/office/powerpoint/2010/main" val="286721523"/>
       </p:ext>
     </p:extLst>
   </p:cSld>
@@ -4680,7 +4764,7 @@
           <a:p>
             <a:fld id="{8740D86D-1409-43B0-8811-9A559436DAB5}" type="slidenum">
               <a:rPr lang="en-US" smtClean="0"/>
-              <a:t>9</a:t>
+              <a:t>8</a:t>
             </a:fld>
             <a:endParaRPr lang="en-US"/>
           </a:p>
@@ -4689,7 +4773,7 @@
     </p:spTree>
     <p:extLst>
       <p:ext uri="{BB962C8B-B14F-4D97-AF65-F5344CB8AC3E}">
-        <p14:creationId xmlns:p14="http://schemas.microsoft.com/office/powerpoint/2010/main" val="2821311572"/>
+        <p14:creationId xmlns:p14="http://schemas.microsoft.com/office/powerpoint/2010/main" val="2044035842"/>
       </p:ext>
     </p:extLst>
   </p:cSld>
@@ -4764,7 +4848,7 @@
           <a:p>
             <a:fld id="{8740D86D-1409-43B0-8811-9A559436DAB5}" type="slidenum">
               <a:rPr lang="en-US" smtClean="0"/>
-              <a:t>10</a:t>
+              <a:t>9</a:t>
             </a:fld>
             <a:endParaRPr lang="en-US"/>
           </a:p>
@@ -4773,7 +4857,7 @@
     </p:spTree>
     <p:extLst>
       <p:ext uri="{BB962C8B-B14F-4D97-AF65-F5344CB8AC3E}">
-        <p14:creationId xmlns:p14="http://schemas.microsoft.com/office/powerpoint/2010/main" val="323937840"/>
+        <p14:creationId xmlns:p14="http://schemas.microsoft.com/office/powerpoint/2010/main" val="2821311572"/>
       </p:ext>
     </p:extLst>
   </p:cSld>
@@ -4930,7 +5014,7 @@
           <a:p>
             <a:fld id="{93C95F23-F574-4C00-9B25-D94C8E69B068}" type="datetimeFigureOut">
               <a:rPr lang="en-US" smtClean="0"/>
-              <a:t>2/13/2026</a:t>
+              <a:t>3/26/2026</a:t>
             </a:fld>
             <a:endParaRPr lang="en-US"/>
           </a:p>
@@ -5128,7 +5212,7 @@
           <a:p>
             <a:fld id="{93C95F23-F574-4C00-9B25-D94C8E69B068}" type="datetimeFigureOut">
               <a:rPr lang="en-US" smtClean="0"/>
-              <a:t>2/13/2026</a:t>
+              <a:t>3/26/2026</a:t>
             </a:fld>
             <a:endParaRPr lang="en-US"/>
           </a:p>
@@ -5336,7 +5420,7 @@
           <a:p>
             <a:fld id="{93C95F23-F574-4C00-9B25-D94C8E69B068}" type="datetimeFigureOut">
               <a:rPr lang="en-US" smtClean="0"/>
-              <a:t>2/13/2026</a:t>
+              <a:t>3/26/2026</a:t>
             </a:fld>
             <a:endParaRPr lang="en-US"/>
           </a:p>
@@ -5534,7 +5618,7 @@
           <a:p>
             <a:fld id="{93C95F23-F574-4C00-9B25-D94C8E69B068}" type="datetimeFigureOut">
               <a:rPr lang="en-US" smtClean="0"/>
-              <a:t>2/13/2026</a:t>
+              <a:t>3/26/2026</a:t>
             </a:fld>
             <a:endParaRPr lang="en-US"/>
           </a:p>
@@ -5809,7 +5893,7 @@
           <a:p>
             <a:fld id="{93C95F23-F574-4C00-9B25-D94C8E69B068}" type="datetimeFigureOut">
               <a:rPr lang="en-US" smtClean="0"/>
-              <a:t>2/13/2026</a:t>
+              <a:t>3/26/2026</a:t>
             </a:fld>
             <a:endParaRPr lang="en-US"/>
           </a:p>
@@ -6074,7 +6158,7 @@
           <a:p>
             <a:fld id="{93C95F23-F574-4C00-9B25-D94C8E69B068}" type="datetimeFigureOut">
               <a:rPr lang="en-US" smtClean="0"/>
-              <a:t>2/13/2026</a:t>
+              <a:t>3/26/2026</a:t>
             </a:fld>
             <a:endParaRPr lang="en-US"/>
           </a:p>
@@ -6486,7 +6570,7 @@
           <a:p>
             <a:fld id="{93C95F23-F574-4C00-9B25-D94C8E69B068}" type="datetimeFigureOut">
               <a:rPr lang="en-US" smtClean="0"/>
-              <a:t>2/13/2026</a:t>
+              <a:t>3/26/2026</a:t>
             </a:fld>
             <a:endParaRPr lang="en-US"/>
           </a:p>
@@ -6627,7 +6711,7 @@
           <a:p>
             <a:fld id="{93C95F23-F574-4C00-9B25-D94C8E69B068}" type="datetimeFigureOut">
               <a:rPr lang="en-US" smtClean="0"/>
-              <a:t>2/13/2026</a:t>
+              <a:t>3/26/2026</a:t>
             </a:fld>
             <a:endParaRPr lang="en-US"/>
           </a:p>
@@ -6740,7 +6824,7 @@
           <a:p>
             <a:fld id="{93C95F23-F574-4C00-9B25-D94C8E69B068}" type="datetimeFigureOut">
               <a:rPr lang="en-US" smtClean="0"/>
-              <a:t>2/13/2026</a:t>
+              <a:t>3/26/2026</a:t>
             </a:fld>
             <a:endParaRPr lang="en-US"/>
           </a:p>
@@ -7051,7 +7135,7 @@
           <a:p>
             <a:fld id="{93C95F23-F574-4C00-9B25-D94C8E69B068}" type="datetimeFigureOut">
               <a:rPr lang="en-US" smtClean="0"/>
-              <a:t>2/13/2026</a:t>
+              <a:t>3/26/2026</a:t>
             </a:fld>
             <a:endParaRPr lang="en-US"/>
           </a:p>
@@ -7339,7 +7423,7 @@
           <a:p>
             <a:fld id="{93C95F23-F574-4C00-9B25-D94C8E69B068}" type="datetimeFigureOut">
               <a:rPr lang="en-US" smtClean="0"/>
-              <a:t>2/13/2026</a:t>
+              <a:t>3/26/2026</a:t>
             </a:fld>
             <a:endParaRPr lang="en-US"/>
           </a:p>
@@ -7580,7 +7664,7 @@
           <a:p>
             <a:fld id="{93C95F23-F574-4C00-9B25-D94C8E69B068}" type="datetimeFigureOut">
               <a:rPr lang="en-US" smtClean="0"/>
-              <a:t>2/13/2026</a:t>
+              <a:t>3/26/2026</a:t>
             </a:fld>
             <a:endParaRPr lang="en-US"/>
           </a:p>
